--- a/racket/scheme1975.pptx
+++ b/racket/scheme1975.pptx
@@ -8,22 +8,35 @@
     <p:sldId id="278" r:id="rId2"/>
     <p:sldId id="273" r:id="rId3"/>
     <p:sldId id="274" r:id="rId4"/>
-    <p:sldId id="280" r:id="rId5"/>
-    <p:sldId id="279" r:id="rId6"/>
-    <p:sldId id="281" r:id="rId7"/>
-    <p:sldId id="275" r:id="rId8"/>
-    <p:sldId id="277" r:id="rId9"/>
-    <p:sldId id="276" r:id="rId10"/>
-    <p:sldId id="272" r:id="rId11"/>
-    <p:sldId id="266" r:id="rId12"/>
-    <p:sldId id="265" r:id="rId13"/>
-    <p:sldId id="259" r:id="rId14"/>
-    <p:sldId id="267" r:id="rId15"/>
-    <p:sldId id="270" r:id="rId16"/>
-    <p:sldId id="260" r:id="rId17"/>
-    <p:sldId id="261" r:id="rId18"/>
-    <p:sldId id="264" r:id="rId19"/>
-    <p:sldId id="271" r:id="rId20"/>
+    <p:sldId id="287" r:id="rId5"/>
+    <p:sldId id="288" r:id="rId6"/>
+    <p:sldId id="289" r:id="rId7"/>
+    <p:sldId id="290" r:id="rId8"/>
+    <p:sldId id="293" r:id="rId9"/>
+    <p:sldId id="291" r:id="rId10"/>
+    <p:sldId id="292" r:id="rId11"/>
+    <p:sldId id="294" r:id="rId12"/>
+    <p:sldId id="295" r:id="rId13"/>
+    <p:sldId id="285" r:id="rId14"/>
+    <p:sldId id="286" r:id="rId15"/>
+    <p:sldId id="280" r:id="rId16"/>
+    <p:sldId id="279" r:id="rId17"/>
+    <p:sldId id="281" r:id="rId18"/>
+    <p:sldId id="275" r:id="rId19"/>
+    <p:sldId id="282" r:id="rId20"/>
+    <p:sldId id="277" r:id="rId21"/>
+    <p:sldId id="283" r:id="rId22"/>
+    <p:sldId id="276" r:id="rId23"/>
+    <p:sldId id="284" r:id="rId24"/>
+    <p:sldId id="266" r:id="rId25"/>
+    <p:sldId id="265" r:id="rId26"/>
+    <p:sldId id="259" r:id="rId27"/>
+    <p:sldId id="267" r:id="rId28"/>
+    <p:sldId id="270" r:id="rId29"/>
+    <p:sldId id="260" r:id="rId30"/>
+    <p:sldId id="261" r:id="rId31"/>
+    <p:sldId id="264" r:id="rId32"/>
+    <p:sldId id="271" r:id="rId33"/>
   </p:sldIdLst>
   <p:sldSz cx="12192000" cy="6858000"/>
   <p:notesSz cx="6858000" cy="9144000"/>
@@ -130,31 +143,38 @@
 </p:presentation>
 </file>
 
-<file path=ppt/revisionInfo.xml><?xml version="1.0" encoding="utf-8"?>
-<p1510:revInfo xmlns:a="http://schemas.openxmlformats.org/drawingml/2006/main" xmlns:r="http://schemas.openxmlformats.org/officeDocument/2006/relationships" xmlns:p1510="http://schemas.microsoft.com/office/powerpoint/2015/10/main">
-  <p1510:revLst>
-    <p1510:client id="{D51C8FB8-671E-BB4F-9753-5E483A41CECE}" v="1" dt="2026-06-18T17:38:07.310"/>
-  </p1510:revLst>
-</p1510:revInfo>
-</file>
-
 <file path=ppt/changesInfos/changesInfo1.xml><?xml version="1.0" encoding="utf-8"?>
 <pc:chgInfo xmlns:a="http://schemas.openxmlformats.org/drawingml/2006/main" xmlns:r="http://schemas.openxmlformats.org/officeDocument/2006/relationships" xmlns:ac="http://schemas.microsoft.com/office/drawing/2013/main/command" xmlns:pc="http://schemas.microsoft.com/office/powerpoint/2013/main/command">
   <pc:docChgLst>
     <pc:chgData name="Toby Donaldson" userId="2e6e5431-bb17-4c41-9985-d39c50d83c73" providerId="ADAL" clId="{F31BC264-820E-54C4-A6D1-F92AF9CC222E}"/>
-    <pc:docChg chg="undo custSel addSld modSld sldOrd">
-      <pc:chgData name="Toby Donaldson" userId="2e6e5431-bb17-4c41-9985-d39c50d83c73" providerId="ADAL" clId="{F31BC264-820E-54C4-A6D1-F92AF9CC222E}" dt="2026-06-18T21:36:57.798" v="154" actId="20577"/>
+    <pc:docChg chg="undo custSel addSld delSld modSld sldOrd">
+      <pc:chgData name="Toby Donaldson" userId="2e6e5431-bb17-4c41-9985-d39c50d83c73" providerId="ADAL" clId="{F31BC264-820E-54C4-A6D1-F92AF9CC222E}" dt="2026-09-28T03:35:27.966" v="849" actId="20578"/>
       <pc:docMkLst>
         <pc:docMk/>
       </pc:docMkLst>
       <pc:sldChg chg="modSp mod">
-        <pc:chgData name="Toby Donaldson" userId="2e6e5431-bb17-4c41-9985-d39c50d83c73" providerId="ADAL" clId="{F31BC264-820E-54C4-A6D1-F92AF9CC222E}" dt="2026-06-18T21:36:57.798" v="154" actId="20577"/>
+        <pc:chgData name="Toby Donaldson" userId="2e6e5431-bb17-4c41-9985-d39c50d83c73" providerId="ADAL" clId="{F31BC264-820E-54C4-A6D1-F92AF9CC222E}" dt="2026-09-28T03:01:10.084" v="237" actId="20577"/>
+        <pc:sldMkLst>
+          <pc:docMk/>
+          <pc:sldMk cId="1855501012" sldId="259"/>
+        </pc:sldMkLst>
+        <pc:spChg chg="mod">
+          <ac:chgData name="Toby Donaldson" userId="2e6e5431-bb17-4c41-9985-d39c50d83c73" providerId="ADAL" clId="{F31BC264-820E-54C4-A6D1-F92AF9CC222E}" dt="2026-09-28T03:01:10.084" v="237" actId="20577"/>
+          <ac:spMkLst>
+            <pc:docMk/>
+            <pc:sldMk cId="1855501012" sldId="259"/>
+            <ac:spMk id="9" creationId="{47FE2D5E-13CF-4FA0-04A0-66A64587C63B}"/>
+          </ac:spMkLst>
+        </pc:spChg>
+      </pc:sldChg>
+      <pc:sldChg chg="modSp mod">
+        <pc:chgData name="Toby Donaldson" userId="2e6e5431-bb17-4c41-9985-d39c50d83c73" providerId="ADAL" clId="{F31BC264-820E-54C4-A6D1-F92AF9CC222E}" dt="2026-09-28T03:02:32.032" v="335" actId="20577"/>
         <pc:sldMkLst>
           <pc:docMk/>
           <pc:sldMk cId="247949623" sldId="261"/>
         </pc:sldMkLst>
         <pc:spChg chg="mod">
-          <ac:chgData name="Toby Donaldson" userId="2e6e5431-bb17-4c41-9985-d39c50d83c73" providerId="ADAL" clId="{F31BC264-820E-54C4-A6D1-F92AF9CC222E}" dt="2026-06-18T21:36:57.798" v="154" actId="20577"/>
+          <ac:chgData name="Toby Donaldson" userId="2e6e5431-bb17-4c41-9985-d39c50d83c73" providerId="ADAL" clId="{F31BC264-820E-54C4-A6D1-F92AF9CC222E}" dt="2026-09-28T03:02:32.032" v="335" actId="20577"/>
           <ac:spMkLst>
             <pc:docMk/>
             <pc:sldMk cId="247949623" sldId="261"/>
@@ -163,274 +183,593 @@
         </pc:spChg>
       </pc:sldChg>
       <pc:sldChg chg="modSp mod">
-        <pc:chgData name="Toby Donaldson" userId="2e6e5431-bb17-4c41-9985-d39c50d83c73" providerId="ADAL" clId="{F31BC264-820E-54C4-A6D1-F92AF9CC222E}" dt="2026-06-18T17:41:50.989" v="44" actId="20577"/>
+        <pc:chgData name="Toby Donaldson" userId="2e6e5431-bb17-4c41-9985-d39c50d83c73" providerId="ADAL" clId="{F31BC264-820E-54C4-A6D1-F92AF9CC222E}" dt="2026-09-28T03:02:40.166" v="342" actId="20577"/>
+        <pc:sldMkLst>
+          <pc:docMk/>
+          <pc:sldMk cId="1760816993" sldId="264"/>
+        </pc:sldMkLst>
+        <pc:spChg chg="mod">
+          <ac:chgData name="Toby Donaldson" userId="2e6e5431-bb17-4c41-9985-d39c50d83c73" providerId="ADAL" clId="{F31BC264-820E-54C4-A6D1-F92AF9CC222E}" dt="2026-09-28T03:02:40.166" v="342" actId="20577"/>
+          <ac:spMkLst>
+            <pc:docMk/>
+            <pc:sldMk cId="1760816993" sldId="264"/>
+            <ac:spMk id="3" creationId="{E45AFAE3-7D9D-4DB0-A01B-CD046F1E7D5F}"/>
+          </ac:spMkLst>
+        </pc:spChg>
+      </pc:sldChg>
+      <pc:sldChg chg="modSp mod">
+        <pc:chgData name="Toby Donaldson" userId="2e6e5431-bb17-4c41-9985-d39c50d83c73" providerId="ADAL" clId="{F31BC264-820E-54C4-A6D1-F92AF9CC222E}" dt="2026-09-28T03:00:12.866" v="225" actId="20577"/>
         <pc:sldMkLst>
           <pc:docMk/>
           <pc:sldMk cId="2446324911" sldId="265"/>
         </pc:sldMkLst>
         <pc:spChg chg="mod">
-          <ac:chgData name="Toby Donaldson" userId="2e6e5431-bb17-4c41-9985-d39c50d83c73" providerId="ADAL" clId="{F31BC264-820E-54C4-A6D1-F92AF9CC222E}" dt="2026-06-18T17:41:50.989" v="44" actId="20577"/>
+          <ac:chgData name="Toby Donaldson" userId="2e6e5431-bb17-4c41-9985-d39c50d83c73" providerId="ADAL" clId="{F31BC264-820E-54C4-A6D1-F92AF9CC222E}" dt="2026-09-28T03:00:12.866" v="225" actId="20577"/>
           <ac:spMkLst>
             <pc:docMk/>
             <pc:sldMk cId="2446324911" sldId="265"/>
-            <ac:spMk id="13" creationId="{070A0247-E84A-DDE7-4901-76D5D335370E}"/>
+            <ac:spMk id="4" creationId="{16127473-8A2B-AE78-F8C5-A0D03B7350B1}"/>
           </ac:spMkLst>
         </pc:spChg>
       </pc:sldChg>
       <pc:sldChg chg="modSp mod">
-        <pc:chgData name="Toby Donaldson" userId="2e6e5431-bb17-4c41-9985-d39c50d83c73" providerId="ADAL" clId="{F31BC264-820E-54C4-A6D1-F92AF9CC222E}" dt="2026-06-18T21:35:04.628" v="78" actId="20577"/>
+        <pc:chgData name="Toby Donaldson" userId="2e6e5431-bb17-4c41-9985-d39c50d83c73" providerId="ADAL" clId="{F31BC264-820E-54C4-A6D1-F92AF9CC222E}" dt="2026-09-28T03:00:18.515" v="229" actId="20577"/>
         <pc:sldMkLst>
           <pc:docMk/>
-          <pc:sldMk cId="251576758" sldId="267"/>
+          <pc:sldMk cId="2513690197" sldId="266"/>
         </pc:sldMkLst>
         <pc:spChg chg="mod">
-          <ac:chgData name="Toby Donaldson" userId="2e6e5431-bb17-4c41-9985-d39c50d83c73" providerId="ADAL" clId="{F31BC264-820E-54C4-A6D1-F92AF9CC222E}" dt="2026-06-18T21:35:04.628" v="78" actId="20577"/>
+          <ac:chgData name="Toby Donaldson" userId="2e6e5431-bb17-4c41-9985-d39c50d83c73" providerId="ADAL" clId="{F31BC264-820E-54C4-A6D1-F92AF9CC222E}" dt="2026-09-28T03:00:18.515" v="229" actId="20577"/>
           <ac:spMkLst>
             <pc:docMk/>
-            <pc:sldMk cId="251576758" sldId="267"/>
-            <ac:spMk id="2" creationId="{AFC4F8B7-DF69-4161-80D5-5D65C38F8A33}"/>
+            <pc:sldMk cId="2513690197" sldId="266"/>
+            <ac:spMk id="2" creationId="{A7CF2578-931A-9B0F-F1EA-3BB34CCE93DF}"/>
           </ac:spMkLst>
         </pc:spChg>
       </pc:sldChg>
-      <pc:sldChg chg="delSp modSp mod">
-        <pc:chgData name="Toby Donaldson" userId="2e6e5431-bb17-4c41-9985-d39c50d83c73" providerId="ADAL" clId="{F31BC264-820E-54C4-A6D1-F92AF9CC222E}" dt="2026-06-18T21:35:39.677" v="85" actId="20577"/>
+      <pc:sldChg chg="modSp mod">
+        <pc:chgData name="Toby Donaldson" userId="2e6e5431-bb17-4c41-9985-d39c50d83c73" providerId="ADAL" clId="{F31BC264-820E-54C4-A6D1-F92AF9CC222E}" dt="2026-09-28T03:01:52.847" v="309" actId="20577"/>
         <pc:sldMkLst>
           <pc:docMk/>
           <pc:sldMk cId="2072605454" sldId="270"/>
         </pc:sldMkLst>
         <pc:spChg chg="mod">
-          <ac:chgData name="Toby Donaldson" userId="2e6e5431-bb17-4c41-9985-d39c50d83c73" providerId="ADAL" clId="{F31BC264-820E-54C4-A6D1-F92AF9CC222E}" dt="2026-06-18T21:35:11.572" v="81" actId="20577"/>
-          <ac:spMkLst>
-            <pc:docMk/>
-            <pc:sldMk cId="2072605454" sldId="270"/>
-            <ac:spMk id="2" creationId="{3AB70837-CC6E-409E-828B-6F152569432E}"/>
-          </ac:spMkLst>
-        </pc:spChg>
-        <pc:spChg chg="mod">
-          <ac:chgData name="Toby Donaldson" userId="2e6e5431-bb17-4c41-9985-d39c50d83c73" providerId="ADAL" clId="{F31BC264-820E-54C4-A6D1-F92AF9CC222E}" dt="2026-06-18T21:35:39.677" v="85" actId="20577"/>
+          <ac:chgData name="Toby Donaldson" userId="2e6e5431-bb17-4c41-9985-d39c50d83c73" providerId="ADAL" clId="{F31BC264-820E-54C4-A6D1-F92AF9CC222E}" dt="2026-09-28T03:01:52.847" v="309" actId="20577"/>
           <ac:spMkLst>
             <pc:docMk/>
             <pc:sldMk cId="2072605454" sldId="270"/>
             <ac:spMk id="3" creationId="{9D85EADE-0C03-49DA-BB59-0942833F47FA}"/>
           </ac:spMkLst>
         </pc:spChg>
-        <pc:spChg chg="del mod">
-          <ac:chgData name="Toby Donaldson" userId="2e6e5431-bb17-4c41-9985-d39c50d83c73" providerId="ADAL" clId="{F31BC264-820E-54C4-A6D1-F92AF9CC222E}" dt="2026-06-18T21:35:28.523" v="83" actId="21"/>
-          <ac:spMkLst>
-            <pc:docMk/>
-            <pc:sldMk cId="2072605454" sldId="270"/>
-            <ac:spMk id="4" creationId="{BE3E16A3-1414-47FA-A3BB-3ABF0D84A1FE}"/>
-          </ac:spMkLst>
-        </pc:spChg>
       </pc:sldChg>
-      <pc:sldChg chg="modSp mod">
-        <pc:chgData name="Toby Donaldson" userId="2e6e5431-bb17-4c41-9985-d39c50d83c73" providerId="ADAL" clId="{F31BC264-820E-54C4-A6D1-F92AF9CC222E}" dt="2026-06-18T21:34:05.555" v="75" actId="20577"/>
+      <pc:sldChg chg="modSp del mod">
+        <pc:chgData name="Toby Donaldson" userId="2e6e5431-bb17-4c41-9985-d39c50d83c73" providerId="ADAL" clId="{F31BC264-820E-54C4-A6D1-F92AF9CC222E}" dt="2026-09-28T03:34:53.241" v="844" actId="2696"/>
         <pc:sldMkLst>
           <pc:docMk/>
           <pc:sldMk cId="1031835898" sldId="272"/>
         </pc:sldMkLst>
         <pc:spChg chg="mod">
-          <ac:chgData name="Toby Donaldson" userId="2e6e5431-bb17-4c41-9985-d39c50d83c73" providerId="ADAL" clId="{F31BC264-820E-54C4-A6D1-F92AF9CC222E}" dt="2026-06-18T17:40:58.369" v="38" actId="27636"/>
+          <ac:chgData name="Toby Donaldson" userId="2e6e5431-bb17-4c41-9985-d39c50d83c73" providerId="ADAL" clId="{F31BC264-820E-54C4-A6D1-F92AF9CC222E}" dt="2026-09-28T02:59:30.122" v="216" actId="20577"/>
           <ac:spMkLst>
             <pc:docMk/>
             <pc:sldMk cId="1031835898" sldId="272"/>
             <ac:spMk id="4" creationId="{8D140EF2-7A80-4170-96C7-C567343A91EE}"/>
           </ac:spMkLst>
         </pc:spChg>
+      </pc:sldChg>
+      <pc:sldChg chg="modSp mod">
+        <pc:chgData name="Toby Donaldson" userId="2e6e5431-bb17-4c41-9985-d39c50d83c73" providerId="ADAL" clId="{F31BC264-820E-54C4-A6D1-F92AF9CC222E}" dt="2026-09-28T03:04:30.283" v="347" actId="20577"/>
+        <pc:sldMkLst>
+          <pc:docMk/>
+          <pc:sldMk cId="1247466648" sldId="273"/>
+        </pc:sldMkLst>
         <pc:spChg chg="mod">
-          <ac:chgData name="Toby Donaldson" userId="2e6e5431-bb17-4c41-9985-d39c50d83c73" providerId="ADAL" clId="{F31BC264-820E-54C4-A6D1-F92AF9CC222E}" dt="2026-06-18T21:34:05.555" v="75" actId="20577"/>
+          <ac:chgData name="Toby Donaldson" userId="2e6e5431-bb17-4c41-9985-d39c50d83c73" providerId="ADAL" clId="{F31BC264-820E-54C4-A6D1-F92AF9CC222E}" dt="2026-09-28T03:04:30.283" v="347" actId="20577"/>
           <ac:spMkLst>
             <pc:docMk/>
-            <pc:sldMk cId="1031835898" sldId="272"/>
-            <ac:spMk id="8" creationId="{E2400FBB-A4E6-4E19-BEB2-E43F372AEDD9}"/>
+            <pc:sldMk cId="1247466648" sldId="273"/>
+            <ac:spMk id="4" creationId="{CB105B6D-9708-4D3F-8738-4E92FD6BE38D}"/>
           </ac:spMkLst>
         </pc:spChg>
       </pc:sldChg>
-      <pc:sldChg chg="delSp modSp mod">
-        <pc:chgData name="Toby Donaldson" userId="2e6e5431-bb17-4c41-9985-d39c50d83c73" providerId="ADAL" clId="{F31BC264-820E-54C4-A6D1-F92AF9CC222E}" dt="2026-06-18T17:38:37.798" v="17" actId="21"/>
+      <pc:sldChg chg="addSp delSp modSp mod">
+        <pc:chgData name="Toby Donaldson" userId="2e6e5431-bb17-4c41-9985-d39c50d83c73" providerId="ADAL" clId="{F31BC264-820E-54C4-A6D1-F92AF9CC222E}" dt="2026-09-28T03:19:36.104" v="636" actId="21"/>
         <pc:sldMkLst>
           <pc:docMk/>
           <pc:sldMk cId="962438491" sldId="274"/>
         </pc:sldMkLst>
-        <pc:spChg chg="del">
-          <ac:chgData name="Toby Donaldson" userId="2e6e5431-bb17-4c41-9985-d39c50d83c73" providerId="ADAL" clId="{F31BC264-820E-54C4-A6D1-F92AF9CC222E}" dt="2026-06-18T17:38:07.309" v="11" actId="21"/>
+        <pc:spChg chg="mod">
+          <ac:chgData name="Toby Donaldson" userId="2e6e5431-bb17-4c41-9985-d39c50d83c73" providerId="ADAL" clId="{F31BC264-820E-54C4-A6D1-F92AF9CC222E}" dt="2026-09-28T03:09:59.936" v="509" actId="20577"/>
           <ac:spMkLst>
             <pc:docMk/>
             <pc:sldMk cId="962438491" sldId="274"/>
-            <ac:spMk id="5" creationId="{F2D67297-229B-3E0F-FFE3-E73B7D2D46D5}"/>
+            <ac:spMk id="2" creationId="{9D56FCE7-DB3A-40C9-92A2-796AAF385628}"/>
           </ac:spMkLst>
         </pc:spChg>
-        <pc:spChg chg="del mod">
-          <ac:chgData name="Toby Donaldson" userId="2e6e5431-bb17-4c41-9985-d39c50d83c73" providerId="ADAL" clId="{F31BC264-820E-54C4-A6D1-F92AF9CC222E}" dt="2026-06-18T17:38:37.798" v="17" actId="21"/>
+        <pc:spChg chg="add del mod">
+          <ac:chgData name="Toby Donaldson" userId="2e6e5431-bb17-4c41-9985-d39c50d83c73" providerId="ADAL" clId="{F31BC264-820E-54C4-A6D1-F92AF9CC222E}" dt="2026-09-28T03:13:35.783" v="526" actId="21"/>
           <ac:spMkLst>
             <pc:docMk/>
             <pc:sldMk cId="962438491" sldId="274"/>
-            <ac:spMk id="16" creationId="{0CB80DD0-CAD0-477C-0E28-FF01DE67E160}"/>
+            <ac:spMk id="3" creationId="{BB094BC1-71C3-BB98-71B5-B4C495BB7489}"/>
           </ac:spMkLst>
         </pc:spChg>
-        <pc:spChg chg="mod">
-          <ac:chgData name="Toby Donaldson" userId="2e6e5431-bb17-4c41-9985-d39c50d83c73" providerId="ADAL" clId="{F31BC264-820E-54C4-A6D1-F92AF9CC222E}" dt="2026-06-18T17:38:11.981" v="12" actId="1076"/>
+        <pc:spChg chg="add mod">
+          <ac:chgData name="Toby Donaldson" userId="2e6e5431-bb17-4c41-9985-d39c50d83c73" providerId="ADAL" clId="{F31BC264-820E-54C4-A6D1-F92AF9CC222E}" dt="2026-09-28T03:14:16.539" v="544" actId="122"/>
+          <ac:spMkLst>
+            <pc:docMk/>
+            <pc:sldMk cId="962438491" sldId="274"/>
+            <ac:spMk id="6" creationId="{E7E6CFE1-7DEA-8C56-C829-1000162D414D}"/>
+          </ac:spMkLst>
+        </pc:spChg>
+        <pc:spChg chg="add mod">
+          <ac:chgData name="Toby Donaldson" userId="2e6e5431-bb17-4c41-9985-d39c50d83c73" providerId="ADAL" clId="{F31BC264-820E-54C4-A6D1-F92AF9CC222E}" dt="2026-09-28T03:14:58.634" v="595" actId="20577"/>
+          <ac:spMkLst>
+            <pc:docMk/>
+            <pc:sldMk cId="962438491" sldId="274"/>
+            <ac:spMk id="8" creationId="{2DC54CBA-4684-67B9-80AA-642ABB2B7588}"/>
+          </ac:spMkLst>
+        </pc:spChg>
+        <pc:spChg chg="add mod">
+          <ac:chgData name="Toby Donaldson" userId="2e6e5431-bb17-4c41-9985-d39c50d83c73" providerId="ADAL" clId="{F31BC264-820E-54C4-A6D1-F92AF9CC222E}" dt="2026-09-28T03:18:27.888" v="629" actId="122"/>
+          <ac:spMkLst>
+            <pc:docMk/>
+            <pc:sldMk cId="962438491" sldId="274"/>
+            <ac:spMk id="12" creationId="{DE82A3DE-9359-7235-C790-FC54430A2C24}"/>
+          </ac:spMkLst>
+        </pc:spChg>
+        <pc:spChg chg="del">
+          <ac:chgData name="Toby Donaldson" userId="2e6e5431-bb17-4c41-9985-d39c50d83c73" providerId="ADAL" clId="{F31BC264-820E-54C4-A6D1-F92AF9CC222E}" dt="2026-09-28T03:07:16.959" v="364" actId="21"/>
           <ac:spMkLst>
             <pc:docMk/>
             <pc:sldMk cId="962438491" sldId="274"/>
             <ac:spMk id="19" creationId="{23530188-1C40-2C32-5B87-5534EF6CEC9A}"/>
           </ac:spMkLst>
         </pc:spChg>
-        <pc:spChg chg="del mod">
-          <ac:chgData name="Toby Donaldson" userId="2e6e5431-bb17-4c41-9985-d39c50d83c73" providerId="ADAL" clId="{F31BC264-820E-54C4-A6D1-F92AF9CC222E}" dt="2026-06-18T17:38:37.798" v="17" actId="21"/>
-          <ac:spMkLst>
+        <pc:grpChg chg="add del mod">
+          <ac:chgData name="Toby Donaldson" userId="2e6e5431-bb17-4c41-9985-d39c50d83c73" providerId="ADAL" clId="{F31BC264-820E-54C4-A6D1-F92AF9CC222E}" dt="2026-09-28T03:19:36.104" v="636" actId="21"/>
+          <ac:grpSpMkLst>
             <pc:docMk/>
             <pc:sldMk cId="962438491" sldId="274"/>
-            <ac:spMk id="22" creationId="{73F381D0-8C6A-5A01-20BC-A996D9E465CA}"/>
-          </ac:spMkLst>
-        </pc:spChg>
-        <pc:picChg chg="del mod">
-          <ac:chgData name="Toby Donaldson" userId="2e6e5431-bb17-4c41-9985-d39c50d83c73" providerId="ADAL" clId="{F31BC264-820E-54C4-A6D1-F92AF9CC222E}" dt="2026-06-18T17:38:37.798" v="17" actId="21"/>
+            <ac:grpSpMk id="7" creationId="{03C8C881-5512-3813-029C-807E63286231}"/>
+          </ac:grpSpMkLst>
+        </pc:grpChg>
+        <pc:grpChg chg="add del mod">
+          <ac:chgData name="Toby Donaldson" userId="2e6e5431-bb17-4c41-9985-d39c50d83c73" providerId="ADAL" clId="{F31BC264-820E-54C4-A6D1-F92AF9CC222E}" dt="2026-09-28T03:19:36.104" v="636" actId="21"/>
+          <ac:grpSpMkLst>
+            <pc:docMk/>
+            <pc:sldMk cId="962438491" sldId="274"/>
+            <ac:grpSpMk id="10" creationId="{0DA239F2-3701-348F-4439-154CBEF360BC}"/>
+          </ac:grpSpMkLst>
+        </pc:grpChg>
+        <pc:grpChg chg="add del mod">
+          <ac:chgData name="Toby Donaldson" userId="2e6e5431-bb17-4c41-9985-d39c50d83c73" providerId="ADAL" clId="{F31BC264-820E-54C4-A6D1-F92AF9CC222E}" dt="2026-09-28T03:19:36.104" v="636" actId="21"/>
+          <ac:grpSpMkLst>
+            <pc:docMk/>
+            <pc:sldMk cId="962438491" sldId="274"/>
+            <ac:grpSpMk id="13" creationId="{B1705807-5208-1E4B-15CE-68C50C47E59A}"/>
+          </ac:grpSpMkLst>
+        </pc:grpChg>
+        <pc:picChg chg="add mod">
+          <ac:chgData name="Toby Donaldson" userId="2e6e5431-bb17-4c41-9985-d39c50d83c73" providerId="ADAL" clId="{F31BC264-820E-54C4-A6D1-F92AF9CC222E}" dt="2026-09-28T03:13:41.988" v="528" actId="14100"/>
           <ac:picMkLst>
             <pc:docMk/>
             <pc:sldMk cId="962438491" sldId="274"/>
-            <ac:picMk id="4" creationId="{2C55B9D4-EA2B-7CB0-0CD8-0D1E7720431C}"/>
+            <ac:picMk id="4" creationId="{23B6CEBD-B8F8-C0F4-E464-6431980AEFD9}"/>
           </ac:picMkLst>
         </pc:picChg>
-        <pc:picChg chg="del mod">
-          <ac:chgData name="Toby Donaldson" userId="2e6e5431-bb17-4c41-9985-d39c50d83c73" providerId="ADAL" clId="{F31BC264-820E-54C4-A6D1-F92AF9CC222E}" dt="2026-06-18T17:38:37.798" v="17" actId="21"/>
+        <pc:picChg chg="add mod">
+          <ac:chgData name="Toby Donaldson" userId="2e6e5431-bb17-4c41-9985-d39c50d83c73" providerId="ADAL" clId="{F31BC264-820E-54C4-A6D1-F92AF9CC222E}" dt="2026-09-28T03:14:35.734" v="549" actId="1076"/>
           <ac:picMkLst>
             <pc:docMk/>
             <pc:sldMk cId="962438491" sldId="274"/>
-            <ac:picMk id="7" creationId="{C46808C1-CFDA-DF22-2957-C868C304F164}"/>
+            <ac:picMk id="5" creationId="{14B4C658-8800-6E38-5351-33F0DEB5ACF4}"/>
           </ac:picMkLst>
         </pc:picChg>
-        <pc:picChg chg="mod">
-          <ac:chgData name="Toby Donaldson" userId="2e6e5431-bb17-4c41-9985-d39c50d83c73" providerId="ADAL" clId="{F31BC264-820E-54C4-A6D1-F92AF9CC222E}" dt="2026-06-18T17:38:11.981" v="12" actId="1076"/>
+        <pc:picChg chg="del">
+          <ac:chgData name="Toby Donaldson" userId="2e6e5431-bb17-4c41-9985-d39c50d83c73" providerId="ADAL" clId="{F31BC264-820E-54C4-A6D1-F92AF9CC222E}" dt="2026-09-28T03:07:16.959" v="364" actId="21"/>
           <ac:picMkLst>
             <pc:docMk/>
             <pc:sldMk cId="962438491" sldId="274"/>
             <ac:picMk id="9" creationId="{AFE33563-555F-8EAF-38A1-15AF81D69B3A}"/>
           </ac:picMkLst>
         </pc:picChg>
-        <pc:picChg chg="del mod">
-          <ac:chgData name="Toby Donaldson" userId="2e6e5431-bb17-4c41-9985-d39c50d83c73" providerId="ADAL" clId="{F31BC264-820E-54C4-A6D1-F92AF9CC222E}" dt="2026-06-18T17:38:37.798" v="17" actId="21"/>
+        <pc:picChg chg="add mod">
+          <ac:chgData name="Toby Donaldson" userId="2e6e5431-bb17-4c41-9985-d39c50d83c73" providerId="ADAL" clId="{F31BC264-820E-54C4-A6D1-F92AF9CC222E}" dt="2026-09-28T03:17:43.088" v="604" actId="1076"/>
           <ac:picMkLst>
             <pc:docMk/>
             <pc:sldMk cId="962438491" sldId="274"/>
-            <ac:picMk id="11" creationId="{3B14DEDC-8340-BAF7-CD22-7465E72E1698}"/>
+            <ac:picMk id="11" creationId="{10AA6F02-24FB-2239-4C48-A982CB258750}"/>
+          </ac:picMkLst>
+        </pc:picChg>
+      </pc:sldChg>
+      <pc:sldChg chg="delSp modSp mod modAnim">
+        <pc:chgData name="Toby Donaldson" userId="2e6e5431-bb17-4c41-9985-d39c50d83c73" providerId="ADAL" clId="{F31BC264-820E-54C4-A6D1-F92AF9CC222E}" dt="2026-09-28T02:58:34.669" v="203" actId="1076"/>
+        <pc:sldMkLst>
+          <pc:docMk/>
+          <pc:sldMk cId="2446982689" sldId="275"/>
+        </pc:sldMkLst>
+        <pc:spChg chg="mod">
+          <ac:chgData name="Toby Donaldson" userId="2e6e5431-bb17-4c41-9985-d39c50d83c73" providerId="ADAL" clId="{F31BC264-820E-54C4-A6D1-F92AF9CC222E}" dt="2026-09-28T02:58:34.669" v="203" actId="1076"/>
+          <ac:spMkLst>
+            <pc:docMk/>
+            <pc:sldMk cId="2446982689" sldId="275"/>
+            <ac:spMk id="3" creationId="{4B9D1E49-D2CE-4AA9-B391-099DA1AD682D}"/>
+          </ac:spMkLst>
+        </pc:spChg>
+        <pc:picChg chg="del">
+          <ac:chgData name="Toby Donaldson" userId="2e6e5431-bb17-4c41-9985-d39c50d83c73" providerId="ADAL" clId="{F31BC264-820E-54C4-A6D1-F92AF9CC222E}" dt="2026-09-28T02:58:14.378" v="198" actId="21"/>
+          <ac:picMkLst>
+            <pc:docMk/>
+            <pc:sldMk cId="2446982689" sldId="275"/>
+            <ac:picMk id="3074" creationId="{EF88CC97-0AAA-E040-AC25-5BBD3D887DF3}"/>
           </ac:picMkLst>
         </pc:picChg>
         <pc:picChg chg="del">
-          <ac:chgData name="Toby Donaldson" userId="2e6e5431-bb17-4c41-9985-d39c50d83c73" providerId="ADAL" clId="{F31BC264-820E-54C4-A6D1-F92AF9CC222E}" dt="2026-06-18T17:38:07.309" v="11" actId="21"/>
+          <ac:chgData name="Toby Donaldson" userId="2e6e5431-bb17-4c41-9985-d39c50d83c73" providerId="ADAL" clId="{F31BC264-820E-54C4-A6D1-F92AF9CC222E}" dt="2026-09-28T02:58:14.378" v="198" actId="21"/>
           <ac:picMkLst>
             <pc:docMk/>
-            <pc:sldMk cId="962438491" sldId="274"/>
-            <ac:picMk id="2050" creationId="{BB11DB6A-CA00-FBD5-56A1-AAAA9227F6D1}"/>
+            <pc:sldMk cId="2446982689" sldId="275"/>
+            <ac:picMk id="3076" creationId="{067363C7-022B-1249-EA60-59CE39F34A44}"/>
           </ac:picMkLst>
         </pc:picChg>
       </pc:sldChg>
-      <pc:sldChg chg="delSp mod delAnim">
-        <pc:chgData name="Toby Donaldson" userId="2e6e5431-bb17-4c41-9985-d39c50d83c73" providerId="ADAL" clId="{F31BC264-820E-54C4-A6D1-F92AF9CC222E}" dt="2026-06-18T17:39:54.073" v="25" actId="21"/>
+      <pc:sldChg chg="addSp delSp modSp modAnim">
+        <pc:chgData name="Toby Donaldson" userId="2e6e5431-bb17-4c41-9985-d39c50d83c73" providerId="ADAL" clId="{F31BC264-820E-54C4-A6D1-F92AF9CC222E}" dt="2026-09-28T02:59:14.585" v="209"/>
+        <pc:sldMkLst>
+          <pc:docMk/>
+          <pc:sldMk cId="390346067" sldId="276"/>
+        </pc:sldMkLst>
+        <pc:spChg chg="del">
+          <ac:chgData name="Toby Donaldson" userId="2e6e5431-bb17-4c41-9985-d39c50d83c73" providerId="ADAL" clId="{F31BC264-820E-54C4-A6D1-F92AF9CC222E}" dt="2026-09-28T02:59:08.135" v="208" actId="21"/>
+          <ac:spMkLst>
+            <pc:docMk/>
+            <pc:sldMk cId="390346067" sldId="276"/>
+            <ac:spMk id="3" creationId="{44141B78-E7ED-4D2B-B858-4927CEC46631}"/>
+          </ac:spMkLst>
+        </pc:spChg>
+        <pc:spChg chg="add mod">
+          <ac:chgData name="Toby Donaldson" userId="2e6e5431-bb17-4c41-9985-d39c50d83c73" providerId="ADAL" clId="{F31BC264-820E-54C4-A6D1-F92AF9CC222E}" dt="2026-09-28T02:59:14.585" v="209"/>
+          <ac:spMkLst>
+            <pc:docMk/>
+            <pc:sldMk cId="390346067" sldId="276"/>
+            <ac:spMk id="4" creationId="{0C185E8B-99DD-A06A-B565-02DD76EDD5F2}"/>
+          </ac:spMkLst>
+        </pc:spChg>
+        <pc:picChg chg="del">
+          <ac:chgData name="Toby Donaldson" userId="2e6e5431-bb17-4c41-9985-d39c50d83c73" providerId="ADAL" clId="{F31BC264-820E-54C4-A6D1-F92AF9CC222E}" dt="2026-09-28T02:59:08.135" v="208" actId="21"/>
+          <ac:picMkLst>
+            <pc:docMk/>
+            <pc:sldMk cId="390346067" sldId="276"/>
+            <ac:picMk id="5122" creationId="{E9F2203B-ECA6-D14F-63FB-EBDBF1D1D11D}"/>
+          </ac:picMkLst>
+        </pc:picChg>
+      </pc:sldChg>
+      <pc:sldChg chg="addSp delSp modSp modAnim">
+        <pc:chgData name="Toby Donaldson" userId="2e6e5431-bb17-4c41-9985-d39c50d83c73" providerId="ADAL" clId="{F31BC264-820E-54C4-A6D1-F92AF9CC222E}" dt="2026-09-28T02:58:54.735" v="206"/>
         <pc:sldMkLst>
           <pc:docMk/>
           <pc:sldMk cId="4198230947" sldId="277"/>
         </pc:sldMkLst>
-        <pc:spChg chg="del">
-          <ac:chgData name="Toby Donaldson" userId="2e6e5431-bb17-4c41-9985-d39c50d83c73" providerId="ADAL" clId="{F31BC264-820E-54C4-A6D1-F92AF9CC222E}" dt="2026-06-18T17:39:54.073" v="25" actId="21"/>
+        <pc:spChg chg="add mod">
+          <ac:chgData name="Toby Donaldson" userId="2e6e5431-bb17-4c41-9985-d39c50d83c73" providerId="ADAL" clId="{F31BC264-820E-54C4-A6D1-F92AF9CC222E}" dt="2026-09-28T02:58:54.735" v="206"/>
           <ac:spMkLst>
             <pc:docMk/>
             <pc:sldMk cId="4198230947" sldId="277"/>
-            <ac:spMk id="5" creationId="{8F75B901-2123-4EAE-9F0D-2187CE35C7C4}"/>
+            <ac:spMk id="3" creationId="{A315D8FF-BE94-FDBE-881E-CA83E30E00B4}"/>
           </ac:spMkLst>
         </pc:spChg>
+        <pc:picChg chg="del">
+          <ac:chgData name="Toby Donaldson" userId="2e6e5431-bb17-4c41-9985-d39c50d83c73" providerId="ADAL" clId="{F31BC264-820E-54C4-A6D1-F92AF9CC222E}" dt="2026-09-28T02:58:47.939" v="205" actId="21"/>
+          <ac:picMkLst>
+            <pc:docMk/>
+            <pc:sldMk cId="4198230947" sldId="277"/>
+            <ac:picMk id="4098" creationId="{FBA016FE-4BE5-0984-C7D3-5EB3DA5D5764}"/>
+          </ac:picMkLst>
+        </pc:picChg>
       </pc:sldChg>
-      <pc:sldChg chg="modSp mod">
-        <pc:chgData name="Toby Donaldson" userId="2e6e5431-bb17-4c41-9985-d39c50d83c73" providerId="ADAL" clId="{F31BC264-820E-54C4-A6D1-F92AF9CC222E}" dt="2026-06-18T21:22:37.595" v="71" actId="20577"/>
+      <pc:sldChg chg="delSp modSp mod">
+        <pc:chgData name="Toby Donaldson" userId="2e6e5431-bb17-4c41-9985-d39c50d83c73" providerId="ADAL" clId="{F31BC264-820E-54C4-A6D1-F92AF9CC222E}" dt="2026-09-28T03:00:37.487" v="231" actId="20577"/>
         <pc:sldMkLst>
           <pc:docMk/>
           <pc:sldMk cId="598291729" sldId="278"/>
         </pc:sldMkLst>
         <pc:spChg chg="mod">
-          <ac:chgData name="Toby Donaldson" userId="2e6e5431-bb17-4c41-9985-d39c50d83c73" providerId="ADAL" clId="{F31BC264-820E-54C4-A6D1-F92AF9CC222E}" dt="2026-06-18T21:22:37.595" v="71" actId="20577"/>
-          <ac:spMkLst>
-            <pc:docMk/>
-            <pc:sldMk cId="598291729" sldId="278"/>
-            <ac:spMk id="3" creationId="{8D326F70-6E73-48ED-853E-D802A1F7CD4A}"/>
-          </ac:spMkLst>
-        </pc:spChg>
-        <pc:spChg chg="mod">
-          <ac:chgData name="Toby Donaldson" userId="2e6e5431-bb17-4c41-9985-d39c50d83c73" providerId="ADAL" clId="{F31BC264-820E-54C4-A6D1-F92AF9CC222E}" dt="2026-06-11T05:41:14.021" v="1" actId="20577"/>
+          <ac:chgData name="Toby Donaldson" userId="2e6e5431-bb17-4c41-9985-d39c50d83c73" providerId="ADAL" clId="{F31BC264-820E-54C4-A6D1-F92AF9CC222E}" dt="2026-09-28T02:56:16.239" v="158" actId="20577"/>
           <ac:spMkLst>
             <pc:docMk/>
             <pc:sldMk cId="598291729" sldId="278"/>
             <ac:spMk id="7" creationId="{729F9EAB-E96A-4A13-B339-346BBE62D038}"/>
           </ac:spMkLst>
         </pc:spChg>
+        <pc:spChg chg="del">
+          <ac:chgData name="Toby Donaldson" userId="2e6e5431-bb17-4c41-9985-d39c50d83c73" providerId="ADAL" clId="{F31BC264-820E-54C4-A6D1-F92AF9CC222E}" dt="2026-09-28T02:56:49.392" v="172" actId="21"/>
+          <ac:spMkLst>
+            <pc:docMk/>
+            <pc:sldMk cId="598291729" sldId="278"/>
+            <ac:spMk id="8" creationId="{4B2E5120-9846-4325-A51B-589BC6A79787}"/>
+          </ac:spMkLst>
+        </pc:spChg>
+        <pc:spChg chg="mod">
+          <ac:chgData name="Toby Donaldson" userId="2e6e5431-bb17-4c41-9985-d39c50d83c73" providerId="ADAL" clId="{F31BC264-820E-54C4-A6D1-F92AF9CC222E}" dt="2026-09-28T03:00:37.487" v="231" actId="20577"/>
+          <ac:spMkLst>
+            <pc:docMk/>
+            <pc:sldMk cId="598291729" sldId="278"/>
+            <ac:spMk id="9" creationId="{DA58FF75-2376-46F2-19E6-8CFEBBBDC59F}"/>
+          </ac:spMkLst>
+        </pc:spChg>
       </pc:sldChg>
-      <pc:sldChg chg="addSp delSp add mod">
-        <pc:chgData name="Toby Donaldson" userId="2e6e5431-bb17-4c41-9985-d39c50d83c73" providerId="ADAL" clId="{F31BC264-820E-54C4-A6D1-F92AF9CC222E}" dt="2026-06-18T17:39:24.154" v="24" actId="21"/>
+      <pc:sldChg chg="add">
+        <pc:chgData name="Toby Donaldson" userId="2e6e5431-bb17-4c41-9985-d39c50d83c73" providerId="ADAL" clId="{F31BC264-820E-54C4-A6D1-F92AF9CC222E}" dt="2026-09-28T02:57:59.959" v="197" actId="2890"/>
         <pc:sldMkLst>
           <pc:docMk/>
-          <pc:sldMk cId="2492672385" sldId="279"/>
+          <pc:sldMk cId="4067275813" sldId="282"/>
         </pc:sldMkLst>
-        <pc:spChg chg="add del">
-          <ac:chgData name="Toby Donaldson" userId="2e6e5431-bb17-4c41-9985-d39c50d83c73" providerId="ADAL" clId="{F31BC264-820E-54C4-A6D1-F92AF9CC222E}" dt="2026-06-18T17:39:24.154" v="24" actId="21"/>
+      </pc:sldChg>
+      <pc:sldChg chg="add">
+        <pc:chgData name="Toby Donaldson" userId="2e6e5431-bb17-4c41-9985-d39c50d83c73" providerId="ADAL" clId="{F31BC264-820E-54C4-A6D1-F92AF9CC222E}" dt="2026-09-28T02:58:45.075" v="204" actId="2890"/>
+        <pc:sldMkLst>
+          <pc:docMk/>
+          <pc:sldMk cId="1596790069" sldId="283"/>
+        </pc:sldMkLst>
+      </pc:sldChg>
+      <pc:sldChg chg="add">
+        <pc:chgData name="Toby Donaldson" userId="2e6e5431-bb17-4c41-9985-d39c50d83c73" providerId="ADAL" clId="{F31BC264-820E-54C4-A6D1-F92AF9CC222E}" dt="2026-09-28T02:59:02.553" v="207" actId="2890"/>
+        <pc:sldMkLst>
+          <pc:docMk/>
+          <pc:sldMk cId="4184603718" sldId="284"/>
+        </pc:sldMkLst>
+      </pc:sldChg>
+      <pc:sldChg chg="add ord">
+        <pc:chgData name="Toby Donaldson" userId="2e6e5431-bb17-4c41-9985-d39c50d83c73" providerId="ADAL" clId="{F31BC264-820E-54C4-A6D1-F92AF9CC222E}" dt="2026-09-28T03:35:27.966" v="849" actId="20578"/>
+        <pc:sldMkLst>
+          <pc:docMk/>
+          <pc:sldMk cId="1574891664" sldId="285"/>
+        </pc:sldMkLst>
+      </pc:sldChg>
+      <pc:sldChg chg="add">
+        <pc:chgData name="Toby Donaldson" userId="2e6e5431-bb17-4c41-9985-d39c50d83c73" providerId="ADAL" clId="{F31BC264-820E-54C4-A6D1-F92AF9CC222E}" dt="2026-09-28T03:07:04.708" v="348" actId="2890"/>
+        <pc:sldMkLst>
+          <pc:docMk/>
+          <pc:sldMk cId="2849338539" sldId="286"/>
+        </pc:sldMkLst>
+      </pc:sldChg>
+      <pc:sldChg chg="delSp add mod">
+        <pc:chgData name="Toby Donaldson" userId="2e6e5431-bb17-4c41-9985-d39c50d83c73" providerId="ADAL" clId="{F31BC264-820E-54C4-A6D1-F92AF9CC222E}" dt="2026-09-28T03:19:40.071" v="637" actId="21"/>
+        <pc:sldMkLst>
+          <pc:docMk/>
+          <pc:sldMk cId="616838184" sldId="287"/>
+        </pc:sldMkLst>
+        <pc:grpChg chg="del">
+          <ac:chgData name="Toby Donaldson" userId="2e6e5431-bb17-4c41-9985-d39c50d83c73" providerId="ADAL" clId="{F31BC264-820E-54C4-A6D1-F92AF9CC222E}" dt="2026-09-28T03:19:40.071" v="637" actId="21"/>
+          <ac:grpSpMkLst>
+            <pc:docMk/>
+            <pc:sldMk cId="616838184" sldId="287"/>
+            <ac:grpSpMk id="10" creationId="{3EE58958-71AC-D02E-B4C9-548CA37A7516}"/>
+          </ac:grpSpMkLst>
+        </pc:grpChg>
+        <pc:grpChg chg="del">
+          <ac:chgData name="Toby Donaldson" userId="2e6e5431-bb17-4c41-9985-d39c50d83c73" providerId="ADAL" clId="{F31BC264-820E-54C4-A6D1-F92AF9CC222E}" dt="2026-09-28T03:19:40.071" v="637" actId="21"/>
+          <ac:grpSpMkLst>
+            <pc:docMk/>
+            <pc:sldMk cId="616838184" sldId="287"/>
+            <ac:grpSpMk id="13" creationId="{CDF2FFC9-CABC-15B3-0EED-83BE38750516}"/>
+          </ac:grpSpMkLst>
+        </pc:grpChg>
+      </pc:sldChg>
+      <pc:sldChg chg="delSp add mod">
+        <pc:chgData name="Toby Donaldson" userId="2e6e5431-bb17-4c41-9985-d39c50d83c73" providerId="ADAL" clId="{F31BC264-820E-54C4-A6D1-F92AF9CC222E}" dt="2026-09-28T03:19:56.644" v="640" actId="21"/>
+        <pc:sldMkLst>
+          <pc:docMk/>
+          <pc:sldMk cId="2319773601" sldId="288"/>
+        </pc:sldMkLst>
+        <pc:grpChg chg="del">
+          <ac:chgData name="Toby Donaldson" userId="2e6e5431-bb17-4c41-9985-d39c50d83c73" providerId="ADAL" clId="{F31BC264-820E-54C4-A6D1-F92AF9CC222E}" dt="2026-09-28T03:19:56.644" v="640" actId="21"/>
+          <ac:grpSpMkLst>
+            <pc:docMk/>
+            <pc:sldMk cId="2319773601" sldId="288"/>
+            <ac:grpSpMk id="13" creationId="{E1C8D604-1E63-835E-1BEC-F18953D8A44E}"/>
+          </ac:grpSpMkLst>
+        </pc:grpChg>
+      </pc:sldChg>
+      <pc:sldChg chg="add">
+        <pc:chgData name="Toby Donaldson" userId="2e6e5431-bb17-4c41-9985-d39c50d83c73" providerId="ADAL" clId="{F31BC264-820E-54C4-A6D1-F92AF9CC222E}" dt="2026-09-28T03:19:47.552" v="638" actId="2890"/>
+        <pc:sldMkLst>
+          <pc:docMk/>
+          <pc:sldMk cId="3123267188" sldId="289"/>
+        </pc:sldMkLst>
+      </pc:sldChg>
+      <pc:sldChg chg="addSp delSp modSp add mod modAnim">
+        <pc:chgData name="Toby Donaldson" userId="2e6e5431-bb17-4c41-9985-d39c50d83c73" providerId="ADAL" clId="{F31BC264-820E-54C4-A6D1-F92AF9CC222E}" dt="2026-09-28T03:21:00.094" v="675"/>
+        <pc:sldMkLst>
+          <pc:docMk/>
+          <pc:sldMk cId="781840860" sldId="290"/>
+        </pc:sldMkLst>
+        <pc:spChg chg="mod">
+          <ac:chgData name="Toby Donaldson" userId="2e6e5431-bb17-4c41-9985-d39c50d83c73" providerId="ADAL" clId="{F31BC264-820E-54C4-A6D1-F92AF9CC222E}" dt="2026-09-28T03:20:49.176" v="674" actId="20577"/>
           <ac:spMkLst>
             <pc:docMk/>
-            <pc:sldMk cId="2492672385" sldId="279"/>
-            <ac:spMk id="16" creationId="{9ED173DB-3CB5-9ED3-3096-97AC77A6B7F2}"/>
+            <pc:sldMk cId="781840860" sldId="290"/>
+            <ac:spMk id="2" creationId="{B54E9B68-94F6-DE60-6A04-2A2F1A74F85E}"/>
+          </ac:spMkLst>
+        </pc:spChg>
+        <pc:spChg chg="add mod">
+          <ac:chgData name="Toby Donaldson" userId="2e6e5431-bb17-4c41-9985-d39c50d83c73" providerId="ADAL" clId="{F31BC264-820E-54C4-A6D1-F92AF9CC222E}" dt="2026-09-28T03:21:00.094" v="675"/>
+          <ac:spMkLst>
+            <pc:docMk/>
+            <pc:sldMk cId="781840860" sldId="290"/>
+            <ac:spMk id="3" creationId="{559C3EB2-9934-1D07-D835-D2467C8393C3}"/>
+          </ac:spMkLst>
+        </pc:spChg>
+        <pc:grpChg chg="del">
+          <ac:chgData name="Toby Donaldson" userId="2e6e5431-bb17-4c41-9985-d39c50d83c73" providerId="ADAL" clId="{F31BC264-820E-54C4-A6D1-F92AF9CC222E}" dt="2026-09-28T03:20:36.788" v="643" actId="21"/>
+          <ac:grpSpMkLst>
+            <pc:docMk/>
+            <pc:sldMk cId="781840860" sldId="290"/>
+            <ac:grpSpMk id="7" creationId="{0996D466-3FEF-3959-0D11-5B024D1D6AE0}"/>
+          </ac:grpSpMkLst>
+        </pc:grpChg>
+        <pc:grpChg chg="del">
+          <ac:chgData name="Toby Donaldson" userId="2e6e5431-bb17-4c41-9985-d39c50d83c73" providerId="ADAL" clId="{F31BC264-820E-54C4-A6D1-F92AF9CC222E}" dt="2026-09-28T03:20:36.788" v="643" actId="21"/>
+          <ac:grpSpMkLst>
+            <pc:docMk/>
+            <pc:sldMk cId="781840860" sldId="290"/>
+            <ac:grpSpMk id="10" creationId="{85BF80E5-6199-24E9-272E-655B2B169C40}"/>
+          </ac:grpSpMkLst>
+        </pc:grpChg>
+        <pc:grpChg chg="del">
+          <ac:chgData name="Toby Donaldson" userId="2e6e5431-bb17-4c41-9985-d39c50d83c73" providerId="ADAL" clId="{F31BC264-820E-54C4-A6D1-F92AF9CC222E}" dt="2026-09-28T03:20:36.788" v="643" actId="21"/>
+          <ac:grpSpMkLst>
+            <pc:docMk/>
+            <pc:sldMk cId="781840860" sldId="290"/>
+            <ac:grpSpMk id="13" creationId="{5AF78126-EB0F-A48D-4399-142CFD62C9C3}"/>
+          </ac:grpSpMkLst>
+        </pc:grpChg>
+      </pc:sldChg>
+      <pc:sldChg chg="add del">
+        <pc:chgData name="Toby Donaldson" userId="2e6e5431-bb17-4c41-9985-d39c50d83c73" providerId="ADAL" clId="{F31BC264-820E-54C4-A6D1-F92AF9CC222E}" dt="2026-09-28T03:20:02.445" v="641" actId="2696"/>
+        <pc:sldMkLst>
+          <pc:docMk/>
+          <pc:sldMk cId="3053787012" sldId="290"/>
+        </pc:sldMkLst>
+      </pc:sldChg>
+      <pc:sldChg chg="addSp delSp modSp add mod ord delAnim modAnim">
+        <pc:chgData name="Toby Donaldson" userId="2e6e5431-bb17-4c41-9985-d39c50d83c73" providerId="ADAL" clId="{F31BC264-820E-54C4-A6D1-F92AF9CC222E}" dt="2026-09-28T03:24:32.038" v="734"/>
+        <pc:sldMkLst>
+          <pc:docMk/>
+          <pc:sldMk cId="1571164964" sldId="291"/>
+        </pc:sldMkLst>
+        <pc:spChg chg="mod">
+          <ac:chgData name="Toby Donaldson" userId="2e6e5431-bb17-4c41-9985-d39c50d83c73" providerId="ADAL" clId="{F31BC264-820E-54C4-A6D1-F92AF9CC222E}" dt="2026-09-28T03:23:38.081" v="722" actId="20577"/>
+          <ac:spMkLst>
+            <pc:docMk/>
+            <pc:sldMk cId="1571164964" sldId="291"/>
+            <ac:spMk id="2" creationId="{5589A304-F718-1296-3FF5-68441A1AFDD9}"/>
+          </ac:spMkLst>
+        </pc:spChg>
+        <pc:spChg chg="del mod">
+          <ac:chgData name="Toby Donaldson" userId="2e6e5431-bb17-4c41-9985-d39c50d83c73" providerId="ADAL" clId="{F31BC264-820E-54C4-A6D1-F92AF9CC222E}" dt="2026-09-28T03:23:46.060" v="725" actId="21"/>
+          <ac:spMkLst>
+            <pc:docMk/>
+            <pc:sldMk cId="1571164964" sldId="291"/>
+            <ac:spMk id="3" creationId="{0765B8FF-F083-3586-993F-A6FFAAA33156}"/>
+          </ac:spMkLst>
+        </pc:spChg>
+        <pc:spChg chg="add mod">
+          <ac:chgData name="Toby Donaldson" userId="2e6e5431-bb17-4c41-9985-d39c50d83c73" providerId="ADAL" clId="{F31BC264-820E-54C4-A6D1-F92AF9CC222E}" dt="2026-09-28T03:24:32.038" v="734"/>
+          <ac:spMkLst>
+            <pc:docMk/>
+            <pc:sldMk cId="1571164964" sldId="291"/>
+            <ac:spMk id="5" creationId="{52F0801C-7ACE-D6D8-B17F-EC9DFDA9E53D}"/>
+          </ac:spMkLst>
+        </pc:spChg>
+        <pc:picChg chg="add del mod">
+          <ac:chgData name="Toby Donaldson" userId="2e6e5431-bb17-4c41-9985-d39c50d83c73" providerId="ADAL" clId="{F31BC264-820E-54C4-A6D1-F92AF9CC222E}" dt="2026-09-28T03:24:24.324" v="733" actId="21"/>
+          <ac:picMkLst>
+            <pc:docMk/>
+            <pc:sldMk cId="1571164964" sldId="291"/>
+            <ac:picMk id="4" creationId="{6951E5DB-5E43-3699-AD52-2D4306529322}"/>
+          </ac:picMkLst>
+        </pc:picChg>
+      </pc:sldChg>
+      <pc:sldChg chg="addSp delSp modSp add mod ord">
+        <pc:chgData name="Toby Donaldson" userId="2e6e5431-bb17-4c41-9985-d39c50d83c73" providerId="ADAL" clId="{F31BC264-820E-54C4-A6D1-F92AF9CC222E}" dt="2026-09-28T03:29:34.102" v="797" actId="20578"/>
+        <pc:sldMkLst>
+          <pc:docMk/>
+          <pc:sldMk cId="1486917320" sldId="292"/>
+        </pc:sldMkLst>
+        <pc:spChg chg="add mod">
+          <ac:chgData name="Toby Donaldson" userId="2e6e5431-bb17-4c41-9985-d39c50d83c73" providerId="ADAL" clId="{F31BC264-820E-54C4-A6D1-F92AF9CC222E}" dt="2026-09-28T03:29:04.862" v="795" actId="1076"/>
+          <ac:spMkLst>
+            <pc:docMk/>
+            <pc:sldMk cId="1486917320" sldId="292"/>
+            <ac:spMk id="5" creationId="{27A29284-E390-1C7C-7FEF-41FCE43C49D3}"/>
+          </ac:spMkLst>
+        </pc:spChg>
+        <pc:picChg chg="add mod">
+          <ac:chgData name="Toby Donaldson" userId="2e6e5431-bb17-4c41-9985-d39c50d83c73" providerId="ADAL" clId="{F31BC264-820E-54C4-A6D1-F92AF9CC222E}" dt="2026-09-28T03:26:50.379" v="767" actId="1076"/>
+          <ac:picMkLst>
+            <pc:docMk/>
+            <pc:sldMk cId="1486917320" sldId="292"/>
+            <ac:picMk id="3" creationId="{098068CA-1720-07D3-A5B3-5F84FD79FEDA}"/>
+          </ac:picMkLst>
+        </pc:picChg>
+        <pc:picChg chg="del mod">
+          <ac:chgData name="Toby Donaldson" userId="2e6e5431-bb17-4c41-9985-d39c50d83c73" providerId="ADAL" clId="{F31BC264-820E-54C4-A6D1-F92AF9CC222E}" dt="2026-09-28T03:26:34.285" v="763" actId="21"/>
+          <ac:picMkLst>
+            <pc:docMk/>
+            <pc:sldMk cId="1486917320" sldId="292"/>
+            <ac:picMk id="4" creationId="{D96D2178-649E-1602-0648-D7E0BCC55118}"/>
+          </ac:picMkLst>
+        </pc:picChg>
+      </pc:sldChg>
+      <pc:sldChg chg="add del">
+        <pc:chgData name="Toby Donaldson" userId="2e6e5431-bb17-4c41-9985-d39c50d83c73" providerId="ADAL" clId="{F31BC264-820E-54C4-A6D1-F92AF9CC222E}" dt="2026-09-28T03:24:16.474" v="731" actId="2696"/>
+        <pc:sldMkLst>
+          <pc:docMk/>
+          <pc:sldMk cId="1727833341" sldId="292"/>
+        </pc:sldMkLst>
+      </pc:sldChg>
+      <pc:sldChg chg="modSp add mod">
+        <pc:chgData name="Toby Donaldson" userId="2e6e5431-bb17-4c41-9985-d39c50d83c73" providerId="ADAL" clId="{F31BC264-820E-54C4-A6D1-F92AF9CC222E}" dt="2026-09-28T03:24:49.716" v="759" actId="1076"/>
+        <pc:sldMkLst>
+          <pc:docMk/>
+          <pc:sldMk cId="4261763910" sldId="293"/>
+        </pc:sldMkLst>
+        <pc:spChg chg="mod">
+          <ac:chgData name="Toby Donaldson" userId="2e6e5431-bb17-4c41-9985-d39c50d83c73" providerId="ADAL" clId="{F31BC264-820E-54C4-A6D1-F92AF9CC222E}" dt="2026-09-28T03:24:49.716" v="759" actId="1076"/>
+          <ac:spMkLst>
+            <pc:docMk/>
+            <pc:sldMk cId="4261763910" sldId="293"/>
+            <ac:spMk id="3" creationId="{13B334F8-84EC-E00E-74F9-A8E03C7ADEE9}"/>
+          </ac:spMkLst>
+        </pc:spChg>
+      </pc:sldChg>
+      <pc:sldChg chg="addSp delSp modSp add mod">
+        <pc:chgData name="Toby Donaldson" userId="2e6e5431-bb17-4c41-9985-d39c50d83c73" providerId="ADAL" clId="{F31BC264-820E-54C4-A6D1-F92AF9CC222E}" dt="2026-09-28T03:32:03.497" v="828" actId="21"/>
+        <pc:sldMkLst>
+          <pc:docMk/>
+          <pc:sldMk cId="3131224629" sldId="294"/>
+        </pc:sldMkLst>
+        <pc:spChg chg="mod">
+          <ac:chgData name="Toby Donaldson" userId="2e6e5431-bb17-4c41-9985-d39c50d83c73" providerId="ADAL" clId="{F31BC264-820E-54C4-A6D1-F92AF9CC222E}" dt="2026-09-28T03:29:43.277" v="824" actId="20577"/>
+          <ac:spMkLst>
+            <pc:docMk/>
+            <pc:sldMk cId="3131224629" sldId="294"/>
+            <ac:spMk id="2" creationId="{C55696B9-36A8-2FE5-492D-7ECAB6D34502}"/>
           </ac:spMkLst>
         </pc:spChg>
         <pc:picChg chg="add del">
-          <ac:chgData name="Toby Donaldson" userId="2e6e5431-bb17-4c41-9985-d39c50d83c73" providerId="ADAL" clId="{F31BC264-820E-54C4-A6D1-F92AF9CC222E}" dt="2026-06-18T17:39:24.154" v="24" actId="21"/>
+          <ac:chgData name="Toby Donaldson" userId="2e6e5431-bb17-4c41-9985-d39c50d83c73" providerId="ADAL" clId="{F31BC264-820E-54C4-A6D1-F92AF9CC222E}" dt="2026-09-28T03:32:03.497" v="828" actId="21"/>
           <ac:picMkLst>
             <pc:docMk/>
-            <pc:sldMk cId="2492672385" sldId="279"/>
-            <ac:picMk id="7" creationId="{4A2AF263-CECF-5E13-E4B4-12DE7B7EC1A9}"/>
+            <pc:sldMk cId="3131224629" sldId="294"/>
+            <ac:picMk id="3" creationId="{148EC868-09F5-122E-23C4-A0C58E49B721}"/>
           </ac:picMkLst>
         </pc:picChg>
       </pc:sldChg>
-      <pc:sldChg chg="delSp add mod ord">
-        <pc:chgData name="Toby Donaldson" userId="2e6e5431-bb17-4c41-9985-d39c50d83c73" providerId="ADAL" clId="{F31BC264-820E-54C4-A6D1-F92AF9CC222E}" dt="2026-06-18T17:39:01.803" v="20" actId="20578"/>
+      <pc:sldChg chg="addSp modSp add mod">
+        <pc:chgData name="Toby Donaldson" userId="2e6e5431-bb17-4c41-9985-d39c50d83c73" providerId="ADAL" clId="{F31BC264-820E-54C4-A6D1-F92AF9CC222E}" dt="2026-09-28T03:33:52.479" v="843" actId="20577"/>
         <pc:sldMkLst>
           <pc:docMk/>
-          <pc:sldMk cId="3265843497" sldId="280"/>
+          <pc:sldMk cId="2829825335" sldId="295"/>
         </pc:sldMkLst>
-        <pc:spChg chg="del">
-          <ac:chgData name="Toby Donaldson" userId="2e6e5431-bb17-4c41-9985-d39c50d83c73" providerId="ADAL" clId="{F31BC264-820E-54C4-A6D1-F92AF9CC222E}" dt="2026-06-18T17:38:56.066" v="19" actId="21"/>
+        <pc:spChg chg="add mod">
+          <ac:chgData name="Toby Donaldson" userId="2e6e5431-bb17-4c41-9985-d39c50d83c73" providerId="ADAL" clId="{F31BC264-820E-54C4-A6D1-F92AF9CC222E}" dt="2026-09-28T03:33:52.479" v="843" actId="20577"/>
           <ac:spMkLst>
             <pc:docMk/>
-            <pc:sldMk cId="3265843497" sldId="280"/>
-            <ac:spMk id="16" creationId="{68D3E4C7-6EC8-B56D-C0F7-88F71FCF7A8E}"/>
+            <pc:sldMk cId="2829825335" sldId="295"/>
+            <ac:spMk id="6" creationId="{E031AD4D-3355-2D5C-005C-7190EBE557AE}"/>
           </ac:spMkLst>
         </pc:spChg>
-        <pc:spChg chg="del">
-          <ac:chgData name="Toby Donaldson" userId="2e6e5431-bb17-4c41-9985-d39c50d83c73" providerId="ADAL" clId="{F31BC264-820E-54C4-A6D1-F92AF9CC222E}" dt="2026-06-18T17:38:56.066" v="19" actId="21"/>
-          <ac:spMkLst>
-            <pc:docMk/>
-            <pc:sldMk cId="3265843497" sldId="280"/>
-            <ac:spMk id="22" creationId="{E698CA7E-C452-37F5-6310-E76AD5DD94E1}"/>
-          </ac:spMkLst>
-        </pc:spChg>
-        <pc:picChg chg="del">
-          <ac:chgData name="Toby Donaldson" userId="2e6e5431-bb17-4c41-9985-d39c50d83c73" providerId="ADAL" clId="{F31BC264-820E-54C4-A6D1-F92AF9CC222E}" dt="2026-06-18T17:38:56.066" v="19" actId="21"/>
+        <pc:picChg chg="mod">
+          <ac:chgData name="Toby Donaldson" userId="2e6e5431-bb17-4c41-9985-d39c50d83c73" providerId="ADAL" clId="{F31BC264-820E-54C4-A6D1-F92AF9CC222E}" dt="2026-09-28T03:33:23.313" v="838" actId="1076"/>
           <ac:picMkLst>
             <pc:docMk/>
-            <pc:sldMk cId="3265843497" sldId="280"/>
-            <ac:picMk id="7" creationId="{123FA1B6-32E3-50D0-449A-992C9A9F8AD6}"/>
+            <pc:sldMk cId="2829825335" sldId="295"/>
+            <ac:picMk id="3" creationId="{9937ED3B-0223-766B-1945-0D7FA4EC0A85}"/>
           </ac:picMkLst>
         </pc:picChg>
-        <pc:picChg chg="del">
-          <ac:chgData name="Toby Donaldson" userId="2e6e5431-bb17-4c41-9985-d39c50d83c73" providerId="ADAL" clId="{F31BC264-820E-54C4-A6D1-F92AF9CC222E}" dt="2026-06-18T17:38:56.066" v="19" actId="21"/>
-          <ac:picMkLst>
-            <pc:docMk/>
-            <pc:sldMk cId="3265843497" sldId="280"/>
-            <ac:picMk id="11" creationId="{6DDAD19A-5401-0CEF-3633-6318023D273E}"/>
-          </ac:picMkLst>
-        </pc:picChg>
-      </pc:sldChg>
-      <pc:sldChg chg="add">
-        <pc:chgData name="Toby Donaldson" userId="2e6e5431-bb17-4c41-9985-d39c50d83c73" providerId="ADAL" clId="{F31BC264-820E-54C4-A6D1-F92AF9CC222E}" dt="2026-06-18T17:39:18.546" v="23" actId="2890"/>
-        <pc:sldMkLst>
-          <pc:docMk/>
-          <pc:sldMk cId="2628330378" sldId="281"/>
-        </pc:sldMkLst>
       </pc:sldChg>
     </pc:docChg>
   </pc:docChgLst>
@@ -586,7 +925,7 @@
           <a:p>
             <a:fld id="{C65E533D-5A30-424C-ADAA-EBA918E78813}" type="datetimeFigureOut">
               <a:rPr lang="en-AU" smtClean="0"/>
-              <a:t>18/6/2026</a:t>
+              <a:t>27/9/2026</a:t>
             </a:fld>
             <a:endParaRPr lang="en-AU"/>
           </a:p>
@@ -786,7 +1125,7 @@
           <a:p>
             <a:fld id="{C65E533D-5A30-424C-ADAA-EBA918E78813}" type="datetimeFigureOut">
               <a:rPr lang="en-AU" smtClean="0"/>
-              <a:t>18/6/2026</a:t>
+              <a:t>27/9/2026</a:t>
             </a:fld>
             <a:endParaRPr lang="en-AU"/>
           </a:p>
@@ -996,7 +1335,7 @@
           <a:p>
             <a:fld id="{C65E533D-5A30-424C-ADAA-EBA918E78813}" type="datetimeFigureOut">
               <a:rPr lang="en-AU" smtClean="0"/>
-              <a:t>18/6/2026</a:t>
+              <a:t>27/9/2026</a:t>
             </a:fld>
             <a:endParaRPr lang="en-AU"/>
           </a:p>
@@ -1196,7 +1535,7 @@
           <a:p>
             <a:fld id="{C65E533D-5A30-424C-ADAA-EBA918E78813}" type="datetimeFigureOut">
               <a:rPr lang="en-AU" smtClean="0"/>
-              <a:t>18/6/2026</a:t>
+              <a:t>27/9/2026</a:t>
             </a:fld>
             <a:endParaRPr lang="en-AU"/>
           </a:p>
@@ -1472,7 +1811,7 @@
           <a:p>
             <a:fld id="{C65E533D-5A30-424C-ADAA-EBA918E78813}" type="datetimeFigureOut">
               <a:rPr lang="en-AU" smtClean="0"/>
-              <a:t>18/6/2026</a:t>
+              <a:t>27/9/2026</a:t>
             </a:fld>
             <a:endParaRPr lang="en-AU"/>
           </a:p>
@@ -1740,7 +2079,7 @@
           <a:p>
             <a:fld id="{C65E533D-5A30-424C-ADAA-EBA918E78813}" type="datetimeFigureOut">
               <a:rPr lang="en-AU" smtClean="0"/>
-              <a:t>18/6/2026</a:t>
+              <a:t>27/9/2026</a:t>
             </a:fld>
             <a:endParaRPr lang="en-AU"/>
           </a:p>
@@ -2155,7 +2494,7 @@
           <a:p>
             <a:fld id="{C65E533D-5A30-424C-ADAA-EBA918E78813}" type="datetimeFigureOut">
               <a:rPr lang="en-AU" smtClean="0"/>
-              <a:t>18/6/2026</a:t>
+              <a:t>27/9/2026</a:t>
             </a:fld>
             <a:endParaRPr lang="en-AU"/>
           </a:p>
@@ -2297,7 +2636,7 @@
           <a:p>
             <a:fld id="{C65E533D-5A30-424C-ADAA-EBA918E78813}" type="datetimeFigureOut">
               <a:rPr lang="en-AU" smtClean="0"/>
-              <a:t>18/6/2026</a:t>
+              <a:t>27/9/2026</a:t>
             </a:fld>
             <a:endParaRPr lang="en-AU"/>
           </a:p>
@@ -2410,7 +2749,7 @@
           <a:p>
             <a:fld id="{C65E533D-5A30-424C-ADAA-EBA918E78813}" type="datetimeFigureOut">
               <a:rPr lang="en-AU" smtClean="0"/>
-              <a:t>18/6/2026</a:t>
+              <a:t>27/9/2026</a:t>
             </a:fld>
             <a:endParaRPr lang="en-AU"/>
           </a:p>
@@ -2723,7 +3062,7 @@
           <a:p>
             <a:fld id="{C65E533D-5A30-424C-ADAA-EBA918E78813}" type="datetimeFigureOut">
               <a:rPr lang="en-AU" smtClean="0"/>
-              <a:t>18/6/2026</a:t>
+              <a:t>27/9/2026</a:t>
             </a:fld>
             <a:endParaRPr lang="en-AU"/>
           </a:p>
@@ -3012,7 +3351,7 @@
           <a:p>
             <a:fld id="{C65E533D-5A30-424C-ADAA-EBA918E78813}" type="datetimeFigureOut">
               <a:rPr lang="en-AU" smtClean="0"/>
-              <a:t>18/6/2026</a:t>
+              <a:t>27/9/2026</a:t>
             </a:fld>
             <a:endParaRPr lang="en-AU"/>
           </a:p>
@@ -3255,7 +3594,7 @@
           <a:p>
             <a:fld id="{C65E533D-5A30-424C-ADAA-EBA918E78813}" type="datetimeFigureOut">
               <a:rPr lang="en-AU" smtClean="0"/>
-              <a:t>18/6/2026</a:t>
+              <a:t>27/9/2026</a:t>
             </a:fld>
             <a:endParaRPr lang="en-AU"/>
           </a:p>
@@ -3730,8 +4069,8 @@
         </p:nvSpPr>
         <p:spPr>
           <a:xfrm>
-            <a:off x="6367068" y="4640746"/>
-            <a:ext cx="2805576" cy="1754326"/>
+            <a:off x="6664137" y="4640746"/>
+            <a:ext cx="2211438" cy="1754326"/>
           </a:xfrm>
           <a:prstGeom prst="rect">
             <a:avLst/>
@@ -3759,7 +4098,7 @@
             <a:pPr algn="ctr"/>
             <a:r>
               <a:rPr lang="en-CA" sz="3600" dirty="0"/>
-              <a:t>Summer 2026</a:t>
+              <a:t>Fall 2026</a:t>
             </a:r>
           </a:p>
           <a:p>
@@ -3769,42 +4108,6 @@
               <a:t>SFU Surrey</a:t>
             </a:r>
             <a:endParaRPr lang="en-AU" sz="3600" dirty="0"/>
-          </a:p>
-        </p:txBody>
-      </p:sp>
-      <p:sp>
-        <p:nvSpPr>
-          <p:cNvPr id="8" name="TextBox 7">
-            <a:extLst>
-              <a:ext uri="{FF2B5EF4-FFF2-40B4-BE49-F238E27FC236}">
-                <a16:creationId xmlns:a16="http://schemas.microsoft.com/office/drawing/2014/main" id="{4B2E5120-9846-4325-A51B-589BC6A79787}"/>
-              </a:ext>
-            </a:extLst>
-          </p:cNvPr>
-          <p:cNvSpPr txBox="1"/>
-          <p:nvPr/>
-        </p:nvSpPr>
-        <p:spPr>
-          <a:xfrm>
-            <a:off x="848879" y="3855916"/>
-            <a:ext cx="2678938" cy="1569660"/>
-          </a:xfrm>
-          <a:prstGeom prst="rect">
-            <a:avLst/>
-          </a:prstGeom>
-          <a:noFill/>
-        </p:spPr>
-        <p:txBody>
-          <a:bodyPr wrap="none" rtlCol="0">
-            <a:spAutoFit/>
-          </a:bodyPr>
-          <a:lstStyle/>
-          <a:p>
-            <a:r>
-              <a:rPr lang="en-CA" sz="9600" i="1" dirty="0"/>
-              <a:t>1975</a:t>
-            </a:r>
-            <a:endParaRPr lang="en-AU" sz="9600" i="1" dirty="0"/>
           </a:p>
         </p:txBody>
       </p:sp>
@@ -3869,8 +4172,8 @@
         </p:nvSpPr>
         <p:spPr>
           <a:xfrm>
-            <a:off x="1122683" y="5225521"/>
-            <a:ext cx="1896673" cy="584775"/>
+            <a:off x="934639" y="4102137"/>
+            <a:ext cx="2547492" cy="1569660"/>
           </a:xfrm>
           <a:prstGeom prst="rect">
             <a:avLst/>
@@ -3885,7 +4188,20 @@
           <a:p>
             <a:r>
               <a:rPr lang="en-CA" sz="3200" i="1" dirty="0"/>
-              <a:t>LISP: 1958</a:t>
+              <a:t>       LISP: 1960</a:t>
+            </a:r>
+            <a:br>
+              <a:rPr lang="en-CA" sz="3200" i="1" dirty="0"/>
+            </a:br>
+            <a:r>
+              <a:rPr lang="en-CA" sz="3200" i="1" dirty="0"/>
+              <a:t>Scheme: 1975</a:t>
+            </a:r>
+          </a:p>
+          <a:p>
+            <a:r>
+              <a:rPr lang="en-CA" sz="3200" i="1" dirty="0"/>
+              <a:t> Racket: 1995</a:t>
             </a:r>
             <a:endParaRPr lang="en-AU" sz="3200" i="1" dirty="0"/>
           </a:p>
@@ -3909,7 +4225,13 @@
   <p:cSld>
     <p:spTree>
       <p:nvGrpSpPr>
-        <p:cNvPr id="1" name=""/>
+        <p:cNvPr id="1" name="">
+          <a:extLst>
+            <a:ext uri="{FF2B5EF4-FFF2-40B4-BE49-F238E27FC236}">
+              <a16:creationId xmlns:a16="http://schemas.microsoft.com/office/drawing/2014/main" id="{529C4FE7-D8D3-4C8F-6FFE-4E0E86D90CCD}"/>
+            </a:ext>
+          </a:extLst>
+        </p:cNvPr>
         <p:cNvGrpSpPr/>
         <p:nvPr/>
       </p:nvGrpSpPr>
@@ -3923,289 +4245,69 @@
       </p:grpSpPr>
       <p:sp>
         <p:nvSpPr>
-          <p:cNvPr id="4" name="Content Placeholder 2">
-            <a:extLst>
-              <a:ext uri="{FF2B5EF4-FFF2-40B4-BE49-F238E27FC236}">
-                <a16:creationId xmlns:a16="http://schemas.microsoft.com/office/drawing/2014/main" id="{8D140EF2-7A80-4170-96C7-C567343A91EE}"/>
-              </a:ext>
-            </a:extLst>
-          </p:cNvPr>
-          <p:cNvSpPr txBox="1">
-            <a:spLocks/>
+          <p:cNvPr id="2" name="Title 1">
+            <a:extLst>
+              <a:ext uri="{FF2B5EF4-FFF2-40B4-BE49-F238E27FC236}">
+                <a16:creationId xmlns:a16="http://schemas.microsoft.com/office/drawing/2014/main" id="{B46834B8-6DF8-5AFE-BBAF-CB42D86B9C75}"/>
+              </a:ext>
+            </a:extLst>
+          </p:cNvPr>
+          <p:cNvSpPr>
+            <a:spLocks noGrp="1"/>
           </p:cNvSpPr>
+          <p:nvPr>
+            <p:ph type="title"/>
+          </p:nvPr>
+        </p:nvSpPr>
+        <p:spPr/>
+        <p:txBody>
+          <a:bodyPr/>
+          <a:lstStyle/>
+          <a:p>
+            <a:r>
+              <a:rPr lang="en-CA" dirty="0"/>
+              <a:t>1960: Top Grossing Movie</a:t>
+            </a:r>
+            <a:endParaRPr lang="en-AU" dirty="0"/>
+          </a:p>
+        </p:txBody>
+      </p:sp>
+      <p:pic>
+        <p:nvPicPr>
+          <p:cNvPr id="3" name="Picture 2">
+            <a:extLst>
+              <a:ext uri="{FF2B5EF4-FFF2-40B4-BE49-F238E27FC236}">
+                <a16:creationId xmlns:a16="http://schemas.microsoft.com/office/drawing/2014/main" id="{098068CA-1720-07D3-A5B3-5F84FD79FEDA}"/>
+              </a:ext>
+            </a:extLst>
+          </p:cNvPr>
+          <p:cNvPicPr>
+            <a:picLocks noChangeAspect="1"/>
+          </p:cNvPicPr>
           <p:nvPr/>
-        </p:nvSpPr>
+        </p:nvPicPr>
+        <p:blipFill>
+          <a:blip r:embed="rId2"/>
+          <a:stretch>
+            <a:fillRect/>
+          </a:stretch>
+        </p:blipFill>
         <p:spPr>
           <a:xfrm>
-            <a:off x="1358538" y="1697333"/>
-            <a:ext cx="9527176" cy="5050308"/>
+            <a:off x="3708536" y="1401873"/>
+            <a:ext cx="3454263" cy="5181395"/>
           </a:xfrm>
           <a:prstGeom prst="rect">
             <a:avLst/>
           </a:prstGeom>
         </p:spPr>
-        <p:txBody>
-          <a:bodyPr vert="horz" lIns="91440" tIns="45720" rIns="91440" bIns="45720" rtlCol="0">
-            <a:normAutofit fontScale="77500" lnSpcReduction="20000"/>
-          </a:bodyPr>
-          <a:lstStyle>
-            <a:lvl1pPr marL="228600" indent="-228600" algn="l" defTabSz="914400" rtl="0" eaLnBrk="1" latinLnBrk="0" hangingPunct="1">
-              <a:lnSpc>
-                <a:spcPct val="90000"/>
-              </a:lnSpc>
-              <a:spcBef>
-                <a:spcPts val="1000"/>
-              </a:spcBef>
-              <a:buFont typeface="Arial" panose="020B0604020202020204" pitchFamily="34" charset="0"/>
-              <a:buChar char="•"/>
-              <a:defRPr sz="2800" kern="1200">
-                <a:solidFill>
-                  <a:schemeClr val="tx1"/>
-                </a:solidFill>
-                <a:latin typeface="+mn-lt"/>
-                <a:ea typeface="+mn-ea"/>
-                <a:cs typeface="+mn-cs"/>
-              </a:defRPr>
-            </a:lvl1pPr>
-            <a:lvl2pPr marL="685800" indent="-228600" algn="l" defTabSz="914400" rtl="0" eaLnBrk="1" latinLnBrk="0" hangingPunct="1">
-              <a:lnSpc>
-                <a:spcPct val="90000"/>
-              </a:lnSpc>
-              <a:spcBef>
-                <a:spcPts val="500"/>
-              </a:spcBef>
-              <a:buFont typeface="Arial" panose="020B0604020202020204" pitchFamily="34" charset="0"/>
-              <a:buChar char="•"/>
-              <a:defRPr sz="2400" kern="1200">
-                <a:solidFill>
-                  <a:schemeClr val="tx1"/>
-                </a:solidFill>
-                <a:latin typeface="+mn-lt"/>
-                <a:ea typeface="+mn-ea"/>
-                <a:cs typeface="+mn-cs"/>
-              </a:defRPr>
-            </a:lvl2pPr>
-            <a:lvl3pPr marL="1143000" indent="-228600" algn="l" defTabSz="914400" rtl="0" eaLnBrk="1" latinLnBrk="0" hangingPunct="1">
-              <a:lnSpc>
-                <a:spcPct val="90000"/>
-              </a:lnSpc>
-              <a:spcBef>
-                <a:spcPts val="500"/>
-              </a:spcBef>
-              <a:buFont typeface="Arial" panose="020B0604020202020204" pitchFamily="34" charset="0"/>
-              <a:buChar char="•"/>
-              <a:defRPr sz="2000" kern="1200">
-                <a:solidFill>
-                  <a:schemeClr val="tx1"/>
-                </a:solidFill>
-                <a:latin typeface="+mn-lt"/>
-                <a:ea typeface="+mn-ea"/>
-                <a:cs typeface="+mn-cs"/>
-              </a:defRPr>
-            </a:lvl3pPr>
-            <a:lvl4pPr marL="1600200" indent="-228600" algn="l" defTabSz="914400" rtl="0" eaLnBrk="1" latinLnBrk="0" hangingPunct="1">
-              <a:lnSpc>
-                <a:spcPct val="90000"/>
-              </a:lnSpc>
-              <a:spcBef>
-                <a:spcPts val="500"/>
-              </a:spcBef>
-              <a:buFont typeface="Arial" panose="020B0604020202020204" pitchFamily="34" charset="0"/>
-              <a:buChar char="•"/>
-              <a:defRPr sz="1800" kern="1200">
-                <a:solidFill>
-                  <a:schemeClr val="tx1"/>
-                </a:solidFill>
-                <a:latin typeface="+mn-lt"/>
-                <a:ea typeface="+mn-ea"/>
-                <a:cs typeface="+mn-cs"/>
-              </a:defRPr>
-            </a:lvl4pPr>
-            <a:lvl5pPr marL="2057400" indent="-228600" algn="l" defTabSz="914400" rtl="0" eaLnBrk="1" latinLnBrk="0" hangingPunct="1">
-              <a:lnSpc>
-                <a:spcPct val="90000"/>
-              </a:lnSpc>
-              <a:spcBef>
-                <a:spcPts val="500"/>
-              </a:spcBef>
-              <a:buFont typeface="Arial" panose="020B0604020202020204" pitchFamily="34" charset="0"/>
-              <a:buChar char="•"/>
-              <a:defRPr sz="1800" kern="1200">
-                <a:solidFill>
-                  <a:schemeClr val="tx1"/>
-                </a:solidFill>
-                <a:latin typeface="+mn-lt"/>
-                <a:ea typeface="+mn-ea"/>
-                <a:cs typeface="+mn-cs"/>
-              </a:defRPr>
-            </a:lvl5pPr>
-            <a:lvl6pPr marL="2514600" indent="-228600" algn="l" defTabSz="914400" rtl="0" eaLnBrk="1" latinLnBrk="0" hangingPunct="1">
-              <a:lnSpc>
-                <a:spcPct val="90000"/>
-              </a:lnSpc>
-              <a:spcBef>
-                <a:spcPts val="500"/>
-              </a:spcBef>
-              <a:buFont typeface="Arial" panose="020B0604020202020204" pitchFamily="34" charset="0"/>
-              <a:buChar char="•"/>
-              <a:defRPr sz="1800" kern="1200">
-                <a:solidFill>
-                  <a:schemeClr val="tx1"/>
-                </a:solidFill>
-                <a:latin typeface="+mn-lt"/>
-                <a:ea typeface="+mn-ea"/>
-                <a:cs typeface="+mn-cs"/>
-              </a:defRPr>
-            </a:lvl6pPr>
-            <a:lvl7pPr marL="2971800" indent="-228600" algn="l" defTabSz="914400" rtl="0" eaLnBrk="1" latinLnBrk="0" hangingPunct="1">
-              <a:lnSpc>
-                <a:spcPct val="90000"/>
-              </a:lnSpc>
-              <a:spcBef>
-                <a:spcPts val="500"/>
-              </a:spcBef>
-              <a:buFont typeface="Arial" panose="020B0604020202020204" pitchFamily="34" charset="0"/>
-              <a:buChar char="•"/>
-              <a:defRPr sz="1800" kern="1200">
-                <a:solidFill>
-                  <a:schemeClr val="tx1"/>
-                </a:solidFill>
-                <a:latin typeface="+mn-lt"/>
-                <a:ea typeface="+mn-ea"/>
-                <a:cs typeface="+mn-cs"/>
-              </a:defRPr>
-            </a:lvl7pPr>
-            <a:lvl8pPr marL="3429000" indent="-228600" algn="l" defTabSz="914400" rtl="0" eaLnBrk="1" latinLnBrk="0" hangingPunct="1">
-              <a:lnSpc>
-                <a:spcPct val="90000"/>
-              </a:lnSpc>
-              <a:spcBef>
-                <a:spcPts val="500"/>
-              </a:spcBef>
-              <a:buFont typeface="Arial" panose="020B0604020202020204" pitchFamily="34" charset="0"/>
-              <a:buChar char="•"/>
-              <a:defRPr sz="1800" kern="1200">
-                <a:solidFill>
-                  <a:schemeClr val="tx1"/>
-                </a:solidFill>
-                <a:latin typeface="+mn-lt"/>
-                <a:ea typeface="+mn-ea"/>
-                <a:cs typeface="+mn-cs"/>
-              </a:defRPr>
-            </a:lvl8pPr>
-            <a:lvl9pPr marL="3886200" indent="-228600" algn="l" defTabSz="914400" rtl="0" eaLnBrk="1" latinLnBrk="0" hangingPunct="1">
-              <a:lnSpc>
-                <a:spcPct val="90000"/>
-              </a:lnSpc>
-              <a:spcBef>
-                <a:spcPts val="500"/>
-              </a:spcBef>
-              <a:buFont typeface="Arial" panose="020B0604020202020204" pitchFamily="34" charset="0"/>
-              <a:buChar char="•"/>
-              <a:defRPr sz="1800" kern="1200">
-                <a:solidFill>
-                  <a:schemeClr val="tx1"/>
-                </a:solidFill>
-                <a:latin typeface="+mn-lt"/>
-                <a:ea typeface="+mn-ea"/>
-                <a:cs typeface="+mn-cs"/>
-              </a:defRPr>
-            </a:lvl9pPr>
-          </a:lstStyle>
-          <a:p>
-            <a:pPr marL="0" indent="0">
-              <a:buNone/>
-            </a:pPr>
-            <a:r>
-              <a:rPr lang="en-CA" sz="4800" dirty="0"/>
-              <a:t>Canadian PM: </a:t>
-            </a:r>
-            <a:r>
-              <a:rPr lang="en-CA" sz="4800" b="1" dirty="0"/>
-              <a:t>Pierre Trudeau</a:t>
-            </a:r>
-          </a:p>
-          <a:p>
-            <a:pPr marL="0" indent="0">
-              <a:buNone/>
-            </a:pPr>
-            <a:endParaRPr lang="en-CA" sz="4800" dirty="0"/>
-          </a:p>
-          <a:p>
-            <a:pPr marL="0" indent="0">
-              <a:buNone/>
-            </a:pPr>
-            <a:r>
-              <a:rPr lang="en-CA" sz="4800" dirty="0"/>
-              <a:t>American President: </a:t>
-            </a:r>
-            <a:r>
-              <a:rPr lang="en-CA" sz="4800" b="1" dirty="0"/>
-              <a:t>Gerald Ford</a:t>
-            </a:r>
-            <a:endParaRPr lang="en-AU" sz="4800" b="1" dirty="0"/>
-          </a:p>
-          <a:p>
-            <a:pPr marL="0" indent="0">
-              <a:buNone/>
-            </a:pPr>
-            <a:endParaRPr lang="en-AU" sz="4800" b="1" dirty="0"/>
-          </a:p>
-          <a:p>
-            <a:pPr marL="0" indent="0">
-              <a:buNone/>
-            </a:pPr>
-            <a:r>
-              <a:rPr lang="en-AU" sz="4800" b="1" dirty="0"/>
-              <a:t>Vietnam war </a:t>
-            </a:r>
-            <a:r>
-              <a:rPr lang="en-AU" sz="4800" dirty="0"/>
-              <a:t>ended</a:t>
-            </a:r>
-          </a:p>
-          <a:p>
-            <a:pPr marL="0" indent="0">
-              <a:buNone/>
-            </a:pPr>
-            <a:endParaRPr lang="en-AU" sz="4800" b="1" dirty="0"/>
-          </a:p>
-          <a:p>
-            <a:pPr marL="0" indent="0">
-              <a:buNone/>
-            </a:pPr>
-            <a:r>
-              <a:rPr lang="en-AU" sz="4800" b="1" dirty="0"/>
-              <a:t>Saturday Night Live </a:t>
-            </a:r>
-            <a:r>
-              <a:rPr lang="en-AU" sz="4800" dirty="0"/>
-              <a:t>comedy show started </a:t>
-            </a:r>
-          </a:p>
-          <a:p>
-            <a:pPr marL="0" indent="0">
-              <a:buNone/>
-            </a:pPr>
-            <a:endParaRPr lang="en-CA" sz="4800" dirty="0"/>
-          </a:p>
-          <a:p>
-            <a:pPr marL="0" indent="0">
-              <a:buNone/>
-            </a:pPr>
-            <a:r>
-              <a:rPr lang="en-CA" sz="4800" dirty="0"/>
-              <a:t>Average US income: $14,100.00</a:t>
-            </a:r>
-          </a:p>
-        </p:txBody>
-      </p:sp>
-      <p:sp>
-        <p:nvSpPr>
-          <p:cNvPr id="8" name="TextBox 7">
-            <a:extLst>
-              <a:ext uri="{FF2B5EF4-FFF2-40B4-BE49-F238E27FC236}">
-                <a16:creationId xmlns:a16="http://schemas.microsoft.com/office/drawing/2014/main" id="{E2400FBB-A4E6-4E19-BEB2-E43F372AEDD9}"/>
+      </p:pic>
+      <p:sp>
+        <p:nvSpPr>
+          <p:cNvPr id="5" name="TextBox 4">
+            <a:extLst>
+              <a:ext uri="{FF2B5EF4-FFF2-40B4-BE49-F238E27FC236}">
+                <a16:creationId xmlns:a16="http://schemas.microsoft.com/office/drawing/2014/main" id="{27A29284-E390-1C7C-7FEF-41FCE43C49D3}"/>
               </a:ext>
             </a:extLst>
           </p:cNvPr>
@@ -4214,8 +4316,8 @@
         </p:nvSpPr>
         <p:spPr>
           <a:xfrm>
-            <a:off x="214122" y="373894"/>
-            <a:ext cx="4858658" cy="769441"/>
+            <a:off x="7701279" y="2104072"/>
+            <a:ext cx="3779521" cy="2862322"/>
           </a:xfrm>
           <a:prstGeom prst="rect">
             <a:avLst/>
@@ -4229,21 +4331,24 @@
           <a:lstStyle/>
           <a:p>
             <a:r>
-              <a:rPr lang="en-CA" sz="4400" dirty="0">
-                <a:latin typeface="+mj-lt"/>
-              </a:rPr>
-              <a:t>1975: Facts</a:t>
-            </a:r>
-            <a:endParaRPr lang="en-AU" sz="4400" dirty="0">
-              <a:latin typeface="+mj-lt"/>
-            </a:endParaRPr>
+              <a:rPr lang="en-US" sz="3600" b="1" dirty="0"/>
+              <a:t>Spartacus</a:t>
+            </a:r>
+            <a:br>
+              <a:rPr lang="en-US" dirty="0"/>
+            </a:br>
+            <a:r>
+              <a:rPr lang="en-CA" dirty="0"/>
+              <a:t>An epic historical drama that tells the story of an enslaved Roman gladiator who leads a rebellion against the Roman Republic. Celebrated for its iconic "I'm Spartacus!" scene and grand battle sequences, the film remains a timeless cinematic symbol of resistance against tyranny.</a:t>
+            </a:r>
+            <a:endParaRPr lang="en-US" dirty="0"/>
           </a:p>
         </p:txBody>
       </p:sp>
     </p:spTree>
     <p:extLst>
       <p:ext uri="{BB962C8B-B14F-4D97-AF65-F5344CB8AC3E}">
-        <p14:creationId xmlns:p14="http://schemas.microsoft.com/office/powerpoint/2010/main" val="1031835898"/>
+        <p14:creationId xmlns:p14="http://schemas.microsoft.com/office/powerpoint/2010/main" val="1486917320"/>
       </p:ext>
     </p:extLst>
   </p:cSld>
@@ -4258,7 +4363,13 @@
   <p:cSld>
     <p:spTree>
       <p:nvGrpSpPr>
-        <p:cNvPr id="1" name=""/>
+        <p:cNvPr id="1" name="">
+          <a:extLst>
+            <a:ext uri="{FF2B5EF4-FFF2-40B4-BE49-F238E27FC236}">
+              <a16:creationId xmlns:a16="http://schemas.microsoft.com/office/drawing/2014/main" id="{0CE1A64D-C736-CBDE-1A53-D5C804A0449D}"/>
+            </a:ext>
+          </a:extLst>
+        </p:cNvPr>
         <p:cNvGrpSpPr/>
         <p:nvPr/>
       </p:nvGrpSpPr>
@@ -4270,59 +4381,41 @@
           <a:chExt cx="0" cy="0"/>
         </a:xfrm>
       </p:grpSpPr>
-      <p:pic>
-        <p:nvPicPr>
-          <p:cNvPr id="4" name="Picture 2" descr="Racket (programming language) - Wikipedia">
-            <a:extLst>
-              <a:ext uri="{FF2B5EF4-FFF2-40B4-BE49-F238E27FC236}">
-                <a16:creationId xmlns:a16="http://schemas.microsoft.com/office/drawing/2014/main" id="{6FE4F0D5-D4CA-7F6E-F27C-8892CF572266}"/>
-              </a:ext>
-            </a:extLst>
-          </p:cNvPr>
-          <p:cNvPicPr>
-            <a:picLocks noChangeAspect="1" noChangeArrowheads="1"/>
-          </p:cNvPicPr>
-          <p:nvPr/>
-        </p:nvPicPr>
-        <p:blipFill>
-          <a:blip r:embed="rId2">
-            <a:extLst>
-              <a:ext uri="{28A0092B-C50C-407E-A947-70E740481C1C}">
-                <a14:useLocalDpi xmlns:a14="http://schemas.microsoft.com/office/drawing/2010/main" val="0"/>
-              </a:ext>
-            </a:extLst>
-          </a:blip>
-          <a:srcRect/>
-          <a:stretch>
-            <a:fillRect/>
-          </a:stretch>
-        </p:blipFill>
-        <p:spPr bwMode="auto">
-          <a:xfrm>
-            <a:off x="4606899" y="690922"/>
-            <a:ext cx="2978202" cy="2978202"/>
-          </a:xfrm>
-          <a:prstGeom prst="rect">
-            <a:avLst/>
-          </a:prstGeom>
-          <a:noFill/>
-          <a:extLst>
-            <a:ext uri="{909E8E84-426E-40DD-AFC4-6F175D3DCCD1}">
-              <a14:hiddenFill xmlns:a14="http://schemas.microsoft.com/office/drawing/2010/main">
-                <a:solidFill>
-                  <a:srgbClr val="FFFFFF"/>
-                </a:solidFill>
-              </a14:hiddenFill>
-            </a:ext>
-          </a:extLst>
-        </p:spPr>
-      </p:pic>
-      <p:sp>
-        <p:nvSpPr>
-          <p:cNvPr id="2" name="TextBox 1">
-            <a:extLst>
-              <a:ext uri="{FF2B5EF4-FFF2-40B4-BE49-F238E27FC236}">
-                <a16:creationId xmlns:a16="http://schemas.microsoft.com/office/drawing/2014/main" id="{A7CF2578-931A-9B0F-F1EA-3BB34CCE93DF}"/>
+      <p:sp>
+        <p:nvSpPr>
+          <p:cNvPr id="2" name="Title 1">
+            <a:extLst>
+              <a:ext uri="{FF2B5EF4-FFF2-40B4-BE49-F238E27FC236}">
+                <a16:creationId xmlns:a16="http://schemas.microsoft.com/office/drawing/2014/main" id="{C55696B9-36A8-2FE5-492D-7ECAB6D34502}"/>
+              </a:ext>
+            </a:extLst>
+          </p:cNvPr>
+          <p:cNvSpPr>
+            <a:spLocks noGrp="1"/>
+          </p:cNvSpPr>
+          <p:nvPr>
+            <p:ph type="title"/>
+          </p:nvPr>
+        </p:nvSpPr>
+        <p:spPr/>
+        <p:txBody>
+          <a:bodyPr/>
+          <a:lstStyle/>
+          <a:p>
+            <a:r>
+              <a:rPr lang="en-CA" dirty="0"/>
+              <a:t>1960: Most Popular Song</a:t>
+            </a:r>
+            <a:endParaRPr lang="en-AU" dirty="0"/>
+          </a:p>
+        </p:txBody>
+      </p:sp>
+      <p:sp>
+        <p:nvSpPr>
+          <p:cNvPr id="5" name="TextBox 4">
+            <a:extLst>
+              <a:ext uri="{FF2B5EF4-FFF2-40B4-BE49-F238E27FC236}">
+                <a16:creationId xmlns:a16="http://schemas.microsoft.com/office/drawing/2014/main" id="{E583A44B-8ADB-C2B5-B091-52AE58764AAE}"/>
               </a:ext>
             </a:extLst>
           </p:cNvPr>
@@ -4331,8 +4424,8 @@
         </p:nvSpPr>
         <p:spPr>
           <a:xfrm>
-            <a:off x="4856309" y="4203165"/>
-            <a:ext cx="2796989" cy="1384995"/>
+            <a:off x="5766422" y="3075057"/>
+            <a:ext cx="659155" cy="707886"/>
           </a:xfrm>
           <a:prstGeom prst="rect">
             <a:avLst/>
@@ -4340,41 +4433,116 @@
           <a:noFill/>
         </p:spPr>
         <p:txBody>
-          <a:bodyPr wrap="square" rtlCol="0">
+          <a:bodyPr wrap="none" rtlCol="0">
             <a:spAutoFit/>
           </a:bodyPr>
           <a:lstStyle/>
           <a:p>
-            <a:r>
-              <a:rPr lang="en-CA" sz="2800" dirty="0"/>
-              <a:t>LISP          1958</a:t>
-            </a:r>
-          </a:p>
-          <a:p>
-            <a:r>
-              <a:rPr lang="en-CA" sz="2800" dirty="0"/>
-              <a:t>Scheme   1975</a:t>
-            </a:r>
-          </a:p>
-          <a:p>
-            <a:r>
-              <a:rPr lang="en-CA" sz="2800" dirty="0"/>
-              <a:t>Racket   ~1995</a:t>
-            </a:r>
-            <a:endParaRPr lang="en-AU" sz="2800" dirty="0"/>
+            <a:pPr algn="ctr"/>
+            <a:r>
+              <a:rPr lang="en-CA" sz="4000" b="1" dirty="0"/>
+              <a:t>??</a:t>
+            </a:r>
+            <a:endParaRPr lang="en-AU" sz="3200" dirty="0"/>
           </a:p>
         </p:txBody>
       </p:sp>
     </p:spTree>
     <p:extLst>
       <p:ext uri="{BB962C8B-B14F-4D97-AF65-F5344CB8AC3E}">
-        <p14:creationId xmlns:p14="http://schemas.microsoft.com/office/powerpoint/2010/main" val="2513690197"/>
+        <p14:creationId xmlns:p14="http://schemas.microsoft.com/office/powerpoint/2010/main" val="3131224629"/>
       </p:ext>
     </p:extLst>
   </p:cSld>
   <p:clrMapOvr>
     <a:masterClrMapping/>
   </p:clrMapOvr>
+  <p:timing>
+    <p:tnLst>
+      <p:par>
+        <p:cTn id="1" dur="indefinite" restart="never" nodeType="tmRoot">
+          <p:childTnLst>
+            <p:seq concurrent="1" nextAc="seek">
+              <p:cTn id="2" dur="indefinite" nodeType="mainSeq">
+                <p:childTnLst>
+                  <p:par>
+                    <p:cTn id="3" fill="hold">
+                      <p:stCondLst>
+                        <p:cond delay="indefinite"/>
+                      </p:stCondLst>
+                      <p:childTnLst>
+                        <p:par>
+                          <p:cTn id="4" fill="hold">
+                            <p:stCondLst>
+                              <p:cond delay="0"/>
+                            </p:stCondLst>
+                            <p:childTnLst>
+                              <p:par>
+                                <p:cTn id="5" presetID="10" presetClass="entr" presetSubtype="0" fill="hold" grpId="0" nodeType="clickEffect">
+                                  <p:stCondLst>
+                                    <p:cond delay="0"/>
+                                  </p:stCondLst>
+                                  <p:childTnLst>
+                                    <p:set>
+                                      <p:cBhvr>
+                                        <p:cTn id="6" dur="1" fill="hold">
+                                          <p:stCondLst>
+                                            <p:cond delay="0"/>
+                                          </p:stCondLst>
+                                        </p:cTn>
+                                        <p:tgtEl>
+                                          <p:spTgt spid="5"/>
+                                        </p:tgtEl>
+                                        <p:attrNameLst>
+                                          <p:attrName>style.visibility</p:attrName>
+                                        </p:attrNameLst>
+                                      </p:cBhvr>
+                                      <p:to>
+                                        <p:strVal val="visible"/>
+                                      </p:to>
+                                    </p:set>
+                                    <p:animEffect transition="in" filter="fade">
+                                      <p:cBhvr>
+                                        <p:cTn id="7" dur="500"/>
+                                        <p:tgtEl>
+                                          <p:spTgt spid="5"/>
+                                        </p:tgtEl>
+                                      </p:cBhvr>
+                                    </p:animEffect>
+                                  </p:childTnLst>
+                                </p:cTn>
+                              </p:par>
+                            </p:childTnLst>
+                          </p:cTn>
+                        </p:par>
+                      </p:childTnLst>
+                    </p:cTn>
+                  </p:par>
+                </p:childTnLst>
+              </p:cTn>
+              <p:prevCondLst>
+                <p:cond evt="onPrev" delay="0">
+                  <p:tgtEl>
+                    <p:sldTgt/>
+                  </p:tgtEl>
+                </p:cond>
+              </p:prevCondLst>
+              <p:nextCondLst>
+                <p:cond evt="onNext" delay="0">
+                  <p:tgtEl>
+                    <p:sldTgt/>
+                  </p:tgtEl>
+                </p:cond>
+              </p:nextCondLst>
+            </p:seq>
+          </p:childTnLst>
+        </p:cTn>
+      </p:par>
+    </p:tnLst>
+    <p:bldLst>
+      <p:bldP spid="5" grpId="0"/>
+    </p:bldLst>
+  </p:timing>
 </p:sld>
 </file>
 
@@ -4383,7 +4551,13 @@
   <p:cSld>
     <p:spTree>
       <p:nvGrpSpPr>
-        <p:cNvPr id="1" name=""/>
+        <p:cNvPr id="1" name="">
+          <a:extLst>
+            <a:ext uri="{FF2B5EF4-FFF2-40B4-BE49-F238E27FC236}">
+              <a16:creationId xmlns:a16="http://schemas.microsoft.com/office/drawing/2014/main" id="{C91F69A2-7836-CA9C-4354-28D29FE09801}"/>
+            </a:ext>
+          </a:extLst>
+        </p:cNvPr>
         <p:cNvGrpSpPr/>
         <p:nvPr/>
       </p:nvGrpSpPr>
@@ -4400,7 +4574,7 @@
           <p:cNvPr id="2" name="Title 1">
             <a:extLst>
               <a:ext uri="{FF2B5EF4-FFF2-40B4-BE49-F238E27FC236}">
-                <a16:creationId xmlns:a16="http://schemas.microsoft.com/office/drawing/2014/main" id="{AFC4F8B7-DF69-4161-80D5-5D65C38F8A33}"/>
+                <a16:creationId xmlns:a16="http://schemas.microsoft.com/office/drawing/2014/main" id="{33C9F766-65EA-27C0-02E3-E60656605A3E}"/>
               </a:ext>
             </a:extLst>
           </p:cNvPr>
@@ -4418,65 +4592,18 @@
           <a:p>
             <a:r>
               <a:rPr lang="en-CA" dirty="0"/>
-              <a:t>LISP and Scheme’s Original Designers</a:t>
+              <a:t>1960: Most Popular Song</a:t>
             </a:r>
             <a:endParaRPr lang="en-AU" dirty="0"/>
           </a:p>
         </p:txBody>
       </p:sp>
-      <p:pic>
-        <p:nvPicPr>
-          <p:cNvPr id="8194" name="Picture 2" descr="'Always inventing, inventing, inventing': McCarthy at work in his artificial intelligence laboratory at Stanford">
-            <a:extLst>
-              <a:ext uri="{FF2B5EF4-FFF2-40B4-BE49-F238E27FC236}">
-                <a16:creationId xmlns:a16="http://schemas.microsoft.com/office/drawing/2014/main" id="{584C219A-150E-A5C6-E0D4-11E43E4026A2}"/>
-              </a:ext>
-            </a:extLst>
-          </p:cNvPr>
-          <p:cNvPicPr>
-            <a:picLocks noChangeAspect="1" noChangeArrowheads="1"/>
-          </p:cNvPicPr>
-          <p:nvPr/>
-        </p:nvPicPr>
-        <p:blipFill>
-          <a:blip r:embed="rId2">
-            <a:extLst>
-              <a:ext uri="{28A0092B-C50C-407E-A947-70E740481C1C}">
-                <a14:useLocalDpi xmlns:a14="http://schemas.microsoft.com/office/drawing/2010/main" val="0"/>
-              </a:ext>
-            </a:extLst>
-          </a:blip>
-          <a:srcRect/>
-          <a:stretch>
-            <a:fillRect/>
-          </a:stretch>
-        </p:blipFill>
-        <p:spPr bwMode="auto">
-          <a:xfrm>
-            <a:off x="1195548" y="1401251"/>
-            <a:ext cx="4205441" cy="3109277"/>
-          </a:xfrm>
-          <a:prstGeom prst="rect">
-            <a:avLst/>
-          </a:prstGeom>
-          <a:noFill/>
-          <a:extLst>
-            <a:ext uri="{909E8E84-426E-40DD-AFC4-6F175D3DCCD1}">
-              <a14:hiddenFill xmlns:a14="http://schemas.microsoft.com/office/drawing/2010/main">
-                <a:solidFill>
-                  <a:srgbClr val="FFFFFF"/>
-                </a:solidFill>
-              </a14:hiddenFill>
-            </a:ext>
-          </a:extLst>
-        </p:spPr>
-      </p:pic>
-      <p:sp>
-        <p:nvSpPr>
-          <p:cNvPr id="4" name="TextBox 3">
-            <a:extLst>
-              <a:ext uri="{FF2B5EF4-FFF2-40B4-BE49-F238E27FC236}">
-                <a16:creationId xmlns:a16="http://schemas.microsoft.com/office/drawing/2014/main" id="{16127473-8A2B-AE78-F8C5-A0D03B7350B1}"/>
+      <p:sp>
+        <p:nvSpPr>
+          <p:cNvPr id="5" name="TextBox 4">
+            <a:extLst>
+              <a:ext uri="{FF2B5EF4-FFF2-40B4-BE49-F238E27FC236}">
+                <a16:creationId xmlns:a16="http://schemas.microsoft.com/office/drawing/2014/main" id="{A34F2859-F916-6364-C846-7C1F78E814C8}"/>
               </a:ext>
             </a:extLst>
           </p:cNvPr>
@@ -4485,8 +4612,8 @@
         </p:nvSpPr>
         <p:spPr>
           <a:xfrm>
-            <a:off x="1575227" y="4718210"/>
-            <a:ext cx="3161443" cy="646331"/>
+            <a:off x="5766422" y="3075057"/>
+            <a:ext cx="659155" cy="707886"/>
           </a:xfrm>
           <a:prstGeom prst="rect">
             <a:avLst/>
@@ -4501,164 +4628,49 @@
           <a:p>
             <a:pPr algn="ctr"/>
             <a:r>
-              <a:rPr lang="en-CA" b="1" dirty="0"/>
-              <a:t>John McCarthy </a:t>
-            </a:r>
-            <a:r>
-              <a:rPr lang="en-CA" dirty="0"/>
-              <a:t>(1927-2011)</a:t>
-            </a:r>
-          </a:p>
-          <a:p>
-            <a:pPr algn="ctr"/>
-            <a:r>
-              <a:rPr lang="en-CA" dirty="0"/>
-              <a:t>Original designer of LISP (1958)</a:t>
-            </a:r>
-            <a:endParaRPr lang="en-AU" dirty="0"/>
-          </a:p>
-        </p:txBody>
-      </p:sp>
-      <p:sp>
-        <p:nvSpPr>
-          <p:cNvPr id="9" name="TextBox 8">
-            <a:extLst>
-              <a:ext uri="{FF2B5EF4-FFF2-40B4-BE49-F238E27FC236}">
-                <a16:creationId xmlns:a16="http://schemas.microsoft.com/office/drawing/2014/main" id="{529CDD03-F006-3579-B9AC-F9755300E325}"/>
-              </a:ext>
-            </a:extLst>
-          </p:cNvPr>
-          <p:cNvSpPr txBox="1"/>
+              <a:rPr lang="en-CA" sz="4000" b="1" dirty="0"/>
+              <a:t>??</a:t>
+            </a:r>
+            <a:endParaRPr lang="en-AU" sz="3200" dirty="0"/>
+          </a:p>
+        </p:txBody>
+      </p:sp>
+      <p:pic>
+        <p:nvPicPr>
+          <p:cNvPr id="3" name="Picture 2">
+            <a:extLst>
+              <a:ext uri="{FF2B5EF4-FFF2-40B4-BE49-F238E27FC236}">
+                <a16:creationId xmlns:a16="http://schemas.microsoft.com/office/drawing/2014/main" id="{9937ED3B-0223-766B-1945-0D7FA4EC0A85}"/>
+              </a:ext>
+            </a:extLst>
+          </p:cNvPr>
+          <p:cNvPicPr>
+            <a:picLocks noChangeAspect="1"/>
+          </p:cNvPicPr>
           <p:nvPr/>
-        </p:nvSpPr>
+        </p:nvPicPr>
+        <p:blipFill>
+          <a:blip r:embed="rId2"/>
+          <a:stretch>
+            <a:fillRect/>
+          </a:stretch>
+        </p:blipFill>
         <p:spPr>
           <a:xfrm>
-            <a:off x="1790663" y="5456749"/>
-            <a:ext cx="2730570" cy="1200329"/>
+            <a:off x="2621280" y="1558290"/>
+            <a:ext cx="4934585" cy="4934585"/>
           </a:xfrm>
           <a:prstGeom prst="rect">
             <a:avLst/>
           </a:prstGeom>
-          <a:solidFill>
-            <a:schemeClr val="accent4">
-              <a:lumMod val="40000"/>
-              <a:lumOff val="60000"/>
-            </a:schemeClr>
-          </a:solidFill>
-        </p:spPr>
-        <p:txBody>
-          <a:bodyPr wrap="square" rtlCol="0">
-            <a:spAutoFit/>
-          </a:bodyPr>
-          <a:lstStyle/>
-          <a:p>
-            <a:pPr algn="ctr"/>
-            <a:r>
-              <a:rPr lang="en-CA" dirty="0"/>
-              <a:t>Also coined the term “Artificial Intelligence”, and for many years was a leading AI researcher.</a:t>
-            </a:r>
-            <a:endParaRPr lang="en-AU" dirty="0"/>
-          </a:p>
-        </p:txBody>
-      </p:sp>
-      <p:pic>
-        <p:nvPicPr>
-          <p:cNvPr id="8196" name="Picture 4">
-            <a:extLst>
-              <a:ext uri="{FF2B5EF4-FFF2-40B4-BE49-F238E27FC236}">
-                <a16:creationId xmlns:a16="http://schemas.microsoft.com/office/drawing/2014/main" id="{BFE3DDBD-D26E-E145-3342-178A22297B56}"/>
-              </a:ext>
-            </a:extLst>
-          </p:cNvPr>
-          <p:cNvPicPr>
-            <a:picLocks noChangeAspect="1" noChangeArrowheads="1"/>
-          </p:cNvPicPr>
-          <p:nvPr/>
-        </p:nvPicPr>
-        <p:blipFill>
-          <a:blip r:embed="rId3">
-            <a:extLst>
-              <a:ext uri="{28A0092B-C50C-407E-A947-70E740481C1C}">
-                <a14:useLocalDpi xmlns:a14="http://schemas.microsoft.com/office/drawing/2010/main" val="0"/>
-              </a:ext>
-            </a:extLst>
-          </a:blip>
-          <a:srcRect/>
-          <a:stretch>
-            <a:fillRect/>
-          </a:stretch>
-        </p:blipFill>
-        <p:spPr bwMode="auto">
-          <a:xfrm>
-            <a:off x="6096000" y="1401251"/>
-            <a:ext cx="2522690" cy="3109277"/>
-          </a:xfrm>
-          <a:prstGeom prst="rect">
-            <a:avLst/>
-          </a:prstGeom>
-          <a:noFill/>
-          <a:extLst>
-            <a:ext uri="{909E8E84-426E-40DD-AFC4-6F175D3DCCD1}">
-              <a14:hiddenFill xmlns:a14="http://schemas.microsoft.com/office/drawing/2010/main">
-                <a:solidFill>
-                  <a:srgbClr val="FFFFFF"/>
-                </a:solidFill>
-              </a14:hiddenFill>
-            </a:ext>
-          </a:extLst>
         </p:spPr>
       </p:pic>
-      <p:pic>
-        <p:nvPicPr>
-          <p:cNvPr id="8198" name="Picture 6" descr="Gerald Sussman">
-            <a:extLst>
-              <a:ext uri="{FF2B5EF4-FFF2-40B4-BE49-F238E27FC236}">
-                <a16:creationId xmlns:a16="http://schemas.microsoft.com/office/drawing/2014/main" id="{DDA7C2AB-C02D-61BF-5B16-E9727D9CF9CD}"/>
-              </a:ext>
-            </a:extLst>
-          </p:cNvPr>
-          <p:cNvPicPr>
-            <a:picLocks noChangeAspect="1" noChangeArrowheads="1"/>
-          </p:cNvPicPr>
-          <p:nvPr/>
-        </p:nvPicPr>
-        <p:blipFill rotWithShape="1">
-          <a:blip r:embed="rId4">
-            <a:extLst>
-              <a:ext uri="{28A0092B-C50C-407E-A947-70E740481C1C}">
-                <a14:useLocalDpi xmlns:a14="http://schemas.microsoft.com/office/drawing/2010/main" val="0"/>
-              </a:ext>
-            </a:extLst>
-          </a:blip>
-          <a:srcRect l="8348" r="11471" b="34117"/>
-          <a:stretch/>
-        </p:blipFill>
-        <p:spPr bwMode="auto">
-          <a:xfrm>
-            <a:off x="8827958" y="1401251"/>
-            <a:ext cx="2522687" cy="3109277"/>
-          </a:xfrm>
-          <a:prstGeom prst="rect">
-            <a:avLst/>
-          </a:prstGeom>
-          <a:noFill/>
-          <a:extLst>
-            <a:ext uri="{909E8E84-426E-40DD-AFC4-6F175D3DCCD1}">
-              <a14:hiddenFill xmlns:a14="http://schemas.microsoft.com/office/drawing/2010/main">
-                <a:solidFill>
-                  <a:srgbClr val="FFFFFF"/>
-                </a:solidFill>
-              </a14:hiddenFill>
-            </a:ext>
-          </a:extLst>
-        </p:spPr>
-      </p:pic>
-      <p:sp>
-        <p:nvSpPr>
-          <p:cNvPr id="12" name="TextBox 11">
-            <a:extLst>
-              <a:ext uri="{FF2B5EF4-FFF2-40B4-BE49-F238E27FC236}">
-                <a16:creationId xmlns:a16="http://schemas.microsoft.com/office/drawing/2014/main" id="{7D456361-9CC9-3318-8D15-4F61A6B43E78}"/>
+      <p:sp>
+        <p:nvSpPr>
+          <p:cNvPr id="6" name="TextBox 5">
+            <a:extLst>
+              <a:ext uri="{FF2B5EF4-FFF2-40B4-BE49-F238E27FC236}">
+                <a16:creationId xmlns:a16="http://schemas.microsoft.com/office/drawing/2014/main" id="{E031AD4D-3355-2D5C-005C-7190EBE557AE}"/>
               </a:ext>
             </a:extLst>
           </p:cNvPr>
@@ -4667,8 +4679,8 @@
         </p:nvSpPr>
         <p:spPr>
           <a:xfrm>
-            <a:off x="6095999" y="4688559"/>
-            <a:ext cx="5254645" cy="646331"/>
+            <a:off x="7711440" y="3157696"/>
+            <a:ext cx="4389120" cy="1477328"/>
           </a:xfrm>
           <a:prstGeom prst="rect">
             <a:avLst/>
@@ -4676,91 +4688,115 @@
           <a:noFill/>
         </p:spPr>
         <p:txBody>
-          <a:bodyPr wrap="square" rtlCol="0">
+          <a:bodyPr wrap="square">
             <a:spAutoFit/>
           </a:bodyPr>
           <a:lstStyle/>
           <a:p>
-            <a:pPr algn="ctr"/>
-            <a:r>
-              <a:rPr lang="en-CA" b="1" dirty="0"/>
-              <a:t>Guy Steele </a:t>
-            </a:r>
             <a:r>
               <a:rPr lang="en-CA" dirty="0"/>
-              <a:t>and </a:t>
-            </a:r>
-            <a:r>
-              <a:rPr lang="en-CA" b="1" dirty="0"/>
-              <a:t>Gerald Sussman</a:t>
-            </a:r>
-          </a:p>
-          <a:p>
-            <a:pPr algn="ctr"/>
-            <a:r>
-              <a:rPr lang="en-CA" dirty="0"/>
-              <a:t>Original designers of Scheme (1975)</a:t>
-            </a:r>
-            <a:endParaRPr lang="en-AU" dirty="0"/>
-          </a:p>
-        </p:txBody>
-      </p:sp>
-      <p:sp>
-        <p:nvSpPr>
-          <p:cNvPr id="13" name="TextBox 12">
-            <a:extLst>
-              <a:ext uri="{FF2B5EF4-FFF2-40B4-BE49-F238E27FC236}">
-                <a16:creationId xmlns:a16="http://schemas.microsoft.com/office/drawing/2014/main" id="{070A0247-E84A-DDE7-4901-76D5D335370E}"/>
-              </a:ext>
-            </a:extLst>
-          </p:cNvPr>
-          <p:cNvSpPr txBox="1"/>
-          <p:nvPr/>
-        </p:nvSpPr>
-        <p:spPr>
-          <a:xfrm>
-            <a:off x="7534158" y="5456749"/>
-            <a:ext cx="2378326" cy="923330"/>
-          </a:xfrm>
-          <a:prstGeom prst="rect">
-            <a:avLst/>
-          </a:prstGeom>
-          <a:solidFill>
-            <a:schemeClr val="accent4">
-              <a:lumMod val="40000"/>
-              <a:lumOff val="60000"/>
-            </a:schemeClr>
-          </a:solidFill>
-        </p:spPr>
-        <p:txBody>
-          <a:bodyPr wrap="square" rtlCol="0">
-            <a:spAutoFit/>
-          </a:bodyPr>
-          <a:lstStyle/>
-          <a:p>
-            <a:pPr algn="ctr"/>
-            <a:r>
-              <a:rPr lang="en-CA" b="1" dirty="0"/>
-              <a:t>Racket</a:t>
-            </a:r>
-            <a:r>
-              <a:rPr lang="en-CA" dirty="0"/>
-              <a:t> is a modern dialect of Scheme, with many new ideas.</a:t>
-            </a:r>
-            <a:endParaRPr lang="en-AU" dirty="0"/>
+              <a:t>A lush, orchestral instrumental standard arranged by Percy Faith, it captures a timeless, nostalgic feeling of youthful romance and easygoing vintage summer calm.</a:t>
+            </a:r>
+            <a:endParaRPr lang="en-US" dirty="0"/>
           </a:p>
         </p:txBody>
       </p:sp>
     </p:spTree>
     <p:extLst>
       <p:ext uri="{BB962C8B-B14F-4D97-AF65-F5344CB8AC3E}">
-        <p14:creationId xmlns:p14="http://schemas.microsoft.com/office/powerpoint/2010/main" val="2446324911"/>
+        <p14:creationId xmlns:p14="http://schemas.microsoft.com/office/powerpoint/2010/main" val="2829825335"/>
       </p:ext>
     </p:extLst>
   </p:cSld>
   <p:clrMapOvr>
     <a:masterClrMapping/>
   </p:clrMapOvr>
+  <p:timing>
+    <p:tnLst>
+      <p:par>
+        <p:cTn id="1" dur="indefinite" restart="never" nodeType="tmRoot">
+          <p:childTnLst>
+            <p:seq concurrent="1" nextAc="seek">
+              <p:cTn id="2" dur="indefinite" nodeType="mainSeq">
+                <p:childTnLst>
+                  <p:par>
+                    <p:cTn id="3" fill="hold">
+                      <p:stCondLst>
+                        <p:cond delay="indefinite"/>
+                      </p:stCondLst>
+                      <p:childTnLst>
+                        <p:par>
+                          <p:cTn id="4" fill="hold">
+                            <p:stCondLst>
+                              <p:cond delay="0"/>
+                            </p:stCondLst>
+                            <p:childTnLst>
+                              <p:par>
+                                <p:cTn id="5" presetID="10" presetClass="entr" presetSubtype="0" fill="hold" grpId="0" nodeType="clickEffect">
+                                  <p:stCondLst>
+                                    <p:cond delay="0"/>
+                                  </p:stCondLst>
+                                  <p:childTnLst>
+                                    <p:set>
+                                      <p:cBhvr>
+                                        <p:cTn id="6" dur="1" fill="hold">
+                                          <p:stCondLst>
+                                            <p:cond delay="0"/>
+                                          </p:stCondLst>
+                                        </p:cTn>
+                                        <p:tgtEl>
+                                          <p:spTgt spid="5"/>
+                                        </p:tgtEl>
+                                        <p:attrNameLst>
+                                          <p:attrName>style.visibility</p:attrName>
+                                        </p:attrNameLst>
+                                      </p:cBhvr>
+                                      <p:to>
+                                        <p:strVal val="visible"/>
+                                      </p:to>
+                                    </p:set>
+                                    <p:animEffect transition="in" filter="fade">
+                                      <p:cBhvr>
+                                        <p:cTn id="7" dur="500"/>
+                                        <p:tgtEl>
+                                          <p:spTgt spid="5"/>
+                                        </p:tgtEl>
+                                      </p:cBhvr>
+                                    </p:animEffect>
+                                  </p:childTnLst>
+                                </p:cTn>
+                              </p:par>
+                            </p:childTnLst>
+                          </p:cTn>
+                        </p:par>
+                      </p:childTnLst>
+                    </p:cTn>
+                  </p:par>
+                </p:childTnLst>
+              </p:cTn>
+              <p:prevCondLst>
+                <p:cond evt="onPrev" delay="0">
+                  <p:tgtEl>
+                    <p:sldTgt/>
+                  </p:tgtEl>
+                </p:cond>
+              </p:prevCondLst>
+              <p:nextCondLst>
+                <p:cond evt="onNext" delay="0">
+                  <p:tgtEl>
+                    <p:sldTgt/>
+                  </p:tgtEl>
+                </p:cond>
+              </p:nextCondLst>
+            </p:seq>
+          </p:childTnLst>
+        </p:cTn>
+      </p:par>
+    </p:tnLst>
+    <p:bldLst>
+      <p:bldP spid="5" grpId="0"/>
+    </p:bldLst>
+  </p:timing>
 </p:sld>
 </file>
 
@@ -4769,7 +4805,13 @@
   <p:cSld>
     <p:spTree>
       <p:nvGrpSpPr>
-        <p:cNvPr id="1" name=""/>
+        <p:cNvPr id="1" name="">
+          <a:extLst>
+            <a:ext uri="{FF2B5EF4-FFF2-40B4-BE49-F238E27FC236}">
+              <a16:creationId xmlns:a16="http://schemas.microsoft.com/office/drawing/2014/main" id="{478C59CE-E9C7-15D1-0CC1-049F947BC2F0}"/>
+            </a:ext>
+          </a:extLst>
+        </p:cNvPr>
         <p:cNvGrpSpPr/>
         <p:nvPr/>
       </p:nvGrpSpPr>
@@ -4783,10 +4825,10 @@
       </p:grpSpPr>
       <p:sp>
         <p:nvSpPr>
-          <p:cNvPr id="2" name="Title 1">
-            <a:extLst>
-              <a:ext uri="{FF2B5EF4-FFF2-40B4-BE49-F238E27FC236}">
-                <a16:creationId xmlns:a16="http://schemas.microsoft.com/office/drawing/2014/main" id="{AFC4F8B7-DF69-4161-80D5-5D65C38F8A33}"/>
+          <p:cNvPr id="4" name="Title 3">
+            <a:extLst>
+              <a:ext uri="{FF2B5EF4-FFF2-40B4-BE49-F238E27FC236}">
+                <a16:creationId xmlns:a16="http://schemas.microsoft.com/office/drawing/2014/main" id="{56C69148-0ECD-0EB1-1D41-271B6304BCBC}"/>
               </a:ext>
             </a:extLst>
           </p:cNvPr>
@@ -4797,251 +4839,31 @@
             <p:ph type="title"/>
           </p:nvPr>
         </p:nvSpPr>
-        <p:spPr/>
-        <p:txBody>
-          <a:bodyPr/>
-          <a:lstStyle/>
-          <a:p>
-            <a:r>
-              <a:rPr lang="en-CA" dirty="0"/>
-              <a:t>Scheme Probably </a:t>
-            </a:r>
-            <a:r>
-              <a:rPr lang="en-CA" b="1" dirty="0">
-                <a:solidFill>
-                  <a:srgbClr val="FF0000"/>
-                </a:solidFill>
-              </a:rPr>
-              <a:t>Can’t</a:t>
-            </a:r>
-            <a:r>
-              <a:rPr lang="en-CA" dirty="0"/>
-              <a:t> Get You a Job!</a:t>
-            </a:r>
-            <a:endParaRPr lang="en-AU" dirty="0"/>
-          </a:p>
-        </p:txBody>
-      </p:sp>
-      <p:sp>
-        <p:nvSpPr>
-          <p:cNvPr id="3" name="TextBox 2">
-            <a:extLst>
-              <a:ext uri="{FF2B5EF4-FFF2-40B4-BE49-F238E27FC236}">
-                <a16:creationId xmlns:a16="http://schemas.microsoft.com/office/drawing/2014/main" id="{10C4AE68-A781-FD56-1D00-6B3AE095A7EF}"/>
-              </a:ext>
-            </a:extLst>
-          </p:cNvPr>
-          <p:cNvSpPr txBox="1"/>
-          <p:nvPr/>
-        </p:nvSpPr>
         <p:spPr>
           <a:xfrm>
-            <a:off x="1718721" y="1965877"/>
-            <a:ext cx="6288042" cy="1384995"/>
+            <a:off x="0" y="2259239"/>
+            <a:ext cx="12192000" cy="1325563"/>
           </a:xfrm>
-          <a:prstGeom prst="rect">
-            <a:avLst/>
-          </a:prstGeom>
-          <a:noFill/>
         </p:spPr>
         <p:txBody>
-          <a:bodyPr wrap="square" rtlCol="0">
-            <a:spAutoFit/>
+          <a:bodyPr>
+            <a:normAutofit/>
           </a:bodyPr>
           <a:lstStyle/>
           <a:p>
             <a:pPr algn="ctr"/>
             <a:r>
-              <a:rPr lang="en-CA" sz="2800" dirty="0"/>
-              <a:t>It’s mostly a research language used by a subset of academic programming language researchers.</a:t>
-            </a:r>
-            <a:endParaRPr lang="en-AU" sz="2800" dirty="0"/>
-          </a:p>
-        </p:txBody>
-      </p:sp>
-      <p:sp>
-        <p:nvSpPr>
-          <p:cNvPr id="9" name="TextBox 8">
-            <a:extLst>
-              <a:ext uri="{FF2B5EF4-FFF2-40B4-BE49-F238E27FC236}">
-                <a16:creationId xmlns:a16="http://schemas.microsoft.com/office/drawing/2014/main" id="{47FE2D5E-13CF-4FA0-04A0-66A64587C63B}"/>
-              </a:ext>
-            </a:extLst>
-          </p:cNvPr>
-          <p:cNvSpPr txBox="1"/>
-          <p:nvPr/>
-        </p:nvSpPr>
-        <p:spPr>
-          <a:xfrm>
-            <a:off x="1801965" y="3794879"/>
-            <a:ext cx="6288042" cy="1815882"/>
-          </a:xfrm>
-          <a:prstGeom prst="rect">
-            <a:avLst/>
-          </a:prstGeom>
-          <a:noFill/>
-        </p:spPr>
-        <p:txBody>
-          <a:bodyPr wrap="square" rtlCol="0">
-            <a:spAutoFit/>
-          </a:bodyPr>
-          <a:lstStyle/>
-          <a:p>
-            <a:pPr algn="ctr"/>
-            <a:r>
-              <a:rPr lang="en-CA" sz="2800" dirty="0"/>
-              <a:t>A variation of LISP called </a:t>
-            </a:r>
-            <a:r>
-              <a:rPr lang="en-CA" sz="2800" b="1" dirty="0"/>
-              <a:t>Clojure</a:t>
-            </a:r>
-            <a:r>
-              <a:rPr lang="en-CA" sz="2800" dirty="0"/>
-              <a:t> has more recently gained some popularity for practical programming (but still pretty niche compared to other languages)</a:t>
-            </a:r>
-            <a:endParaRPr lang="en-AU" sz="2800" dirty="0"/>
-          </a:p>
-        </p:txBody>
-      </p:sp>
-      <p:pic>
-        <p:nvPicPr>
-          <p:cNvPr id="6146" name="Picture 2" descr="Clojure - Wikipedia">
-            <a:extLst>
-              <a:ext uri="{FF2B5EF4-FFF2-40B4-BE49-F238E27FC236}">
-                <a16:creationId xmlns:a16="http://schemas.microsoft.com/office/drawing/2014/main" id="{29461ED7-186D-9E98-8402-81436C92CAE0}"/>
-              </a:ext>
-            </a:extLst>
-          </p:cNvPr>
-          <p:cNvPicPr>
-            <a:picLocks noChangeAspect="1" noChangeArrowheads="1"/>
-          </p:cNvPicPr>
-          <p:nvPr/>
-        </p:nvPicPr>
-        <p:blipFill>
-          <a:blip r:embed="rId2">
-            <a:extLst>
-              <a:ext uri="{28A0092B-C50C-407E-A947-70E740481C1C}">
-                <a14:useLocalDpi xmlns:a14="http://schemas.microsoft.com/office/drawing/2010/main" val="0"/>
-              </a:ext>
-            </a:extLst>
-          </a:blip>
-          <a:srcRect/>
-          <a:stretch>
-            <a:fillRect/>
-          </a:stretch>
-        </p:blipFill>
-        <p:spPr bwMode="auto">
-          <a:xfrm>
-            <a:off x="8385710" y="3429000"/>
-            <a:ext cx="2670202" cy="2670202"/>
-          </a:xfrm>
-          <a:prstGeom prst="rect">
-            <a:avLst/>
-          </a:prstGeom>
-          <a:noFill/>
-          <a:extLst>
-            <a:ext uri="{909E8E84-426E-40DD-AFC4-6F175D3DCCD1}">
-              <a14:hiddenFill xmlns:a14="http://schemas.microsoft.com/office/drawing/2010/main">
-                <a:solidFill>
-                  <a:srgbClr val="FFFFFF"/>
-                </a:solidFill>
-              </a14:hiddenFill>
-            </a:ext>
-          </a:extLst>
-        </p:spPr>
-      </p:pic>
-      <p:sp>
-        <p:nvSpPr>
-          <p:cNvPr id="11" name="TextBox 10">
-            <a:extLst>
-              <a:ext uri="{FF2B5EF4-FFF2-40B4-BE49-F238E27FC236}">
-                <a16:creationId xmlns:a16="http://schemas.microsoft.com/office/drawing/2014/main" id="{C6BDB633-1BCE-7B16-1722-A554A77B7C89}"/>
-              </a:ext>
-            </a:extLst>
-          </p:cNvPr>
-          <p:cNvSpPr txBox="1"/>
-          <p:nvPr/>
-        </p:nvSpPr>
-        <p:spPr>
-          <a:xfrm>
-            <a:off x="9003694" y="5945082"/>
-            <a:ext cx="1502169" cy="523220"/>
-          </a:xfrm>
-          <a:prstGeom prst="rect">
-            <a:avLst/>
-          </a:prstGeom>
-          <a:noFill/>
-        </p:spPr>
-        <p:txBody>
-          <a:bodyPr wrap="square" rtlCol="0">
-            <a:spAutoFit/>
-          </a:bodyPr>
-          <a:lstStyle/>
-          <a:p>
-            <a:pPr algn="ctr"/>
-            <a:r>
-              <a:rPr lang="en-CA" sz="2800" dirty="0"/>
-              <a:t>Clojure</a:t>
-            </a:r>
-            <a:endParaRPr lang="en-AU" sz="2800" dirty="0"/>
-          </a:p>
-        </p:txBody>
-      </p:sp>
-      <p:sp>
-        <p:nvSpPr>
-          <p:cNvPr id="7" name="TextBox 6">
-            <a:extLst>
-              <a:ext uri="{FF2B5EF4-FFF2-40B4-BE49-F238E27FC236}">
-                <a16:creationId xmlns:a16="http://schemas.microsoft.com/office/drawing/2014/main" id="{69B985F0-AB93-7DC0-1218-74589D1B7444}"/>
-              </a:ext>
-            </a:extLst>
-          </p:cNvPr>
-          <p:cNvSpPr txBox="1"/>
-          <p:nvPr/>
-        </p:nvSpPr>
-        <p:spPr>
-          <a:xfrm>
-            <a:off x="8385710" y="1554599"/>
-            <a:ext cx="2857501" cy="1477328"/>
-          </a:xfrm>
-          <a:prstGeom prst="rect">
-            <a:avLst/>
-          </a:prstGeom>
-          <a:solidFill>
-            <a:schemeClr val="accent4">
-              <a:lumMod val="40000"/>
-              <a:lumOff val="60000"/>
-            </a:schemeClr>
-          </a:solidFill>
-        </p:spPr>
-        <p:txBody>
-          <a:bodyPr wrap="square" rtlCol="0">
-            <a:spAutoFit/>
-          </a:bodyPr>
-          <a:lstStyle/>
-          <a:p>
-            <a:pPr algn="ctr"/>
-            <a:r>
-              <a:rPr lang="en-CA" dirty="0"/>
-              <a:t>The original version of </a:t>
-            </a:r>
-            <a:r>
-              <a:rPr lang="en-CA" b="1" dirty="0"/>
-              <a:t>JavaScript</a:t>
-            </a:r>
-            <a:r>
-              <a:rPr lang="en-CA" dirty="0"/>
-              <a:t> was implemented as a Scheme-style language, before being modified to look more C-like.</a:t>
-            </a:r>
-            <a:endParaRPr lang="en-AU" dirty="0"/>
+              <a:rPr lang="en-CA" sz="6600" dirty="0"/>
+              <a:t>What was going on in 1975?</a:t>
+            </a:r>
+            <a:endParaRPr lang="en-AU" sz="6600" dirty="0"/>
           </a:p>
         </p:txBody>
       </p:sp>
     </p:spTree>
     <p:extLst>
       <p:ext uri="{BB962C8B-B14F-4D97-AF65-F5344CB8AC3E}">
-        <p14:creationId xmlns:p14="http://schemas.microsoft.com/office/powerpoint/2010/main" val="1855501012"/>
+        <p14:creationId xmlns:p14="http://schemas.microsoft.com/office/powerpoint/2010/main" val="1574891664"/>
       </p:ext>
     </p:extLst>
   </p:cSld>
@@ -5056,7 +4878,13 @@
   <p:cSld>
     <p:spTree>
       <p:nvGrpSpPr>
-        <p:cNvPr id="1" name=""/>
+        <p:cNvPr id="1" name="">
+          <a:extLst>
+            <a:ext uri="{FF2B5EF4-FFF2-40B4-BE49-F238E27FC236}">
+              <a16:creationId xmlns:a16="http://schemas.microsoft.com/office/drawing/2014/main" id="{1808D710-CD42-6FDC-CA10-286B809D8B7E}"/>
+            </a:ext>
+          </a:extLst>
+        </p:cNvPr>
         <p:cNvGrpSpPr/>
         <p:nvPr/>
       </p:nvGrpSpPr>
@@ -5073,7 +4901,7 @@
           <p:cNvPr id="2" name="Title 1">
             <a:extLst>
               <a:ext uri="{FF2B5EF4-FFF2-40B4-BE49-F238E27FC236}">
-                <a16:creationId xmlns:a16="http://schemas.microsoft.com/office/drawing/2014/main" id="{AFC4F8B7-DF69-4161-80D5-5D65C38F8A33}"/>
+                <a16:creationId xmlns:a16="http://schemas.microsoft.com/office/drawing/2014/main" id="{09FFDA26-AA38-846A-9FEB-8A5ADDAEBF06}"/>
               </a:ext>
             </a:extLst>
           </p:cNvPr>
@@ -5084,43 +4912,55 @@
             <p:ph type="title"/>
           </p:nvPr>
         </p:nvSpPr>
+        <p:spPr/>
+        <p:txBody>
+          <a:bodyPr/>
+          <a:lstStyle/>
+          <a:p>
+            <a:r>
+              <a:rPr lang="en-CA" dirty="0"/>
+              <a:t>1975: First Appearances</a:t>
+            </a:r>
+            <a:endParaRPr lang="en-AU" dirty="0"/>
+          </a:p>
+        </p:txBody>
+      </p:sp>
+      <p:pic>
+        <p:nvPicPr>
+          <p:cNvPr id="9" name="Picture 8">
+            <a:extLst>
+              <a:ext uri="{FF2B5EF4-FFF2-40B4-BE49-F238E27FC236}">
+                <a16:creationId xmlns:a16="http://schemas.microsoft.com/office/drawing/2014/main" id="{E890CC80-6058-FE26-54FC-F65EF54E8BFA}"/>
+              </a:ext>
+            </a:extLst>
+          </p:cNvPr>
+          <p:cNvPicPr>
+            <a:picLocks noChangeAspect="1"/>
+          </p:cNvPicPr>
+          <p:nvPr/>
+        </p:nvPicPr>
+        <p:blipFill>
+          <a:blip r:embed="rId2"/>
+          <a:stretch>
+            <a:fillRect/>
+          </a:stretch>
+        </p:blipFill>
         <p:spPr>
           <a:xfrm>
-            <a:off x="2316125" y="78200"/>
-            <a:ext cx="7559750" cy="1325563"/>
+            <a:off x="2991197" y="1399284"/>
+            <a:ext cx="2282158" cy="1923271"/>
           </a:xfrm>
+          <a:prstGeom prst="rect">
+            <a:avLst/>
+          </a:prstGeom>
         </p:spPr>
-        <p:txBody>
-          <a:bodyPr/>
-          <a:lstStyle/>
-          <a:p>
-            <a:pPr algn="ctr"/>
-            <a:r>
-              <a:rPr lang="en-CA" dirty="0"/>
-              <a:t>What is Scheme/LISP </a:t>
-            </a:r>
-            <a:r>
-              <a:rPr lang="en-CA" dirty="0">
-                <a:solidFill>
-                  <a:srgbClr val="FF0000"/>
-                </a:solidFill>
-              </a:rPr>
-              <a:t>Good</a:t>
-            </a:r>
-            <a:r>
-              <a:rPr lang="en-CA" dirty="0"/>
-              <a:t> for?</a:t>
-            </a:r>
-            <a:endParaRPr lang="en-AU" dirty="0"/>
-          </a:p>
-        </p:txBody>
-      </p:sp>
-      <p:sp>
-        <p:nvSpPr>
-          <p:cNvPr id="3" name="TextBox 2">
-            <a:extLst>
-              <a:ext uri="{FF2B5EF4-FFF2-40B4-BE49-F238E27FC236}">
-                <a16:creationId xmlns:a16="http://schemas.microsoft.com/office/drawing/2014/main" id="{E8A268BC-88E6-45E5-8262-598A2B9A5D02}"/>
+      </p:pic>
+      <p:sp>
+        <p:nvSpPr>
+          <p:cNvPr id="19" name="TextBox 18">
+            <a:extLst>
+              <a:ext uri="{FF2B5EF4-FFF2-40B4-BE49-F238E27FC236}">
+                <a16:creationId xmlns:a16="http://schemas.microsoft.com/office/drawing/2014/main" id="{34327EB4-2908-64CF-9F40-B7367154CD2A}"/>
               </a:ext>
             </a:extLst>
           </p:cNvPr>
@@ -5129,8 +4969,8 @@
         </p:nvSpPr>
         <p:spPr>
           <a:xfrm>
-            <a:off x="3137531" y="2684301"/>
-            <a:ext cx="4800076" cy="1815882"/>
+            <a:off x="2987733" y="3322555"/>
+            <a:ext cx="2282158" cy="923330"/>
           </a:xfrm>
           <a:prstGeom prst="rect">
             <a:avLst/>
@@ -5145,98 +4985,34 @@
           <a:p>
             <a:pPr algn="ctr"/>
             <a:r>
-              <a:rPr lang="en-CA" sz="2800" dirty="0"/>
-              <a:t>Packed with all kinds of interesting ideas, many of which have inspired more mainstream languages.</a:t>
-            </a:r>
-            <a:endParaRPr lang="en-AU" sz="2800" dirty="0"/>
-          </a:p>
-        </p:txBody>
-      </p:sp>
-      <p:sp>
-        <p:nvSpPr>
-          <p:cNvPr id="27" name="TextBox 26">
-            <a:extLst>
-              <a:ext uri="{FF2B5EF4-FFF2-40B4-BE49-F238E27FC236}">
-                <a16:creationId xmlns:a16="http://schemas.microsoft.com/office/drawing/2014/main" id="{689FDA23-C4D9-4490-9037-82BD6C7F4654}"/>
-              </a:ext>
-            </a:extLst>
-          </p:cNvPr>
-          <p:cNvSpPr txBox="1"/>
-          <p:nvPr/>
-        </p:nvSpPr>
-        <p:spPr>
-          <a:xfrm>
-            <a:off x="7384356" y="4500183"/>
-            <a:ext cx="4695695" cy="1815882"/>
-          </a:xfrm>
-          <a:prstGeom prst="rect">
-            <a:avLst/>
-          </a:prstGeom>
-          <a:noFill/>
-        </p:spPr>
-        <p:txBody>
-          <a:bodyPr wrap="square" rtlCol="0">
-            <a:spAutoFit/>
-          </a:bodyPr>
-          <a:lstStyle/>
+              <a:rPr lang="en-CA" b="1" dirty="0" err="1"/>
+              <a:t>Cromemco</a:t>
+            </a:r>
+            <a:r>
+              <a:rPr lang="en-CA" b="1" dirty="0"/>
+              <a:t> Cyclops</a:t>
+            </a:r>
+          </a:p>
           <a:p>
             <a:pPr algn="ctr"/>
             <a:r>
-              <a:rPr lang="en-CA" sz="2800" dirty="0"/>
-              <a:t>A good language for </a:t>
-            </a:r>
-            <a:r>
-              <a:rPr lang="en-CA" sz="2800" b="1" dirty="0"/>
-              <a:t>writing other programming languages </a:t>
-            </a:r>
-            <a:r>
-              <a:rPr lang="en-CA" sz="2800" dirty="0"/>
-              <a:t>and programming language tools.</a:t>
-            </a:r>
-          </a:p>
-        </p:txBody>
-      </p:sp>
-      <p:sp>
-        <p:nvSpPr>
-          <p:cNvPr id="6" name="TextBox 5">
-            <a:extLst>
-              <a:ext uri="{FF2B5EF4-FFF2-40B4-BE49-F238E27FC236}">
-                <a16:creationId xmlns:a16="http://schemas.microsoft.com/office/drawing/2014/main" id="{F20849FE-CF35-3A97-ED65-D50740D29574}"/>
-              </a:ext>
-            </a:extLst>
-          </p:cNvPr>
-          <p:cNvSpPr txBox="1"/>
-          <p:nvPr/>
-        </p:nvSpPr>
-        <p:spPr>
-          <a:xfrm>
-            <a:off x="293157" y="1520812"/>
-            <a:ext cx="3725592" cy="954107"/>
-          </a:xfrm>
-          <a:prstGeom prst="rect">
-            <a:avLst/>
-          </a:prstGeom>
-          <a:noFill/>
-        </p:spPr>
-        <p:txBody>
-          <a:bodyPr wrap="square" rtlCol="0">
-            <a:spAutoFit/>
-          </a:bodyPr>
-          <a:lstStyle/>
+              <a:rPr lang="en-AU" dirty="0"/>
+              <a:t>First all-digital camera</a:t>
+            </a:r>
+          </a:p>
           <a:p>
             <a:pPr algn="ctr"/>
             <a:r>
-              <a:rPr lang="en-CA" sz="2800" dirty="0"/>
-              <a:t>Popular in traditional “symbolic” AI research.</a:t>
-            </a:r>
-            <a:endParaRPr lang="en-AU" sz="2800" dirty="0"/>
+              <a:rPr lang="en-AU" sz="1600" dirty="0"/>
+              <a:t>32x32 pixel resolution</a:t>
+            </a:r>
           </a:p>
         </p:txBody>
       </p:sp>
     </p:spTree>
     <p:extLst>
       <p:ext uri="{BB962C8B-B14F-4D97-AF65-F5344CB8AC3E}">
-        <p14:creationId xmlns:p14="http://schemas.microsoft.com/office/powerpoint/2010/main" val="251576758"/>
+        <p14:creationId xmlns:p14="http://schemas.microsoft.com/office/powerpoint/2010/main" val="2849338539"/>
       </p:ext>
     </p:extLst>
   </p:cSld>
@@ -5251,7 +5027,13 @@
   <p:cSld>
     <p:spTree>
       <p:nvGrpSpPr>
-        <p:cNvPr id="1" name=""/>
+        <p:cNvPr id="1" name="">
+          <a:extLst>
+            <a:ext uri="{FF2B5EF4-FFF2-40B4-BE49-F238E27FC236}">
+              <a16:creationId xmlns:a16="http://schemas.microsoft.com/office/drawing/2014/main" id="{6FE0AE82-0BC2-F223-17A0-A26D2C6573AD}"/>
+            </a:ext>
+          </a:extLst>
+        </p:cNvPr>
         <p:cNvGrpSpPr/>
         <p:nvPr/>
       </p:nvGrpSpPr>
@@ -5268,7 +5050,7 @@
           <p:cNvPr id="2" name="Title 1">
             <a:extLst>
               <a:ext uri="{FF2B5EF4-FFF2-40B4-BE49-F238E27FC236}">
-                <a16:creationId xmlns:a16="http://schemas.microsoft.com/office/drawing/2014/main" id="{3AB70837-CC6E-409E-828B-6F152569432E}"/>
+                <a16:creationId xmlns:a16="http://schemas.microsoft.com/office/drawing/2014/main" id="{D9BA201D-C85F-417D-0457-E3A75525C8A1}"/>
               </a:ext>
             </a:extLst>
           </p:cNvPr>
@@ -5281,127 +5063,127 @@
         </p:nvSpPr>
         <p:spPr/>
         <p:txBody>
-          <a:bodyPr>
-            <a:normAutofit/>
-          </a:bodyPr>
+          <a:bodyPr/>
           <a:lstStyle/>
           <a:p>
             <a:r>
               <a:rPr lang="en-CA" dirty="0"/>
-              <a:t>What is Scheme </a:t>
-            </a:r>
-            <a:r>
-              <a:rPr lang="en-CA" dirty="0">
-                <a:solidFill>
-                  <a:srgbClr val="FF0000"/>
-                </a:solidFill>
-              </a:rPr>
-              <a:t>Not</a:t>
-            </a:r>
-            <a:r>
-              <a:rPr lang="en-CA" dirty="0"/>
-              <a:t> so Good For? </a:t>
+              <a:t>1975: First Appearances</a:t>
             </a:r>
             <a:endParaRPr lang="en-AU" dirty="0"/>
           </a:p>
         </p:txBody>
       </p:sp>
-      <p:sp>
-        <p:nvSpPr>
-          <p:cNvPr id="3" name="Content Placeholder 2">
-            <a:extLst>
-              <a:ext uri="{FF2B5EF4-FFF2-40B4-BE49-F238E27FC236}">
-                <a16:creationId xmlns:a16="http://schemas.microsoft.com/office/drawing/2014/main" id="{9D85EADE-0C03-49DA-BB59-0942833F47FA}"/>
-              </a:ext>
-            </a:extLst>
-          </p:cNvPr>
-          <p:cNvSpPr>
-            <a:spLocks noGrp="1"/>
-          </p:cNvSpPr>
-          <p:nvPr>
-            <p:ph idx="1"/>
-          </p:nvPr>
-        </p:nvSpPr>
+      <p:pic>
+        <p:nvPicPr>
+          <p:cNvPr id="4" name="Picture 3">
+            <a:extLst>
+              <a:ext uri="{FF2B5EF4-FFF2-40B4-BE49-F238E27FC236}">
+                <a16:creationId xmlns:a16="http://schemas.microsoft.com/office/drawing/2014/main" id="{A986E45D-FDE8-B00C-7D82-78E5FF621433}"/>
+              </a:ext>
+            </a:extLst>
+          </p:cNvPr>
+          <p:cNvPicPr>
+            <a:picLocks noChangeAspect="1"/>
+          </p:cNvPicPr>
+          <p:nvPr/>
+        </p:nvPicPr>
+        <p:blipFill>
+          <a:blip r:embed="rId2"/>
+          <a:stretch>
+            <a:fillRect/>
+          </a:stretch>
+        </p:blipFill>
         <p:spPr>
           <a:xfrm>
-            <a:off x="838199" y="1825625"/>
-            <a:ext cx="10918371" cy="4351338"/>
+            <a:off x="340472" y="4567780"/>
+            <a:ext cx="4220164" cy="1867161"/>
           </a:xfrm>
+          <a:prstGeom prst="rect">
+            <a:avLst/>
+          </a:prstGeom>
         </p:spPr>
-        <p:txBody>
-          <a:bodyPr/>
-          <a:lstStyle/>
-          <a:p>
-            <a:r>
-              <a:rPr lang="en-CA" dirty="0"/>
-              <a:t>Scheme</a:t>
-            </a:r>
+      </p:pic>
+      <p:pic>
+        <p:nvPicPr>
+          <p:cNvPr id="9" name="Picture 8">
+            <a:extLst>
+              <a:ext uri="{FF2B5EF4-FFF2-40B4-BE49-F238E27FC236}">
+                <a16:creationId xmlns:a16="http://schemas.microsoft.com/office/drawing/2014/main" id="{17A31C30-B018-0F68-175E-B9EB0C24C93E}"/>
+              </a:ext>
+            </a:extLst>
+          </p:cNvPr>
+          <p:cNvPicPr>
+            <a:picLocks noChangeAspect="1"/>
+          </p:cNvPicPr>
+          <p:nvPr/>
+        </p:nvPicPr>
+        <p:blipFill>
+          <a:blip r:embed="rId3"/>
+          <a:stretch>
+            <a:fillRect/>
+          </a:stretch>
+        </p:blipFill>
+        <p:spPr>
+          <a:xfrm>
+            <a:off x="2991197" y="1399284"/>
+            <a:ext cx="2282158" cy="1923271"/>
+          </a:xfrm>
+          <a:prstGeom prst="rect">
+            <a:avLst/>
+          </a:prstGeom>
+        </p:spPr>
+      </p:pic>
+      <p:sp>
+        <p:nvSpPr>
+          <p:cNvPr id="19" name="TextBox 18">
+            <a:extLst>
+              <a:ext uri="{FF2B5EF4-FFF2-40B4-BE49-F238E27FC236}">
+                <a16:creationId xmlns:a16="http://schemas.microsoft.com/office/drawing/2014/main" id="{A7175928-CB53-B2B6-D8AB-301DC2E58055}"/>
+              </a:ext>
+            </a:extLst>
+          </p:cNvPr>
+          <p:cNvSpPr txBox="1"/>
+          <p:nvPr/>
+        </p:nvSpPr>
+        <p:spPr>
+          <a:xfrm>
+            <a:off x="2987733" y="3322555"/>
+            <a:ext cx="2282158" cy="923330"/>
+          </a:xfrm>
+          <a:prstGeom prst="rect">
+            <a:avLst/>
+          </a:prstGeom>
+          <a:noFill/>
+        </p:spPr>
+        <p:txBody>
+          <a:bodyPr wrap="square" rtlCol="0">
+            <a:spAutoFit/>
+          </a:bodyPr>
+          <a:lstStyle/>
+          <a:p>
+            <a:pPr algn="ctr"/>
+            <a:r>
+              <a:rPr lang="en-CA" b="1" dirty="0" err="1"/>
+              <a:t>Cromemco</a:t>
+            </a:r>
+            <a:r>
+              <a:rPr lang="en-CA" b="1" dirty="0"/>
+              <a:t> Cyclops</a:t>
+            </a:r>
+          </a:p>
+          <a:p>
+            <a:pPr algn="ctr"/>
             <a:r>
               <a:rPr lang="en-AU" dirty="0"/>
-              <a:t> is generally </a:t>
-            </a:r>
-            <a:r>
-              <a:rPr lang="en-AU" dirty="0">
-                <a:solidFill>
-                  <a:srgbClr val="FF0000"/>
-                </a:solidFill>
-              </a:rPr>
-              <a:t>not</a:t>
-            </a:r>
-            <a:r>
-              <a:rPr lang="en-AU" dirty="0"/>
-              <a:t> as efficient as other languages.</a:t>
-            </a:r>
-          </a:p>
-          <a:p>
-            <a:r>
-              <a:rPr lang="en-AU" dirty="0"/>
-              <a:t>Scheme is </a:t>
-            </a:r>
-            <a:r>
-              <a:rPr lang="en-AU" dirty="0">
-                <a:solidFill>
-                  <a:srgbClr val="FF0000"/>
-                </a:solidFill>
-              </a:rPr>
-              <a:t>not</a:t>
-            </a:r>
-            <a:r>
-              <a:rPr lang="en-AU" dirty="0"/>
-              <a:t> used much in practice, so it can be hard to find support for it.</a:t>
-            </a:r>
-          </a:p>
-          <a:p>
-            <a:r>
-              <a:rPr lang="en-AU" dirty="0"/>
-              <a:t>Scheme’s notation is simple, but maybe </a:t>
-            </a:r>
-            <a:r>
-              <a:rPr lang="en-AU" i="1" dirty="0"/>
-              <a:t>too</a:t>
-            </a:r>
-            <a:r>
-              <a:rPr lang="en-AU" dirty="0"/>
-              <a:t> simple. </a:t>
-            </a:r>
-            <a:br>
-              <a:rPr lang="en-AU" dirty="0"/>
-            </a:br>
-            <a:r>
-              <a:rPr lang="en-AU" dirty="0"/>
-              <a:t>()-style notation results in lots and lots of parentheses, which many programmers </a:t>
-            </a:r>
-            <a:r>
-              <a:rPr lang="en-AU" dirty="0">
-                <a:solidFill>
-                  <a:srgbClr val="FF0000"/>
-                </a:solidFill>
-              </a:rPr>
-              <a:t>dislike</a:t>
-            </a:r>
-            <a:r>
-              <a:rPr lang="en-AU" dirty="0"/>
-              <a:t>.</a:t>
+              <a:t>First all-digital camera</a:t>
+            </a:r>
+          </a:p>
+          <a:p>
+            <a:pPr algn="ctr"/>
+            <a:r>
+              <a:rPr lang="en-AU" sz="1600" dirty="0"/>
+              <a:t>32x32 pixel resolution</a:t>
             </a:r>
           </a:p>
         </p:txBody>
@@ -5409,7 +5191,7 @@
     </p:spTree>
     <p:extLst>
       <p:ext uri="{BB962C8B-B14F-4D97-AF65-F5344CB8AC3E}">
-        <p14:creationId xmlns:p14="http://schemas.microsoft.com/office/powerpoint/2010/main" val="2072605454"/>
+        <p14:creationId xmlns:p14="http://schemas.microsoft.com/office/powerpoint/2010/main" val="3265843497"/>
       </p:ext>
     </p:extLst>
   </p:cSld>
@@ -5424,7 +5206,13 @@
   <p:cSld>
     <p:spTree>
       <p:nvGrpSpPr>
-        <p:cNvPr id="1" name=""/>
+        <p:cNvPr id="1" name="">
+          <a:extLst>
+            <a:ext uri="{FF2B5EF4-FFF2-40B4-BE49-F238E27FC236}">
+              <a16:creationId xmlns:a16="http://schemas.microsoft.com/office/drawing/2014/main" id="{133F391E-493C-037B-C4BD-F08CE67811EF}"/>
+            </a:ext>
+          </a:extLst>
+        </p:cNvPr>
         <p:cNvGrpSpPr/>
         <p:nvPr/>
       </p:nvGrpSpPr>
@@ -5441,7 +5229,7 @@
           <p:cNvPr id="2" name="Title 1">
             <a:extLst>
               <a:ext uri="{FF2B5EF4-FFF2-40B4-BE49-F238E27FC236}">
-                <a16:creationId xmlns:a16="http://schemas.microsoft.com/office/drawing/2014/main" id="{E453DFDB-8487-48AA-A582-0CEA13856DA2}"/>
+                <a16:creationId xmlns:a16="http://schemas.microsoft.com/office/drawing/2014/main" id="{CAC22D92-5FE5-3545-8228-C2354B063F75}"/>
               </a:ext>
             </a:extLst>
           </p:cNvPr>
@@ -5459,161 +5247,202 @@
           <a:p>
             <a:r>
               <a:rPr lang="en-CA" dirty="0"/>
-              <a:t>Major Features of Scheme</a:t>
+              <a:t>1975: First Appearances</a:t>
             </a:r>
             <a:endParaRPr lang="en-AU" dirty="0"/>
           </a:p>
         </p:txBody>
       </p:sp>
-      <p:sp>
-        <p:nvSpPr>
-          <p:cNvPr id="3" name="Content Placeholder 2">
-            <a:extLst>
-              <a:ext uri="{FF2B5EF4-FFF2-40B4-BE49-F238E27FC236}">
-                <a16:creationId xmlns:a16="http://schemas.microsoft.com/office/drawing/2014/main" id="{E45AFAE3-7D9D-4DB0-A01B-CD046F1E7D5F}"/>
-              </a:ext>
-            </a:extLst>
-          </p:cNvPr>
-          <p:cNvSpPr>
-            <a:spLocks noGrp="1"/>
-          </p:cNvSpPr>
-          <p:nvPr>
-            <p:ph idx="1"/>
-          </p:nvPr>
-        </p:nvSpPr>
-        <p:spPr/>
-        <p:txBody>
-          <a:bodyPr>
-            <a:normAutofit lnSpcReduction="10000"/>
+      <p:pic>
+        <p:nvPicPr>
+          <p:cNvPr id="4" name="Picture 3">
+            <a:extLst>
+              <a:ext uri="{FF2B5EF4-FFF2-40B4-BE49-F238E27FC236}">
+                <a16:creationId xmlns:a16="http://schemas.microsoft.com/office/drawing/2014/main" id="{199B4271-4787-3B6B-DC55-77B80AE8E06F}"/>
+              </a:ext>
+            </a:extLst>
+          </p:cNvPr>
+          <p:cNvPicPr>
+            <a:picLocks noChangeAspect="1"/>
+          </p:cNvPicPr>
+          <p:nvPr/>
+        </p:nvPicPr>
+        <p:blipFill>
+          <a:blip r:embed="rId2"/>
+          <a:stretch>
+            <a:fillRect/>
+          </a:stretch>
+        </p:blipFill>
+        <p:spPr>
+          <a:xfrm>
+            <a:off x="340472" y="4567780"/>
+            <a:ext cx="4220164" cy="1867161"/>
+          </a:xfrm>
+          <a:prstGeom prst="rect">
+            <a:avLst/>
+          </a:prstGeom>
+        </p:spPr>
+      </p:pic>
+      <p:pic>
+        <p:nvPicPr>
+          <p:cNvPr id="9" name="Picture 8">
+            <a:extLst>
+              <a:ext uri="{FF2B5EF4-FFF2-40B4-BE49-F238E27FC236}">
+                <a16:creationId xmlns:a16="http://schemas.microsoft.com/office/drawing/2014/main" id="{C8E4C159-094B-F17A-0F4A-3D40EE24D96F}"/>
+              </a:ext>
+            </a:extLst>
+          </p:cNvPr>
+          <p:cNvPicPr>
+            <a:picLocks noChangeAspect="1"/>
+          </p:cNvPicPr>
+          <p:nvPr/>
+        </p:nvPicPr>
+        <p:blipFill>
+          <a:blip r:embed="rId3"/>
+          <a:stretch>
+            <a:fillRect/>
+          </a:stretch>
+        </p:blipFill>
+        <p:spPr>
+          <a:xfrm>
+            <a:off x="2991197" y="1399284"/>
+            <a:ext cx="2282158" cy="1923271"/>
+          </a:xfrm>
+          <a:prstGeom prst="rect">
+            <a:avLst/>
+          </a:prstGeom>
+        </p:spPr>
+      </p:pic>
+      <p:sp>
+        <p:nvSpPr>
+          <p:cNvPr id="19" name="TextBox 18">
+            <a:extLst>
+              <a:ext uri="{FF2B5EF4-FFF2-40B4-BE49-F238E27FC236}">
+                <a16:creationId xmlns:a16="http://schemas.microsoft.com/office/drawing/2014/main" id="{5DC7C711-DC34-AEDE-1940-12900A4688CE}"/>
+              </a:ext>
+            </a:extLst>
+          </p:cNvPr>
+          <p:cNvSpPr txBox="1"/>
+          <p:nvPr/>
+        </p:nvSpPr>
+        <p:spPr>
+          <a:xfrm>
+            <a:off x="2987733" y="3322555"/>
+            <a:ext cx="2282158" cy="923330"/>
+          </a:xfrm>
+          <a:prstGeom prst="rect">
+            <a:avLst/>
+          </a:prstGeom>
+          <a:noFill/>
+        </p:spPr>
+        <p:txBody>
+          <a:bodyPr wrap="square" rtlCol="0">
+            <a:spAutoFit/>
           </a:bodyPr>
           <a:lstStyle/>
           <a:p>
-            <a:pPr marL="0" indent="0">
-              <a:buNone/>
-            </a:pPr>
-            <a:r>
-              <a:rPr lang="en-AU" dirty="0">
-                <a:solidFill>
-                  <a:srgbClr val="0070C0"/>
-                </a:solidFill>
-              </a:rPr>
-              <a:t>Functions are first-class objects</a:t>
-            </a:r>
-          </a:p>
-          <a:p>
-            <a:pPr marL="457200" lvl="1" indent="0">
-              <a:buNone/>
-            </a:pPr>
+            <a:pPr algn="ctr"/>
+            <a:r>
+              <a:rPr lang="en-CA" b="1" dirty="0" err="1"/>
+              <a:t>Cromemco</a:t>
+            </a:r>
+            <a:r>
+              <a:rPr lang="en-CA" b="1" dirty="0"/>
+              <a:t> Cyclops</a:t>
+            </a:r>
+          </a:p>
+          <a:p>
+            <a:pPr algn="ctr"/>
+            <a:r>
+              <a:rPr lang="en-AU" dirty="0"/>
+              <a:t>First all-digital camera</a:t>
+            </a:r>
+          </a:p>
+          <a:p>
+            <a:pPr algn="ctr"/>
+            <a:r>
+              <a:rPr lang="en-AU" sz="1600" dirty="0"/>
+              <a:t>32x32 pixel resolution</a:t>
+            </a:r>
+          </a:p>
+        </p:txBody>
+      </p:sp>
+      <p:pic>
+        <p:nvPicPr>
+          <p:cNvPr id="11" name="Picture 10">
+            <a:extLst>
+              <a:ext uri="{FF2B5EF4-FFF2-40B4-BE49-F238E27FC236}">
+                <a16:creationId xmlns:a16="http://schemas.microsoft.com/office/drawing/2014/main" id="{32FB66A8-D26E-EF48-9547-F2EFC1841393}"/>
+              </a:ext>
+            </a:extLst>
+          </p:cNvPr>
+          <p:cNvPicPr>
+            <a:picLocks noChangeAspect="1"/>
+          </p:cNvPicPr>
+          <p:nvPr/>
+        </p:nvPicPr>
+        <p:blipFill>
+          <a:blip r:embed="rId4"/>
+          <a:stretch>
+            <a:fillRect/>
+          </a:stretch>
+        </p:blipFill>
+        <p:spPr>
+          <a:xfrm>
+            <a:off x="5187804" y="4567780"/>
+            <a:ext cx="1816392" cy="1925095"/>
+          </a:xfrm>
+          <a:prstGeom prst="rect">
+            <a:avLst/>
+          </a:prstGeom>
+        </p:spPr>
+      </p:pic>
+      <p:sp>
+        <p:nvSpPr>
+          <p:cNvPr id="22" name="TextBox 21">
+            <a:extLst>
+              <a:ext uri="{FF2B5EF4-FFF2-40B4-BE49-F238E27FC236}">
+                <a16:creationId xmlns:a16="http://schemas.microsoft.com/office/drawing/2014/main" id="{06079444-57ED-5F14-CFD9-E1818E6BFAE7}"/>
+              </a:ext>
+            </a:extLst>
+          </p:cNvPr>
+          <p:cNvSpPr txBox="1"/>
+          <p:nvPr/>
+        </p:nvSpPr>
+        <p:spPr>
+          <a:xfrm>
+            <a:off x="7004196" y="4969369"/>
+            <a:ext cx="3423875" cy="646331"/>
+          </a:xfrm>
+          <a:prstGeom prst="rect">
+            <a:avLst/>
+          </a:prstGeom>
+          <a:noFill/>
+        </p:spPr>
+        <p:txBody>
+          <a:bodyPr wrap="square" rtlCol="0">
+            <a:spAutoFit/>
+          </a:bodyPr>
+          <a:lstStyle/>
+          <a:p>
+            <a:r>
+              <a:rPr lang="en-CA" b="1" dirty="0"/>
+              <a:t>Betamax and VHS </a:t>
+            </a:r>
+            <a:br>
+              <a:rPr lang="en-CA" b="1" dirty="0"/>
+            </a:br>
             <a:r>
               <a:rPr lang="en-CA" dirty="0"/>
-              <a:t>Functions can be passed and returned (including closures)</a:t>
-            </a:r>
-          </a:p>
-          <a:p>
-            <a:pPr marL="0" indent="0">
-              <a:buNone/>
-            </a:pPr>
-            <a:r>
-              <a:rPr lang="en-CA" dirty="0">
-                <a:solidFill>
-                  <a:srgbClr val="0070C0"/>
-                </a:solidFill>
-              </a:rPr>
-              <a:t>Interpreted</a:t>
-            </a:r>
-          </a:p>
-          <a:p>
-            <a:pPr marL="457200" lvl="1" indent="0">
-              <a:buNone/>
-            </a:pPr>
-            <a:r>
-              <a:rPr lang="en-AU" dirty="0"/>
-              <a:t>Easy to evaluate individual expressions</a:t>
-            </a:r>
-          </a:p>
-          <a:p>
-            <a:pPr marL="0" indent="0">
-              <a:buNone/>
-            </a:pPr>
-            <a:r>
-              <a:rPr lang="en-AU" dirty="0">
-                <a:solidFill>
-                  <a:srgbClr val="0070C0"/>
-                </a:solidFill>
-              </a:rPr>
-              <a:t>Memory-safe and garbage-collected</a:t>
-            </a:r>
-          </a:p>
-          <a:p>
-            <a:pPr marL="457200" lvl="1" indent="0">
-              <a:buNone/>
-            </a:pPr>
-            <a:r>
-              <a:rPr lang="en-AU" dirty="0"/>
-              <a:t>No dangling pointers, no manual memory deletion</a:t>
-            </a:r>
-          </a:p>
-          <a:p>
-            <a:pPr marL="0" indent="0">
-              <a:buNone/>
-            </a:pPr>
-            <a:r>
-              <a:rPr lang="en-AU" dirty="0">
-                <a:solidFill>
-                  <a:srgbClr val="0070C0"/>
-                </a:solidFill>
-              </a:rPr>
-              <a:t>Homoiconic</a:t>
-            </a:r>
-          </a:p>
-          <a:p>
-            <a:pPr marL="457200" lvl="1" indent="0">
-              <a:buNone/>
-            </a:pPr>
-            <a:r>
-              <a:rPr lang="en-AU" dirty="0"/>
-              <a:t>Scheme programs are written as Scheme lists</a:t>
-            </a:r>
-            <a:endParaRPr lang="en-AU" dirty="0">
-              <a:solidFill>
-                <a:srgbClr val="0070C0"/>
-              </a:solidFill>
-            </a:endParaRPr>
-          </a:p>
-          <a:p>
-            <a:pPr marL="0" indent="0">
-              <a:buNone/>
-            </a:pPr>
-            <a:r>
-              <a:rPr lang="en-AU" dirty="0">
-                <a:solidFill>
-                  <a:srgbClr val="0070C0"/>
-                </a:solidFill>
-              </a:rPr>
-              <a:t>Flexible</a:t>
-            </a:r>
-          </a:p>
-          <a:p>
-            <a:pPr marL="457200" lvl="1" indent="0">
-              <a:buNone/>
-            </a:pPr>
-            <a:r>
-              <a:rPr lang="en-AU" dirty="0"/>
-              <a:t>Powerful macro system allows for major changes to the language</a:t>
-            </a:r>
-          </a:p>
-          <a:p>
-            <a:pPr marL="457200" lvl="1" indent="0">
-              <a:buNone/>
-            </a:pPr>
-            <a:endParaRPr lang="en-AU" dirty="0"/>
+              <a:t>Consumer video recorder formats</a:t>
+            </a:r>
           </a:p>
         </p:txBody>
       </p:sp>
     </p:spTree>
     <p:extLst>
       <p:ext uri="{BB962C8B-B14F-4D97-AF65-F5344CB8AC3E}">
-        <p14:creationId xmlns:p14="http://schemas.microsoft.com/office/powerpoint/2010/main" val="2414411496"/>
+        <p14:creationId xmlns:p14="http://schemas.microsoft.com/office/powerpoint/2010/main" val="2492672385"/>
       </p:ext>
     </p:extLst>
   </p:cSld>
@@ -5628,7 +5457,13 @@
   <p:cSld>
     <p:spTree>
       <p:nvGrpSpPr>
-        <p:cNvPr id="1" name=""/>
+        <p:cNvPr id="1" name="">
+          <a:extLst>
+            <a:ext uri="{FF2B5EF4-FFF2-40B4-BE49-F238E27FC236}">
+              <a16:creationId xmlns:a16="http://schemas.microsoft.com/office/drawing/2014/main" id="{25D7E641-C830-9B6A-BCEF-B5F2FD08A4AB}"/>
+            </a:ext>
+          </a:extLst>
+        </p:cNvPr>
         <p:cNvGrpSpPr/>
         <p:nvPr/>
       </p:nvGrpSpPr>
@@ -5645,7 +5480,7 @@
           <p:cNvPr id="2" name="Title 1">
             <a:extLst>
               <a:ext uri="{FF2B5EF4-FFF2-40B4-BE49-F238E27FC236}">
-                <a16:creationId xmlns:a16="http://schemas.microsoft.com/office/drawing/2014/main" id="{E453DFDB-8487-48AA-A582-0CEA13856DA2}"/>
+                <a16:creationId xmlns:a16="http://schemas.microsoft.com/office/drawing/2014/main" id="{B992DF99-E075-E9BB-73A0-D925195C473E}"/>
               </a:ext>
             </a:extLst>
           </p:cNvPr>
@@ -5663,145 +5498,275 @@
           <a:p>
             <a:r>
               <a:rPr lang="en-CA" dirty="0"/>
-              <a:t>Major Features of Scheme</a:t>
+              <a:t>1975: First Appearances</a:t>
             </a:r>
             <a:endParaRPr lang="en-AU" dirty="0"/>
           </a:p>
         </p:txBody>
       </p:sp>
-      <p:sp>
-        <p:nvSpPr>
-          <p:cNvPr id="3" name="Content Placeholder 2">
-            <a:extLst>
-              <a:ext uri="{FF2B5EF4-FFF2-40B4-BE49-F238E27FC236}">
-                <a16:creationId xmlns:a16="http://schemas.microsoft.com/office/drawing/2014/main" id="{E45AFAE3-7D9D-4DB0-A01B-CD046F1E7D5F}"/>
-              </a:ext>
-            </a:extLst>
-          </p:cNvPr>
-          <p:cNvSpPr>
-            <a:spLocks noGrp="1"/>
-          </p:cNvSpPr>
-          <p:nvPr>
-            <p:ph idx="1"/>
-          </p:nvPr>
-        </p:nvSpPr>
-        <p:spPr/>
-        <p:txBody>
-          <a:bodyPr>
-            <a:normAutofit/>
+      <p:pic>
+        <p:nvPicPr>
+          <p:cNvPr id="4" name="Picture 3">
+            <a:extLst>
+              <a:ext uri="{FF2B5EF4-FFF2-40B4-BE49-F238E27FC236}">
+                <a16:creationId xmlns:a16="http://schemas.microsoft.com/office/drawing/2014/main" id="{9C35A337-C070-B474-D653-4E1492991C09}"/>
+              </a:ext>
+            </a:extLst>
+          </p:cNvPr>
+          <p:cNvPicPr>
+            <a:picLocks noChangeAspect="1"/>
+          </p:cNvPicPr>
+          <p:nvPr/>
+        </p:nvPicPr>
+        <p:blipFill>
+          <a:blip r:embed="rId2"/>
+          <a:stretch>
+            <a:fillRect/>
+          </a:stretch>
+        </p:blipFill>
+        <p:spPr>
+          <a:xfrm>
+            <a:off x="340472" y="4567780"/>
+            <a:ext cx="4220164" cy="1867161"/>
+          </a:xfrm>
+          <a:prstGeom prst="rect">
+            <a:avLst/>
+          </a:prstGeom>
+        </p:spPr>
+      </p:pic>
+      <p:pic>
+        <p:nvPicPr>
+          <p:cNvPr id="7" name="Picture 6">
+            <a:extLst>
+              <a:ext uri="{FF2B5EF4-FFF2-40B4-BE49-F238E27FC236}">
+                <a16:creationId xmlns:a16="http://schemas.microsoft.com/office/drawing/2014/main" id="{8A7B7B42-AB41-569B-7C9C-53B22FB1C3DD}"/>
+              </a:ext>
+            </a:extLst>
+          </p:cNvPr>
+          <p:cNvPicPr>
+            <a:picLocks noChangeAspect="1"/>
+          </p:cNvPicPr>
+          <p:nvPr/>
+        </p:nvPicPr>
+        <p:blipFill>
+          <a:blip r:embed="rId3"/>
+          <a:stretch>
+            <a:fillRect/>
+          </a:stretch>
+        </p:blipFill>
+        <p:spPr>
+          <a:xfrm>
+            <a:off x="7631365" y="720098"/>
+            <a:ext cx="3930910" cy="3201351"/>
+          </a:xfrm>
+          <a:prstGeom prst="rect">
+            <a:avLst/>
+          </a:prstGeom>
+        </p:spPr>
+      </p:pic>
+      <p:sp>
+        <p:nvSpPr>
+          <p:cNvPr id="16" name="TextBox 15">
+            <a:extLst>
+              <a:ext uri="{FF2B5EF4-FFF2-40B4-BE49-F238E27FC236}">
+                <a16:creationId xmlns:a16="http://schemas.microsoft.com/office/drawing/2014/main" id="{EA03230F-9FB4-6236-A8D2-B774852BBEB4}"/>
+              </a:ext>
+            </a:extLst>
+          </p:cNvPr>
+          <p:cNvSpPr txBox="1"/>
+          <p:nvPr/>
+        </p:nvSpPr>
+        <p:spPr>
+          <a:xfrm>
+            <a:off x="7631364" y="3921449"/>
+            <a:ext cx="3930909" cy="646331"/>
+          </a:xfrm>
+          <a:prstGeom prst="rect">
+            <a:avLst/>
+          </a:prstGeom>
+          <a:noFill/>
+        </p:spPr>
+        <p:txBody>
+          <a:bodyPr wrap="square" rtlCol="0">
+            <a:spAutoFit/>
           </a:bodyPr>
           <a:lstStyle/>
           <a:p>
-            <a:pPr marL="0" indent="0">
-              <a:buNone/>
-            </a:pPr>
-            <a:r>
-              <a:rPr lang="en-CA" dirty="0">
-                <a:solidFill>
-                  <a:srgbClr val="0070C0"/>
-                </a:solidFill>
-              </a:rPr>
-              <a:t>Types</a:t>
-            </a:r>
-          </a:p>
-          <a:p>
-            <a:pPr marL="457200" lvl="1" indent="0">
-              <a:buNone/>
-            </a:pPr>
+            <a:pPr algn="ctr"/>
+            <a:r>
+              <a:rPr lang="en-CA" b="1" dirty="0"/>
+              <a:t>Colossal Cave Adventure</a:t>
+            </a:r>
+          </a:p>
+          <a:p>
+            <a:pPr algn="ctr"/>
+            <a:r>
+              <a:rPr lang="en-AU" dirty="0"/>
+              <a:t>First text-based role-playing game</a:t>
+            </a:r>
+          </a:p>
+        </p:txBody>
+      </p:sp>
+      <p:pic>
+        <p:nvPicPr>
+          <p:cNvPr id="9" name="Picture 8">
+            <a:extLst>
+              <a:ext uri="{FF2B5EF4-FFF2-40B4-BE49-F238E27FC236}">
+                <a16:creationId xmlns:a16="http://schemas.microsoft.com/office/drawing/2014/main" id="{6157C85A-64DF-F13C-942C-CA9C12581A8F}"/>
+              </a:ext>
+            </a:extLst>
+          </p:cNvPr>
+          <p:cNvPicPr>
+            <a:picLocks noChangeAspect="1"/>
+          </p:cNvPicPr>
+          <p:nvPr/>
+        </p:nvPicPr>
+        <p:blipFill>
+          <a:blip r:embed="rId4"/>
+          <a:stretch>
+            <a:fillRect/>
+          </a:stretch>
+        </p:blipFill>
+        <p:spPr>
+          <a:xfrm>
+            <a:off x="2991197" y="1399284"/>
+            <a:ext cx="2282158" cy="1923271"/>
+          </a:xfrm>
+          <a:prstGeom prst="rect">
+            <a:avLst/>
+          </a:prstGeom>
+        </p:spPr>
+      </p:pic>
+      <p:sp>
+        <p:nvSpPr>
+          <p:cNvPr id="19" name="TextBox 18">
+            <a:extLst>
+              <a:ext uri="{FF2B5EF4-FFF2-40B4-BE49-F238E27FC236}">
+                <a16:creationId xmlns:a16="http://schemas.microsoft.com/office/drawing/2014/main" id="{7E41BB0B-3053-10BC-0F8E-7E59AD8FD9F4}"/>
+              </a:ext>
+            </a:extLst>
+          </p:cNvPr>
+          <p:cNvSpPr txBox="1"/>
+          <p:nvPr/>
+        </p:nvSpPr>
+        <p:spPr>
+          <a:xfrm>
+            <a:off x="2987733" y="3322555"/>
+            <a:ext cx="2282158" cy="923330"/>
+          </a:xfrm>
+          <a:prstGeom prst="rect">
+            <a:avLst/>
+          </a:prstGeom>
+          <a:noFill/>
+        </p:spPr>
+        <p:txBody>
+          <a:bodyPr wrap="square" rtlCol="0">
+            <a:spAutoFit/>
+          </a:bodyPr>
+          <a:lstStyle/>
+          <a:p>
+            <a:pPr algn="ctr"/>
+            <a:r>
+              <a:rPr lang="en-CA" b="1" dirty="0" err="1"/>
+              <a:t>Cromemco</a:t>
+            </a:r>
+            <a:r>
+              <a:rPr lang="en-CA" b="1" dirty="0"/>
+              <a:t> Cyclops</a:t>
+            </a:r>
+          </a:p>
+          <a:p>
+            <a:pPr algn="ctr"/>
+            <a:r>
+              <a:rPr lang="en-AU" dirty="0"/>
+              <a:t>First all-digital camera</a:t>
+            </a:r>
+          </a:p>
+          <a:p>
+            <a:pPr algn="ctr"/>
+            <a:r>
+              <a:rPr lang="en-AU" sz="1600" dirty="0"/>
+              <a:t>32x32 pixel resolution</a:t>
+            </a:r>
+          </a:p>
+        </p:txBody>
+      </p:sp>
+      <p:pic>
+        <p:nvPicPr>
+          <p:cNvPr id="11" name="Picture 10">
+            <a:extLst>
+              <a:ext uri="{FF2B5EF4-FFF2-40B4-BE49-F238E27FC236}">
+                <a16:creationId xmlns:a16="http://schemas.microsoft.com/office/drawing/2014/main" id="{191B3EBF-7C46-B2D3-42A3-59658CADDBDF}"/>
+              </a:ext>
+            </a:extLst>
+          </p:cNvPr>
+          <p:cNvPicPr>
+            <a:picLocks noChangeAspect="1"/>
+          </p:cNvPicPr>
+          <p:nvPr/>
+        </p:nvPicPr>
+        <p:blipFill>
+          <a:blip r:embed="rId5"/>
+          <a:stretch>
+            <a:fillRect/>
+          </a:stretch>
+        </p:blipFill>
+        <p:spPr>
+          <a:xfrm>
+            <a:off x="5187804" y="4567780"/>
+            <a:ext cx="1816392" cy="1925095"/>
+          </a:xfrm>
+          <a:prstGeom prst="rect">
+            <a:avLst/>
+          </a:prstGeom>
+        </p:spPr>
+      </p:pic>
+      <p:sp>
+        <p:nvSpPr>
+          <p:cNvPr id="22" name="TextBox 21">
+            <a:extLst>
+              <a:ext uri="{FF2B5EF4-FFF2-40B4-BE49-F238E27FC236}">
+                <a16:creationId xmlns:a16="http://schemas.microsoft.com/office/drawing/2014/main" id="{8D273361-BDC0-7655-3F60-CA98A038E2AF}"/>
+              </a:ext>
+            </a:extLst>
+          </p:cNvPr>
+          <p:cNvSpPr txBox="1"/>
+          <p:nvPr/>
+        </p:nvSpPr>
+        <p:spPr>
+          <a:xfrm>
+            <a:off x="7004196" y="4969369"/>
+            <a:ext cx="3423875" cy="646331"/>
+          </a:xfrm>
+          <a:prstGeom prst="rect">
+            <a:avLst/>
+          </a:prstGeom>
+          <a:noFill/>
+        </p:spPr>
+        <p:txBody>
+          <a:bodyPr wrap="square" rtlCol="0">
+            <a:spAutoFit/>
+          </a:bodyPr>
+          <a:lstStyle/>
+          <a:p>
+            <a:r>
+              <a:rPr lang="en-CA" b="1" dirty="0"/>
+              <a:t>Betamax and VHS </a:t>
+            </a:r>
+            <a:br>
+              <a:rPr lang="en-CA" b="1" dirty="0"/>
+            </a:br>
             <a:r>
               <a:rPr lang="en-CA" dirty="0"/>
-              <a:t>Dynamically typed, i.e. types checked at run-time (like Python)</a:t>
-            </a:r>
-          </a:p>
-          <a:p>
-            <a:pPr marL="457200" lvl="1" indent="0">
-              <a:buNone/>
-            </a:pPr>
-            <a:r>
-              <a:rPr lang="en-CA" dirty="0"/>
-              <a:t>Symbols</a:t>
-            </a:r>
-            <a:br>
-              <a:rPr lang="en-CA" dirty="0"/>
-            </a:br>
-            <a:r>
-              <a:rPr lang="en-CA" dirty="0"/>
-              <a:t>Lists are the key data structure</a:t>
-            </a:r>
-          </a:p>
-          <a:p>
-            <a:pPr marL="0" indent="0">
-              <a:buNone/>
-            </a:pPr>
-            <a:r>
-              <a:rPr lang="en-CA" dirty="0">
-                <a:solidFill>
-                  <a:srgbClr val="0070C0"/>
-                </a:solidFill>
-              </a:rPr>
-              <a:t>Lexical Scoping</a:t>
-            </a:r>
-          </a:p>
-          <a:p>
-            <a:pPr marL="457200" lvl="1" indent="0">
-              <a:buNone/>
-            </a:pPr>
-            <a:r>
-              <a:rPr lang="en-CA" dirty="0"/>
-              <a:t>One of the first languages to fully implement the name-scoping rules we now take for granted in programming (scope can be </a:t>
-            </a:r>
-            <a:r>
-              <a:rPr lang="en-CA"/>
-              <a:t>determined from source code)</a:t>
-            </a:r>
-            <a:endParaRPr lang="en-CA" dirty="0"/>
-          </a:p>
-          <a:p>
-            <a:pPr marL="0" indent="0">
-              <a:buNone/>
-            </a:pPr>
-            <a:r>
-              <a:rPr lang="en-CA" dirty="0">
-                <a:solidFill>
-                  <a:srgbClr val="0070C0"/>
-                </a:solidFill>
-              </a:rPr>
-              <a:t>Tail Recursion</a:t>
-            </a:r>
-          </a:p>
-          <a:p>
-            <a:pPr marL="457200" lvl="1" indent="0">
-              <a:buNone/>
-            </a:pPr>
-            <a:r>
-              <a:rPr lang="en-CA" dirty="0"/>
-              <a:t>Tail-recursive functions are automatically optimized into loops</a:t>
-            </a:r>
-          </a:p>
-          <a:p>
-            <a:pPr marL="457200" lvl="1" indent="0">
-              <a:buNone/>
-            </a:pPr>
-            <a:endParaRPr lang="en-CA" dirty="0"/>
-          </a:p>
-          <a:p>
-            <a:pPr marL="457200" lvl="1" indent="0">
-              <a:buNone/>
-            </a:pPr>
-            <a:endParaRPr lang="en-CA" dirty="0"/>
-          </a:p>
-          <a:p>
-            <a:pPr marL="457200" lvl="1" indent="0">
-              <a:buNone/>
-            </a:pPr>
-            <a:endParaRPr lang="en-CA" dirty="0"/>
+              <a:t>Consumer video recorder formats</a:t>
+            </a:r>
           </a:p>
         </p:txBody>
       </p:sp>
     </p:spTree>
     <p:extLst>
       <p:ext uri="{BB962C8B-B14F-4D97-AF65-F5344CB8AC3E}">
-        <p14:creationId xmlns:p14="http://schemas.microsoft.com/office/powerpoint/2010/main" val="247949623"/>
+        <p14:creationId xmlns:p14="http://schemas.microsoft.com/office/powerpoint/2010/main" val="2628330378"/>
       </p:ext>
     </p:extLst>
   </p:cSld>
@@ -5833,7 +5798,7 @@
           <p:cNvPr id="2" name="Title 1">
             <a:extLst>
               <a:ext uri="{FF2B5EF4-FFF2-40B4-BE49-F238E27FC236}">
-                <a16:creationId xmlns:a16="http://schemas.microsoft.com/office/drawing/2014/main" id="{E453DFDB-8487-48AA-A582-0CEA13856DA2}"/>
+                <a16:creationId xmlns:a16="http://schemas.microsoft.com/office/drawing/2014/main" id="{9E374E6F-0FF1-43DD-A06C-EF7571CCEA89}"/>
               </a:ext>
             </a:extLst>
           </p:cNvPr>
@@ -5851,19 +5816,7 @@
           <a:p>
             <a:r>
               <a:rPr lang="en-CA" dirty="0"/>
-              <a:t>Major Features </a:t>
-            </a:r>
-            <a:r>
-              <a:rPr lang="en-CA" dirty="0">
-                <a:solidFill>
-                  <a:srgbClr val="FF0000"/>
-                </a:solidFill>
-              </a:rPr>
-              <a:t>Not</a:t>
-            </a:r>
-            <a:r>
-              <a:rPr lang="en-CA" dirty="0"/>
-              <a:t> in Scheme</a:t>
+              <a:t>1975: Highest-grossing Arcade Game</a:t>
             </a:r>
             <a:endParaRPr lang="en-AU" dirty="0"/>
           </a:p>
@@ -5871,124 +5824,137 @@
       </p:sp>
       <p:sp>
         <p:nvSpPr>
-          <p:cNvPr id="3" name="Content Placeholder 2">
-            <a:extLst>
-              <a:ext uri="{FF2B5EF4-FFF2-40B4-BE49-F238E27FC236}">
-                <a16:creationId xmlns:a16="http://schemas.microsoft.com/office/drawing/2014/main" id="{E45AFAE3-7D9D-4DB0-A01B-CD046F1E7D5F}"/>
-              </a:ext>
-            </a:extLst>
-          </p:cNvPr>
-          <p:cNvSpPr>
-            <a:spLocks noGrp="1"/>
-          </p:cNvSpPr>
-          <p:nvPr>
-            <p:ph idx="1"/>
-          </p:nvPr>
-        </p:nvSpPr>
-        <p:spPr/>
-        <p:txBody>
-          <a:bodyPr>
-            <a:normAutofit/>
+          <p:cNvPr id="3" name="TextBox 2">
+            <a:extLst>
+              <a:ext uri="{FF2B5EF4-FFF2-40B4-BE49-F238E27FC236}">
+                <a16:creationId xmlns:a16="http://schemas.microsoft.com/office/drawing/2014/main" id="{4B9D1E49-D2CE-4AA9-B391-099DA1AD682D}"/>
+              </a:ext>
+            </a:extLst>
+          </p:cNvPr>
+          <p:cNvSpPr txBox="1"/>
+          <p:nvPr/>
+        </p:nvSpPr>
+        <p:spPr>
+          <a:xfrm>
+            <a:off x="5766422" y="3075057"/>
+            <a:ext cx="659155" cy="707886"/>
+          </a:xfrm>
+          <a:prstGeom prst="rect">
+            <a:avLst/>
+          </a:prstGeom>
+          <a:noFill/>
+        </p:spPr>
+        <p:txBody>
+          <a:bodyPr wrap="none" rtlCol="0">
+            <a:spAutoFit/>
           </a:bodyPr>
           <a:lstStyle/>
           <a:p>
-            <a:pPr marL="0" indent="0">
-              <a:buNone/>
-            </a:pPr>
-            <a:r>
-              <a:rPr lang="en-CA" dirty="0">
-                <a:solidFill>
-                  <a:srgbClr val="0070C0"/>
-                </a:solidFill>
-              </a:rPr>
-              <a:t>Features </a:t>
-            </a:r>
-            <a:r>
-              <a:rPr lang="en-CA" b="1" dirty="0">
-                <a:solidFill>
-                  <a:srgbClr val="0070C0"/>
-                </a:solidFill>
-              </a:rPr>
-              <a:t>not</a:t>
-            </a:r>
-            <a:r>
-              <a:rPr lang="en-CA" dirty="0">
-                <a:solidFill>
-                  <a:srgbClr val="0070C0"/>
-                </a:solidFill>
-              </a:rPr>
-              <a:t> part of Scheme</a:t>
-            </a:r>
-          </a:p>
-          <a:p>
-            <a:pPr marL="457200" lvl="1" indent="0">
-              <a:buNone/>
-            </a:pPr>
-            <a:r>
-              <a:rPr lang="en-CA" dirty="0">
-                <a:solidFill>
-                  <a:srgbClr val="FF0000"/>
-                </a:solidFill>
-              </a:rPr>
-              <a:t>No</a:t>
-            </a:r>
-            <a:r>
-              <a:rPr lang="en-CA" dirty="0"/>
-              <a:t> type declarations</a:t>
-            </a:r>
-          </a:p>
-          <a:p>
-            <a:pPr marL="457200" lvl="1" indent="0">
-              <a:buNone/>
-            </a:pPr>
-            <a:r>
-              <a:rPr lang="en-CA" dirty="0">
-                <a:solidFill>
-                  <a:srgbClr val="FF0000"/>
-                </a:solidFill>
-              </a:rPr>
-              <a:t>No</a:t>
-            </a:r>
-            <a:r>
-              <a:rPr lang="en-CA" dirty="0"/>
-              <a:t> pointers</a:t>
-            </a:r>
-          </a:p>
-          <a:p>
-            <a:pPr marL="457200" lvl="1" indent="0">
-              <a:buNone/>
-            </a:pPr>
-            <a:r>
-              <a:rPr lang="en-CA" dirty="0">
-                <a:solidFill>
-                  <a:srgbClr val="FF0000"/>
-                </a:solidFill>
-              </a:rPr>
-              <a:t>No</a:t>
-            </a:r>
-            <a:r>
-              <a:rPr lang="en-CA" dirty="0"/>
-              <a:t> built-in notion of object-oriented programming</a:t>
-            </a:r>
-          </a:p>
-          <a:p>
-            <a:pPr marL="457200" lvl="1" indent="0">
-              <a:buNone/>
-            </a:pPr>
-            <a:endParaRPr lang="en-CA" dirty="0"/>
+            <a:pPr algn="ctr"/>
+            <a:r>
+              <a:rPr lang="en-CA" sz="4000" b="1" dirty="0"/>
+              <a:t>??</a:t>
+            </a:r>
+            <a:endParaRPr lang="en-AU" sz="3200" dirty="0"/>
           </a:p>
         </p:txBody>
       </p:sp>
     </p:spTree>
     <p:extLst>
       <p:ext uri="{BB962C8B-B14F-4D97-AF65-F5344CB8AC3E}">
-        <p14:creationId xmlns:p14="http://schemas.microsoft.com/office/powerpoint/2010/main" val="1760816993"/>
+        <p14:creationId xmlns:p14="http://schemas.microsoft.com/office/powerpoint/2010/main" val="2446982689"/>
       </p:ext>
     </p:extLst>
   </p:cSld>
   <p:clrMapOvr>
     <a:masterClrMapping/>
   </p:clrMapOvr>
+  <p:timing>
+    <p:tnLst>
+      <p:par>
+        <p:cTn id="1" dur="indefinite" restart="never" nodeType="tmRoot">
+          <p:childTnLst>
+            <p:seq concurrent="1" nextAc="seek">
+              <p:cTn id="2" dur="indefinite" nodeType="mainSeq">
+                <p:childTnLst>
+                  <p:par>
+                    <p:cTn id="3" fill="hold">
+                      <p:stCondLst>
+                        <p:cond delay="indefinite"/>
+                      </p:stCondLst>
+                      <p:childTnLst>
+                        <p:par>
+                          <p:cTn id="4" fill="hold">
+                            <p:stCondLst>
+                              <p:cond delay="0"/>
+                            </p:stCondLst>
+                            <p:childTnLst>
+                              <p:par>
+                                <p:cTn id="5" presetID="10" presetClass="entr" presetSubtype="0" fill="hold" grpId="0" nodeType="clickEffect">
+                                  <p:stCondLst>
+                                    <p:cond delay="0"/>
+                                  </p:stCondLst>
+                                  <p:childTnLst>
+                                    <p:set>
+                                      <p:cBhvr>
+                                        <p:cTn id="6" dur="1" fill="hold">
+                                          <p:stCondLst>
+                                            <p:cond delay="0"/>
+                                          </p:stCondLst>
+                                        </p:cTn>
+                                        <p:tgtEl>
+                                          <p:spTgt spid="3"/>
+                                        </p:tgtEl>
+                                        <p:attrNameLst>
+                                          <p:attrName>style.visibility</p:attrName>
+                                        </p:attrNameLst>
+                                      </p:cBhvr>
+                                      <p:to>
+                                        <p:strVal val="visible"/>
+                                      </p:to>
+                                    </p:set>
+                                    <p:animEffect transition="in" filter="fade">
+                                      <p:cBhvr>
+                                        <p:cTn id="7" dur="500"/>
+                                        <p:tgtEl>
+                                          <p:spTgt spid="3"/>
+                                        </p:tgtEl>
+                                      </p:cBhvr>
+                                    </p:animEffect>
+                                  </p:childTnLst>
+                                </p:cTn>
+                              </p:par>
+                            </p:childTnLst>
+                          </p:cTn>
+                        </p:par>
+                      </p:childTnLst>
+                    </p:cTn>
+                  </p:par>
+                </p:childTnLst>
+              </p:cTn>
+              <p:prevCondLst>
+                <p:cond evt="onPrev" delay="0">
+                  <p:tgtEl>
+                    <p:sldTgt/>
+                  </p:tgtEl>
+                </p:cond>
+              </p:prevCondLst>
+              <p:nextCondLst>
+                <p:cond evt="onNext" delay="0">
+                  <p:tgtEl>
+                    <p:sldTgt/>
+                  </p:tgtEl>
+                </p:cond>
+              </p:nextCondLst>
+            </p:seq>
+          </p:childTnLst>
+        </p:cTn>
+      </p:par>
+    </p:tnLst>
+    <p:bldLst>
+      <p:bldP spid="3" grpId="0"/>
+    </p:bldLst>
+  </p:timing>
 </p:sld>
 </file>
 
@@ -5997,410 +5963,10 @@
   <p:cSld>
     <p:spTree>
       <p:nvGrpSpPr>
-        <p:cNvPr id="1" name=""/>
-        <p:cNvGrpSpPr/>
-        <p:nvPr/>
-      </p:nvGrpSpPr>
-      <p:grpSpPr>
-        <a:xfrm>
-          <a:off x="0" y="0"/>
-          <a:ext cx="0" cy="0"/>
-          <a:chOff x="0" y="0"/>
-          <a:chExt cx="0" cy="0"/>
-        </a:xfrm>
-      </p:grpSpPr>
-      <p:sp>
-        <p:nvSpPr>
-          <p:cNvPr id="2" name="Title 1">
-            <a:extLst>
-              <a:ext uri="{FF2B5EF4-FFF2-40B4-BE49-F238E27FC236}">
-                <a16:creationId xmlns:a16="http://schemas.microsoft.com/office/drawing/2014/main" id="{24666DA8-3BC8-44C4-A6B8-4077E3A5589E}"/>
-              </a:ext>
-            </a:extLst>
-          </p:cNvPr>
-          <p:cNvSpPr>
-            <a:spLocks noGrp="1"/>
-          </p:cNvSpPr>
-          <p:nvPr>
-            <p:ph type="title"/>
-          </p:nvPr>
-        </p:nvSpPr>
-        <p:spPr>
-          <a:xfrm>
-            <a:off x="421822" y="75519"/>
-            <a:ext cx="10515600" cy="1325563"/>
-          </a:xfrm>
-        </p:spPr>
-        <p:txBody>
-          <a:bodyPr/>
-          <a:lstStyle/>
-          <a:p>
-            <a:r>
-              <a:rPr lang="en-CA" dirty="0"/>
-              <a:t>Hello, World!</a:t>
-            </a:r>
-            <a:endParaRPr lang="en-AU" dirty="0"/>
-          </a:p>
-        </p:txBody>
-      </p:sp>
-      <p:sp>
-        <p:nvSpPr>
-          <p:cNvPr id="3" name="Content Placeholder 2">
-            <a:extLst>
-              <a:ext uri="{FF2B5EF4-FFF2-40B4-BE49-F238E27FC236}">
-                <a16:creationId xmlns:a16="http://schemas.microsoft.com/office/drawing/2014/main" id="{625907E2-02AB-4FC8-8372-75485A2CCADC}"/>
-              </a:ext>
-            </a:extLst>
-          </p:cNvPr>
-          <p:cNvSpPr>
-            <a:spLocks noGrp="1"/>
-          </p:cNvSpPr>
-          <p:nvPr>
-            <p:ph idx="1"/>
-          </p:nvPr>
-        </p:nvSpPr>
-        <p:spPr>
-          <a:xfrm>
-            <a:off x="2132118" y="2146358"/>
-            <a:ext cx="4750014" cy="2033681"/>
-          </a:xfrm>
-        </p:spPr>
-        <p:txBody>
-          <a:bodyPr>
-            <a:normAutofit/>
-          </a:bodyPr>
-          <a:lstStyle/>
-          <a:p>
-            <a:pPr marL="0" indent="0">
-              <a:buNone/>
-            </a:pPr>
-            <a:r>
-              <a:rPr lang="en-US" dirty="0">
-                <a:latin typeface="Consolas" panose="020B0609020204030204" pitchFamily="49" charset="0"/>
-              </a:rPr>
-              <a:t>;; </a:t>
-            </a:r>
-            <a:r>
-              <a:rPr lang="en-US" dirty="0" err="1">
-                <a:latin typeface="Consolas" panose="020B0609020204030204" pitchFamily="49" charset="0"/>
-              </a:rPr>
-              <a:t>hello_world.rkt</a:t>
-            </a:r>
-            <a:endParaRPr lang="en-US" dirty="0">
-              <a:latin typeface="Consolas" panose="020B0609020204030204" pitchFamily="49" charset="0"/>
-            </a:endParaRPr>
-          </a:p>
-          <a:p>
-            <a:pPr marL="0" indent="0">
-              <a:buNone/>
-            </a:pPr>
-            <a:endParaRPr lang="en-US" dirty="0">
-              <a:latin typeface="Consolas" panose="020B0609020204030204" pitchFamily="49" charset="0"/>
-            </a:endParaRPr>
-          </a:p>
-          <a:p>
-            <a:pPr marL="0" indent="0">
-              <a:buNone/>
-            </a:pPr>
-            <a:r>
-              <a:rPr lang="en-US" dirty="0">
-                <a:latin typeface="Consolas" panose="020B0609020204030204" pitchFamily="49" charset="0"/>
-              </a:rPr>
-              <a:t>(print "Hello, world!")</a:t>
-            </a:r>
-          </a:p>
-        </p:txBody>
-      </p:sp>
-      <p:sp>
-        <p:nvSpPr>
-          <p:cNvPr id="4" name="TextBox 3">
-            <a:extLst>
-              <a:ext uri="{FF2B5EF4-FFF2-40B4-BE49-F238E27FC236}">
-                <a16:creationId xmlns:a16="http://schemas.microsoft.com/office/drawing/2014/main" id="{1AB9C04D-6CD3-48A5-BEAC-80EB44E5AF49}"/>
-              </a:ext>
-            </a:extLst>
-          </p:cNvPr>
-          <p:cNvSpPr txBox="1"/>
-          <p:nvPr/>
-        </p:nvSpPr>
-        <p:spPr>
-          <a:xfrm>
-            <a:off x="7607873" y="2516868"/>
-            <a:ext cx="2452009" cy="1477328"/>
-          </a:xfrm>
-          <a:prstGeom prst="rect">
-            <a:avLst/>
-          </a:prstGeom>
-          <a:solidFill>
-            <a:schemeClr val="accent4">
-              <a:lumMod val="40000"/>
-              <a:lumOff val="60000"/>
-            </a:schemeClr>
-          </a:solidFill>
-        </p:spPr>
-        <p:txBody>
-          <a:bodyPr wrap="square" rtlCol="0">
-            <a:spAutoFit/>
-          </a:bodyPr>
-          <a:lstStyle/>
-          <a:p>
-            <a:pPr algn="ctr"/>
-            <a:r>
-              <a:rPr lang="en-CA" dirty="0"/>
-              <a:t>Download and run this in the </a:t>
-            </a:r>
-            <a:r>
-              <a:rPr lang="en-CA" b="1" dirty="0" err="1"/>
-              <a:t>DrRacket</a:t>
-            </a:r>
-            <a:r>
-              <a:rPr lang="en-CA" dirty="0"/>
-              <a:t> IDE. We’ll use both the interpreter and file editor in </a:t>
-            </a:r>
-            <a:r>
-              <a:rPr lang="en-CA" dirty="0" err="1"/>
-              <a:t>DrRacket</a:t>
-            </a:r>
-            <a:r>
-              <a:rPr lang="en-CA" dirty="0"/>
-              <a:t>.</a:t>
-            </a:r>
-            <a:endParaRPr lang="en-AU" dirty="0"/>
-          </a:p>
-        </p:txBody>
-      </p:sp>
-    </p:spTree>
-    <p:extLst>
-      <p:ext uri="{BB962C8B-B14F-4D97-AF65-F5344CB8AC3E}">
-        <p14:creationId xmlns:p14="http://schemas.microsoft.com/office/powerpoint/2010/main" val="230914827"/>
-      </p:ext>
-    </p:extLst>
-  </p:cSld>
-  <p:clrMapOvr>
-    <a:masterClrMapping/>
-  </p:clrMapOvr>
-</p:sld>
-</file>
-
-<file path=ppt/slides/slide2.xml><?xml version="1.0" encoding="utf-8"?>
-<p:sld xmlns:a="http://schemas.openxmlformats.org/drawingml/2006/main" xmlns:r="http://schemas.openxmlformats.org/officeDocument/2006/relationships" xmlns:p="http://schemas.openxmlformats.org/presentationml/2006/main">
-  <p:cSld>
-    <p:spTree>
-      <p:nvGrpSpPr>
-        <p:cNvPr id="1" name=""/>
-        <p:cNvGrpSpPr/>
-        <p:nvPr/>
-      </p:nvGrpSpPr>
-      <p:grpSpPr>
-        <a:xfrm>
-          <a:off x="0" y="0"/>
-          <a:ext cx="0" cy="0"/>
-          <a:chOff x="0" y="0"/>
-          <a:chExt cx="0" cy="0"/>
-        </a:xfrm>
-      </p:grpSpPr>
-      <p:sp>
-        <p:nvSpPr>
-          <p:cNvPr id="4" name="Title 3">
-            <a:extLst>
-              <a:ext uri="{FF2B5EF4-FFF2-40B4-BE49-F238E27FC236}">
-                <a16:creationId xmlns:a16="http://schemas.microsoft.com/office/drawing/2014/main" id="{CB105B6D-9708-4D3F-8738-4E92FD6BE38D}"/>
-              </a:ext>
-            </a:extLst>
-          </p:cNvPr>
-          <p:cNvSpPr>
-            <a:spLocks noGrp="1"/>
-          </p:cNvSpPr>
-          <p:nvPr>
-            <p:ph type="title"/>
-          </p:nvPr>
-        </p:nvSpPr>
-        <p:spPr>
-          <a:xfrm>
-            <a:off x="0" y="2259239"/>
-            <a:ext cx="12192000" cy="1325563"/>
-          </a:xfrm>
-        </p:spPr>
-        <p:txBody>
-          <a:bodyPr>
-            <a:normAutofit/>
-          </a:bodyPr>
-          <a:lstStyle/>
-          <a:p>
-            <a:pPr algn="ctr"/>
-            <a:r>
-              <a:rPr lang="en-CA" sz="6600" dirty="0"/>
-              <a:t>What was going on in 1975?</a:t>
-            </a:r>
-            <a:endParaRPr lang="en-AU" sz="6600" dirty="0"/>
-          </a:p>
-        </p:txBody>
-      </p:sp>
-    </p:spTree>
-    <p:extLst>
-      <p:ext uri="{BB962C8B-B14F-4D97-AF65-F5344CB8AC3E}">
-        <p14:creationId xmlns:p14="http://schemas.microsoft.com/office/powerpoint/2010/main" val="1247466648"/>
-      </p:ext>
-    </p:extLst>
-  </p:cSld>
-  <p:clrMapOvr>
-    <a:masterClrMapping/>
-  </p:clrMapOvr>
-</p:sld>
-</file>
-
-<file path=ppt/slides/slide3.xml><?xml version="1.0" encoding="utf-8"?>
-<p:sld xmlns:a="http://schemas.openxmlformats.org/drawingml/2006/main" xmlns:r="http://schemas.openxmlformats.org/officeDocument/2006/relationships" xmlns:p="http://schemas.openxmlformats.org/presentationml/2006/main">
-  <p:cSld>
-    <p:spTree>
-      <p:nvGrpSpPr>
-        <p:cNvPr id="1" name=""/>
-        <p:cNvGrpSpPr/>
-        <p:nvPr/>
-      </p:nvGrpSpPr>
-      <p:grpSpPr>
-        <a:xfrm>
-          <a:off x="0" y="0"/>
-          <a:ext cx="0" cy="0"/>
-          <a:chOff x="0" y="0"/>
-          <a:chExt cx="0" cy="0"/>
-        </a:xfrm>
-      </p:grpSpPr>
-      <p:sp>
-        <p:nvSpPr>
-          <p:cNvPr id="2" name="Title 1">
-            <a:extLst>
-              <a:ext uri="{FF2B5EF4-FFF2-40B4-BE49-F238E27FC236}">
-                <a16:creationId xmlns:a16="http://schemas.microsoft.com/office/drawing/2014/main" id="{9D56FCE7-DB3A-40C9-92A2-796AAF385628}"/>
-              </a:ext>
-            </a:extLst>
-          </p:cNvPr>
-          <p:cNvSpPr>
-            <a:spLocks noGrp="1"/>
-          </p:cNvSpPr>
-          <p:nvPr>
-            <p:ph type="title"/>
-          </p:nvPr>
-        </p:nvSpPr>
-        <p:spPr/>
-        <p:txBody>
-          <a:bodyPr/>
-          <a:lstStyle/>
-          <a:p>
-            <a:r>
-              <a:rPr lang="en-CA" dirty="0"/>
-              <a:t>1975: First Appearances</a:t>
-            </a:r>
-            <a:endParaRPr lang="en-AU" dirty="0"/>
-          </a:p>
-        </p:txBody>
-      </p:sp>
-      <p:pic>
-        <p:nvPicPr>
-          <p:cNvPr id="9" name="Picture 8">
-            <a:extLst>
-              <a:ext uri="{FF2B5EF4-FFF2-40B4-BE49-F238E27FC236}">
-                <a16:creationId xmlns:a16="http://schemas.microsoft.com/office/drawing/2014/main" id="{AFE33563-555F-8EAF-38A1-15AF81D69B3A}"/>
-              </a:ext>
-            </a:extLst>
-          </p:cNvPr>
-          <p:cNvPicPr>
-            <a:picLocks noChangeAspect="1"/>
-          </p:cNvPicPr>
-          <p:nvPr/>
-        </p:nvPicPr>
-        <p:blipFill>
-          <a:blip r:embed="rId2"/>
-          <a:stretch>
-            <a:fillRect/>
-          </a:stretch>
-        </p:blipFill>
-        <p:spPr>
-          <a:xfrm>
-            <a:off x="2991197" y="1399284"/>
-            <a:ext cx="2282158" cy="1923271"/>
-          </a:xfrm>
-          <a:prstGeom prst="rect">
-            <a:avLst/>
-          </a:prstGeom>
-        </p:spPr>
-      </p:pic>
-      <p:sp>
-        <p:nvSpPr>
-          <p:cNvPr id="19" name="TextBox 18">
-            <a:extLst>
-              <a:ext uri="{FF2B5EF4-FFF2-40B4-BE49-F238E27FC236}">
-                <a16:creationId xmlns:a16="http://schemas.microsoft.com/office/drawing/2014/main" id="{23530188-1C40-2C32-5B87-5534EF6CEC9A}"/>
-              </a:ext>
-            </a:extLst>
-          </p:cNvPr>
-          <p:cNvSpPr txBox="1"/>
-          <p:nvPr/>
-        </p:nvSpPr>
-        <p:spPr>
-          <a:xfrm>
-            <a:off x="2987733" y="3322555"/>
-            <a:ext cx="2282158" cy="923330"/>
-          </a:xfrm>
-          <a:prstGeom prst="rect">
-            <a:avLst/>
-          </a:prstGeom>
-          <a:noFill/>
-        </p:spPr>
-        <p:txBody>
-          <a:bodyPr wrap="square" rtlCol="0">
-            <a:spAutoFit/>
-          </a:bodyPr>
-          <a:lstStyle/>
-          <a:p>
-            <a:pPr algn="ctr"/>
-            <a:r>
-              <a:rPr lang="en-CA" b="1" dirty="0" err="1"/>
-              <a:t>Cromemco</a:t>
-            </a:r>
-            <a:r>
-              <a:rPr lang="en-CA" b="1" dirty="0"/>
-              <a:t> Cyclops</a:t>
-            </a:r>
-          </a:p>
-          <a:p>
-            <a:pPr algn="ctr"/>
-            <a:r>
-              <a:rPr lang="en-AU" dirty="0"/>
-              <a:t>First all-digital camera</a:t>
-            </a:r>
-          </a:p>
-          <a:p>
-            <a:pPr algn="ctr"/>
-            <a:r>
-              <a:rPr lang="en-AU" sz="1600" dirty="0"/>
-              <a:t>32x32 pixel resolution</a:t>
-            </a:r>
-          </a:p>
-        </p:txBody>
-      </p:sp>
-    </p:spTree>
-    <p:extLst>
-      <p:ext uri="{BB962C8B-B14F-4D97-AF65-F5344CB8AC3E}">
-        <p14:creationId xmlns:p14="http://schemas.microsoft.com/office/powerpoint/2010/main" val="962438491"/>
-      </p:ext>
-    </p:extLst>
-  </p:cSld>
-  <p:clrMapOvr>
-    <a:masterClrMapping/>
-  </p:clrMapOvr>
-</p:sld>
-</file>
-
-<file path=ppt/slides/slide4.xml><?xml version="1.0" encoding="utf-8"?>
-<p:sld xmlns:a="http://schemas.openxmlformats.org/drawingml/2006/main" xmlns:r="http://schemas.openxmlformats.org/officeDocument/2006/relationships" xmlns:p="http://schemas.openxmlformats.org/presentationml/2006/main">
-  <p:cSld>
-    <p:spTree>
-      <p:nvGrpSpPr>
         <p:cNvPr id="1" name="">
           <a:extLst>
             <a:ext uri="{FF2B5EF4-FFF2-40B4-BE49-F238E27FC236}">
-              <a16:creationId xmlns:a16="http://schemas.microsoft.com/office/drawing/2014/main" id="{6FE0AE82-0BC2-F223-17A0-A26D2C6573AD}"/>
+              <a16:creationId xmlns:a16="http://schemas.microsoft.com/office/drawing/2014/main" id="{D34C781C-7458-887D-F028-0B22134CFEBE}"/>
             </a:ext>
           </a:extLst>
         </p:cNvPr>
@@ -6420,7 +5986,7 @@
           <p:cNvPr id="2" name="Title 1">
             <a:extLst>
               <a:ext uri="{FF2B5EF4-FFF2-40B4-BE49-F238E27FC236}">
-                <a16:creationId xmlns:a16="http://schemas.microsoft.com/office/drawing/2014/main" id="{D9BA201D-C85F-417D-0457-E3A75525C8A1}"/>
+                <a16:creationId xmlns:a16="http://schemas.microsoft.com/office/drawing/2014/main" id="{FDB95246-637D-392C-F5F1-B585B2726B79}"/>
               </a:ext>
             </a:extLst>
           </p:cNvPr>
@@ -6438,766 +6004,18 @@
           <a:p>
             <a:r>
               <a:rPr lang="en-CA" dirty="0"/>
-              <a:t>1975: First Appearances</a:t>
+              <a:t>1975: Highest-grossing Arcade Game</a:t>
             </a:r>
             <a:endParaRPr lang="en-AU" dirty="0"/>
           </a:p>
         </p:txBody>
       </p:sp>
-      <p:pic>
-        <p:nvPicPr>
-          <p:cNvPr id="4" name="Picture 3">
-            <a:extLst>
-              <a:ext uri="{FF2B5EF4-FFF2-40B4-BE49-F238E27FC236}">
-                <a16:creationId xmlns:a16="http://schemas.microsoft.com/office/drawing/2014/main" id="{A986E45D-FDE8-B00C-7D82-78E5FF621433}"/>
-              </a:ext>
-            </a:extLst>
-          </p:cNvPr>
-          <p:cNvPicPr>
-            <a:picLocks noChangeAspect="1"/>
-          </p:cNvPicPr>
-          <p:nvPr/>
-        </p:nvPicPr>
-        <p:blipFill>
-          <a:blip r:embed="rId2"/>
-          <a:stretch>
-            <a:fillRect/>
-          </a:stretch>
-        </p:blipFill>
-        <p:spPr>
-          <a:xfrm>
-            <a:off x="340472" y="4567780"/>
-            <a:ext cx="4220164" cy="1867161"/>
-          </a:xfrm>
-          <a:prstGeom prst="rect">
-            <a:avLst/>
-          </a:prstGeom>
-        </p:spPr>
-      </p:pic>
-      <p:pic>
-        <p:nvPicPr>
-          <p:cNvPr id="9" name="Picture 8">
-            <a:extLst>
-              <a:ext uri="{FF2B5EF4-FFF2-40B4-BE49-F238E27FC236}">
-                <a16:creationId xmlns:a16="http://schemas.microsoft.com/office/drawing/2014/main" id="{17A31C30-B018-0F68-175E-B9EB0C24C93E}"/>
-              </a:ext>
-            </a:extLst>
-          </p:cNvPr>
-          <p:cNvPicPr>
-            <a:picLocks noChangeAspect="1"/>
-          </p:cNvPicPr>
-          <p:nvPr/>
-        </p:nvPicPr>
-        <p:blipFill>
-          <a:blip r:embed="rId3"/>
-          <a:stretch>
-            <a:fillRect/>
-          </a:stretch>
-        </p:blipFill>
-        <p:spPr>
-          <a:xfrm>
-            <a:off x="2991197" y="1399284"/>
-            <a:ext cx="2282158" cy="1923271"/>
-          </a:xfrm>
-          <a:prstGeom prst="rect">
-            <a:avLst/>
-          </a:prstGeom>
-        </p:spPr>
-      </p:pic>
-      <p:sp>
-        <p:nvSpPr>
-          <p:cNvPr id="19" name="TextBox 18">
-            <a:extLst>
-              <a:ext uri="{FF2B5EF4-FFF2-40B4-BE49-F238E27FC236}">
-                <a16:creationId xmlns:a16="http://schemas.microsoft.com/office/drawing/2014/main" id="{A7175928-CB53-B2B6-D8AB-301DC2E58055}"/>
-              </a:ext>
-            </a:extLst>
-          </p:cNvPr>
-          <p:cNvSpPr txBox="1"/>
-          <p:nvPr/>
-        </p:nvSpPr>
-        <p:spPr>
-          <a:xfrm>
-            <a:off x="2987733" y="3322555"/>
-            <a:ext cx="2282158" cy="923330"/>
-          </a:xfrm>
-          <a:prstGeom prst="rect">
-            <a:avLst/>
-          </a:prstGeom>
-          <a:noFill/>
-        </p:spPr>
-        <p:txBody>
-          <a:bodyPr wrap="square" rtlCol="0">
-            <a:spAutoFit/>
-          </a:bodyPr>
-          <a:lstStyle/>
-          <a:p>
-            <a:pPr algn="ctr"/>
-            <a:r>
-              <a:rPr lang="en-CA" b="1" dirty="0" err="1"/>
-              <a:t>Cromemco</a:t>
-            </a:r>
-            <a:r>
-              <a:rPr lang="en-CA" b="1" dirty="0"/>
-              <a:t> Cyclops</a:t>
-            </a:r>
-          </a:p>
-          <a:p>
-            <a:pPr algn="ctr"/>
-            <a:r>
-              <a:rPr lang="en-AU" dirty="0"/>
-              <a:t>First all-digital camera</a:t>
-            </a:r>
-          </a:p>
-          <a:p>
-            <a:pPr algn="ctr"/>
-            <a:r>
-              <a:rPr lang="en-AU" sz="1600" dirty="0"/>
-              <a:t>32x32 pixel resolution</a:t>
-            </a:r>
-          </a:p>
-        </p:txBody>
-      </p:sp>
-    </p:spTree>
-    <p:extLst>
-      <p:ext uri="{BB962C8B-B14F-4D97-AF65-F5344CB8AC3E}">
-        <p14:creationId xmlns:p14="http://schemas.microsoft.com/office/powerpoint/2010/main" val="3265843497"/>
-      </p:ext>
-    </p:extLst>
-  </p:cSld>
-  <p:clrMapOvr>
-    <a:masterClrMapping/>
-  </p:clrMapOvr>
-</p:sld>
-</file>
-
-<file path=ppt/slides/slide5.xml><?xml version="1.0" encoding="utf-8"?>
-<p:sld xmlns:a="http://schemas.openxmlformats.org/drawingml/2006/main" xmlns:r="http://schemas.openxmlformats.org/officeDocument/2006/relationships" xmlns:p="http://schemas.openxmlformats.org/presentationml/2006/main">
-  <p:cSld>
-    <p:spTree>
-      <p:nvGrpSpPr>
-        <p:cNvPr id="1" name="">
-          <a:extLst>
-            <a:ext uri="{FF2B5EF4-FFF2-40B4-BE49-F238E27FC236}">
-              <a16:creationId xmlns:a16="http://schemas.microsoft.com/office/drawing/2014/main" id="{133F391E-493C-037B-C4BD-F08CE67811EF}"/>
-            </a:ext>
-          </a:extLst>
-        </p:cNvPr>
-        <p:cNvGrpSpPr/>
-        <p:nvPr/>
-      </p:nvGrpSpPr>
-      <p:grpSpPr>
-        <a:xfrm>
-          <a:off x="0" y="0"/>
-          <a:ext cx="0" cy="0"/>
-          <a:chOff x="0" y="0"/>
-          <a:chExt cx="0" cy="0"/>
-        </a:xfrm>
-      </p:grpSpPr>
-      <p:sp>
-        <p:nvSpPr>
-          <p:cNvPr id="2" name="Title 1">
-            <a:extLst>
-              <a:ext uri="{FF2B5EF4-FFF2-40B4-BE49-F238E27FC236}">
-                <a16:creationId xmlns:a16="http://schemas.microsoft.com/office/drawing/2014/main" id="{CAC22D92-5FE5-3545-8228-C2354B063F75}"/>
-              </a:ext>
-            </a:extLst>
-          </p:cNvPr>
-          <p:cNvSpPr>
-            <a:spLocks noGrp="1"/>
-          </p:cNvSpPr>
-          <p:nvPr>
-            <p:ph type="title"/>
-          </p:nvPr>
-        </p:nvSpPr>
-        <p:spPr/>
-        <p:txBody>
-          <a:bodyPr/>
-          <a:lstStyle/>
-          <a:p>
-            <a:r>
-              <a:rPr lang="en-CA" dirty="0"/>
-              <a:t>1975: First Appearances</a:t>
-            </a:r>
-            <a:endParaRPr lang="en-AU" dirty="0"/>
-          </a:p>
-        </p:txBody>
-      </p:sp>
-      <p:pic>
-        <p:nvPicPr>
-          <p:cNvPr id="4" name="Picture 3">
-            <a:extLst>
-              <a:ext uri="{FF2B5EF4-FFF2-40B4-BE49-F238E27FC236}">
-                <a16:creationId xmlns:a16="http://schemas.microsoft.com/office/drawing/2014/main" id="{199B4271-4787-3B6B-DC55-77B80AE8E06F}"/>
-              </a:ext>
-            </a:extLst>
-          </p:cNvPr>
-          <p:cNvPicPr>
-            <a:picLocks noChangeAspect="1"/>
-          </p:cNvPicPr>
-          <p:nvPr/>
-        </p:nvPicPr>
-        <p:blipFill>
-          <a:blip r:embed="rId2"/>
-          <a:stretch>
-            <a:fillRect/>
-          </a:stretch>
-        </p:blipFill>
-        <p:spPr>
-          <a:xfrm>
-            <a:off x="340472" y="4567780"/>
-            <a:ext cx="4220164" cy="1867161"/>
-          </a:xfrm>
-          <a:prstGeom prst="rect">
-            <a:avLst/>
-          </a:prstGeom>
-        </p:spPr>
-      </p:pic>
-      <p:pic>
-        <p:nvPicPr>
-          <p:cNvPr id="9" name="Picture 8">
-            <a:extLst>
-              <a:ext uri="{FF2B5EF4-FFF2-40B4-BE49-F238E27FC236}">
-                <a16:creationId xmlns:a16="http://schemas.microsoft.com/office/drawing/2014/main" id="{C8E4C159-094B-F17A-0F4A-3D40EE24D96F}"/>
-              </a:ext>
-            </a:extLst>
-          </p:cNvPr>
-          <p:cNvPicPr>
-            <a:picLocks noChangeAspect="1"/>
-          </p:cNvPicPr>
-          <p:nvPr/>
-        </p:nvPicPr>
-        <p:blipFill>
-          <a:blip r:embed="rId3"/>
-          <a:stretch>
-            <a:fillRect/>
-          </a:stretch>
-        </p:blipFill>
-        <p:spPr>
-          <a:xfrm>
-            <a:off x="2991197" y="1399284"/>
-            <a:ext cx="2282158" cy="1923271"/>
-          </a:xfrm>
-          <a:prstGeom prst="rect">
-            <a:avLst/>
-          </a:prstGeom>
-        </p:spPr>
-      </p:pic>
-      <p:sp>
-        <p:nvSpPr>
-          <p:cNvPr id="19" name="TextBox 18">
-            <a:extLst>
-              <a:ext uri="{FF2B5EF4-FFF2-40B4-BE49-F238E27FC236}">
-                <a16:creationId xmlns:a16="http://schemas.microsoft.com/office/drawing/2014/main" id="{5DC7C711-DC34-AEDE-1940-12900A4688CE}"/>
-              </a:ext>
-            </a:extLst>
-          </p:cNvPr>
-          <p:cNvSpPr txBox="1"/>
-          <p:nvPr/>
-        </p:nvSpPr>
-        <p:spPr>
-          <a:xfrm>
-            <a:off x="2987733" y="3322555"/>
-            <a:ext cx="2282158" cy="923330"/>
-          </a:xfrm>
-          <a:prstGeom prst="rect">
-            <a:avLst/>
-          </a:prstGeom>
-          <a:noFill/>
-        </p:spPr>
-        <p:txBody>
-          <a:bodyPr wrap="square" rtlCol="0">
-            <a:spAutoFit/>
-          </a:bodyPr>
-          <a:lstStyle/>
-          <a:p>
-            <a:pPr algn="ctr"/>
-            <a:r>
-              <a:rPr lang="en-CA" b="1" dirty="0" err="1"/>
-              <a:t>Cromemco</a:t>
-            </a:r>
-            <a:r>
-              <a:rPr lang="en-CA" b="1" dirty="0"/>
-              <a:t> Cyclops</a:t>
-            </a:r>
-          </a:p>
-          <a:p>
-            <a:pPr algn="ctr"/>
-            <a:r>
-              <a:rPr lang="en-AU" dirty="0"/>
-              <a:t>First all-digital camera</a:t>
-            </a:r>
-          </a:p>
-          <a:p>
-            <a:pPr algn="ctr"/>
-            <a:r>
-              <a:rPr lang="en-AU" sz="1600" dirty="0"/>
-              <a:t>32x32 pixel resolution</a:t>
-            </a:r>
-          </a:p>
-        </p:txBody>
-      </p:sp>
-      <p:pic>
-        <p:nvPicPr>
-          <p:cNvPr id="11" name="Picture 10">
-            <a:extLst>
-              <a:ext uri="{FF2B5EF4-FFF2-40B4-BE49-F238E27FC236}">
-                <a16:creationId xmlns:a16="http://schemas.microsoft.com/office/drawing/2014/main" id="{32FB66A8-D26E-EF48-9547-F2EFC1841393}"/>
-              </a:ext>
-            </a:extLst>
-          </p:cNvPr>
-          <p:cNvPicPr>
-            <a:picLocks noChangeAspect="1"/>
-          </p:cNvPicPr>
-          <p:nvPr/>
-        </p:nvPicPr>
-        <p:blipFill>
-          <a:blip r:embed="rId4"/>
-          <a:stretch>
-            <a:fillRect/>
-          </a:stretch>
-        </p:blipFill>
-        <p:spPr>
-          <a:xfrm>
-            <a:off x="5187804" y="4567780"/>
-            <a:ext cx="1816392" cy="1925095"/>
-          </a:xfrm>
-          <a:prstGeom prst="rect">
-            <a:avLst/>
-          </a:prstGeom>
-        </p:spPr>
-      </p:pic>
-      <p:sp>
-        <p:nvSpPr>
-          <p:cNvPr id="22" name="TextBox 21">
-            <a:extLst>
-              <a:ext uri="{FF2B5EF4-FFF2-40B4-BE49-F238E27FC236}">
-                <a16:creationId xmlns:a16="http://schemas.microsoft.com/office/drawing/2014/main" id="{06079444-57ED-5F14-CFD9-E1818E6BFAE7}"/>
-              </a:ext>
-            </a:extLst>
-          </p:cNvPr>
-          <p:cNvSpPr txBox="1"/>
-          <p:nvPr/>
-        </p:nvSpPr>
-        <p:spPr>
-          <a:xfrm>
-            <a:off x="7004196" y="4969369"/>
-            <a:ext cx="3423875" cy="646331"/>
-          </a:xfrm>
-          <a:prstGeom prst="rect">
-            <a:avLst/>
-          </a:prstGeom>
-          <a:noFill/>
-        </p:spPr>
-        <p:txBody>
-          <a:bodyPr wrap="square" rtlCol="0">
-            <a:spAutoFit/>
-          </a:bodyPr>
-          <a:lstStyle/>
-          <a:p>
-            <a:r>
-              <a:rPr lang="en-CA" b="1" dirty="0"/>
-              <a:t>Betamax and VHS </a:t>
-            </a:r>
-            <a:br>
-              <a:rPr lang="en-CA" b="1" dirty="0"/>
-            </a:br>
-            <a:r>
-              <a:rPr lang="en-CA" dirty="0"/>
-              <a:t>Consumer video recorder formats</a:t>
-            </a:r>
-          </a:p>
-        </p:txBody>
-      </p:sp>
-    </p:spTree>
-    <p:extLst>
-      <p:ext uri="{BB962C8B-B14F-4D97-AF65-F5344CB8AC3E}">
-        <p14:creationId xmlns:p14="http://schemas.microsoft.com/office/powerpoint/2010/main" val="2492672385"/>
-      </p:ext>
-    </p:extLst>
-  </p:cSld>
-  <p:clrMapOvr>
-    <a:masterClrMapping/>
-  </p:clrMapOvr>
-</p:sld>
-</file>
-
-<file path=ppt/slides/slide6.xml><?xml version="1.0" encoding="utf-8"?>
-<p:sld xmlns:a="http://schemas.openxmlformats.org/drawingml/2006/main" xmlns:r="http://schemas.openxmlformats.org/officeDocument/2006/relationships" xmlns:p="http://schemas.openxmlformats.org/presentationml/2006/main">
-  <p:cSld>
-    <p:spTree>
-      <p:nvGrpSpPr>
-        <p:cNvPr id="1" name="">
-          <a:extLst>
-            <a:ext uri="{FF2B5EF4-FFF2-40B4-BE49-F238E27FC236}">
-              <a16:creationId xmlns:a16="http://schemas.microsoft.com/office/drawing/2014/main" id="{25D7E641-C830-9B6A-BCEF-B5F2FD08A4AB}"/>
-            </a:ext>
-          </a:extLst>
-        </p:cNvPr>
-        <p:cNvGrpSpPr/>
-        <p:nvPr/>
-      </p:nvGrpSpPr>
-      <p:grpSpPr>
-        <a:xfrm>
-          <a:off x="0" y="0"/>
-          <a:ext cx="0" cy="0"/>
-          <a:chOff x="0" y="0"/>
-          <a:chExt cx="0" cy="0"/>
-        </a:xfrm>
-      </p:grpSpPr>
-      <p:sp>
-        <p:nvSpPr>
-          <p:cNvPr id="2" name="Title 1">
-            <a:extLst>
-              <a:ext uri="{FF2B5EF4-FFF2-40B4-BE49-F238E27FC236}">
-                <a16:creationId xmlns:a16="http://schemas.microsoft.com/office/drawing/2014/main" id="{B992DF99-E075-E9BB-73A0-D925195C473E}"/>
-              </a:ext>
-            </a:extLst>
-          </p:cNvPr>
-          <p:cNvSpPr>
-            <a:spLocks noGrp="1"/>
-          </p:cNvSpPr>
-          <p:nvPr>
-            <p:ph type="title"/>
-          </p:nvPr>
-        </p:nvSpPr>
-        <p:spPr/>
-        <p:txBody>
-          <a:bodyPr/>
-          <a:lstStyle/>
-          <a:p>
-            <a:r>
-              <a:rPr lang="en-CA" dirty="0"/>
-              <a:t>1975: First Appearances</a:t>
-            </a:r>
-            <a:endParaRPr lang="en-AU" dirty="0"/>
-          </a:p>
-        </p:txBody>
-      </p:sp>
-      <p:pic>
-        <p:nvPicPr>
-          <p:cNvPr id="4" name="Picture 3">
-            <a:extLst>
-              <a:ext uri="{FF2B5EF4-FFF2-40B4-BE49-F238E27FC236}">
-                <a16:creationId xmlns:a16="http://schemas.microsoft.com/office/drawing/2014/main" id="{9C35A337-C070-B474-D653-4E1492991C09}"/>
-              </a:ext>
-            </a:extLst>
-          </p:cNvPr>
-          <p:cNvPicPr>
-            <a:picLocks noChangeAspect="1"/>
-          </p:cNvPicPr>
-          <p:nvPr/>
-        </p:nvPicPr>
-        <p:blipFill>
-          <a:blip r:embed="rId2"/>
-          <a:stretch>
-            <a:fillRect/>
-          </a:stretch>
-        </p:blipFill>
-        <p:spPr>
-          <a:xfrm>
-            <a:off x="340472" y="4567780"/>
-            <a:ext cx="4220164" cy="1867161"/>
-          </a:xfrm>
-          <a:prstGeom prst="rect">
-            <a:avLst/>
-          </a:prstGeom>
-        </p:spPr>
-      </p:pic>
-      <p:pic>
-        <p:nvPicPr>
-          <p:cNvPr id="7" name="Picture 6">
-            <a:extLst>
-              <a:ext uri="{FF2B5EF4-FFF2-40B4-BE49-F238E27FC236}">
-                <a16:creationId xmlns:a16="http://schemas.microsoft.com/office/drawing/2014/main" id="{8A7B7B42-AB41-569B-7C9C-53B22FB1C3DD}"/>
-              </a:ext>
-            </a:extLst>
-          </p:cNvPr>
-          <p:cNvPicPr>
-            <a:picLocks noChangeAspect="1"/>
-          </p:cNvPicPr>
-          <p:nvPr/>
-        </p:nvPicPr>
-        <p:blipFill>
-          <a:blip r:embed="rId3"/>
-          <a:stretch>
-            <a:fillRect/>
-          </a:stretch>
-        </p:blipFill>
-        <p:spPr>
-          <a:xfrm>
-            <a:off x="7631365" y="720098"/>
-            <a:ext cx="3930910" cy="3201351"/>
-          </a:xfrm>
-          <a:prstGeom prst="rect">
-            <a:avLst/>
-          </a:prstGeom>
-        </p:spPr>
-      </p:pic>
-      <p:sp>
-        <p:nvSpPr>
-          <p:cNvPr id="16" name="TextBox 15">
-            <a:extLst>
-              <a:ext uri="{FF2B5EF4-FFF2-40B4-BE49-F238E27FC236}">
-                <a16:creationId xmlns:a16="http://schemas.microsoft.com/office/drawing/2014/main" id="{EA03230F-9FB4-6236-A8D2-B774852BBEB4}"/>
-              </a:ext>
-            </a:extLst>
-          </p:cNvPr>
-          <p:cNvSpPr txBox="1"/>
-          <p:nvPr/>
-        </p:nvSpPr>
-        <p:spPr>
-          <a:xfrm>
-            <a:off x="7631364" y="3921449"/>
-            <a:ext cx="3930909" cy="646331"/>
-          </a:xfrm>
-          <a:prstGeom prst="rect">
-            <a:avLst/>
-          </a:prstGeom>
-          <a:noFill/>
-        </p:spPr>
-        <p:txBody>
-          <a:bodyPr wrap="square" rtlCol="0">
-            <a:spAutoFit/>
-          </a:bodyPr>
-          <a:lstStyle/>
-          <a:p>
-            <a:pPr algn="ctr"/>
-            <a:r>
-              <a:rPr lang="en-CA" b="1" dirty="0"/>
-              <a:t>Colossal Cave Adventure</a:t>
-            </a:r>
-          </a:p>
-          <a:p>
-            <a:pPr algn="ctr"/>
-            <a:r>
-              <a:rPr lang="en-AU" dirty="0"/>
-              <a:t>First text-based role-playing game</a:t>
-            </a:r>
-          </a:p>
-        </p:txBody>
-      </p:sp>
-      <p:pic>
-        <p:nvPicPr>
-          <p:cNvPr id="9" name="Picture 8">
-            <a:extLst>
-              <a:ext uri="{FF2B5EF4-FFF2-40B4-BE49-F238E27FC236}">
-                <a16:creationId xmlns:a16="http://schemas.microsoft.com/office/drawing/2014/main" id="{6157C85A-64DF-F13C-942C-CA9C12581A8F}"/>
-              </a:ext>
-            </a:extLst>
-          </p:cNvPr>
-          <p:cNvPicPr>
-            <a:picLocks noChangeAspect="1"/>
-          </p:cNvPicPr>
-          <p:nvPr/>
-        </p:nvPicPr>
-        <p:blipFill>
-          <a:blip r:embed="rId4"/>
-          <a:stretch>
-            <a:fillRect/>
-          </a:stretch>
-        </p:blipFill>
-        <p:spPr>
-          <a:xfrm>
-            <a:off x="2991197" y="1399284"/>
-            <a:ext cx="2282158" cy="1923271"/>
-          </a:xfrm>
-          <a:prstGeom prst="rect">
-            <a:avLst/>
-          </a:prstGeom>
-        </p:spPr>
-      </p:pic>
-      <p:sp>
-        <p:nvSpPr>
-          <p:cNvPr id="19" name="TextBox 18">
-            <a:extLst>
-              <a:ext uri="{FF2B5EF4-FFF2-40B4-BE49-F238E27FC236}">
-                <a16:creationId xmlns:a16="http://schemas.microsoft.com/office/drawing/2014/main" id="{7E41BB0B-3053-10BC-0F8E-7E59AD8FD9F4}"/>
-              </a:ext>
-            </a:extLst>
-          </p:cNvPr>
-          <p:cNvSpPr txBox="1"/>
-          <p:nvPr/>
-        </p:nvSpPr>
-        <p:spPr>
-          <a:xfrm>
-            <a:off x="2987733" y="3322555"/>
-            <a:ext cx="2282158" cy="923330"/>
-          </a:xfrm>
-          <a:prstGeom prst="rect">
-            <a:avLst/>
-          </a:prstGeom>
-          <a:noFill/>
-        </p:spPr>
-        <p:txBody>
-          <a:bodyPr wrap="square" rtlCol="0">
-            <a:spAutoFit/>
-          </a:bodyPr>
-          <a:lstStyle/>
-          <a:p>
-            <a:pPr algn="ctr"/>
-            <a:r>
-              <a:rPr lang="en-CA" b="1" dirty="0" err="1"/>
-              <a:t>Cromemco</a:t>
-            </a:r>
-            <a:r>
-              <a:rPr lang="en-CA" b="1" dirty="0"/>
-              <a:t> Cyclops</a:t>
-            </a:r>
-          </a:p>
-          <a:p>
-            <a:pPr algn="ctr"/>
-            <a:r>
-              <a:rPr lang="en-AU" dirty="0"/>
-              <a:t>First all-digital camera</a:t>
-            </a:r>
-          </a:p>
-          <a:p>
-            <a:pPr algn="ctr"/>
-            <a:r>
-              <a:rPr lang="en-AU" sz="1600" dirty="0"/>
-              <a:t>32x32 pixel resolution</a:t>
-            </a:r>
-          </a:p>
-        </p:txBody>
-      </p:sp>
-      <p:pic>
-        <p:nvPicPr>
-          <p:cNvPr id="11" name="Picture 10">
-            <a:extLst>
-              <a:ext uri="{FF2B5EF4-FFF2-40B4-BE49-F238E27FC236}">
-                <a16:creationId xmlns:a16="http://schemas.microsoft.com/office/drawing/2014/main" id="{191B3EBF-7C46-B2D3-42A3-59658CADDBDF}"/>
-              </a:ext>
-            </a:extLst>
-          </p:cNvPr>
-          <p:cNvPicPr>
-            <a:picLocks noChangeAspect="1"/>
-          </p:cNvPicPr>
-          <p:nvPr/>
-        </p:nvPicPr>
-        <p:blipFill>
-          <a:blip r:embed="rId5"/>
-          <a:stretch>
-            <a:fillRect/>
-          </a:stretch>
-        </p:blipFill>
-        <p:spPr>
-          <a:xfrm>
-            <a:off x="5187804" y="4567780"/>
-            <a:ext cx="1816392" cy="1925095"/>
-          </a:xfrm>
-          <a:prstGeom prst="rect">
-            <a:avLst/>
-          </a:prstGeom>
-        </p:spPr>
-      </p:pic>
-      <p:sp>
-        <p:nvSpPr>
-          <p:cNvPr id="22" name="TextBox 21">
-            <a:extLst>
-              <a:ext uri="{FF2B5EF4-FFF2-40B4-BE49-F238E27FC236}">
-                <a16:creationId xmlns:a16="http://schemas.microsoft.com/office/drawing/2014/main" id="{8D273361-BDC0-7655-3F60-CA98A038E2AF}"/>
-              </a:ext>
-            </a:extLst>
-          </p:cNvPr>
-          <p:cNvSpPr txBox="1"/>
-          <p:nvPr/>
-        </p:nvSpPr>
-        <p:spPr>
-          <a:xfrm>
-            <a:off x="7004196" y="4969369"/>
-            <a:ext cx="3423875" cy="646331"/>
-          </a:xfrm>
-          <a:prstGeom prst="rect">
-            <a:avLst/>
-          </a:prstGeom>
-          <a:noFill/>
-        </p:spPr>
-        <p:txBody>
-          <a:bodyPr wrap="square" rtlCol="0">
-            <a:spAutoFit/>
-          </a:bodyPr>
-          <a:lstStyle/>
-          <a:p>
-            <a:r>
-              <a:rPr lang="en-CA" b="1" dirty="0"/>
-              <a:t>Betamax and VHS </a:t>
-            </a:r>
-            <a:br>
-              <a:rPr lang="en-CA" b="1" dirty="0"/>
-            </a:br>
-            <a:r>
-              <a:rPr lang="en-CA" dirty="0"/>
-              <a:t>Consumer video recorder formats</a:t>
-            </a:r>
-          </a:p>
-        </p:txBody>
-      </p:sp>
-    </p:spTree>
-    <p:extLst>
-      <p:ext uri="{BB962C8B-B14F-4D97-AF65-F5344CB8AC3E}">
-        <p14:creationId xmlns:p14="http://schemas.microsoft.com/office/powerpoint/2010/main" val="2628330378"/>
-      </p:ext>
-    </p:extLst>
-  </p:cSld>
-  <p:clrMapOvr>
-    <a:masterClrMapping/>
-  </p:clrMapOvr>
-</p:sld>
-</file>
-
-<file path=ppt/slides/slide7.xml><?xml version="1.0" encoding="utf-8"?>
-<p:sld xmlns:a="http://schemas.openxmlformats.org/drawingml/2006/main" xmlns:r="http://schemas.openxmlformats.org/officeDocument/2006/relationships" xmlns:p="http://schemas.openxmlformats.org/presentationml/2006/main">
-  <p:cSld>
-    <p:spTree>
-      <p:nvGrpSpPr>
-        <p:cNvPr id="1" name=""/>
-        <p:cNvGrpSpPr/>
-        <p:nvPr/>
-      </p:nvGrpSpPr>
-      <p:grpSpPr>
-        <a:xfrm>
-          <a:off x="0" y="0"/>
-          <a:ext cx="0" cy="0"/>
-          <a:chOff x="0" y="0"/>
-          <a:chExt cx="0" cy="0"/>
-        </a:xfrm>
-      </p:grpSpPr>
-      <p:sp>
-        <p:nvSpPr>
-          <p:cNvPr id="2" name="Title 1">
-            <a:extLst>
-              <a:ext uri="{FF2B5EF4-FFF2-40B4-BE49-F238E27FC236}">
-                <a16:creationId xmlns:a16="http://schemas.microsoft.com/office/drawing/2014/main" id="{9E374E6F-0FF1-43DD-A06C-EF7571CCEA89}"/>
-              </a:ext>
-            </a:extLst>
-          </p:cNvPr>
-          <p:cNvSpPr>
-            <a:spLocks noGrp="1"/>
-          </p:cNvSpPr>
-          <p:nvPr>
-            <p:ph type="title"/>
-          </p:nvPr>
-        </p:nvSpPr>
-        <p:spPr/>
-        <p:txBody>
-          <a:bodyPr/>
-          <a:lstStyle/>
-          <a:p>
-            <a:r>
-              <a:rPr lang="en-CA" dirty="0"/>
-              <a:t>1975: Highest-grossing Arcade Game</a:t>
-            </a:r>
-            <a:endParaRPr lang="en-AU" dirty="0"/>
-          </a:p>
-        </p:txBody>
-      </p:sp>
       <p:sp>
         <p:nvSpPr>
           <p:cNvPr id="3" name="TextBox 2">
             <a:extLst>
               <a:ext uri="{FF2B5EF4-FFF2-40B4-BE49-F238E27FC236}">
-                <a16:creationId xmlns:a16="http://schemas.microsoft.com/office/drawing/2014/main" id="{4B9D1E49-D2CE-4AA9-B391-099DA1AD682D}"/>
+                <a16:creationId xmlns:a16="http://schemas.microsoft.com/office/drawing/2014/main" id="{B3D92AB6-F07D-87F0-D601-50DF4AD43027}"/>
               </a:ext>
             </a:extLst>
           </p:cNvPr>
@@ -7241,7 +6059,7 @@
           <p:cNvPr id="3074" name="Picture 2">
             <a:extLst>
               <a:ext uri="{FF2B5EF4-FFF2-40B4-BE49-F238E27FC236}">
-                <a16:creationId xmlns:a16="http://schemas.microsoft.com/office/drawing/2014/main" id="{EF88CC97-0AAA-E040-AC25-5BBD3D887DF3}"/>
+                <a16:creationId xmlns:a16="http://schemas.microsoft.com/office/drawing/2014/main" id="{63B98B37-A10B-823D-6293-9B1136A8315A}"/>
               </a:ext>
             </a:extLst>
           </p:cNvPr>
@@ -7288,7 +6106,7 @@
           <p:cNvPr id="3076" name="Picture 4">
             <a:extLst>
               <a:ext uri="{FF2B5EF4-FFF2-40B4-BE49-F238E27FC236}">
-                <a16:creationId xmlns:a16="http://schemas.microsoft.com/office/drawing/2014/main" id="{067363C7-022B-1249-EA60-59CE39F34A44}"/>
+                <a16:creationId xmlns:a16="http://schemas.microsoft.com/office/drawing/2014/main" id="{396E5B2E-7DD0-E3A0-0A7F-6412675B2009}"/>
               </a:ext>
             </a:extLst>
           </p:cNvPr>
@@ -7333,7 +6151,7 @@
     </p:spTree>
     <p:extLst>
       <p:ext uri="{BB962C8B-B14F-4D97-AF65-F5344CB8AC3E}">
-        <p14:creationId xmlns:p14="http://schemas.microsoft.com/office/powerpoint/2010/main" val="2446982689"/>
+        <p14:creationId xmlns:p14="http://schemas.microsoft.com/office/powerpoint/2010/main" val="4067275813"/>
       </p:ext>
     </p:extLst>
   </p:cSld>
@@ -7499,7 +6317,7 @@
 </p:sld>
 </file>
 
-<file path=ppt/slides/slide8.xml><?xml version="1.0" encoding="utf-8"?>
+<file path=ppt/slides/slide2.xml><?xml version="1.0" encoding="utf-8"?>
 <p:sld xmlns:a="http://schemas.openxmlformats.org/drawingml/2006/main" xmlns:r="http://schemas.openxmlformats.org/officeDocument/2006/relationships" xmlns:p="http://schemas.openxmlformats.org/presentationml/2006/main">
   <p:cSld>
     <p:spTree>
@@ -7518,10 +6336,10 @@
       </p:grpSpPr>
       <p:sp>
         <p:nvSpPr>
-          <p:cNvPr id="2" name="Title 1">
-            <a:extLst>
-              <a:ext uri="{FF2B5EF4-FFF2-40B4-BE49-F238E27FC236}">
-                <a16:creationId xmlns:a16="http://schemas.microsoft.com/office/drawing/2014/main" id="{9E374E6F-0FF1-43DD-A06C-EF7571CCEA89}"/>
+          <p:cNvPr id="4" name="Title 3">
+            <a:extLst>
+              <a:ext uri="{FF2B5EF4-FFF2-40B4-BE49-F238E27FC236}">
+                <a16:creationId xmlns:a16="http://schemas.microsoft.com/office/drawing/2014/main" id="{CB105B6D-9708-4D3F-8738-4E92FD6BE38D}"/>
               </a:ext>
             </a:extLst>
           </p:cNvPr>
@@ -7532,6 +6350,261 @@
             <p:ph type="title"/>
           </p:nvPr>
         </p:nvSpPr>
+        <p:spPr>
+          <a:xfrm>
+            <a:off x="0" y="2259239"/>
+            <a:ext cx="12192000" cy="1325563"/>
+          </a:xfrm>
+        </p:spPr>
+        <p:txBody>
+          <a:bodyPr>
+            <a:normAutofit/>
+          </a:bodyPr>
+          <a:lstStyle/>
+          <a:p>
+            <a:pPr algn="ctr"/>
+            <a:r>
+              <a:rPr lang="en-CA" sz="6600" dirty="0"/>
+              <a:t>What was going on in 1960?</a:t>
+            </a:r>
+            <a:endParaRPr lang="en-AU" sz="6600" dirty="0"/>
+          </a:p>
+        </p:txBody>
+      </p:sp>
+    </p:spTree>
+    <p:extLst>
+      <p:ext uri="{BB962C8B-B14F-4D97-AF65-F5344CB8AC3E}">
+        <p14:creationId xmlns:p14="http://schemas.microsoft.com/office/powerpoint/2010/main" val="1247466648"/>
+      </p:ext>
+    </p:extLst>
+  </p:cSld>
+  <p:clrMapOvr>
+    <a:masterClrMapping/>
+  </p:clrMapOvr>
+</p:sld>
+</file>
+
+<file path=ppt/slides/slide20.xml><?xml version="1.0" encoding="utf-8"?>
+<p:sld xmlns:a="http://schemas.openxmlformats.org/drawingml/2006/main" xmlns:r="http://schemas.openxmlformats.org/officeDocument/2006/relationships" xmlns:p="http://schemas.openxmlformats.org/presentationml/2006/main">
+  <p:cSld>
+    <p:spTree>
+      <p:nvGrpSpPr>
+        <p:cNvPr id="1" name=""/>
+        <p:cNvGrpSpPr/>
+        <p:nvPr/>
+      </p:nvGrpSpPr>
+      <p:grpSpPr>
+        <a:xfrm>
+          <a:off x="0" y="0"/>
+          <a:ext cx="0" cy="0"/>
+          <a:chOff x="0" y="0"/>
+          <a:chExt cx="0" cy="0"/>
+        </a:xfrm>
+      </p:grpSpPr>
+      <p:sp>
+        <p:nvSpPr>
+          <p:cNvPr id="2" name="Title 1">
+            <a:extLst>
+              <a:ext uri="{FF2B5EF4-FFF2-40B4-BE49-F238E27FC236}">
+                <a16:creationId xmlns:a16="http://schemas.microsoft.com/office/drawing/2014/main" id="{9E374E6F-0FF1-43DD-A06C-EF7571CCEA89}"/>
+              </a:ext>
+            </a:extLst>
+          </p:cNvPr>
+          <p:cNvSpPr>
+            <a:spLocks noGrp="1"/>
+          </p:cNvSpPr>
+          <p:nvPr>
+            <p:ph type="title"/>
+          </p:nvPr>
+        </p:nvSpPr>
+        <p:spPr/>
+        <p:txBody>
+          <a:bodyPr/>
+          <a:lstStyle/>
+          <a:p>
+            <a:r>
+              <a:rPr lang="en-CA" dirty="0"/>
+              <a:t>1975: Highest-Grossing Movie</a:t>
+            </a:r>
+            <a:endParaRPr lang="en-AU" dirty="0"/>
+          </a:p>
+        </p:txBody>
+      </p:sp>
+      <p:sp>
+        <p:nvSpPr>
+          <p:cNvPr id="3" name="TextBox 2">
+            <a:extLst>
+              <a:ext uri="{FF2B5EF4-FFF2-40B4-BE49-F238E27FC236}">
+                <a16:creationId xmlns:a16="http://schemas.microsoft.com/office/drawing/2014/main" id="{A315D8FF-BE94-FDBE-881E-CA83E30E00B4}"/>
+              </a:ext>
+            </a:extLst>
+          </p:cNvPr>
+          <p:cNvSpPr txBox="1"/>
+          <p:nvPr/>
+        </p:nvSpPr>
+        <p:spPr>
+          <a:xfrm>
+            <a:off x="5766422" y="3075057"/>
+            <a:ext cx="659155" cy="707886"/>
+          </a:xfrm>
+          <a:prstGeom prst="rect">
+            <a:avLst/>
+          </a:prstGeom>
+          <a:noFill/>
+        </p:spPr>
+        <p:txBody>
+          <a:bodyPr wrap="none" rtlCol="0">
+            <a:spAutoFit/>
+          </a:bodyPr>
+          <a:lstStyle/>
+          <a:p>
+            <a:pPr algn="ctr"/>
+            <a:r>
+              <a:rPr lang="en-CA" sz="4000" b="1" dirty="0"/>
+              <a:t>??</a:t>
+            </a:r>
+            <a:endParaRPr lang="en-AU" sz="3200" dirty="0"/>
+          </a:p>
+        </p:txBody>
+      </p:sp>
+    </p:spTree>
+    <p:extLst>
+      <p:ext uri="{BB962C8B-B14F-4D97-AF65-F5344CB8AC3E}">
+        <p14:creationId xmlns:p14="http://schemas.microsoft.com/office/powerpoint/2010/main" val="4198230947"/>
+      </p:ext>
+    </p:extLst>
+  </p:cSld>
+  <p:clrMapOvr>
+    <a:masterClrMapping/>
+  </p:clrMapOvr>
+  <p:timing>
+    <p:tnLst>
+      <p:par>
+        <p:cTn id="1" dur="indefinite" restart="never" nodeType="tmRoot">
+          <p:childTnLst>
+            <p:seq concurrent="1" nextAc="seek">
+              <p:cTn id="2" dur="indefinite" nodeType="mainSeq">
+                <p:childTnLst>
+                  <p:par>
+                    <p:cTn id="3" fill="hold">
+                      <p:stCondLst>
+                        <p:cond delay="indefinite"/>
+                      </p:stCondLst>
+                      <p:childTnLst>
+                        <p:par>
+                          <p:cTn id="4" fill="hold">
+                            <p:stCondLst>
+                              <p:cond delay="0"/>
+                            </p:stCondLst>
+                            <p:childTnLst>
+                              <p:par>
+                                <p:cTn id="5" presetID="10" presetClass="entr" presetSubtype="0" fill="hold" grpId="0" nodeType="clickEffect">
+                                  <p:stCondLst>
+                                    <p:cond delay="0"/>
+                                  </p:stCondLst>
+                                  <p:childTnLst>
+                                    <p:set>
+                                      <p:cBhvr>
+                                        <p:cTn id="6" dur="1" fill="hold">
+                                          <p:stCondLst>
+                                            <p:cond delay="0"/>
+                                          </p:stCondLst>
+                                        </p:cTn>
+                                        <p:tgtEl>
+                                          <p:spTgt spid="3"/>
+                                        </p:tgtEl>
+                                        <p:attrNameLst>
+                                          <p:attrName>style.visibility</p:attrName>
+                                        </p:attrNameLst>
+                                      </p:cBhvr>
+                                      <p:to>
+                                        <p:strVal val="visible"/>
+                                      </p:to>
+                                    </p:set>
+                                    <p:animEffect transition="in" filter="fade">
+                                      <p:cBhvr>
+                                        <p:cTn id="7" dur="500"/>
+                                        <p:tgtEl>
+                                          <p:spTgt spid="3"/>
+                                        </p:tgtEl>
+                                      </p:cBhvr>
+                                    </p:animEffect>
+                                  </p:childTnLst>
+                                </p:cTn>
+                              </p:par>
+                            </p:childTnLst>
+                          </p:cTn>
+                        </p:par>
+                      </p:childTnLst>
+                    </p:cTn>
+                  </p:par>
+                </p:childTnLst>
+              </p:cTn>
+              <p:prevCondLst>
+                <p:cond evt="onPrev" delay="0">
+                  <p:tgtEl>
+                    <p:sldTgt/>
+                  </p:tgtEl>
+                </p:cond>
+              </p:prevCondLst>
+              <p:nextCondLst>
+                <p:cond evt="onNext" delay="0">
+                  <p:tgtEl>
+                    <p:sldTgt/>
+                  </p:tgtEl>
+                </p:cond>
+              </p:nextCondLst>
+            </p:seq>
+          </p:childTnLst>
+        </p:cTn>
+      </p:par>
+    </p:tnLst>
+    <p:bldLst>
+      <p:bldP spid="3" grpId="0"/>
+    </p:bldLst>
+  </p:timing>
+</p:sld>
+</file>
+
+<file path=ppt/slides/slide21.xml><?xml version="1.0" encoding="utf-8"?>
+<p:sld xmlns:a="http://schemas.openxmlformats.org/drawingml/2006/main" xmlns:r="http://schemas.openxmlformats.org/officeDocument/2006/relationships" xmlns:p="http://schemas.openxmlformats.org/presentationml/2006/main">
+  <p:cSld>
+    <p:spTree>
+      <p:nvGrpSpPr>
+        <p:cNvPr id="1" name="">
+          <a:extLst>
+            <a:ext uri="{FF2B5EF4-FFF2-40B4-BE49-F238E27FC236}">
+              <a16:creationId xmlns:a16="http://schemas.microsoft.com/office/drawing/2014/main" id="{97B5A9C8-351C-3AB1-A554-D1FCBDD33EB8}"/>
+            </a:ext>
+          </a:extLst>
+        </p:cNvPr>
+        <p:cNvGrpSpPr/>
+        <p:nvPr/>
+      </p:nvGrpSpPr>
+      <p:grpSpPr>
+        <a:xfrm>
+          <a:off x="0" y="0"/>
+          <a:ext cx="0" cy="0"/>
+          <a:chOff x="0" y="0"/>
+          <a:chExt cx="0" cy="0"/>
+        </a:xfrm>
+      </p:grpSpPr>
+      <p:sp>
+        <p:nvSpPr>
+          <p:cNvPr id="2" name="Title 1">
+            <a:extLst>
+              <a:ext uri="{FF2B5EF4-FFF2-40B4-BE49-F238E27FC236}">
+                <a16:creationId xmlns:a16="http://schemas.microsoft.com/office/drawing/2014/main" id="{BF29E298-5336-AB2A-AE4D-F1912E8AEE66}"/>
+              </a:ext>
+            </a:extLst>
+          </p:cNvPr>
+          <p:cNvSpPr>
+            <a:spLocks noGrp="1"/>
+          </p:cNvSpPr>
+          <p:nvPr>
+            <p:ph type="title"/>
+          </p:nvPr>
+        </p:nvSpPr>
         <p:spPr/>
         <p:txBody>
           <a:bodyPr/>
@@ -7550,7 +6623,7 @@
           <p:cNvPr id="4098" name="Picture 2" descr="Movie poster shows a woman in the ocean swimming to the right. Below her is a large shark, and only its head and open mouth with teeth can be seen. Within the image is the film's title and above it in a surrounding black background is the phrase &quot;The most terrifying motion picture from the terrifying No. 1 best seller.&quot; The bottom of the image details the starring actors and lists credits and the MPAA rating.">
             <a:extLst>
               <a:ext uri="{FF2B5EF4-FFF2-40B4-BE49-F238E27FC236}">
-                <a16:creationId xmlns:a16="http://schemas.microsoft.com/office/drawing/2014/main" id="{FBA016FE-4BE5-0984-C7D3-5EB3DA5D5764}"/>
+                <a16:creationId xmlns:a16="http://schemas.microsoft.com/office/drawing/2014/main" id="{2CC24690-7567-5B8B-1B13-95FE86685437}"/>
               </a:ext>
             </a:extLst>
           </p:cNvPr>
@@ -7595,7 +6668,7 @@
     </p:spTree>
     <p:extLst>
       <p:ext uri="{BB962C8B-B14F-4D97-AF65-F5344CB8AC3E}">
-        <p14:creationId xmlns:p14="http://schemas.microsoft.com/office/powerpoint/2010/main" val="4198230947"/>
+        <p14:creationId xmlns:p14="http://schemas.microsoft.com/office/powerpoint/2010/main" val="1596790069"/>
       </p:ext>
     </p:extLst>
   </p:cSld>
@@ -7691,7 +6764,7 @@
 </p:sld>
 </file>
 
-<file path=ppt/slides/slide9.xml><?xml version="1.0" encoding="utf-8"?>
+<file path=ppt/slides/slide22.xml><?xml version="1.0" encoding="utf-8"?>
 <p:sld xmlns:a="http://schemas.openxmlformats.org/drawingml/2006/main" xmlns:r="http://schemas.openxmlformats.org/officeDocument/2006/relationships" xmlns:p="http://schemas.openxmlformats.org/presentationml/2006/main">
   <p:cSld>
     <p:spTree>
@@ -7739,10 +6812,198 @@
       </p:sp>
       <p:sp>
         <p:nvSpPr>
+          <p:cNvPr id="4" name="TextBox 3">
+            <a:extLst>
+              <a:ext uri="{FF2B5EF4-FFF2-40B4-BE49-F238E27FC236}">
+                <a16:creationId xmlns:a16="http://schemas.microsoft.com/office/drawing/2014/main" id="{0C185E8B-99DD-A06A-B565-02DD76EDD5F2}"/>
+              </a:ext>
+            </a:extLst>
+          </p:cNvPr>
+          <p:cNvSpPr txBox="1"/>
+          <p:nvPr/>
+        </p:nvSpPr>
+        <p:spPr>
+          <a:xfrm>
+            <a:off x="5766422" y="3075057"/>
+            <a:ext cx="659155" cy="707886"/>
+          </a:xfrm>
+          <a:prstGeom prst="rect">
+            <a:avLst/>
+          </a:prstGeom>
+          <a:noFill/>
+        </p:spPr>
+        <p:txBody>
+          <a:bodyPr wrap="none" rtlCol="0">
+            <a:spAutoFit/>
+          </a:bodyPr>
+          <a:lstStyle/>
+          <a:p>
+            <a:pPr algn="ctr"/>
+            <a:r>
+              <a:rPr lang="en-CA" sz="4000" b="1" dirty="0"/>
+              <a:t>??</a:t>
+            </a:r>
+            <a:endParaRPr lang="en-AU" sz="3200" dirty="0"/>
+          </a:p>
+        </p:txBody>
+      </p:sp>
+    </p:spTree>
+    <p:extLst>
+      <p:ext uri="{BB962C8B-B14F-4D97-AF65-F5344CB8AC3E}">
+        <p14:creationId xmlns:p14="http://schemas.microsoft.com/office/powerpoint/2010/main" val="390346067"/>
+      </p:ext>
+    </p:extLst>
+  </p:cSld>
+  <p:clrMapOvr>
+    <a:masterClrMapping/>
+  </p:clrMapOvr>
+  <p:timing>
+    <p:tnLst>
+      <p:par>
+        <p:cTn id="1" dur="indefinite" restart="never" nodeType="tmRoot">
+          <p:childTnLst>
+            <p:seq concurrent="1" nextAc="seek">
+              <p:cTn id="2" dur="indefinite" nodeType="mainSeq">
+                <p:childTnLst>
+                  <p:par>
+                    <p:cTn id="3" fill="hold">
+                      <p:stCondLst>
+                        <p:cond delay="indefinite"/>
+                      </p:stCondLst>
+                      <p:childTnLst>
+                        <p:par>
+                          <p:cTn id="4" fill="hold">
+                            <p:stCondLst>
+                              <p:cond delay="0"/>
+                            </p:stCondLst>
+                            <p:childTnLst>
+                              <p:par>
+                                <p:cTn id="5" presetID="10" presetClass="entr" presetSubtype="0" fill="hold" grpId="0" nodeType="clickEffect">
+                                  <p:stCondLst>
+                                    <p:cond delay="0"/>
+                                  </p:stCondLst>
+                                  <p:childTnLst>
+                                    <p:set>
+                                      <p:cBhvr>
+                                        <p:cTn id="6" dur="1" fill="hold">
+                                          <p:stCondLst>
+                                            <p:cond delay="0"/>
+                                          </p:stCondLst>
+                                        </p:cTn>
+                                        <p:tgtEl>
+                                          <p:spTgt spid="4"/>
+                                        </p:tgtEl>
+                                        <p:attrNameLst>
+                                          <p:attrName>style.visibility</p:attrName>
+                                        </p:attrNameLst>
+                                      </p:cBhvr>
+                                      <p:to>
+                                        <p:strVal val="visible"/>
+                                      </p:to>
+                                    </p:set>
+                                    <p:animEffect transition="in" filter="fade">
+                                      <p:cBhvr>
+                                        <p:cTn id="7" dur="500"/>
+                                        <p:tgtEl>
+                                          <p:spTgt spid="4"/>
+                                        </p:tgtEl>
+                                      </p:cBhvr>
+                                    </p:animEffect>
+                                  </p:childTnLst>
+                                </p:cTn>
+                              </p:par>
+                            </p:childTnLst>
+                          </p:cTn>
+                        </p:par>
+                      </p:childTnLst>
+                    </p:cTn>
+                  </p:par>
+                </p:childTnLst>
+              </p:cTn>
+              <p:prevCondLst>
+                <p:cond evt="onPrev" delay="0">
+                  <p:tgtEl>
+                    <p:sldTgt/>
+                  </p:tgtEl>
+                </p:cond>
+              </p:prevCondLst>
+              <p:nextCondLst>
+                <p:cond evt="onNext" delay="0">
+                  <p:tgtEl>
+                    <p:sldTgt/>
+                  </p:tgtEl>
+                </p:cond>
+              </p:nextCondLst>
+            </p:seq>
+          </p:childTnLst>
+        </p:cTn>
+      </p:par>
+    </p:tnLst>
+    <p:bldLst>
+      <p:bldP spid="4" grpId="0"/>
+    </p:bldLst>
+  </p:timing>
+</p:sld>
+</file>
+
+<file path=ppt/slides/slide23.xml><?xml version="1.0" encoding="utf-8"?>
+<p:sld xmlns:a="http://schemas.openxmlformats.org/drawingml/2006/main" xmlns:r="http://schemas.openxmlformats.org/officeDocument/2006/relationships" xmlns:p="http://schemas.openxmlformats.org/presentationml/2006/main">
+  <p:cSld>
+    <p:spTree>
+      <p:nvGrpSpPr>
+        <p:cNvPr id="1" name="">
+          <a:extLst>
+            <a:ext uri="{FF2B5EF4-FFF2-40B4-BE49-F238E27FC236}">
+              <a16:creationId xmlns:a16="http://schemas.microsoft.com/office/drawing/2014/main" id="{14A1F0EC-34AD-4B11-3E66-AF2E7ACAF0B3}"/>
+            </a:ext>
+          </a:extLst>
+        </p:cNvPr>
+        <p:cNvGrpSpPr/>
+        <p:nvPr/>
+      </p:nvGrpSpPr>
+      <p:grpSpPr>
+        <a:xfrm>
+          <a:off x="0" y="0"/>
+          <a:ext cx="0" cy="0"/>
+          <a:chOff x="0" y="0"/>
+          <a:chExt cx="0" cy="0"/>
+        </a:xfrm>
+      </p:grpSpPr>
+      <p:sp>
+        <p:nvSpPr>
+          <p:cNvPr id="2" name="Title 1">
+            <a:extLst>
+              <a:ext uri="{FF2B5EF4-FFF2-40B4-BE49-F238E27FC236}">
+                <a16:creationId xmlns:a16="http://schemas.microsoft.com/office/drawing/2014/main" id="{0F398806-1083-6018-EEE7-0FC0C16EF443}"/>
+              </a:ext>
+            </a:extLst>
+          </p:cNvPr>
+          <p:cNvSpPr>
+            <a:spLocks noGrp="1"/>
+          </p:cNvSpPr>
+          <p:nvPr>
+            <p:ph type="title"/>
+          </p:nvPr>
+        </p:nvSpPr>
+        <p:spPr/>
+        <p:txBody>
+          <a:bodyPr/>
+          <a:lstStyle/>
+          <a:p>
+            <a:r>
+              <a:rPr lang="en-CA" dirty="0"/>
+              <a:t>1975: Most Popular Song</a:t>
+            </a:r>
+            <a:endParaRPr lang="en-AU" dirty="0"/>
+          </a:p>
+        </p:txBody>
+      </p:sp>
+      <p:sp>
+        <p:nvSpPr>
           <p:cNvPr id="3" name="TextBox 2">
             <a:extLst>
               <a:ext uri="{FF2B5EF4-FFF2-40B4-BE49-F238E27FC236}">
-                <a16:creationId xmlns:a16="http://schemas.microsoft.com/office/drawing/2014/main" id="{44141B78-E7ED-4D2B-B858-4927CEC46631}"/>
+                <a16:creationId xmlns:a16="http://schemas.microsoft.com/office/drawing/2014/main" id="{E1E65513-BCCE-213D-0F04-BA7D2B00AC1F}"/>
               </a:ext>
             </a:extLst>
           </p:cNvPr>
@@ -7786,7 +7047,7 @@
           <p:cNvPr id="5122" name="Picture 2" descr="Captain &amp; Tennille">
             <a:extLst>
               <a:ext uri="{FF2B5EF4-FFF2-40B4-BE49-F238E27FC236}">
-                <a16:creationId xmlns:a16="http://schemas.microsoft.com/office/drawing/2014/main" id="{E9F2203B-ECA6-D14F-63FB-EBDBF1D1D11D}"/>
+                <a16:creationId xmlns:a16="http://schemas.microsoft.com/office/drawing/2014/main" id="{1F52F10C-7A48-890C-8054-B26A189EF1B3}"/>
               </a:ext>
             </a:extLst>
           </p:cNvPr>
@@ -7831,7 +7092,7 @@
     </p:spTree>
     <p:extLst>
       <p:ext uri="{BB962C8B-B14F-4D97-AF65-F5344CB8AC3E}">
-        <p14:creationId xmlns:p14="http://schemas.microsoft.com/office/powerpoint/2010/main" val="390346067"/>
+        <p14:creationId xmlns:p14="http://schemas.microsoft.com/office/powerpoint/2010/main" val="4184603718"/>
       </p:ext>
     </p:extLst>
   </p:cSld>
@@ -7957,6 +7218,3286 @@
     </p:tnLst>
     <p:bldLst>
       <p:bldP spid="3" grpId="0"/>
+    </p:bldLst>
+  </p:timing>
+</p:sld>
+</file>
+
+<file path=ppt/slides/slide24.xml><?xml version="1.0" encoding="utf-8"?>
+<p:sld xmlns:a="http://schemas.openxmlformats.org/drawingml/2006/main" xmlns:r="http://schemas.openxmlformats.org/officeDocument/2006/relationships" xmlns:p="http://schemas.openxmlformats.org/presentationml/2006/main">
+  <p:cSld>
+    <p:spTree>
+      <p:nvGrpSpPr>
+        <p:cNvPr id="1" name=""/>
+        <p:cNvGrpSpPr/>
+        <p:nvPr/>
+      </p:nvGrpSpPr>
+      <p:grpSpPr>
+        <a:xfrm>
+          <a:off x="0" y="0"/>
+          <a:ext cx="0" cy="0"/>
+          <a:chOff x="0" y="0"/>
+          <a:chExt cx="0" cy="0"/>
+        </a:xfrm>
+      </p:grpSpPr>
+      <p:pic>
+        <p:nvPicPr>
+          <p:cNvPr id="4" name="Picture 2" descr="Racket (programming language) - Wikipedia">
+            <a:extLst>
+              <a:ext uri="{FF2B5EF4-FFF2-40B4-BE49-F238E27FC236}">
+                <a16:creationId xmlns:a16="http://schemas.microsoft.com/office/drawing/2014/main" id="{6FE4F0D5-D4CA-7F6E-F27C-8892CF572266}"/>
+              </a:ext>
+            </a:extLst>
+          </p:cNvPr>
+          <p:cNvPicPr>
+            <a:picLocks noChangeAspect="1" noChangeArrowheads="1"/>
+          </p:cNvPicPr>
+          <p:nvPr/>
+        </p:nvPicPr>
+        <p:blipFill>
+          <a:blip r:embed="rId2">
+            <a:extLst>
+              <a:ext uri="{28A0092B-C50C-407E-A947-70E740481C1C}">
+                <a14:useLocalDpi xmlns:a14="http://schemas.microsoft.com/office/drawing/2010/main" val="0"/>
+              </a:ext>
+            </a:extLst>
+          </a:blip>
+          <a:srcRect/>
+          <a:stretch>
+            <a:fillRect/>
+          </a:stretch>
+        </p:blipFill>
+        <p:spPr bwMode="auto">
+          <a:xfrm>
+            <a:off x="4606899" y="690922"/>
+            <a:ext cx="2978202" cy="2978202"/>
+          </a:xfrm>
+          <a:prstGeom prst="rect">
+            <a:avLst/>
+          </a:prstGeom>
+          <a:noFill/>
+          <a:extLst>
+            <a:ext uri="{909E8E84-426E-40DD-AFC4-6F175D3DCCD1}">
+              <a14:hiddenFill xmlns:a14="http://schemas.microsoft.com/office/drawing/2010/main">
+                <a:solidFill>
+                  <a:srgbClr val="FFFFFF"/>
+                </a:solidFill>
+              </a14:hiddenFill>
+            </a:ext>
+          </a:extLst>
+        </p:spPr>
+      </p:pic>
+      <p:sp>
+        <p:nvSpPr>
+          <p:cNvPr id="2" name="TextBox 1">
+            <a:extLst>
+              <a:ext uri="{FF2B5EF4-FFF2-40B4-BE49-F238E27FC236}">
+                <a16:creationId xmlns:a16="http://schemas.microsoft.com/office/drawing/2014/main" id="{A7CF2578-931A-9B0F-F1EA-3BB34CCE93DF}"/>
+              </a:ext>
+            </a:extLst>
+          </p:cNvPr>
+          <p:cNvSpPr txBox="1"/>
+          <p:nvPr/>
+        </p:nvSpPr>
+        <p:spPr>
+          <a:xfrm>
+            <a:off x="4856309" y="4203165"/>
+            <a:ext cx="2796989" cy="1384995"/>
+          </a:xfrm>
+          <a:prstGeom prst="rect">
+            <a:avLst/>
+          </a:prstGeom>
+          <a:noFill/>
+        </p:spPr>
+        <p:txBody>
+          <a:bodyPr wrap="square" rtlCol="0">
+            <a:spAutoFit/>
+          </a:bodyPr>
+          <a:lstStyle/>
+          <a:p>
+            <a:r>
+              <a:rPr lang="en-CA" sz="2800" dirty="0"/>
+              <a:t>LISP          1960</a:t>
+            </a:r>
+          </a:p>
+          <a:p>
+            <a:r>
+              <a:rPr lang="en-CA" sz="2800" dirty="0"/>
+              <a:t>Scheme   1975</a:t>
+            </a:r>
+          </a:p>
+          <a:p>
+            <a:r>
+              <a:rPr lang="en-CA" sz="2800" dirty="0"/>
+              <a:t>Racket     1995</a:t>
+            </a:r>
+            <a:endParaRPr lang="en-AU" sz="2800" dirty="0"/>
+          </a:p>
+        </p:txBody>
+      </p:sp>
+    </p:spTree>
+    <p:extLst>
+      <p:ext uri="{BB962C8B-B14F-4D97-AF65-F5344CB8AC3E}">
+        <p14:creationId xmlns:p14="http://schemas.microsoft.com/office/powerpoint/2010/main" val="2513690197"/>
+      </p:ext>
+    </p:extLst>
+  </p:cSld>
+  <p:clrMapOvr>
+    <a:masterClrMapping/>
+  </p:clrMapOvr>
+</p:sld>
+</file>
+
+<file path=ppt/slides/slide25.xml><?xml version="1.0" encoding="utf-8"?>
+<p:sld xmlns:a="http://schemas.openxmlformats.org/drawingml/2006/main" xmlns:r="http://schemas.openxmlformats.org/officeDocument/2006/relationships" xmlns:p="http://schemas.openxmlformats.org/presentationml/2006/main">
+  <p:cSld>
+    <p:spTree>
+      <p:nvGrpSpPr>
+        <p:cNvPr id="1" name=""/>
+        <p:cNvGrpSpPr/>
+        <p:nvPr/>
+      </p:nvGrpSpPr>
+      <p:grpSpPr>
+        <a:xfrm>
+          <a:off x="0" y="0"/>
+          <a:ext cx="0" cy="0"/>
+          <a:chOff x="0" y="0"/>
+          <a:chExt cx="0" cy="0"/>
+        </a:xfrm>
+      </p:grpSpPr>
+      <p:sp>
+        <p:nvSpPr>
+          <p:cNvPr id="2" name="Title 1">
+            <a:extLst>
+              <a:ext uri="{FF2B5EF4-FFF2-40B4-BE49-F238E27FC236}">
+                <a16:creationId xmlns:a16="http://schemas.microsoft.com/office/drawing/2014/main" id="{AFC4F8B7-DF69-4161-80D5-5D65C38F8A33}"/>
+              </a:ext>
+            </a:extLst>
+          </p:cNvPr>
+          <p:cNvSpPr>
+            <a:spLocks noGrp="1"/>
+          </p:cNvSpPr>
+          <p:nvPr>
+            <p:ph type="title"/>
+          </p:nvPr>
+        </p:nvSpPr>
+        <p:spPr/>
+        <p:txBody>
+          <a:bodyPr/>
+          <a:lstStyle/>
+          <a:p>
+            <a:r>
+              <a:rPr lang="en-CA" dirty="0"/>
+              <a:t>LISP and Scheme’s Original Designers</a:t>
+            </a:r>
+            <a:endParaRPr lang="en-AU" dirty="0"/>
+          </a:p>
+        </p:txBody>
+      </p:sp>
+      <p:pic>
+        <p:nvPicPr>
+          <p:cNvPr id="8194" name="Picture 2" descr="'Always inventing, inventing, inventing': McCarthy at work in his artificial intelligence laboratory at Stanford">
+            <a:extLst>
+              <a:ext uri="{FF2B5EF4-FFF2-40B4-BE49-F238E27FC236}">
+                <a16:creationId xmlns:a16="http://schemas.microsoft.com/office/drawing/2014/main" id="{584C219A-150E-A5C6-E0D4-11E43E4026A2}"/>
+              </a:ext>
+            </a:extLst>
+          </p:cNvPr>
+          <p:cNvPicPr>
+            <a:picLocks noChangeAspect="1" noChangeArrowheads="1"/>
+          </p:cNvPicPr>
+          <p:nvPr/>
+        </p:nvPicPr>
+        <p:blipFill>
+          <a:blip r:embed="rId2">
+            <a:extLst>
+              <a:ext uri="{28A0092B-C50C-407E-A947-70E740481C1C}">
+                <a14:useLocalDpi xmlns:a14="http://schemas.microsoft.com/office/drawing/2010/main" val="0"/>
+              </a:ext>
+            </a:extLst>
+          </a:blip>
+          <a:srcRect/>
+          <a:stretch>
+            <a:fillRect/>
+          </a:stretch>
+        </p:blipFill>
+        <p:spPr bwMode="auto">
+          <a:xfrm>
+            <a:off x="1195548" y="1401251"/>
+            <a:ext cx="4205441" cy="3109277"/>
+          </a:xfrm>
+          <a:prstGeom prst="rect">
+            <a:avLst/>
+          </a:prstGeom>
+          <a:noFill/>
+          <a:extLst>
+            <a:ext uri="{909E8E84-426E-40DD-AFC4-6F175D3DCCD1}">
+              <a14:hiddenFill xmlns:a14="http://schemas.microsoft.com/office/drawing/2010/main">
+                <a:solidFill>
+                  <a:srgbClr val="FFFFFF"/>
+                </a:solidFill>
+              </a14:hiddenFill>
+            </a:ext>
+          </a:extLst>
+        </p:spPr>
+      </p:pic>
+      <p:sp>
+        <p:nvSpPr>
+          <p:cNvPr id="4" name="TextBox 3">
+            <a:extLst>
+              <a:ext uri="{FF2B5EF4-FFF2-40B4-BE49-F238E27FC236}">
+                <a16:creationId xmlns:a16="http://schemas.microsoft.com/office/drawing/2014/main" id="{16127473-8A2B-AE78-F8C5-A0D03B7350B1}"/>
+              </a:ext>
+            </a:extLst>
+          </p:cNvPr>
+          <p:cNvSpPr txBox="1"/>
+          <p:nvPr/>
+        </p:nvSpPr>
+        <p:spPr>
+          <a:xfrm>
+            <a:off x="1597670" y="4718210"/>
+            <a:ext cx="3116559" cy="646331"/>
+          </a:xfrm>
+          <a:prstGeom prst="rect">
+            <a:avLst/>
+          </a:prstGeom>
+          <a:noFill/>
+        </p:spPr>
+        <p:txBody>
+          <a:bodyPr wrap="none" rtlCol="0">
+            <a:spAutoFit/>
+          </a:bodyPr>
+          <a:lstStyle/>
+          <a:p>
+            <a:pPr algn="ctr"/>
+            <a:r>
+              <a:rPr lang="en-CA" b="1" dirty="0"/>
+              <a:t>John McCarthy </a:t>
+            </a:r>
+            <a:r>
+              <a:rPr lang="en-CA" dirty="0"/>
+              <a:t>(1927-2011)</a:t>
+            </a:r>
+          </a:p>
+          <a:p>
+            <a:pPr algn="ctr"/>
+            <a:r>
+              <a:rPr lang="en-CA" dirty="0"/>
+              <a:t>Original designer of LISP (1960)</a:t>
+            </a:r>
+            <a:endParaRPr lang="en-AU" dirty="0"/>
+          </a:p>
+        </p:txBody>
+      </p:sp>
+      <p:sp>
+        <p:nvSpPr>
+          <p:cNvPr id="9" name="TextBox 8">
+            <a:extLst>
+              <a:ext uri="{FF2B5EF4-FFF2-40B4-BE49-F238E27FC236}">
+                <a16:creationId xmlns:a16="http://schemas.microsoft.com/office/drawing/2014/main" id="{529CDD03-F006-3579-B9AC-F9755300E325}"/>
+              </a:ext>
+            </a:extLst>
+          </p:cNvPr>
+          <p:cNvSpPr txBox="1"/>
+          <p:nvPr/>
+        </p:nvSpPr>
+        <p:spPr>
+          <a:xfrm>
+            <a:off x="1790663" y="5456749"/>
+            <a:ext cx="2730570" cy="1200329"/>
+          </a:xfrm>
+          <a:prstGeom prst="rect">
+            <a:avLst/>
+          </a:prstGeom>
+          <a:solidFill>
+            <a:schemeClr val="accent4">
+              <a:lumMod val="40000"/>
+              <a:lumOff val="60000"/>
+            </a:schemeClr>
+          </a:solidFill>
+        </p:spPr>
+        <p:txBody>
+          <a:bodyPr wrap="square" rtlCol="0">
+            <a:spAutoFit/>
+          </a:bodyPr>
+          <a:lstStyle/>
+          <a:p>
+            <a:pPr algn="ctr"/>
+            <a:r>
+              <a:rPr lang="en-CA" dirty="0"/>
+              <a:t>Also coined the term “Artificial Intelligence”, and for many years was a leading AI researcher.</a:t>
+            </a:r>
+            <a:endParaRPr lang="en-AU" dirty="0"/>
+          </a:p>
+        </p:txBody>
+      </p:sp>
+      <p:pic>
+        <p:nvPicPr>
+          <p:cNvPr id="8196" name="Picture 4">
+            <a:extLst>
+              <a:ext uri="{FF2B5EF4-FFF2-40B4-BE49-F238E27FC236}">
+                <a16:creationId xmlns:a16="http://schemas.microsoft.com/office/drawing/2014/main" id="{BFE3DDBD-D26E-E145-3342-178A22297B56}"/>
+              </a:ext>
+            </a:extLst>
+          </p:cNvPr>
+          <p:cNvPicPr>
+            <a:picLocks noChangeAspect="1" noChangeArrowheads="1"/>
+          </p:cNvPicPr>
+          <p:nvPr/>
+        </p:nvPicPr>
+        <p:blipFill>
+          <a:blip r:embed="rId3">
+            <a:extLst>
+              <a:ext uri="{28A0092B-C50C-407E-A947-70E740481C1C}">
+                <a14:useLocalDpi xmlns:a14="http://schemas.microsoft.com/office/drawing/2010/main" val="0"/>
+              </a:ext>
+            </a:extLst>
+          </a:blip>
+          <a:srcRect/>
+          <a:stretch>
+            <a:fillRect/>
+          </a:stretch>
+        </p:blipFill>
+        <p:spPr bwMode="auto">
+          <a:xfrm>
+            <a:off x="6096000" y="1401251"/>
+            <a:ext cx="2522690" cy="3109277"/>
+          </a:xfrm>
+          <a:prstGeom prst="rect">
+            <a:avLst/>
+          </a:prstGeom>
+          <a:noFill/>
+          <a:extLst>
+            <a:ext uri="{909E8E84-426E-40DD-AFC4-6F175D3DCCD1}">
+              <a14:hiddenFill xmlns:a14="http://schemas.microsoft.com/office/drawing/2010/main">
+                <a:solidFill>
+                  <a:srgbClr val="FFFFFF"/>
+                </a:solidFill>
+              </a14:hiddenFill>
+            </a:ext>
+          </a:extLst>
+        </p:spPr>
+      </p:pic>
+      <p:pic>
+        <p:nvPicPr>
+          <p:cNvPr id="8198" name="Picture 6" descr="Gerald Sussman">
+            <a:extLst>
+              <a:ext uri="{FF2B5EF4-FFF2-40B4-BE49-F238E27FC236}">
+                <a16:creationId xmlns:a16="http://schemas.microsoft.com/office/drawing/2014/main" id="{DDA7C2AB-C02D-61BF-5B16-E9727D9CF9CD}"/>
+              </a:ext>
+            </a:extLst>
+          </p:cNvPr>
+          <p:cNvPicPr>
+            <a:picLocks noChangeAspect="1" noChangeArrowheads="1"/>
+          </p:cNvPicPr>
+          <p:nvPr/>
+        </p:nvPicPr>
+        <p:blipFill rotWithShape="1">
+          <a:blip r:embed="rId4">
+            <a:extLst>
+              <a:ext uri="{28A0092B-C50C-407E-A947-70E740481C1C}">
+                <a14:useLocalDpi xmlns:a14="http://schemas.microsoft.com/office/drawing/2010/main" val="0"/>
+              </a:ext>
+            </a:extLst>
+          </a:blip>
+          <a:srcRect l="8348" r="11471" b="34117"/>
+          <a:stretch/>
+        </p:blipFill>
+        <p:spPr bwMode="auto">
+          <a:xfrm>
+            <a:off x="8827958" y="1401251"/>
+            <a:ext cx="2522687" cy="3109277"/>
+          </a:xfrm>
+          <a:prstGeom prst="rect">
+            <a:avLst/>
+          </a:prstGeom>
+          <a:noFill/>
+          <a:extLst>
+            <a:ext uri="{909E8E84-426E-40DD-AFC4-6F175D3DCCD1}">
+              <a14:hiddenFill xmlns:a14="http://schemas.microsoft.com/office/drawing/2010/main">
+                <a:solidFill>
+                  <a:srgbClr val="FFFFFF"/>
+                </a:solidFill>
+              </a14:hiddenFill>
+            </a:ext>
+          </a:extLst>
+        </p:spPr>
+      </p:pic>
+      <p:sp>
+        <p:nvSpPr>
+          <p:cNvPr id="12" name="TextBox 11">
+            <a:extLst>
+              <a:ext uri="{FF2B5EF4-FFF2-40B4-BE49-F238E27FC236}">
+                <a16:creationId xmlns:a16="http://schemas.microsoft.com/office/drawing/2014/main" id="{7D456361-9CC9-3318-8D15-4F61A6B43E78}"/>
+              </a:ext>
+            </a:extLst>
+          </p:cNvPr>
+          <p:cNvSpPr txBox="1"/>
+          <p:nvPr/>
+        </p:nvSpPr>
+        <p:spPr>
+          <a:xfrm>
+            <a:off x="6095999" y="4688559"/>
+            <a:ext cx="5254645" cy="646331"/>
+          </a:xfrm>
+          <a:prstGeom prst="rect">
+            <a:avLst/>
+          </a:prstGeom>
+          <a:noFill/>
+        </p:spPr>
+        <p:txBody>
+          <a:bodyPr wrap="square" rtlCol="0">
+            <a:spAutoFit/>
+          </a:bodyPr>
+          <a:lstStyle/>
+          <a:p>
+            <a:pPr algn="ctr"/>
+            <a:r>
+              <a:rPr lang="en-CA" b="1" dirty="0"/>
+              <a:t>Guy Steele </a:t>
+            </a:r>
+            <a:r>
+              <a:rPr lang="en-CA" dirty="0"/>
+              <a:t>and </a:t>
+            </a:r>
+            <a:r>
+              <a:rPr lang="en-CA" b="1" dirty="0"/>
+              <a:t>Gerald Sussman</a:t>
+            </a:r>
+          </a:p>
+          <a:p>
+            <a:pPr algn="ctr"/>
+            <a:r>
+              <a:rPr lang="en-CA" dirty="0"/>
+              <a:t>Original designers of Scheme (1975)</a:t>
+            </a:r>
+            <a:endParaRPr lang="en-AU" dirty="0"/>
+          </a:p>
+        </p:txBody>
+      </p:sp>
+      <p:sp>
+        <p:nvSpPr>
+          <p:cNvPr id="13" name="TextBox 12">
+            <a:extLst>
+              <a:ext uri="{FF2B5EF4-FFF2-40B4-BE49-F238E27FC236}">
+                <a16:creationId xmlns:a16="http://schemas.microsoft.com/office/drawing/2014/main" id="{070A0247-E84A-DDE7-4901-76D5D335370E}"/>
+              </a:ext>
+            </a:extLst>
+          </p:cNvPr>
+          <p:cNvSpPr txBox="1"/>
+          <p:nvPr/>
+        </p:nvSpPr>
+        <p:spPr>
+          <a:xfrm>
+            <a:off x="7534158" y="5456749"/>
+            <a:ext cx="2378326" cy="923330"/>
+          </a:xfrm>
+          <a:prstGeom prst="rect">
+            <a:avLst/>
+          </a:prstGeom>
+          <a:solidFill>
+            <a:schemeClr val="accent4">
+              <a:lumMod val="40000"/>
+              <a:lumOff val="60000"/>
+            </a:schemeClr>
+          </a:solidFill>
+        </p:spPr>
+        <p:txBody>
+          <a:bodyPr wrap="square" rtlCol="0">
+            <a:spAutoFit/>
+          </a:bodyPr>
+          <a:lstStyle/>
+          <a:p>
+            <a:pPr algn="ctr"/>
+            <a:r>
+              <a:rPr lang="en-CA" b="1" dirty="0"/>
+              <a:t>Racket</a:t>
+            </a:r>
+            <a:r>
+              <a:rPr lang="en-CA" dirty="0"/>
+              <a:t> is a modern dialect of Scheme, with many new ideas.</a:t>
+            </a:r>
+            <a:endParaRPr lang="en-AU" dirty="0"/>
+          </a:p>
+        </p:txBody>
+      </p:sp>
+    </p:spTree>
+    <p:extLst>
+      <p:ext uri="{BB962C8B-B14F-4D97-AF65-F5344CB8AC3E}">
+        <p14:creationId xmlns:p14="http://schemas.microsoft.com/office/powerpoint/2010/main" val="2446324911"/>
+      </p:ext>
+    </p:extLst>
+  </p:cSld>
+  <p:clrMapOvr>
+    <a:masterClrMapping/>
+  </p:clrMapOvr>
+</p:sld>
+</file>
+
+<file path=ppt/slides/slide26.xml><?xml version="1.0" encoding="utf-8"?>
+<p:sld xmlns:a="http://schemas.openxmlformats.org/drawingml/2006/main" xmlns:r="http://schemas.openxmlformats.org/officeDocument/2006/relationships" xmlns:p="http://schemas.openxmlformats.org/presentationml/2006/main">
+  <p:cSld>
+    <p:spTree>
+      <p:nvGrpSpPr>
+        <p:cNvPr id="1" name=""/>
+        <p:cNvGrpSpPr/>
+        <p:nvPr/>
+      </p:nvGrpSpPr>
+      <p:grpSpPr>
+        <a:xfrm>
+          <a:off x="0" y="0"/>
+          <a:ext cx="0" cy="0"/>
+          <a:chOff x="0" y="0"/>
+          <a:chExt cx="0" cy="0"/>
+        </a:xfrm>
+      </p:grpSpPr>
+      <p:sp>
+        <p:nvSpPr>
+          <p:cNvPr id="2" name="Title 1">
+            <a:extLst>
+              <a:ext uri="{FF2B5EF4-FFF2-40B4-BE49-F238E27FC236}">
+                <a16:creationId xmlns:a16="http://schemas.microsoft.com/office/drawing/2014/main" id="{AFC4F8B7-DF69-4161-80D5-5D65C38F8A33}"/>
+              </a:ext>
+            </a:extLst>
+          </p:cNvPr>
+          <p:cNvSpPr>
+            <a:spLocks noGrp="1"/>
+          </p:cNvSpPr>
+          <p:nvPr>
+            <p:ph type="title"/>
+          </p:nvPr>
+        </p:nvSpPr>
+        <p:spPr/>
+        <p:txBody>
+          <a:bodyPr/>
+          <a:lstStyle/>
+          <a:p>
+            <a:r>
+              <a:rPr lang="en-CA" dirty="0"/>
+              <a:t>Scheme Probably </a:t>
+            </a:r>
+            <a:r>
+              <a:rPr lang="en-CA" b="1" dirty="0">
+                <a:solidFill>
+                  <a:srgbClr val="FF0000"/>
+                </a:solidFill>
+              </a:rPr>
+              <a:t>Can’t</a:t>
+            </a:r>
+            <a:r>
+              <a:rPr lang="en-CA" dirty="0"/>
+              <a:t> Get You a Job!</a:t>
+            </a:r>
+            <a:endParaRPr lang="en-AU" dirty="0"/>
+          </a:p>
+        </p:txBody>
+      </p:sp>
+      <p:sp>
+        <p:nvSpPr>
+          <p:cNvPr id="3" name="TextBox 2">
+            <a:extLst>
+              <a:ext uri="{FF2B5EF4-FFF2-40B4-BE49-F238E27FC236}">
+                <a16:creationId xmlns:a16="http://schemas.microsoft.com/office/drawing/2014/main" id="{10C4AE68-A781-FD56-1D00-6B3AE095A7EF}"/>
+              </a:ext>
+            </a:extLst>
+          </p:cNvPr>
+          <p:cNvSpPr txBox="1"/>
+          <p:nvPr/>
+        </p:nvSpPr>
+        <p:spPr>
+          <a:xfrm>
+            <a:off x="1718721" y="1965877"/>
+            <a:ext cx="6288042" cy="1384995"/>
+          </a:xfrm>
+          <a:prstGeom prst="rect">
+            <a:avLst/>
+          </a:prstGeom>
+          <a:noFill/>
+        </p:spPr>
+        <p:txBody>
+          <a:bodyPr wrap="square" rtlCol="0">
+            <a:spAutoFit/>
+          </a:bodyPr>
+          <a:lstStyle/>
+          <a:p>
+            <a:pPr algn="ctr"/>
+            <a:r>
+              <a:rPr lang="en-CA" sz="2800" dirty="0"/>
+              <a:t>It’s mostly a research language used by a subset of academic programming language researchers.</a:t>
+            </a:r>
+            <a:endParaRPr lang="en-AU" sz="2800" dirty="0"/>
+          </a:p>
+        </p:txBody>
+      </p:sp>
+      <p:sp>
+        <p:nvSpPr>
+          <p:cNvPr id="9" name="TextBox 8">
+            <a:extLst>
+              <a:ext uri="{FF2B5EF4-FFF2-40B4-BE49-F238E27FC236}">
+                <a16:creationId xmlns:a16="http://schemas.microsoft.com/office/drawing/2014/main" id="{47FE2D5E-13CF-4FA0-04A0-66A64587C63B}"/>
+              </a:ext>
+            </a:extLst>
+          </p:cNvPr>
+          <p:cNvSpPr txBox="1"/>
+          <p:nvPr/>
+        </p:nvSpPr>
+        <p:spPr>
+          <a:xfrm>
+            <a:off x="1801965" y="3794879"/>
+            <a:ext cx="6288042" cy="1815882"/>
+          </a:xfrm>
+          <a:prstGeom prst="rect">
+            <a:avLst/>
+          </a:prstGeom>
+          <a:noFill/>
+        </p:spPr>
+        <p:txBody>
+          <a:bodyPr wrap="square" rtlCol="0">
+            <a:spAutoFit/>
+          </a:bodyPr>
+          <a:lstStyle/>
+          <a:p>
+            <a:pPr algn="ctr"/>
+            <a:r>
+              <a:rPr lang="en-CA" sz="2800" dirty="0"/>
+              <a:t>A variation of LISP called </a:t>
+            </a:r>
+            <a:r>
+              <a:rPr lang="en-CA" sz="2800" b="1" dirty="0"/>
+              <a:t>Clojure</a:t>
+            </a:r>
+            <a:r>
+              <a:rPr lang="en-CA" sz="2800" dirty="0"/>
+              <a:t> has gained some popularity as a practical programming (but still pretty niche compared to other languages)</a:t>
+            </a:r>
+            <a:endParaRPr lang="en-AU" sz="2800" dirty="0"/>
+          </a:p>
+        </p:txBody>
+      </p:sp>
+      <p:pic>
+        <p:nvPicPr>
+          <p:cNvPr id="6146" name="Picture 2" descr="Clojure - Wikipedia">
+            <a:extLst>
+              <a:ext uri="{FF2B5EF4-FFF2-40B4-BE49-F238E27FC236}">
+                <a16:creationId xmlns:a16="http://schemas.microsoft.com/office/drawing/2014/main" id="{29461ED7-186D-9E98-8402-81436C92CAE0}"/>
+              </a:ext>
+            </a:extLst>
+          </p:cNvPr>
+          <p:cNvPicPr>
+            <a:picLocks noChangeAspect="1" noChangeArrowheads="1"/>
+          </p:cNvPicPr>
+          <p:nvPr/>
+        </p:nvPicPr>
+        <p:blipFill>
+          <a:blip r:embed="rId2">
+            <a:extLst>
+              <a:ext uri="{28A0092B-C50C-407E-A947-70E740481C1C}">
+                <a14:useLocalDpi xmlns:a14="http://schemas.microsoft.com/office/drawing/2010/main" val="0"/>
+              </a:ext>
+            </a:extLst>
+          </a:blip>
+          <a:srcRect/>
+          <a:stretch>
+            <a:fillRect/>
+          </a:stretch>
+        </p:blipFill>
+        <p:spPr bwMode="auto">
+          <a:xfrm>
+            <a:off x="8385710" y="3429000"/>
+            <a:ext cx="2670202" cy="2670202"/>
+          </a:xfrm>
+          <a:prstGeom prst="rect">
+            <a:avLst/>
+          </a:prstGeom>
+          <a:noFill/>
+          <a:extLst>
+            <a:ext uri="{909E8E84-426E-40DD-AFC4-6F175D3DCCD1}">
+              <a14:hiddenFill xmlns:a14="http://schemas.microsoft.com/office/drawing/2010/main">
+                <a:solidFill>
+                  <a:srgbClr val="FFFFFF"/>
+                </a:solidFill>
+              </a14:hiddenFill>
+            </a:ext>
+          </a:extLst>
+        </p:spPr>
+      </p:pic>
+      <p:sp>
+        <p:nvSpPr>
+          <p:cNvPr id="11" name="TextBox 10">
+            <a:extLst>
+              <a:ext uri="{FF2B5EF4-FFF2-40B4-BE49-F238E27FC236}">
+                <a16:creationId xmlns:a16="http://schemas.microsoft.com/office/drawing/2014/main" id="{C6BDB633-1BCE-7B16-1722-A554A77B7C89}"/>
+              </a:ext>
+            </a:extLst>
+          </p:cNvPr>
+          <p:cNvSpPr txBox="1"/>
+          <p:nvPr/>
+        </p:nvSpPr>
+        <p:spPr>
+          <a:xfrm>
+            <a:off x="9003694" y="5945082"/>
+            <a:ext cx="1502169" cy="523220"/>
+          </a:xfrm>
+          <a:prstGeom prst="rect">
+            <a:avLst/>
+          </a:prstGeom>
+          <a:noFill/>
+        </p:spPr>
+        <p:txBody>
+          <a:bodyPr wrap="square" rtlCol="0">
+            <a:spAutoFit/>
+          </a:bodyPr>
+          <a:lstStyle/>
+          <a:p>
+            <a:pPr algn="ctr"/>
+            <a:r>
+              <a:rPr lang="en-CA" sz="2800" dirty="0"/>
+              <a:t>Clojure</a:t>
+            </a:r>
+            <a:endParaRPr lang="en-AU" sz="2800" dirty="0"/>
+          </a:p>
+        </p:txBody>
+      </p:sp>
+      <p:sp>
+        <p:nvSpPr>
+          <p:cNvPr id="7" name="TextBox 6">
+            <a:extLst>
+              <a:ext uri="{FF2B5EF4-FFF2-40B4-BE49-F238E27FC236}">
+                <a16:creationId xmlns:a16="http://schemas.microsoft.com/office/drawing/2014/main" id="{69B985F0-AB93-7DC0-1218-74589D1B7444}"/>
+              </a:ext>
+            </a:extLst>
+          </p:cNvPr>
+          <p:cNvSpPr txBox="1"/>
+          <p:nvPr/>
+        </p:nvSpPr>
+        <p:spPr>
+          <a:xfrm>
+            <a:off x="8385710" y="1554599"/>
+            <a:ext cx="2857501" cy="1477328"/>
+          </a:xfrm>
+          <a:prstGeom prst="rect">
+            <a:avLst/>
+          </a:prstGeom>
+          <a:solidFill>
+            <a:schemeClr val="accent4">
+              <a:lumMod val="40000"/>
+              <a:lumOff val="60000"/>
+            </a:schemeClr>
+          </a:solidFill>
+        </p:spPr>
+        <p:txBody>
+          <a:bodyPr wrap="square" rtlCol="0">
+            <a:spAutoFit/>
+          </a:bodyPr>
+          <a:lstStyle/>
+          <a:p>
+            <a:pPr algn="ctr"/>
+            <a:r>
+              <a:rPr lang="en-CA" dirty="0"/>
+              <a:t>The original version of </a:t>
+            </a:r>
+            <a:r>
+              <a:rPr lang="en-CA" b="1" dirty="0"/>
+              <a:t>JavaScript</a:t>
+            </a:r>
+            <a:r>
+              <a:rPr lang="en-CA" dirty="0"/>
+              <a:t> was implemented as a Scheme-style language, before being modified to look more C-like.</a:t>
+            </a:r>
+            <a:endParaRPr lang="en-AU" dirty="0"/>
+          </a:p>
+        </p:txBody>
+      </p:sp>
+    </p:spTree>
+    <p:extLst>
+      <p:ext uri="{BB962C8B-B14F-4D97-AF65-F5344CB8AC3E}">
+        <p14:creationId xmlns:p14="http://schemas.microsoft.com/office/powerpoint/2010/main" val="1855501012"/>
+      </p:ext>
+    </p:extLst>
+  </p:cSld>
+  <p:clrMapOvr>
+    <a:masterClrMapping/>
+  </p:clrMapOvr>
+</p:sld>
+</file>
+
+<file path=ppt/slides/slide27.xml><?xml version="1.0" encoding="utf-8"?>
+<p:sld xmlns:a="http://schemas.openxmlformats.org/drawingml/2006/main" xmlns:r="http://schemas.openxmlformats.org/officeDocument/2006/relationships" xmlns:p="http://schemas.openxmlformats.org/presentationml/2006/main">
+  <p:cSld>
+    <p:spTree>
+      <p:nvGrpSpPr>
+        <p:cNvPr id="1" name=""/>
+        <p:cNvGrpSpPr/>
+        <p:nvPr/>
+      </p:nvGrpSpPr>
+      <p:grpSpPr>
+        <a:xfrm>
+          <a:off x="0" y="0"/>
+          <a:ext cx="0" cy="0"/>
+          <a:chOff x="0" y="0"/>
+          <a:chExt cx="0" cy="0"/>
+        </a:xfrm>
+      </p:grpSpPr>
+      <p:sp>
+        <p:nvSpPr>
+          <p:cNvPr id="2" name="Title 1">
+            <a:extLst>
+              <a:ext uri="{FF2B5EF4-FFF2-40B4-BE49-F238E27FC236}">
+                <a16:creationId xmlns:a16="http://schemas.microsoft.com/office/drawing/2014/main" id="{AFC4F8B7-DF69-4161-80D5-5D65C38F8A33}"/>
+              </a:ext>
+            </a:extLst>
+          </p:cNvPr>
+          <p:cNvSpPr>
+            <a:spLocks noGrp="1"/>
+          </p:cNvSpPr>
+          <p:nvPr>
+            <p:ph type="title"/>
+          </p:nvPr>
+        </p:nvSpPr>
+        <p:spPr>
+          <a:xfrm>
+            <a:off x="2316125" y="78200"/>
+            <a:ext cx="7559750" cy="1325563"/>
+          </a:xfrm>
+        </p:spPr>
+        <p:txBody>
+          <a:bodyPr/>
+          <a:lstStyle/>
+          <a:p>
+            <a:pPr algn="ctr"/>
+            <a:r>
+              <a:rPr lang="en-CA" dirty="0"/>
+              <a:t>What is Scheme/LISP </a:t>
+            </a:r>
+            <a:r>
+              <a:rPr lang="en-CA" dirty="0">
+                <a:solidFill>
+                  <a:srgbClr val="FF0000"/>
+                </a:solidFill>
+              </a:rPr>
+              <a:t>Good</a:t>
+            </a:r>
+            <a:r>
+              <a:rPr lang="en-CA" dirty="0"/>
+              <a:t> for?</a:t>
+            </a:r>
+            <a:endParaRPr lang="en-AU" dirty="0"/>
+          </a:p>
+        </p:txBody>
+      </p:sp>
+      <p:sp>
+        <p:nvSpPr>
+          <p:cNvPr id="3" name="TextBox 2">
+            <a:extLst>
+              <a:ext uri="{FF2B5EF4-FFF2-40B4-BE49-F238E27FC236}">
+                <a16:creationId xmlns:a16="http://schemas.microsoft.com/office/drawing/2014/main" id="{E8A268BC-88E6-45E5-8262-598A2B9A5D02}"/>
+              </a:ext>
+            </a:extLst>
+          </p:cNvPr>
+          <p:cNvSpPr txBox="1"/>
+          <p:nvPr/>
+        </p:nvSpPr>
+        <p:spPr>
+          <a:xfrm>
+            <a:off x="3137531" y="2684301"/>
+            <a:ext cx="4800076" cy="1815882"/>
+          </a:xfrm>
+          <a:prstGeom prst="rect">
+            <a:avLst/>
+          </a:prstGeom>
+          <a:noFill/>
+        </p:spPr>
+        <p:txBody>
+          <a:bodyPr wrap="square" rtlCol="0">
+            <a:spAutoFit/>
+          </a:bodyPr>
+          <a:lstStyle/>
+          <a:p>
+            <a:pPr algn="ctr"/>
+            <a:r>
+              <a:rPr lang="en-CA" sz="2800" dirty="0"/>
+              <a:t>Packed with all kinds of interesting ideas, many of which have inspired more mainstream languages.</a:t>
+            </a:r>
+            <a:endParaRPr lang="en-AU" sz="2800" dirty="0"/>
+          </a:p>
+        </p:txBody>
+      </p:sp>
+      <p:sp>
+        <p:nvSpPr>
+          <p:cNvPr id="27" name="TextBox 26">
+            <a:extLst>
+              <a:ext uri="{FF2B5EF4-FFF2-40B4-BE49-F238E27FC236}">
+                <a16:creationId xmlns:a16="http://schemas.microsoft.com/office/drawing/2014/main" id="{689FDA23-C4D9-4490-9037-82BD6C7F4654}"/>
+              </a:ext>
+            </a:extLst>
+          </p:cNvPr>
+          <p:cNvSpPr txBox="1"/>
+          <p:nvPr/>
+        </p:nvSpPr>
+        <p:spPr>
+          <a:xfrm>
+            <a:off x="7384356" y="4500183"/>
+            <a:ext cx="4695695" cy="1815882"/>
+          </a:xfrm>
+          <a:prstGeom prst="rect">
+            <a:avLst/>
+          </a:prstGeom>
+          <a:noFill/>
+        </p:spPr>
+        <p:txBody>
+          <a:bodyPr wrap="square" rtlCol="0">
+            <a:spAutoFit/>
+          </a:bodyPr>
+          <a:lstStyle/>
+          <a:p>
+            <a:pPr algn="ctr"/>
+            <a:r>
+              <a:rPr lang="en-CA" sz="2800" dirty="0"/>
+              <a:t>A good language for </a:t>
+            </a:r>
+            <a:r>
+              <a:rPr lang="en-CA" sz="2800" b="1" dirty="0"/>
+              <a:t>writing other programming languages </a:t>
+            </a:r>
+            <a:r>
+              <a:rPr lang="en-CA" sz="2800" dirty="0"/>
+              <a:t>and programming language tools.</a:t>
+            </a:r>
+          </a:p>
+        </p:txBody>
+      </p:sp>
+      <p:sp>
+        <p:nvSpPr>
+          <p:cNvPr id="6" name="TextBox 5">
+            <a:extLst>
+              <a:ext uri="{FF2B5EF4-FFF2-40B4-BE49-F238E27FC236}">
+                <a16:creationId xmlns:a16="http://schemas.microsoft.com/office/drawing/2014/main" id="{F20849FE-CF35-3A97-ED65-D50740D29574}"/>
+              </a:ext>
+            </a:extLst>
+          </p:cNvPr>
+          <p:cNvSpPr txBox="1"/>
+          <p:nvPr/>
+        </p:nvSpPr>
+        <p:spPr>
+          <a:xfrm>
+            <a:off x="293157" y="1520812"/>
+            <a:ext cx="3725592" cy="954107"/>
+          </a:xfrm>
+          <a:prstGeom prst="rect">
+            <a:avLst/>
+          </a:prstGeom>
+          <a:noFill/>
+        </p:spPr>
+        <p:txBody>
+          <a:bodyPr wrap="square" rtlCol="0">
+            <a:spAutoFit/>
+          </a:bodyPr>
+          <a:lstStyle/>
+          <a:p>
+            <a:pPr algn="ctr"/>
+            <a:r>
+              <a:rPr lang="en-CA" sz="2800" dirty="0"/>
+              <a:t>Popular in traditional “symbolic” AI research.</a:t>
+            </a:r>
+            <a:endParaRPr lang="en-AU" sz="2800" dirty="0"/>
+          </a:p>
+        </p:txBody>
+      </p:sp>
+    </p:spTree>
+    <p:extLst>
+      <p:ext uri="{BB962C8B-B14F-4D97-AF65-F5344CB8AC3E}">
+        <p14:creationId xmlns:p14="http://schemas.microsoft.com/office/powerpoint/2010/main" val="251576758"/>
+      </p:ext>
+    </p:extLst>
+  </p:cSld>
+  <p:clrMapOvr>
+    <a:masterClrMapping/>
+  </p:clrMapOvr>
+</p:sld>
+</file>
+
+<file path=ppt/slides/slide28.xml><?xml version="1.0" encoding="utf-8"?>
+<p:sld xmlns:a="http://schemas.openxmlformats.org/drawingml/2006/main" xmlns:r="http://schemas.openxmlformats.org/officeDocument/2006/relationships" xmlns:p="http://schemas.openxmlformats.org/presentationml/2006/main">
+  <p:cSld>
+    <p:spTree>
+      <p:nvGrpSpPr>
+        <p:cNvPr id="1" name=""/>
+        <p:cNvGrpSpPr/>
+        <p:nvPr/>
+      </p:nvGrpSpPr>
+      <p:grpSpPr>
+        <a:xfrm>
+          <a:off x="0" y="0"/>
+          <a:ext cx="0" cy="0"/>
+          <a:chOff x="0" y="0"/>
+          <a:chExt cx="0" cy="0"/>
+        </a:xfrm>
+      </p:grpSpPr>
+      <p:sp>
+        <p:nvSpPr>
+          <p:cNvPr id="2" name="Title 1">
+            <a:extLst>
+              <a:ext uri="{FF2B5EF4-FFF2-40B4-BE49-F238E27FC236}">
+                <a16:creationId xmlns:a16="http://schemas.microsoft.com/office/drawing/2014/main" id="{3AB70837-CC6E-409E-828B-6F152569432E}"/>
+              </a:ext>
+            </a:extLst>
+          </p:cNvPr>
+          <p:cNvSpPr>
+            <a:spLocks noGrp="1"/>
+          </p:cNvSpPr>
+          <p:nvPr>
+            <p:ph type="title"/>
+          </p:nvPr>
+        </p:nvSpPr>
+        <p:spPr/>
+        <p:txBody>
+          <a:bodyPr>
+            <a:normAutofit/>
+          </a:bodyPr>
+          <a:lstStyle/>
+          <a:p>
+            <a:r>
+              <a:rPr lang="en-CA" dirty="0"/>
+              <a:t>What is Scheme </a:t>
+            </a:r>
+            <a:r>
+              <a:rPr lang="en-CA" dirty="0">
+                <a:solidFill>
+                  <a:srgbClr val="FF0000"/>
+                </a:solidFill>
+              </a:rPr>
+              <a:t>Not</a:t>
+            </a:r>
+            <a:r>
+              <a:rPr lang="en-CA" dirty="0"/>
+              <a:t> so Good For? </a:t>
+            </a:r>
+            <a:endParaRPr lang="en-AU" dirty="0"/>
+          </a:p>
+        </p:txBody>
+      </p:sp>
+      <p:sp>
+        <p:nvSpPr>
+          <p:cNvPr id="3" name="Content Placeholder 2">
+            <a:extLst>
+              <a:ext uri="{FF2B5EF4-FFF2-40B4-BE49-F238E27FC236}">
+                <a16:creationId xmlns:a16="http://schemas.microsoft.com/office/drawing/2014/main" id="{9D85EADE-0C03-49DA-BB59-0942833F47FA}"/>
+              </a:ext>
+            </a:extLst>
+          </p:cNvPr>
+          <p:cNvSpPr>
+            <a:spLocks noGrp="1"/>
+          </p:cNvSpPr>
+          <p:nvPr>
+            <p:ph idx="1"/>
+          </p:nvPr>
+        </p:nvSpPr>
+        <p:spPr>
+          <a:xfrm>
+            <a:off x="838199" y="1825625"/>
+            <a:ext cx="10918371" cy="4351338"/>
+          </a:xfrm>
+        </p:spPr>
+        <p:txBody>
+          <a:bodyPr/>
+          <a:lstStyle/>
+          <a:p>
+            <a:r>
+              <a:rPr lang="en-CA" dirty="0"/>
+              <a:t>Scheme</a:t>
+            </a:r>
+            <a:r>
+              <a:rPr lang="en-AU" dirty="0"/>
+              <a:t> is generally </a:t>
+            </a:r>
+            <a:r>
+              <a:rPr lang="en-AU" dirty="0">
+                <a:solidFill>
+                  <a:srgbClr val="FF0000"/>
+                </a:solidFill>
+              </a:rPr>
+              <a:t>not</a:t>
+            </a:r>
+            <a:r>
+              <a:rPr lang="en-AU" dirty="0"/>
+              <a:t> as efficient as other languages.</a:t>
+            </a:r>
+          </a:p>
+          <a:p>
+            <a:r>
+              <a:rPr lang="en-AU" dirty="0"/>
+              <a:t>Scheme is </a:t>
+            </a:r>
+            <a:r>
+              <a:rPr lang="en-AU" dirty="0">
+                <a:solidFill>
+                  <a:srgbClr val="FF0000"/>
+                </a:solidFill>
+              </a:rPr>
+              <a:t>not</a:t>
+            </a:r>
+            <a:r>
+              <a:rPr lang="en-AU" dirty="0"/>
+              <a:t> used much in practice, so it can be hard to find support for it.</a:t>
+            </a:r>
+          </a:p>
+          <a:p>
+            <a:r>
+              <a:rPr lang="en-AU" dirty="0"/>
+              <a:t>Scheme’s notation is simple, but maybe </a:t>
+            </a:r>
+            <a:r>
+              <a:rPr lang="en-AU" i="1" dirty="0"/>
+              <a:t>too</a:t>
+            </a:r>
+            <a:r>
+              <a:rPr lang="en-AU" dirty="0"/>
+              <a:t> simple. </a:t>
+            </a:r>
+            <a:br>
+              <a:rPr lang="en-AU" dirty="0"/>
+            </a:br>
+            <a:r>
+              <a:rPr lang="en-AU" dirty="0"/>
+              <a:t>()-style notation results in lots and lots of parentheses, which many programmers </a:t>
+            </a:r>
+            <a:r>
+              <a:rPr lang="en-AU" dirty="0">
+                <a:solidFill>
+                  <a:srgbClr val="FF0000"/>
+                </a:solidFill>
+              </a:rPr>
+              <a:t>dislike</a:t>
+            </a:r>
+            <a:r>
+              <a:rPr lang="en-AU" dirty="0"/>
+              <a:t>.</a:t>
+            </a:r>
+          </a:p>
+        </p:txBody>
+      </p:sp>
+    </p:spTree>
+    <p:extLst>
+      <p:ext uri="{BB962C8B-B14F-4D97-AF65-F5344CB8AC3E}">
+        <p14:creationId xmlns:p14="http://schemas.microsoft.com/office/powerpoint/2010/main" val="2072605454"/>
+      </p:ext>
+    </p:extLst>
+  </p:cSld>
+  <p:clrMapOvr>
+    <a:masterClrMapping/>
+  </p:clrMapOvr>
+</p:sld>
+</file>
+
+<file path=ppt/slides/slide29.xml><?xml version="1.0" encoding="utf-8"?>
+<p:sld xmlns:a="http://schemas.openxmlformats.org/drawingml/2006/main" xmlns:r="http://schemas.openxmlformats.org/officeDocument/2006/relationships" xmlns:p="http://schemas.openxmlformats.org/presentationml/2006/main">
+  <p:cSld>
+    <p:spTree>
+      <p:nvGrpSpPr>
+        <p:cNvPr id="1" name=""/>
+        <p:cNvGrpSpPr/>
+        <p:nvPr/>
+      </p:nvGrpSpPr>
+      <p:grpSpPr>
+        <a:xfrm>
+          <a:off x="0" y="0"/>
+          <a:ext cx="0" cy="0"/>
+          <a:chOff x="0" y="0"/>
+          <a:chExt cx="0" cy="0"/>
+        </a:xfrm>
+      </p:grpSpPr>
+      <p:sp>
+        <p:nvSpPr>
+          <p:cNvPr id="2" name="Title 1">
+            <a:extLst>
+              <a:ext uri="{FF2B5EF4-FFF2-40B4-BE49-F238E27FC236}">
+                <a16:creationId xmlns:a16="http://schemas.microsoft.com/office/drawing/2014/main" id="{E453DFDB-8487-48AA-A582-0CEA13856DA2}"/>
+              </a:ext>
+            </a:extLst>
+          </p:cNvPr>
+          <p:cNvSpPr>
+            <a:spLocks noGrp="1"/>
+          </p:cNvSpPr>
+          <p:nvPr>
+            <p:ph type="title"/>
+          </p:nvPr>
+        </p:nvSpPr>
+        <p:spPr/>
+        <p:txBody>
+          <a:bodyPr/>
+          <a:lstStyle/>
+          <a:p>
+            <a:r>
+              <a:rPr lang="en-CA" dirty="0"/>
+              <a:t>Major Features of Scheme</a:t>
+            </a:r>
+            <a:endParaRPr lang="en-AU" dirty="0"/>
+          </a:p>
+        </p:txBody>
+      </p:sp>
+      <p:sp>
+        <p:nvSpPr>
+          <p:cNvPr id="3" name="Content Placeholder 2">
+            <a:extLst>
+              <a:ext uri="{FF2B5EF4-FFF2-40B4-BE49-F238E27FC236}">
+                <a16:creationId xmlns:a16="http://schemas.microsoft.com/office/drawing/2014/main" id="{E45AFAE3-7D9D-4DB0-A01B-CD046F1E7D5F}"/>
+              </a:ext>
+            </a:extLst>
+          </p:cNvPr>
+          <p:cNvSpPr>
+            <a:spLocks noGrp="1"/>
+          </p:cNvSpPr>
+          <p:nvPr>
+            <p:ph idx="1"/>
+          </p:nvPr>
+        </p:nvSpPr>
+        <p:spPr/>
+        <p:txBody>
+          <a:bodyPr>
+            <a:normAutofit lnSpcReduction="10000"/>
+          </a:bodyPr>
+          <a:lstStyle/>
+          <a:p>
+            <a:pPr marL="0" indent="0">
+              <a:buNone/>
+            </a:pPr>
+            <a:r>
+              <a:rPr lang="en-AU" dirty="0">
+                <a:solidFill>
+                  <a:srgbClr val="0070C0"/>
+                </a:solidFill>
+              </a:rPr>
+              <a:t>Functions are first-class objects</a:t>
+            </a:r>
+          </a:p>
+          <a:p>
+            <a:pPr marL="457200" lvl="1" indent="0">
+              <a:buNone/>
+            </a:pPr>
+            <a:r>
+              <a:rPr lang="en-CA" dirty="0"/>
+              <a:t>Functions can be passed and returned (including closures)</a:t>
+            </a:r>
+          </a:p>
+          <a:p>
+            <a:pPr marL="0" indent="0">
+              <a:buNone/>
+            </a:pPr>
+            <a:r>
+              <a:rPr lang="en-CA" dirty="0">
+                <a:solidFill>
+                  <a:srgbClr val="0070C0"/>
+                </a:solidFill>
+              </a:rPr>
+              <a:t>Interpreted</a:t>
+            </a:r>
+          </a:p>
+          <a:p>
+            <a:pPr marL="457200" lvl="1" indent="0">
+              <a:buNone/>
+            </a:pPr>
+            <a:r>
+              <a:rPr lang="en-AU" dirty="0"/>
+              <a:t>Easy to evaluate individual expressions</a:t>
+            </a:r>
+          </a:p>
+          <a:p>
+            <a:pPr marL="0" indent="0">
+              <a:buNone/>
+            </a:pPr>
+            <a:r>
+              <a:rPr lang="en-AU" dirty="0">
+                <a:solidFill>
+                  <a:srgbClr val="0070C0"/>
+                </a:solidFill>
+              </a:rPr>
+              <a:t>Memory-safe and garbage-collected</a:t>
+            </a:r>
+          </a:p>
+          <a:p>
+            <a:pPr marL="457200" lvl="1" indent="0">
+              <a:buNone/>
+            </a:pPr>
+            <a:r>
+              <a:rPr lang="en-AU" dirty="0"/>
+              <a:t>No dangling pointers, no manual memory deletion</a:t>
+            </a:r>
+          </a:p>
+          <a:p>
+            <a:pPr marL="0" indent="0">
+              <a:buNone/>
+            </a:pPr>
+            <a:r>
+              <a:rPr lang="en-AU" dirty="0">
+                <a:solidFill>
+                  <a:srgbClr val="0070C0"/>
+                </a:solidFill>
+              </a:rPr>
+              <a:t>Homoiconic</a:t>
+            </a:r>
+          </a:p>
+          <a:p>
+            <a:pPr marL="457200" lvl="1" indent="0">
+              <a:buNone/>
+            </a:pPr>
+            <a:r>
+              <a:rPr lang="en-AU" dirty="0"/>
+              <a:t>Scheme programs are written as Scheme lists</a:t>
+            </a:r>
+            <a:endParaRPr lang="en-AU" dirty="0">
+              <a:solidFill>
+                <a:srgbClr val="0070C0"/>
+              </a:solidFill>
+            </a:endParaRPr>
+          </a:p>
+          <a:p>
+            <a:pPr marL="0" indent="0">
+              <a:buNone/>
+            </a:pPr>
+            <a:r>
+              <a:rPr lang="en-AU" dirty="0">
+                <a:solidFill>
+                  <a:srgbClr val="0070C0"/>
+                </a:solidFill>
+              </a:rPr>
+              <a:t>Flexible</a:t>
+            </a:r>
+          </a:p>
+          <a:p>
+            <a:pPr marL="457200" lvl="1" indent="0">
+              <a:buNone/>
+            </a:pPr>
+            <a:r>
+              <a:rPr lang="en-AU" dirty="0"/>
+              <a:t>Powerful macro system allows for major changes to the language</a:t>
+            </a:r>
+          </a:p>
+          <a:p>
+            <a:pPr marL="457200" lvl="1" indent="0">
+              <a:buNone/>
+            </a:pPr>
+            <a:endParaRPr lang="en-AU" dirty="0"/>
+          </a:p>
+        </p:txBody>
+      </p:sp>
+    </p:spTree>
+    <p:extLst>
+      <p:ext uri="{BB962C8B-B14F-4D97-AF65-F5344CB8AC3E}">
+        <p14:creationId xmlns:p14="http://schemas.microsoft.com/office/powerpoint/2010/main" val="2414411496"/>
+      </p:ext>
+    </p:extLst>
+  </p:cSld>
+  <p:clrMapOvr>
+    <a:masterClrMapping/>
+  </p:clrMapOvr>
+</p:sld>
+</file>
+
+<file path=ppt/slides/slide3.xml><?xml version="1.0" encoding="utf-8"?>
+<p:sld xmlns:a="http://schemas.openxmlformats.org/drawingml/2006/main" xmlns:r="http://schemas.openxmlformats.org/officeDocument/2006/relationships" xmlns:p="http://schemas.openxmlformats.org/presentationml/2006/main">
+  <p:cSld>
+    <p:spTree>
+      <p:nvGrpSpPr>
+        <p:cNvPr id="1" name=""/>
+        <p:cNvGrpSpPr/>
+        <p:nvPr/>
+      </p:nvGrpSpPr>
+      <p:grpSpPr>
+        <a:xfrm>
+          <a:off x="0" y="0"/>
+          <a:ext cx="0" cy="0"/>
+          <a:chOff x="0" y="0"/>
+          <a:chExt cx="0" cy="0"/>
+        </a:xfrm>
+      </p:grpSpPr>
+      <p:sp>
+        <p:nvSpPr>
+          <p:cNvPr id="2" name="Title 1">
+            <a:extLst>
+              <a:ext uri="{FF2B5EF4-FFF2-40B4-BE49-F238E27FC236}">
+                <a16:creationId xmlns:a16="http://schemas.microsoft.com/office/drawing/2014/main" id="{9D56FCE7-DB3A-40C9-92A2-796AAF385628}"/>
+              </a:ext>
+            </a:extLst>
+          </p:cNvPr>
+          <p:cNvSpPr>
+            <a:spLocks noGrp="1"/>
+          </p:cNvSpPr>
+          <p:nvPr>
+            <p:ph type="title"/>
+          </p:nvPr>
+        </p:nvSpPr>
+        <p:spPr/>
+        <p:txBody>
+          <a:bodyPr/>
+          <a:lstStyle/>
+          <a:p>
+            <a:r>
+              <a:rPr lang="en-CA" dirty="0"/>
+              <a:t>1960: First Appearances</a:t>
+            </a:r>
+            <a:endParaRPr lang="en-AU" dirty="0"/>
+          </a:p>
+        </p:txBody>
+      </p:sp>
+    </p:spTree>
+    <p:extLst>
+      <p:ext uri="{BB962C8B-B14F-4D97-AF65-F5344CB8AC3E}">
+        <p14:creationId xmlns:p14="http://schemas.microsoft.com/office/powerpoint/2010/main" val="962438491"/>
+      </p:ext>
+    </p:extLst>
+  </p:cSld>
+  <p:clrMapOvr>
+    <a:masterClrMapping/>
+  </p:clrMapOvr>
+</p:sld>
+</file>
+
+<file path=ppt/slides/slide30.xml><?xml version="1.0" encoding="utf-8"?>
+<p:sld xmlns:a="http://schemas.openxmlformats.org/drawingml/2006/main" xmlns:r="http://schemas.openxmlformats.org/officeDocument/2006/relationships" xmlns:p="http://schemas.openxmlformats.org/presentationml/2006/main">
+  <p:cSld>
+    <p:spTree>
+      <p:nvGrpSpPr>
+        <p:cNvPr id="1" name=""/>
+        <p:cNvGrpSpPr/>
+        <p:nvPr/>
+      </p:nvGrpSpPr>
+      <p:grpSpPr>
+        <a:xfrm>
+          <a:off x="0" y="0"/>
+          <a:ext cx="0" cy="0"/>
+          <a:chOff x="0" y="0"/>
+          <a:chExt cx="0" cy="0"/>
+        </a:xfrm>
+      </p:grpSpPr>
+      <p:sp>
+        <p:nvSpPr>
+          <p:cNvPr id="2" name="Title 1">
+            <a:extLst>
+              <a:ext uri="{FF2B5EF4-FFF2-40B4-BE49-F238E27FC236}">
+                <a16:creationId xmlns:a16="http://schemas.microsoft.com/office/drawing/2014/main" id="{E453DFDB-8487-48AA-A582-0CEA13856DA2}"/>
+              </a:ext>
+            </a:extLst>
+          </p:cNvPr>
+          <p:cNvSpPr>
+            <a:spLocks noGrp="1"/>
+          </p:cNvSpPr>
+          <p:nvPr>
+            <p:ph type="title"/>
+          </p:nvPr>
+        </p:nvSpPr>
+        <p:spPr/>
+        <p:txBody>
+          <a:bodyPr/>
+          <a:lstStyle/>
+          <a:p>
+            <a:r>
+              <a:rPr lang="en-CA" dirty="0"/>
+              <a:t>Major Features of Scheme</a:t>
+            </a:r>
+            <a:endParaRPr lang="en-AU" dirty="0"/>
+          </a:p>
+        </p:txBody>
+      </p:sp>
+      <p:sp>
+        <p:nvSpPr>
+          <p:cNvPr id="3" name="Content Placeholder 2">
+            <a:extLst>
+              <a:ext uri="{FF2B5EF4-FFF2-40B4-BE49-F238E27FC236}">
+                <a16:creationId xmlns:a16="http://schemas.microsoft.com/office/drawing/2014/main" id="{E45AFAE3-7D9D-4DB0-A01B-CD046F1E7D5F}"/>
+              </a:ext>
+            </a:extLst>
+          </p:cNvPr>
+          <p:cNvSpPr>
+            <a:spLocks noGrp="1"/>
+          </p:cNvSpPr>
+          <p:nvPr>
+            <p:ph idx="1"/>
+          </p:nvPr>
+        </p:nvSpPr>
+        <p:spPr/>
+        <p:txBody>
+          <a:bodyPr>
+            <a:normAutofit/>
+          </a:bodyPr>
+          <a:lstStyle/>
+          <a:p>
+            <a:pPr marL="0" indent="0">
+              <a:buNone/>
+            </a:pPr>
+            <a:r>
+              <a:rPr lang="en-CA" dirty="0">
+                <a:solidFill>
+                  <a:srgbClr val="0070C0"/>
+                </a:solidFill>
+              </a:rPr>
+              <a:t>Types</a:t>
+            </a:r>
+          </a:p>
+          <a:p>
+            <a:pPr marL="457200" lvl="1" indent="0">
+              <a:buNone/>
+            </a:pPr>
+            <a:r>
+              <a:rPr lang="en-CA" dirty="0"/>
+              <a:t>Dynamically typed, i.e. types checked at run-time (like Python)</a:t>
+            </a:r>
+          </a:p>
+          <a:p>
+            <a:pPr marL="457200" lvl="1" indent="0">
+              <a:buNone/>
+            </a:pPr>
+            <a:r>
+              <a:rPr lang="en-CA" dirty="0"/>
+              <a:t>Symbols are a data type</a:t>
+            </a:r>
+            <a:br>
+              <a:rPr lang="en-CA" dirty="0"/>
+            </a:br>
+            <a:r>
+              <a:rPr lang="en-CA" dirty="0"/>
+              <a:t>Lists are the key data structure</a:t>
+            </a:r>
+          </a:p>
+          <a:p>
+            <a:pPr marL="0" indent="0">
+              <a:buNone/>
+            </a:pPr>
+            <a:r>
+              <a:rPr lang="en-CA" dirty="0">
+                <a:solidFill>
+                  <a:srgbClr val="0070C0"/>
+                </a:solidFill>
+              </a:rPr>
+              <a:t>Lexical Scoping</a:t>
+            </a:r>
+          </a:p>
+          <a:p>
+            <a:pPr marL="457200" lvl="1" indent="0">
+              <a:buNone/>
+            </a:pPr>
+            <a:r>
+              <a:rPr lang="en-CA" dirty="0"/>
+              <a:t>One of the first languages to fully implement the name-scoping rules we now take for granted in programming (scope can be determined from source code)</a:t>
+            </a:r>
+          </a:p>
+          <a:p>
+            <a:pPr marL="0" indent="0">
+              <a:buNone/>
+            </a:pPr>
+            <a:r>
+              <a:rPr lang="en-CA" dirty="0">
+                <a:solidFill>
+                  <a:srgbClr val="0070C0"/>
+                </a:solidFill>
+              </a:rPr>
+              <a:t>Tail Recursion</a:t>
+            </a:r>
+          </a:p>
+          <a:p>
+            <a:pPr marL="457200" lvl="1" indent="0">
+              <a:buNone/>
+            </a:pPr>
+            <a:r>
+              <a:rPr lang="en-CA" dirty="0"/>
+              <a:t>Tail-recursive functions are automatically optimized into loops</a:t>
+            </a:r>
+          </a:p>
+          <a:p>
+            <a:pPr marL="457200" lvl="1" indent="0">
+              <a:buNone/>
+            </a:pPr>
+            <a:endParaRPr lang="en-CA" dirty="0"/>
+          </a:p>
+          <a:p>
+            <a:pPr marL="457200" lvl="1" indent="0">
+              <a:buNone/>
+            </a:pPr>
+            <a:endParaRPr lang="en-CA" dirty="0"/>
+          </a:p>
+          <a:p>
+            <a:pPr marL="457200" lvl="1" indent="0">
+              <a:buNone/>
+            </a:pPr>
+            <a:endParaRPr lang="en-CA" dirty="0"/>
+          </a:p>
+        </p:txBody>
+      </p:sp>
+    </p:spTree>
+    <p:extLst>
+      <p:ext uri="{BB962C8B-B14F-4D97-AF65-F5344CB8AC3E}">
+        <p14:creationId xmlns:p14="http://schemas.microsoft.com/office/powerpoint/2010/main" val="247949623"/>
+      </p:ext>
+    </p:extLst>
+  </p:cSld>
+  <p:clrMapOvr>
+    <a:masterClrMapping/>
+  </p:clrMapOvr>
+</p:sld>
+</file>
+
+<file path=ppt/slides/slide31.xml><?xml version="1.0" encoding="utf-8"?>
+<p:sld xmlns:a="http://schemas.openxmlformats.org/drawingml/2006/main" xmlns:r="http://schemas.openxmlformats.org/officeDocument/2006/relationships" xmlns:p="http://schemas.openxmlformats.org/presentationml/2006/main">
+  <p:cSld>
+    <p:spTree>
+      <p:nvGrpSpPr>
+        <p:cNvPr id="1" name=""/>
+        <p:cNvGrpSpPr/>
+        <p:nvPr/>
+      </p:nvGrpSpPr>
+      <p:grpSpPr>
+        <a:xfrm>
+          <a:off x="0" y="0"/>
+          <a:ext cx="0" cy="0"/>
+          <a:chOff x="0" y="0"/>
+          <a:chExt cx="0" cy="0"/>
+        </a:xfrm>
+      </p:grpSpPr>
+      <p:sp>
+        <p:nvSpPr>
+          <p:cNvPr id="2" name="Title 1">
+            <a:extLst>
+              <a:ext uri="{FF2B5EF4-FFF2-40B4-BE49-F238E27FC236}">
+                <a16:creationId xmlns:a16="http://schemas.microsoft.com/office/drawing/2014/main" id="{E453DFDB-8487-48AA-A582-0CEA13856DA2}"/>
+              </a:ext>
+            </a:extLst>
+          </p:cNvPr>
+          <p:cNvSpPr>
+            <a:spLocks noGrp="1"/>
+          </p:cNvSpPr>
+          <p:nvPr>
+            <p:ph type="title"/>
+          </p:nvPr>
+        </p:nvSpPr>
+        <p:spPr/>
+        <p:txBody>
+          <a:bodyPr/>
+          <a:lstStyle/>
+          <a:p>
+            <a:r>
+              <a:rPr lang="en-CA" dirty="0"/>
+              <a:t>Major Features </a:t>
+            </a:r>
+            <a:r>
+              <a:rPr lang="en-CA" dirty="0">
+                <a:solidFill>
+                  <a:srgbClr val="FF0000"/>
+                </a:solidFill>
+              </a:rPr>
+              <a:t>Not</a:t>
+            </a:r>
+            <a:r>
+              <a:rPr lang="en-CA" dirty="0"/>
+              <a:t> in Scheme</a:t>
+            </a:r>
+            <a:endParaRPr lang="en-AU" dirty="0"/>
+          </a:p>
+        </p:txBody>
+      </p:sp>
+      <p:sp>
+        <p:nvSpPr>
+          <p:cNvPr id="3" name="Content Placeholder 2">
+            <a:extLst>
+              <a:ext uri="{FF2B5EF4-FFF2-40B4-BE49-F238E27FC236}">
+                <a16:creationId xmlns:a16="http://schemas.microsoft.com/office/drawing/2014/main" id="{E45AFAE3-7D9D-4DB0-A01B-CD046F1E7D5F}"/>
+              </a:ext>
+            </a:extLst>
+          </p:cNvPr>
+          <p:cNvSpPr>
+            <a:spLocks noGrp="1"/>
+          </p:cNvSpPr>
+          <p:nvPr>
+            <p:ph idx="1"/>
+          </p:nvPr>
+        </p:nvSpPr>
+        <p:spPr/>
+        <p:txBody>
+          <a:bodyPr>
+            <a:normAutofit/>
+          </a:bodyPr>
+          <a:lstStyle/>
+          <a:p>
+            <a:pPr marL="0" indent="0">
+              <a:buNone/>
+            </a:pPr>
+            <a:r>
+              <a:rPr lang="en-CA" dirty="0">
+                <a:solidFill>
+                  <a:srgbClr val="0070C0"/>
+                </a:solidFill>
+              </a:rPr>
+              <a:t>Features </a:t>
+            </a:r>
+            <a:r>
+              <a:rPr lang="en-CA" b="1" dirty="0">
+                <a:solidFill>
+                  <a:srgbClr val="0070C0"/>
+                </a:solidFill>
+              </a:rPr>
+              <a:t>not</a:t>
+            </a:r>
+            <a:r>
+              <a:rPr lang="en-CA" dirty="0">
+                <a:solidFill>
+                  <a:srgbClr val="0070C0"/>
+                </a:solidFill>
+              </a:rPr>
+              <a:t> part of Scheme</a:t>
+            </a:r>
+          </a:p>
+          <a:p>
+            <a:pPr marL="457200" lvl="1" indent="0">
+              <a:buNone/>
+            </a:pPr>
+            <a:r>
+              <a:rPr lang="en-CA" dirty="0">
+                <a:solidFill>
+                  <a:srgbClr val="FF0000"/>
+                </a:solidFill>
+              </a:rPr>
+              <a:t>No</a:t>
+            </a:r>
+            <a:r>
+              <a:rPr lang="en-CA" dirty="0"/>
+              <a:t> static type declarations</a:t>
+            </a:r>
+          </a:p>
+          <a:p>
+            <a:pPr marL="457200" lvl="1" indent="0">
+              <a:buNone/>
+            </a:pPr>
+            <a:r>
+              <a:rPr lang="en-CA" dirty="0">
+                <a:solidFill>
+                  <a:srgbClr val="FF0000"/>
+                </a:solidFill>
+              </a:rPr>
+              <a:t>No</a:t>
+            </a:r>
+            <a:r>
+              <a:rPr lang="en-CA" dirty="0"/>
+              <a:t> pointers</a:t>
+            </a:r>
+          </a:p>
+          <a:p>
+            <a:pPr marL="457200" lvl="1" indent="0">
+              <a:buNone/>
+            </a:pPr>
+            <a:r>
+              <a:rPr lang="en-CA" dirty="0">
+                <a:solidFill>
+                  <a:srgbClr val="FF0000"/>
+                </a:solidFill>
+              </a:rPr>
+              <a:t>No</a:t>
+            </a:r>
+            <a:r>
+              <a:rPr lang="en-CA" dirty="0"/>
+              <a:t> built-in notion of object-oriented programming</a:t>
+            </a:r>
+          </a:p>
+          <a:p>
+            <a:pPr marL="457200" lvl="1" indent="0">
+              <a:buNone/>
+            </a:pPr>
+            <a:endParaRPr lang="en-CA" dirty="0"/>
+          </a:p>
+        </p:txBody>
+      </p:sp>
+    </p:spTree>
+    <p:extLst>
+      <p:ext uri="{BB962C8B-B14F-4D97-AF65-F5344CB8AC3E}">
+        <p14:creationId xmlns:p14="http://schemas.microsoft.com/office/powerpoint/2010/main" val="1760816993"/>
+      </p:ext>
+    </p:extLst>
+  </p:cSld>
+  <p:clrMapOvr>
+    <a:masterClrMapping/>
+  </p:clrMapOvr>
+</p:sld>
+</file>
+
+<file path=ppt/slides/slide32.xml><?xml version="1.0" encoding="utf-8"?>
+<p:sld xmlns:a="http://schemas.openxmlformats.org/drawingml/2006/main" xmlns:r="http://schemas.openxmlformats.org/officeDocument/2006/relationships" xmlns:p="http://schemas.openxmlformats.org/presentationml/2006/main">
+  <p:cSld>
+    <p:spTree>
+      <p:nvGrpSpPr>
+        <p:cNvPr id="1" name=""/>
+        <p:cNvGrpSpPr/>
+        <p:nvPr/>
+      </p:nvGrpSpPr>
+      <p:grpSpPr>
+        <a:xfrm>
+          <a:off x="0" y="0"/>
+          <a:ext cx="0" cy="0"/>
+          <a:chOff x="0" y="0"/>
+          <a:chExt cx="0" cy="0"/>
+        </a:xfrm>
+      </p:grpSpPr>
+      <p:sp>
+        <p:nvSpPr>
+          <p:cNvPr id="2" name="Title 1">
+            <a:extLst>
+              <a:ext uri="{FF2B5EF4-FFF2-40B4-BE49-F238E27FC236}">
+                <a16:creationId xmlns:a16="http://schemas.microsoft.com/office/drawing/2014/main" id="{24666DA8-3BC8-44C4-A6B8-4077E3A5589E}"/>
+              </a:ext>
+            </a:extLst>
+          </p:cNvPr>
+          <p:cNvSpPr>
+            <a:spLocks noGrp="1"/>
+          </p:cNvSpPr>
+          <p:nvPr>
+            <p:ph type="title"/>
+          </p:nvPr>
+        </p:nvSpPr>
+        <p:spPr>
+          <a:xfrm>
+            <a:off x="421822" y="75519"/>
+            <a:ext cx="10515600" cy="1325563"/>
+          </a:xfrm>
+        </p:spPr>
+        <p:txBody>
+          <a:bodyPr/>
+          <a:lstStyle/>
+          <a:p>
+            <a:r>
+              <a:rPr lang="en-CA" dirty="0"/>
+              <a:t>Hello, World!</a:t>
+            </a:r>
+            <a:endParaRPr lang="en-AU" dirty="0"/>
+          </a:p>
+        </p:txBody>
+      </p:sp>
+      <p:sp>
+        <p:nvSpPr>
+          <p:cNvPr id="3" name="Content Placeholder 2">
+            <a:extLst>
+              <a:ext uri="{FF2B5EF4-FFF2-40B4-BE49-F238E27FC236}">
+                <a16:creationId xmlns:a16="http://schemas.microsoft.com/office/drawing/2014/main" id="{625907E2-02AB-4FC8-8372-75485A2CCADC}"/>
+              </a:ext>
+            </a:extLst>
+          </p:cNvPr>
+          <p:cNvSpPr>
+            <a:spLocks noGrp="1"/>
+          </p:cNvSpPr>
+          <p:nvPr>
+            <p:ph idx="1"/>
+          </p:nvPr>
+        </p:nvSpPr>
+        <p:spPr>
+          <a:xfrm>
+            <a:off x="2132118" y="2146358"/>
+            <a:ext cx="4750014" cy="2033681"/>
+          </a:xfrm>
+        </p:spPr>
+        <p:txBody>
+          <a:bodyPr>
+            <a:normAutofit/>
+          </a:bodyPr>
+          <a:lstStyle/>
+          <a:p>
+            <a:pPr marL="0" indent="0">
+              <a:buNone/>
+            </a:pPr>
+            <a:r>
+              <a:rPr lang="en-US" dirty="0">
+                <a:latin typeface="Consolas" panose="020B0609020204030204" pitchFamily="49" charset="0"/>
+              </a:rPr>
+              <a:t>;; </a:t>
+            </a:r>
+            <a:r>
+              <a:rPr lang="en-US" dirty="0" err="1">
+                <a:latin typeface="Consolas" panose="020B0609020204030204" pitchFamily="49" charset="0"/>
+              </a:rPr>
+              <a:t>hello_world.rkt</a:t>
+            </a:r>
+            <a:endParaRPr lang="en-US" dirty="0">
+              <a:latin typeface="Consolas" panose="020B0609020204030204" pitchFamily="49" charset="0"/>
+            </a:endParaRPr>
+          </a:p>
+          <a:p>
+            <a:pPr marL="0" indent="0">
+              <a:buNone/>
+            </a:pPr>
+            <a:endParaRPr lang="en-US" dirty="0">
+              <a:latin typeface="Consolas" panose="020B0609020204030204" pitchFamily="49" charset="0"/>
+            </a:endParaRPr>
+          </a:p>
+          <a:p>
+            <a:pPr marL="0" indent="0">
+              <a:buNone/>
+            </a:pPr>
+            <a:r>
+              <a:rPr lang="en-US" dirty="0">
+                <a:latin typeface="Consolas" panose="020B0609020204030204" pitchFamily="49" charset="0"/>
+              </a:rPr>
+              <a:t>(print "Hello, world!")</a:t>
+            </a:r>
+          </a:p>
+        </p:txBody>
+      </p:sp>
+      <p:sp>
+        <p:nvSpPr>
+          <p:cNvPr id="4" name="TextBox 3">
+            <a:extLst>
+              <a:ext uri="{FF2B5EF4-FFF2-40B4-BE49-F238E27FC236}">
+                <a16:creationId xmlns:a16="http://schemas.microsoft.com/office/drawing/2014/main" id="{1AB9C04D-6CD3-48A5-BEAC-80EB44E5AF49}"/>
+              </a:ext>
+            </a:extLst>
+          </p:cNvPr>
+          <p:cNvSpPr txBox="1"/>
+          <p:nvPr/>
+        </p:nvSpPr>
+        <p:spPr>
+          <a:xfrm>
+            <a:off x="7607873" y="2516868"/>
+            <a:ext cx="2452009" cy="1477328"/>
+          </a:xfrm>
+          <a:prstGeom prst="rect">
+            <a:avLst/>
+          </a:prstGeom>
+          <a:solidFill>
+            <a:schemeClr val="accent4">
+              <a:lumMod val="40000"/>
+              <a:lumOff val="60000"/>
+            </a:schemeClr>
+          </a:solidFill>
+        </p:spPr>
+        <p:txBody>
+          <a:bodyPr wrap="square" rtlCol="0">
+            <a:spAutoFit/>
+          </a:bodyPr>
+          <a:lstStyle/>
+          <a:p>
+            <a:pPr algn="ctr"/>
+            <a:r>
+              <a:rPr lang="en-CA" dirty="0"/>
+              <a:t>Download and run this in the </a:t>
+            </a:r>
+            <a:r>
+              <a:rPr lang="en-CA" b="1" dirty="0" err="1"/>
+              <a:t>DrRacket</a:t>
+            </a:r>
+            <a:r>
+              <a:rPr lang="en-CA" dirty="0"/>
+              <a:t> IDE. We’ll use both the interpreter and file editor in </a:t>
+            </a:r>
+            <a:r>
+              <a:rPr lang="en-CA" dirty="0" err="1"/>
+              <a:t>DrRacket</a:t>
+            </a:r>
+            <a:r>
+              <a:rPr lang="en-CA" dirty="0"/>
+              <a:t>.</a:t>
+            </a:r>
+            <a:endParaRPr lang="en-AU" dirty="0"/>
+          </a:p>
+        </p:txBody>
+      </p:sp>
+    </p:spTree>
+    <p:extLst>
+      <p:ext uri="{BB962C8B-B14F-4D97-AF65-F5344CB8AC3E}">
+        <p14:creationId xmlns:p14="http://schemas.microsoft.com/office/powerpoint/2010/main" val="230914827"/>
+      </p:ext>
+    </p:extLst>
+  </p:cSld>
+  <p:clrMapOvr>
+    <a:masterClrMapping/>
+  </p:clrMapOvr>
+</p:sld>
+</file>
+
+<file path=ppt/slides/slide4.xml><?xml version="1.0" encoding="utf-8"?>
+<p:sld xmlns:a="http://schemas.openxmlformats.org/drawingml/2006/main" xmlns:r="http://schemas.openxmlformats.org/officeDocument/2006/relationships" xmlns:p="http://schemas.openxmlformats.org/presentationml/2006/main">
+  <p:cSld>
+    <p:spTree>
+      <p:nvGrpSpPr>
+        <p:cNvPr id="1" name="">
+          <a:extLst>
+            <a:ext uri="{FF2B5EF4-FFF2-40B4-BE49-F238E27FC236}">
+              <a16:creationId xmlns:a16="http://schemas.microsoft.com/office/drawing/2014/main" id="{401AAF09-5F79-584A-39B1-C352E2A7F3F4}"/>
+            </a:ext>
+          </a:extLst>
+        </p:cNvPr>
+        <p:cNvGrpSpPr/>
+        <p:nvPr/>
+      </p:nvGrpSpPr>
+      <p:grpSpPr>
+        <a:xfrm>
+          <a:off x="0" y="0"/>
+          <a:ext cx="0" cy="0"/>
+          <a:chOff x="0" y="0"/>
+          <a:chExt cx="0" cy="0"/>
+        </a:xfrm>
+      </p:grpSpPr>
+      <p:sp>
+        <p:nvSpPr>
+          <p:cNvPr id="2" name="Title 1">
+            <a:extLst>
+              <a:ext uri="{FF2B5EF4-FFF2-40B4-BE49-F238E27FC236}">
+                <a16:creationId xmlns:a16="http://schemas.microsoft.com/office/drawing/2014/main" id="{D119AAF8-9DEC-CA6F-4790-29DF18C5DDF7}"/>
+              </a:ext>
+            </a:extLst>
+          </p:cNvPr>
+          <p:cNvSpPr>
+            <a:spLocks noGrp="1"/>
+          </p:cNvSpPr>
+          <p:nvPr>
+            <p:ph type="title"/>
+          </p:nvPr>
+        </p:nvSpPr>
+        <p:spPr/>
+        <p:txBody>
+          <a:bodyPr/>
+          <a:lstStyle/>
+          <a:p>
+            <a:r>
+              <a:rPr lang="en-CA" dirty="0"/>
+              <a:t>1960: First Appearances</a:t>
+            </a:r>
+            <a:endParaRPr lang="en-AU" dirty="0"/>
+          </a:p>
+        </p:txBody>
+      </p:sp>
+      <p:grpSp>
+        <p:nvGrpSpPr>
+          <p:cNvPr id="7" name="Group 6">
+            <a:extLst>
+              <a:ext uri="{FF2B5EF4-FFF2-40B4-BE49-F238E27FC236}">
+                <a16:creationId xmlns:a16="http://schemas.microsoft.com/office/drawing/2014/main" id="{68BD7798-D95B-B2AC-1701-5A8C24FF56B6}"/>
+              </a:ext>
+            </a:extLst>
+          </p:cNvPr>
+          <p:cNvGrpSpPr/>
+          <p:nvPr/>
+        </p:nvGrpSpPr>
+        <p:grpSpPr>
+          <a:xfrm>
+            <a:off x="689610" y="2118638"/>
+            <a:ext cx="2759059" cy="2620724"/>
+            <a:chOff x="669290" y="1690688"/>
+            <a:chExt cx="2759059" cy="2620724"/>
+          </a:xfrm>
+        </p:grpSpPr>
+        <p:pic>
+          <p:nvPicPr>
+            <p:cNvPr id="4" name="Picture 3">
+              <a:extLst>
+                <a:ext uri="{FF2B5EF4-FFF2-40B4-BE49-F238E27FC236}">
+                  <a16:creationId xmlns:a16="http://schemas.microsoft.com/office/drawing/2014/main" id="{1A1E4A59-D3A3-FAE0-1B8F-513D2CF789BF}"/>
+                </a:ext>
+              </a:extLst>
+            </p:cNvPr>
+            <p:cNvPicPr>
+              <a:picLocks noChangeAspect="1"/>
+            </p:cNvPicPr>
+            <p:nvPr/>
+          </p:nvPicPr>
+          <p:blipFill>
+            <a:blip r:embed="rId2"/>
+            <a:stretch>
+              <a:fillRect/>
+            </a:stretch>
+          </p:blipFill>
+          <p:spPr>
+            <a:xfrm>
+              <a:off x="669290" y="1690688"/>
+              <a:ext cx="2759059" cy="2251392"/>
+            </a:xfrm>
+            <a:prstGeom prst="rect">
+              <a:avLst/>
+            </a:prstGeom>
+          </p:spPr>
+        </p:pic>
+        <p:sp>
+          <p:nvSpPr>
+            <p:cNvPr id="6" name="TextBox 5">
+              <a:extLst>
+                <a:ext uri="{FF2B5EF4-FFF2-40B4-BE49-F238E27FC236}">
+                  <a16:creationId xmlns:a16="http://schemas.microsoft.com/office/drawing/2014/main" id="{24A17C11-5035-5B20-3A5A-C556B7F57B30}"/>
+                </a:ext>
+              </a:extLst>
+            </p:cNvPr>
+            <p:cNvSpPr txBox="1"/>
+            <p:nvPr/>
+          </p:nvSpPr>
+          <p:spPr>
+            <a:xfrm>
+              <a:off x="669290" y="3942080"/>
+              <a:ext cx="2759059" cy="369332"/>
+            </a:xfrm>
+            <a:prstGeom prst="rect">
+              <a:avLst/>
+            </a:prstGeom>
+            <a:noFill/>
+          </p:spPr>
+          <p:txBody>
+            <a:bodyPr wrap="square" rtlCol="0">
+              <a:spAutoFit/>
+            </a:bodyPr>
+            <a:lstStyle/>
+            <a:p>
+              <a:pPr algn="ctr"/>
+              <a:r>
+                <a:rPr lang="en-US" dirty="0"/>
+                <a:t>The Laser</a:t>
+              </a:r>
+            </a:p>
+          </p:txBody>
+        </p:sp>
+      </p:grpSp>
+    </p:spTree>
+    <p:extLst>
+      <p:ext uri="{BB962C8B-B14F-4D97-AF65-F5344CB8AC3E}">
+        <p14:creationId xmlns:p14="http://schemas.microsoft.com/office/powerpoint/2010/main" val="616838184"/>
+      </p:ext>
+    </p:extLst>
+  </p:cSld>
+  <p:clrMapOvr>
+    <a:masterClrMapping/>
+  </p:clrMapOvr>
+</p:sld>
+</file>
+
+<file path=ppt/slides/slide5.xml><?xml version="1.0" encoding="utf-8"?>
+<p:sld xmlns:a="http://schemas.openxmlformats.org/drawingml/2006/main" xmlns:r="http://schemas.openxmlformats.org/officeDocument/2006/relationships" xmlns:p="http://schemas.openxmlformats.org/presentationml/2006/main">
+  <p:cSld>
+    <p:spTree>
+      <p:nvGrpSpPr>
+        <p:cNvPr id="1" name="">
+          <a:extLst>
+            <a:ext uri="{FF2B5EF4-FFF2-40B4-BE49-F238E27FC236}">
+              <a16:creationId xmlns:a16="http://schemas.microsoft.com/office/drawing/2014/main" id="{EF2F07A7-9312-BBCC-380A-57AE049AA6B5}"/>
+            </a:ext>
+          </a:extLst>
+        </p:cNvPr>
+        <p:cNvGrpSpPr/>
+        <p:nvPr/>
+      </p:nvGrpSpPr>
+      <p:grpSpPr>
+        <a:xfrm>
+          <a:off x="0" y="0"/>
+          <a:ext cx="0" cy="0"/>
+          <a:chOff x="0" y="0"/>
+          <a:chExt cx="0" cy="0"/>
+        </a:xfrm>
+      </p:grpSpPr>
+      <p:sp>
+        <p:nvSpPr>
+          <p:cNvPr id="2" name="Title 1">
+            <a:extLst>
+              <a:ext uri="{FF2B5EF4-FFF2-40B4-BE49-F238E27FC236}">
+                <a16:creationId xmlns:a16="http://schemas.microsoft.com/office/drawing/2014/main" id="{0642766D-D5B1-9297-5E53-19FB9B89CA7F}"/>
+              </a:ext>
+            </a:extLst>
+          </p:cNvPr>
+          <p:cNvSpPr>
+            <a:spLocks noGrp="1"/>
+          </p:cNvSpPr>
+          <p:nvPr>
+            <p:ph type="title"/>
+          </p:nvPr>
+        </p:nvSpPr>
+        <p:spPr/>
+        <p:txBody>
+          <a:bodyPr/>
+          <a:lstStyle/>
+          <a:p>
+            <a:r>
+              <a:rPr lang="en-CA" dirty="0"/>
+              <a:t>1960: First Appearances</a:t>
+            </a:r>
+            <a:endParaRPr lang="en-AU" dirty="0"/>
+          </a:p>
+        </p:txBody>
+      </p:sp>
+      <p:grpSp>
+        <p:nvGrpSpPr>
+          <p:cNvPr id="7" name="Group 6">
+            <a:extLst>
+              <a:ext uri="{FF2B5EF4-FFF2-40B4-BE49-F238E27FC236}">
+                <a16:creationId xmlns:a16="http://schemas.microsoft.com/office/drawing/2014/main" id="{9FAE27BF-23E0-14A2-A10E-E4F110AE110F}"/>
+              </a:ext>
+            </a:extLst>
+          </p:cNvPr>
+          <p:cNvGrpSpPr/>
+          <p:nvPr/>
+        </p:nvGrpSpPr>
+        <p:grpSpPr>
+          <a:xfrm>
+            <a:off x="689610" y="2118638"/>
+            <a:ext cx="2759059" cy="2620724"/>
+            <a:chOff x="669290" y="1690688"/>
+            <a:chExt cx="2759059" cy="2620724"/>
+          </a:xfrm>
+        </p:grpSpPr>
+        <p:pic>
+          <p:nvPicPr>
+            <p:cNvPr id="4" name="Picture 3">
+              <a:extLst>
+                <a:ext uri="{FF2B5EF4-FFF2-40B4-BE49-F238E27FC236}">
+                  <a16:creationId xmlns:a16="http://schemas.microsoft.com/office/drawing/2014/main" id="{897B5259-21C7-AA58-BDA1-FEF2BA366C51}"/>
+                </a:ext>
+              </a:extLst>
+            </p:cNvPr>
+            <p:cNvPicPr>
+              <a:picLocks noChangeAspect="1"/>
+            </p:cNvPicPr>
+            <p:nvPr/>
+          </p:nvPicPr>
+          <p:blipFill>
+            <a:blip r:embed="rId2"/>
+            <a:stretch>
+              <a:fillRect/>
+            </a:stretch>
+          </p:blipFill>
+          <p:spPr>
+            <a:xfrm>
+              <a:off x="669290" y="1690688"/>
+              <a:ext cx="2759059" cy="2251392"/>
+            </a:xfrm>
+            <a:prstGeom prst="rect">
+              <a:avLst/>
+            </a:prstGeom>
+          </p:spPr>
+        </p:pic>
+        <p:sp>
+          <p:nvSpPr>
+            <p:cNvPr id="6" name="TextBox 5">
+              <a:extLst>
+                <a:ext uri="{FF2B5EF4-FFF2-40B4-BE49-F238E27FC236}">
+                  <a16:creationId xmlns:a16="http://schemas.microsoft.com/office/drawing/2014/main" id="{EEC0E8B7-56B7-3EBA-C7BF-F1ED92C84EB9}"/>
+                </a:ext>
+              </a:extLst>
+            </p:cNvPr>
+            <p:cNvSpPr txBox="1"/>
+            <p:nvPr/>
+          </p:nvSpPr>
+          <p:spPr>
+            <a:xfrm>
+              <a:off x="669290" y="3942080"/>
+              <a:ext cx="2759059" cy="369332"/>
+            </a:xfrm>
+            <a:prstGeom prst="rect">
+              <a:avLst/>
+            </a:prstGeom>
+            <a:noFill/>
+          </p:spPr>
+          <p:txBody>
+            <a:bodyPr wrap="square" rtlCol="0">
+              <a:spAutoFit/>
+            </a:bodyPr>
+            <a:lstStyle/>
+            <a:p>
+              <a:pPr algn="ctr"/>
+              <a:r>
+                <a:rPr lang="en-US" dirty="0"/>
+                <a:t>The Laser</a:t>
+              </a:r>
+            </a:p>
+          </p:txBody>
+        </p:sp>
+      </p:grpSp>
+      <p:grpSp>
+        <p:nvGrpSpPr>
+          <p:cNvPr id="10" name="Group 9">
+            <a:extLst>
+              <a:ext uri="{FF2B5EF4-FFF2-40B4-BE49-F238E27FC236}">
+                <a16:creationId xmlns:a16="http://schemas.microsoft.com/office/drawing/2014/main" id="{E12B6314-526B-CB01-9C5D-9A50E7B27965}"/>
+              </a:ext>
+            </a:extLst>
+          </p:cNvPr>
+          <p:cNvGrpSpPr/>
+          <p:nvPr/>
+        </p:nvGrpSpPr>
+        <p:grpSpPr>
+          <a:xfrm>
+            <a:off x="4431269" y="2118638"/>
+            <a:ext cx="2669575" cy="2583081"/>
+            <a:chOff x="7164310" y="2983865"/>
+            <a:chExt cx="2669575" cy="2583081"/>
+          </a:xfrm>
+        </p:grpSpPr>
+        <p:pic>
+          <p:nvPicPr>
+            <p:cNvPr id="5" name="Picture 4" descr="First weather satellite (TIROS) | DARPA">
+              <a:extLst>
+                <a:ext uri="{FF2B5EF4-FFF2-40B4-BE49-F238E27FC236}">
+                  <a16:creationId xmlns:a16="http://schemas.microsoft.com/office/drawing/2014/main" id="{6D3209D2-1B75-E00C-86D9-9D302C419F64}"/>
+                </a:ext>
+              </a:extLst>
+            </p:cNvPr>
+            <p:cNvPicPr>
+              <a:picLocks noChangeAspect="1"/>
+            </p:cNvPicPr>
+            <p:nvPr/>
+          </p:nvPicPr>
+          <p:blipFill>
+            <a:blip r:embed="rId3"/>
+            <a:stretch>
+              <a:fillRect/>
+            </a:stretch>
+          </p:blipFill>
+          <p:spPr>
+            <a:xfrm>
+              <a:off x="7164310" y="2983865"/>
+              <a:ext cx="2669574" cy="1936750"/>
+            </a:xfrm>
+            <a:prstGeom prst="rect">
+              <a:avLst/>
+            </a:prstGeom>
+          </p:spPr>
+        </p:pic>
+        <p:sp>
+          <p:nvSpPr>
+            <p:cNvPr id="8" name="TextBox 7">
+              <a:extLst>
+                <a:ext uri="{FF2B5EF4-FFF2-40B4-BE49-F238E27FC236}">
+                  <a16:creationId xmlns:a16="http://schemas.microsoft.com/office/drawing/2014/main" id="{E31A1121-4F6C-5E06-71A8-3F7C5F57F067}"/>
+                </a:ext>
+              </a:extLst>
+            </p:cNvPr>
+            <p:cNvSpPr txBox="1"/>
+            <p:nvPr/>
+          </p:nvSpPr>
+          <p:spPr>
+            <a:xfrm>
+              <a:off x="7164311" y="4920615"/>
+              <a:ext cx="2669574" cy="646331"/>
+            </a:xfrm>
+            <a:prstGeom prst="rect">
+              <a:avLst/>
+            </a:prstGeom>
+            <a:noFill/>
+          </p:spPr>
+          <p:txBody>
+            <a:bodyPr wrap="square" rtlCol="0">
+              <a:spAutoFit/>
+            </a:bodyPr>
+            <a:lstStyle/>
+            <a:p>
+              <a:pPr algn="ctr"/>
+              <a:r>
+                <a:rPr lang="en-US" dirty="0"/>
+                <a:t>1</a:t>
+              </a:r>
+              <a:r>
+                <a:rPr lang="en-US" baseline="30000" dirty="0"/>
+                <a:t>st</a:t>
+              </a:r>
+              <a:r>
+                <a:rPr lang="en-US" dirty="0"/>
+                <a:t> Weather Satellite: TIROS1</a:t>
+              </a:r>
+            </a:p>
+          </p:txBody>
+        </p:sp>
+      </p:grpSp>
+    </p:spTree>
+    <p:extLst>
+      <p:ext uri="{BB962C8B-B14F-4D97-AF65-F5344CB8AC3E}">
+        <p14:creationId xmlns:p14="http://schemas.microsoft.com/office/powerpoint/2010/main" val="2319773601"/>
+      </p:ext>
+    </p:extLst>
+  </p:cSld>
+  <p:clrMapOvr>
+    <a:masterClrMapping/>
+  </p:clrMapOvr>
+</p:sld>
+</file>
+
+<file path=ppt/slides/slide6.xml><?xml version="1.0" encoding="utf-8"?>
+<p:sld xmlns:a="http://schemas.openxmlformats.org/drawingml/2006/main" xmlns:r="http://schemas.openxmlformats.org/officeDocument/2006/relationships" xmlns:p="http://schemas.openxmlformats.org/presentationml/2006/main">
+  <p:cSld>
+    <p:spTree>
+      <p:nvGrpSpPr>
+        <p:cNvPr id="1" name="">
+          <a:extLst>
+            <a:ext uri="{FF2B5EF4-FFF2-40B4-BE49-F238E27FC236}">
+              <a16:creationId xmlns:a16="http://schemas.microsoft.com/office/drawing/2014/main" id="{069BA7B1-53DD-711E-3EE7-E84782376F74}"/>
+            </a:ext>
+          </a:extLst>
+        </p:cNvPr>
+        <p:cNvGrpSpPr/>
+        <p:nvPr/>
+      </p:nvGrpSpPr>
+      <p:grpSpPr>
+        <a:xfrm>
+          <a:off x="0" y="0"/>
+          <a:ext cx="0" cy="0"/>
+          <a:chOff x="0" y="0"/>
+          <a:chExt cx="0" cy="0"/>
+        </a:xfrm>
+      </p:grpSpPr>
+      <p:sp>
+        <p:nvSpPr>
+          <p:cNvPr id="2" name="Title 1">
+            <a:extLst>
+              <a:ext uri="{FF2B5EF4-FFF2-40B4-BE49-F238E27FC236}">
+                <a16:creationId xmlns:a16="http://schemas.microsoft.com/office/drawing/2014/main" id="{544DC1F0-982D-2598-6BAF-3A190440A353}"/>
+              </a:ext>
+            </a:extLst>
+          </p:cNvPr>
+          <p:cNvSpPr>
+            <a:spLocks noGrp="1"/>
+          </p:cNvSpPr>
+          <p:nvPr>
+            <p:ph type="title"/>
+          </p:nvPr>
+        </p:nvSpPr>
+        <p:spPr/>
+        <p:txBody>
+          <a:bodyPr/>
+          <a:lstStyle/>
+          <a:p>
+            <a:r>
+              <a:rPr lang="en-CA" dirty="0"/>
+              <a:t>1960: First Appearances</a:t>
+            </a:r>
+            <a:endParaRPr lang="en-AU" dirty="0"/>
+          </a:p>
+        </p:txBody>
+      </p:sp>
+      <p:grpSp>
+        <p:nvGrpSpPr>
+          <p:cNvPr id="7" name="Group 6">
+            <a:extLst>
+              <a:ext uri="{FF2B5EF4-FFF2-40B4-BE49-F238E27FC236}">
+                <a16:creationId xmlns:a16="http://schemas.microsoft.com/office/drawing/2014/main" id="{0227E524-64C4-7158-6930-C9CF72EC86A9}"/>
+              </a:ext>
+            </a:extLst>
+          </p:cNvPr>
+          <p:cNvGrpSpPr/>
+          <p:nvPr/>
+        </p:nvGrpSpPr>
+        <p:grpSpPr>
+          <a:xfrm>
+            <a:off x="689610" y="2118638"/>
+            <a:ext cx="2759059" cy="2620724"/>
+            <a:chOff x="669290" y="1690688"/>
+            <a:chExt cx="2759059" cy="2620724"/>
+          </a:xfrm>
+        </p:grpSpPr>
+        <p:pic>
+          <p:nvPicPr>
+            <p:cNvPr id="4" name="Picture 3">
+              <a:extLst>
+                <a:ext uri="{FF2B5EF4-FFF2-40B4-BE49-F238E27FC236}">
+                  <a16:creationId xmlns:a16="http://schemas.microsoft.com/office/drawing/2014/main" id="{BDF395FF-DF5F-6C4F-DB87-E40D1FA8BEA1}"/>
+                </a:ext>
+              </a:extLst>
+            </p:cNvPr>
+            <p:cNvPicPr>
+              <a:picLocks noChangeAspect="1"/>
+            </p:cNvPicPr>
+            <p:nvPr/>
+          </p:nvPicPr>
+          <p:blipFill>
+            <a:blip r:embed="rId2"/>
+            <a:stretch>
+              <a:fillRect/>
+            </a:stretch>
+          </p:blipFill>
+          <p:spPr>
+            <a:xfrm>
+              <a:off x="669290" y="1690688"/>
+              <a:ext cx="2759059" cy="2251392"/>
+            </a:xfrm>
+            <a:prstGeom prst="rect">
+              <a:avLst/>
+            </a:prstGeom>
+          </p:spPr>
+        </p:pic>
+        <p:sp>
+          <p:nvSpPr>
+            <p:cNvPr id="6" name="TextBox 5">
+              <a:extLst>
+                <a:ext uri="{FF2B5EF4-FFF2-40B4-BE49-F238E27FC236}">
+                  <a16:creationId xmlns:a16="http://schemas.microsoft.com/office/drawing/2014/main" id="{AAC6DE53-E0EC-31F3-254D-1DC313265539}"/>
+                </a:ext>
+              </a:extLst>
+            </p:cNvPr>
+            <p:cNvSpPr txBox="1"/>
+            <p:nvPr/>
+          </p:nvSpPr>
+          <p:spPr>
+            <a:xfrm>
+              <a:off x="669290" y="3942080"/>
+              <a:ext cx="2759059" cy="369332"/>
+            </a:xfrm>
+            <a:prstGeom prst="rect">
+              <a:avLst/>
+            </a:prstGeom>
+            <a:noFill/>
+          </p:spPr>
+          <p:txBody>
+            <a:bodyPr wrap="square" rtlCol="0">
+              <a:spAutoFit/>
+            </a:bodyPr>
+            <a:lstStyle/>
+            <a:p>
+              <a:pPr algn="ctr"/>
+              <a:r>
+                <a:rPr lang="en-US" dirty="0"/>
+                <a:t>The Laser</a:t>
+              </a:r>
+            </a:p>
+          </p:txBody>
+        </p:sp>
+      </p:grpSp>
+      <p:grpSp>
+        <p:nvGrpSpPr>
+          <p:cNvPr id="10" name="Group 9">
+            <a:extLst>
+              <a:ext uri="{FF2B5EF4-FFF2-40B4-BE49-F238E27FC236}">
+                <a16:creationId xmlns:a16="http://schemas.microsoft.com/office/drawing/2014/main" id="{1DAB998B-6FEF-6162-4F66-F736227B5B91}"/>
+              </a:ext>
+            </a:extLst>
+          </p:cNvPr>
+          <p:cNvGrpSpPr/>
+          <p:nvPr/>
+        </p:nvGrpSpPr>
+        <p:grpSpPr>
+          <a:xfrm>
+            <a:off x="4431269" y="2118638"/>
+            <a:ext cx="2669575" cy="2583081"/>
+            <a:chOff x="7164310" y="2983865"/>
+            <a:chExt cx="2669575" cy="2583081"/>
+          </a:xfrm>
+        </p:grpSpPr>
+        <p:pic>
+          <p:nvPicPr>
+            <p:cNvPr id="5" name="Picture 4" descr="First weather satellite (TIROS) | DARPA">
+              <a:extLst>
+                <a:ext uri="{FF2B5EF4-FFF2-40B4-BE49-F238E27FC236}">
+                  <a16:creationId xmlns:a16="http://schemas.microsoft.com/office/drawing/2014/main" id="{49A9F97A-461B-E0C5-1398-844FED9830A4}"/>
+                </a:ext>
+              </a:extLst>
+            </p:cNvPr>
+            <p:cNvPicPr>
+              <a:picLocks noChangeAspect="1"/>
+            </p:cNvPicPr>
+            <p:nvPr/>
+          </p:nvPicPr>
+          <p:blipFill>
+            <a:blip r:embed="rId3"/>
+            <a:stretch>
+              <a:fillRect/>
+            </a:stretch>
+          </p:blipFill>
+          <p:spPr>
+            <a:xfrm>
+              <a:off x="7164310" y="2983865"/>
+              <a:ext cx="2669574" cy="1936750"/>
+            </a:xfrm>
+            <a:prstGeom prst="rect">
+              <a:avLst/>
+            </a:prstGeom>
+          </p:spPr>
+        </p:pic>
+        <p:sp>
+          <p:nvSpPr>
+            <p:cNvPr id="8" name="TextBox 7">
+              <a:extLst>
+                <a:ext uri="{FF2B5EF4-FFF2-40B4-BE49-F238E27FC236}">
+                  <a16:creationId xmlns:a16="http://schemas.microsoft.com/office/drawing/2014/main" id="{EB9A6DE7-7E5B-D9E7-2923-F7F5B850CD77}"/>
+                </a:ext>
+              </a:extLst>
+            </p:cNvPr>
+            <p:cNvSpPr txBox="1"/>
+            <p:nvPr/>
+          </p:nvSpPr>
+          <p:spPr>
+            <a:xfrm>
+              <a:off x="7164311" y="4920615"/>
+              <a:ext cx="2669574" cy="646331"/>
+            </a:xfrm>
+            <a:prstGeom prst="rect">
+              <a:avLst/>
+            </a:prstGeom>
+            <a:noFill/>
+          </p:spPr>
+          <p:txBody>
+            <a:bodyPr wrap="square" rtlCol="0">
+              <a:spAutoFit/>
+            </a:bodyPr>
+            <a:lstStyle/>
+            <a:p>
+              <a:pPr algn="ctr"/>
+              <a:r>
+                <a:rPr lang="en-US" dirty="0"/>
+                <a:t>1</a:t>
+              </a:r>
+              <a:r>
+                <a:rPr lang="en-US" baseline="30000" dirty="0"/>
+                <a:t>st</a:t>
+              </a:r>
+              <a:r>
+                <a:rPr lang="en-US" dirty="0"/>
+                <a:t> Weather Satellite: TIROS1</a:t>
+              </a:r>
+            </a:p>
+          </p:txBody>
+        </p:sp>
+      </p:grpSp>
+      <p:grpSp>
+        <p:nvGrpSpPr>
+          <p:cNvPr id="13" name="Group 12">
+            <a:extLst>
+              <a:ext uri="{FF2B5EF4-FFF2-40B4-BE49-F238E27FC236}">
+                <a16:creationId xmlns:a16="http://schemas.microsoft.com/office/drawing/2014/main" id="{2C5DB5AE-FA29-EE68-7098-8AE7DB0BBDF4}"/>
+              </a:ext>
+            </a:extLst>
+          </p:cNvPr>
+          <p:cNvGrpSpPr/>
+          <p:nvPr/>
+        </p:nvGrpSpPr>
+        <p:grpSpPr>
+          <a:xfrm>
+            <a:off x="8083445" y="2118638"/>
+            <a:ext cx="2445392" cy="2291570"/>
+            <a:chOff x="8063125" y="1797778"/>
+            <a:chExt cx="2445392" cy="2291570"/>
+          </a:xfrm>
+        </p:grpSpPr>
+        <p:pic>
+          <p:nvPicPr>
+            <p:cNvPr id="11" name="Picture 10">
+              <a:extLst>
+                <a:ext uri="{FF2B5EF4-FFF2-40B4-BE49-F238E27FC236}">
+                  <a16:creationId xmlns:a16="http://schemas.microsoft.com/office/drawing/2014/main" id="{1F541326-580F-D21B-0150-9CDA5133C8C0}"/>
+                </a:ext>
+              </a:extLst>
+            </p:cNvPr>
+            <p:cNvPicPr>
+              <a:picLocks noChangeAspect="1"/>
+            </p:cNvPicPr>
+            <p:nvPr/>
+          </p:nvPicPr>
+          <p:blipFill>
+            <a:blip r:embed="rId4"/>
+            <a:stretch>
+              <a:fillRect/>
+            </a:stretch>
+          </p:blipFill>
+          <p:spPr>
+            <a:xfrm>
+              <a:off x="8063125" y="1797778"/>
+              <a:ext cx="2445392" cy="1936750"/>
+            </a:xfrm>
+            <a:prstGeom prst="rect">
+              <a:avLst/>
+            </a:prstGeom>
+          </p:spPr>
+        </p:pic>
+        <p:sp>
+          <p:nvSpPr>
+            <p:cNvPr id="12" name="TextBox 11">
+              <a:extLst>
+                <a:ext uri="{FF2B5EF4-FFF2-40B4-BE49-F238E27FC236}">
+                  <a16:creationId xmlns:a16="http://schemas.microsoft.com/office/drawing/2014/main" id="{52C2C022-4057-5C57-A3F3-DA58DCED91E0}"/>
+                </a:ext>
+              </a:extLst>
+            </p:cNvPr>
+            <p:cNvSpPr txBox="1"/>
+            <p:nvPr/>
+          </p:nvSpPr>
+          <p:spPr>
+            <a:xfrm>
+              <a:off x="8063125" y="3720016"/>
+              <a:ext cx="2445392" cy="369332"/>
+            </a:xfrm>
+            <a:prstGeom prst="rect">
+              <a:avLst/>
+            </a:prstGeom>
+            <a:noFill/>
+          </p:spPr>
+          <p:txBody>
+            <a:bodyPr wrap="square" rtlCol="0">
+              <a:spAutoFit/>
+            </a:bodyPr>
+            <a:lstStyle/>
+            <a:p>
+              <a:pPr algn="ctr"/>
+              <a:r>
+                <a:rPr lang="en-US" dirty="0"/>
+                <a:t>Etch A Sketch</a:t>
+              </a:r>
+            </a:p>
+          </p:txBody>
+        </p:sp>
+      </p:grpSp>
+    </p:spTree>
+    <p:extLst>
+      <p:ext uri="{BB962C8B-B14F-4D97-AF65-F5344CB8AC3E}">
+        <p14:creationId xmlns:p14="http://schemas.microsoft.com/office/powerpoint/2010/main" val="3123267188"/>
+      </p:ext>
+    </p:extLst>
+  </p:cSld>
+  <p:clrMapOvr>
+    <a:masterClrMapping/>
+  </p:clrMapOvr>
+</p:sld>
+</file>
+
+<file path=ppt/slides/slide7.xml><?xml version="1.0" encoding="utf-8"?>
+<p:sld xmlns:a="http://schemas.openxmlformats.org/drawingml/2006/main" xmlns:r="http://schemas.openxmlformats.org/officeDocument/2006/relationships" xmlns:p="http://schemas.openxmlformats.org/presentationml/2006/main">
+  <p:cSld>
+    <p:spTree>
+      <p:nvGrpSpPr>
+        <p:cNvPr id="1" name="">
+          <a:extLst>
+            <a:ext uri="{FF2B5EF4-FFF2-40B4-BE49-F238E27FC236}">
+              <a16:creationId xmlns:a16="http://schemas.microsoft.com/office/drawing/2014/main" id="{1155C923-8111-E3E0-3723-1711F64320DC}"/>
+            </a:ext>
+          </a:extLst>
+        </p:cNvPr>
+        <p:cNvGrpSpPr/>
+        <p:nvPr/>
+      </p:nvGrpSpPr>
+      <p:grpSpPr>
+        <a:xfrm>
+          <a:off x="0" y="0"/>
+          <a:ext cx="0" cy="0"/>
+          <a:chOff x="0" y="0"/>
+          <a:chExt cx="0" cy="0"/>
+        </a:xfrm>
+      </p:grpSpPr>
+      <p:sp>
+        <p:nvSpPr>
+          <p:cNvPr id="2" name="Title 1">
+            <a:extLst>
+              <a:ext uri="{FF2B5EF4-FFF2-40B4-BE49-F238E27FC236}">
+                <a16:creationId xmlns:a16="http://schemas.microsoft.com/office/drawing/2014/main" id="{B54E9B68-94F6-DE60-6A04-2A2F1A74F85E}"/>
+              </a:ext>
+            </a:extLst>
+          </p:cNvPr>
+          <p:cNvSpPr>
+            <a:spLocks noGrp="1"/>
+          </p:cNvSpPr>
+          <p:nvPr>
+            <p:ph type="title"/>
+          </p:nvPr>
+        </p:nvSpPr>
+        <p:spPr/>
+        <p:txBody>
+          <a:bodyPr/>
+          <a:lstStyle/>
+          <a:p>
+            <a:r>
+              <a:rPr lang="en-CA" dirty="0"/>
+              <a:t>1960: Highest Grossing Video Game</a:t>
+            </a:r>
+            <a:endParaRPr lang="en-AU" dirty="0"/>
+          </a:p>
+        </p:txBody>
+      </p:sp>
+      <p:sp>
+        <p:nvSpPr>
+          <p:cNvPr id="3" name="TextBox 2">
+            <a:extLst>
+              <a:ext uri="{FF2B5EF4-FFF2-40B4-BE49-F238E27FC236}">
+                <a16:creationId xmlns:a16="http://schemas.microsoft.com/office/drawing/2014/main" id="{559C3EB2-9934-1D07-D835-D2467C8393C3}"/>
+              </a:ext>
+            </a:extLst>
+          </p:cNvPr>
+          <p:cNvSpPr txBox="1"/>
+          <p:nvPr/>
+        </p:nvSpPr>
+        <p:spPr>
+          <a:xfrm>
+            <a:off x="5766422" y="3075057"/>
+            <a:ext cx="659155" cy="707886"/>
+          </a:xfrm>
+          <a:prstGeom prst="rect">
+            <a:avLst/>
+          </a:prstGeom>
+          <a:noFill/>
+        </p:spPr>
+        <p:txBody>
+          <a:bodyPr wrap="none" rtlCol="0">
+            <a:spAutoFit/>
+          </a:bodyPr>
+          <a:lstStyle/>
+          <a:p>
+            <a:pPr algn="ctr"/>
+            <a:r>
+              <a:rPr lang="en-CA" sz="4000" b="1" dirty="0"/>
+              <a:t>??</a:t>
+            </a:r>
+            <a:endParaRPr lang="en-AU" sz="3200" dirty="0"/>
+          </a:p>
+        </p:txBody>
+      </p:sp>
+    </p:spTree>
+    <p:extLst>
+      <p:ext uri="{BB962C8B-B14F-4D97-AF65-F5344CB8AC3E}">
+        <p14:creationId xmlns:p14="http://schemas.microsoft.com/office/powerpoint/2010/main" val="781840860"/>
+      </p:ext>
+    </p:extLst>
+  </p:cSld>
+  <p:clrMapOvr>
+    <a:masterClrMapping/>
+  </p:clrMapOvr>
+  <p:timing>
+    <p:tnLst>
+      <p:par>
+        <p:cTn id="1" dur="indefinite" restart="never" nodeType="tmRoot">
+          <p:childTnLst>
+            <p:seq concurrent="1" nextAc="seek">
+              <p:cTn id="2" dur="indefinite" nodeType="mainSeq">
+                <p:childTnLst>
+                  <p:par>
+                    <p:cTn id="3" fill="hold">
+                      <p:stCondLst>
+                        <p:cond delay="indefinite"/>
+                      </p:stCondLst>
+                      <p:childTnLst>
+                        <p:par>
+                          <p:cTn id="4" fill="hold">
+                            <p:stCondLst>
+                              <p:cond delay="0"/>
+                            </p:stCondLst>
+                            <p:childTnLst>
+                              <p:par>
+                                <p:cTn id="5" presetID="10" presetClass="entr" presetSubtype="0" fill="hold" grpId="0" nodeType="clickEffect">
+                                  <p:stCondLst>
+                                    <p:cond delay="0"/>
+                                  </p:stCondLst>
+                                  <p:childTnLst>
+                                    <p:set>
+                                      <p:cBhvr>
+                                        <p:cTn id="6" dur="1" fill="hold">
+                                          <p:stCondLst>
+                                            <p:cond delay="0"/>
+                                          </p:stCondLst>
+                                        </p:cTn>
+                                        <p:tgtEl>
+                                          <p:spTgt spid="3"/>
+                                        </p:tgtEl>
+                                        <p:attrNameLst>
+                                          <p:attrName>style.visibility</p:attrName>
+                                        </p:attrNameLst>
+                                      </p:cBhvr>
+                                      <p:to>
+                                        <p:strVal val="visible"/>
+                                      </p:to>
+                                    </p:set>
+                                    <p:animEffect transition="in" filter="fade">
+                                      <p:cBhvr>
+                                        <p:cTn id="7" dur="500"/>
+                                        <p:tgtEl>
+                                          <p:spTgt spid="3"/>
+                                        </p:tgtEl>
+                                      </p:cBhvr>
+                                    </p:animEffect>
+                                  </p:childTnLst>
+                                </p:cTn>
+                              </p:par>
+                            </p:childTnLst>
+                          </p:cTn>
+                        </p:par>
+                      </p:childTnLst>
+                    </p:cTn>
+                  </p:par>
+                </p:childTnLst>
+              </p:cTn>
+              <p:prevCondLst>
+                <p:cond evt="onPrev" delay="0">
+                  <p:tgtEl>
+                    <p:sldTgt/>
+                  </p:tgtEl>
+                </p:cond>
+              </p:prevCondLst>
+              <p:nextCondLst>
+                <p:cond evt="onNext" delay="0">
+                  <p:tgtEl>
+                    <p:sldTgt/>
+                  </p:tgtEl>
+                </p:cond>
+              </p:nextCondLst>
+            </p:seq>
+          </p:childTnLst>
+        </p:cTn>
+      </p:par>
+    </p:tnLst>
+    <p:bldLst>
+      <p:bldP spid="3" grpId="0"/>
+    </p:bldLst>
+  </p:timing>
+</p:sld>
+</file>
+
+<file path=ppt/slides/slide8.xml><?xml version="1.0" encoding="utf-8"?>
+<p:sld xmlns:a="http://schemas.openxmlformats.org/drawingml/2006/main" xmlns:r="http://schemas.openxmlformats.org/officeDocument/2006/relationships" xmlns:p="http://schemas.openxmlformats.org/presentationml/2006/main">
+  <p:cSld>
+    <p:spTree>
+      <p:nvGrpSpPr>
+        <p:cNvPr id="1" name="">
+          <a:extLst>
+            <a:ext uri="{FF2B5EF4-FFF2-40B4-BE49-F238E27FC236}">
+              <a16:creationId xmlns:a16="http://schemas.microsoft.com/office/drawing/2014/main" id="{17A3FC03-BA1C-3083-2D9F-49049C70B507}"/>
+            </a:ext>
+          </a:extLst>
+        </p:cNvPr>
+        <p:cNvGrpSpPr/>
+        <p:nvPr/>
+      </p:nvGrpSpPr>
+      <p:grpSpPr>
+        <a:xfrm>
+          <a:off x="0" y="0"/>
+          <a:ext cx="0" cy="0"/>
+          <a:chOff x="0" y="0"/>
+          <a:chExt cx="0" cy="0"/>
+        </a:xfrm>
+      </p:grpSpPr>
+      <p:sp>
+        <p:nvSpPr>
+          <p:cNvPr id="2" name="Title 1">
+            <a:extLst>
+              <a:ext uri="{FF2B5EF4-FFF2-40B4-BE49-F238E27FC236}">
+                <a16:creationId xmlns:a16="http://schemas.microsoft.com/office/drawing/2014/main" id="{1C7133D0-6D6A-D0B5-A021-3DE694CE5DB7}"/>
+              </a:ext>
+            </a:extLst>
+          </p:cNvPr>
+          <p:cNvSpPr>
+            <a:spLocks noGrp="1"/>
+          </p:cNvSpPr>
+          <p:nvPr>
+            <p:ph type="title"/>
+          </p:nvPr>
+        </p:nvSpPr>
+        <p:spPr/>
+        <p:txBody>
+          <a:bodyPr/>
+          <a:lstStyle/>
+          <a:p>
+            <a:r>
+              <a:rPr lang="en-CA" dirty="0"/>
+              <a:t>1960: Highest Grossing Video Game</a:t>
+            </a:r>
+            <a:endParaRPr lang="en-AU" dirty="0"/>
+          </a:p>
+        </p:txBody>
+      </p:sp>
+      <p:sp>
+        <p:nvSpPr>
+          <p:cNvPr id="3" name="TextBox 2">
+            <a:extLst>
+              <a:ext uri="{FF2B5EF4-FFF2-40B4-BE49-F238E27FC236}">
+                <a16:creationId xmlns:a16="http://schemas.microsoft.com/office/drawing/2014/main" id="{13B334F8-84EC-E00E-74F9-A8E03C7ADEE9}"/>
+              </a:ext>
+            </a:extLst>
+          </p:cNvPr>
+          <p:cNvSpPr txBox="1"/>
+          <p:nvPr/>
+        </p:nvSpPr>
+        <p:spPr>
+          <a:xfrm>
+            <a:off x="3476225" y="3075057"/>
+            <a:ext cx="4528356" cy="707886"/>
+          </a:xfrm>
+          <a:prstGeom prst="rect">
+            <a:avLst/>
+          </a:prstGeom>
+          <a:noFill/>
+        </p:spPr>
+        <p:txBody>
+          <a:bodyPr wrap="none" rtlCol="0">
+            <a:spAutoFit/>
+          </a:bodyPr>
+          <a:lstStyle/>
+          <a:p>
+            <a:pPr algn="ctr"/>
+            <a:r>
+              <a:rPr lang="en-CA" sz="4000" b="1" dirty="0"/>
+              <a:t>No video games yet!</a:t>
+            </a:r>
+            <a:endParaRPr lang="en-AU" sz="3200" dirty="0"/>
+          </a:p>
+        </p:txBody>
+      </p:sp>
+    </p:spTree>
+    <p:extLst>
+      <p:ext uri="{BB962C8B-B14F-4D97-AF65-F5344CB8AC3E}">
+        <p14:creationId xmlns:p14="http://schemas.microsoft.com/office/powerpoint/2010/main" val="4261763910"/>
+      </p:ext>
+    </p:extLst>
+  </p:cSld>
+  <p:clrMapOvr>
+    <a:masterClrMapping/>
+  </p:clrMapOvr>
+  <p:timing>
+    <p:tnLst>
+      <p:par>
+        <p:cTn id="1" dur="indefinite" restart="never" nodeType="tmRoot">
+          <p:childTnLst>
+            <p:seq concurrent="1" nextAc="seek">
+              <p:cTn id="2" dur="indefinite" nodeType="mainSeq">
+                <p:childTnLst>
+                  <p:par>
+                    <p:cTn id="3" fill="hold">
+                      <p:stCondLst>
+                        <p:cond delay="indefinite"/>
+                      </p:stCondLst>
+                      <p:childTnLst>
+                        <p:par>
+                          <p:cTn id="4" fill="hold">
+                            <p:stCondLst>
+                              <p:cond delay="0"/>
+                            </p:stCondLst>
+                            <p:childTnLst>
+                              <p:par>
+                                <p:cTn id="5" presetID="10" presetClass="entr" presetSubtype="0" fill="hold" grpId="0" nodeType="clickEffect">
+                                  <p:stCondLst>
+                                    <p:cond delay="0"/>
+                                  </p:stCondLst>
+                                  <p:childTnLst>
+                                    <p:set>
+                                      <p:cBhvr>
+                                        <p:cTn id="6" dur="1" fill="hold">
+                                          <p:stCondLst>
+                                            <p:cond delay="0"/>
+                                          </p:stCondLst>
+                                        </p:cTn>
+                                        <p:tgtEl>
+                                          <p:spTgt spid="3"/>
+                                        </p:tgtEl>
+                                        <p:attrNameLst>
+                                          <p:attrName>style.visibility</p:attrName>
+                                        </p:attrNameLst>
+                                      </p:cBhvr>
+                                      <p:to>
+                                        <p:strVal val="visible"/>
+                                      </p:to>
+                                    </p:set>
+                                    <p:animEffect transition="in" filter="fade">
+                                      <p:cBhvr>
+                                        <p:cTn id="7" dur="500"/>
+                                        <p:tgtEl>
+                                          <p:spTgt spid="3"/>
+                                        </p:tgtEl>
+                                      </p:cBhvr>
+                                    </p:animEffect>
+                                  </p:childTnLst>
+                                </p:cTn>
+                              </p:par>
+                            </p:childTnLst>
+                          </p:cTn>
+                        </p:par>
+                      </p:childTnLst>
+                    </p:cTn>
+                  </p:par>
+                </p:childTnLst>
+              </p:cTn>
+              <p:prevCondLst>
+                <p:cond evt="onPrev" delay="0">
+                  <p:tgtEl>
+                    <p:sldTgt/>
+                  </p:tgtEl>
+                </p:cond>
+              </p:prevCondLst>
+              <p:nextCondLst>
+                <p:cond evt="onNext" delay="0">
+                  <p:tgtEl>
+                    <p:sldTgt/>
+                  </p:tgtEl>
+                </p:cond>
+              </p:nextCondLst>
+            </p:seq>
+          </p:childTnLst>
+        </p:cTn>
+      </p:par>
+    </p:tnLst>
+    <p:bldLst>
+      <p:bldP spid="3" grpId="0"/>
+    </p:bldLst>
+  </p:timing>
+</p:sld>
+</file>
+
+<file path=ppt/slides/slide9.xml><?xml version="1.0" encoding="utf-8"?>
+<p:sld xmlns:a="http://schemas.openxmlformats.org/drawingml/2006/main" xmlns:r="http://schemas.openxmlformats.org/officeDocument/2006/relationships" xmlns:p="http://schemas.openxmlformats.org/presentationml/2006/main">
+  <p:cSld>
+    <p:spTree>
+      <p:nvGrpSpPr>
+        <p:cNvPr id="1" name="">
+          <a:extLst>
+            <a:ext uri="{FF2B5EF4-FFF2-40B4-BE49-F238E27FC236}">
+              <a16:creationId xmlns:a16="http://schemas.microsoft.com/office/drawing/2014/main" id="{C73F0672-9490-9B79-F27E-3354DD393E2E}"/>
+            </a:ext>
+          </a:extLst>
+        </p:cNvPr>
+        <p:cNvGrpSpPr/>
+        <p:nvPr/>
+      </p:nvGrpSpPr>
+      <p:grpSpPr>
+        <a:xfrm>
+          <a:off x="0" y="0"/>
+          <a:ext cx="0" cy="0"/>
+          <a:chOff x="0" y="0"/>
+          <a:chExt cx="0" cy="0"/>
+        </a:xfrm>
+      </p:grpSpPr>
+      <p:sp>
+        <p:nvSpPr>
+          <p:cNvPr id="2" name="Title 1">
+            <a:extLst>
+              <a:ext uri="{FF2B5EF4-FFF2-40B4-BE49-F238E27FC236}">
+                <a16:creationId xmlns:a16="http://schemas.microsoft.com/office/drawing/2014/main" id="{5589A304-F718-1296-3FF5-68441A1AFDD9}"/>
+              </a:ext>
+            </a:extLst>
+          </p:cNvPr>
+          <p:cNvSpPr>
+            <a:spLocks noGrp="1"/>
+          </p:cNvSpPr>
+          <p:nvPr>
+            <p:ph type="title"/>
+          </p:nvPr>
+        </p:nvSpPr>
+        <p:spPr/>
+        <p:txBody>
+          <a:bodyPr/>
+          <a:lstStyle/>
+          <a:p>
+            <a:r>
+              <a:rPr lang="en-CA" dirty="0"/>
+              <a:t>1960: Top Grossing Movie</a:t>
+            </a:r>
+            <a:endParaRPr lang="en-AU" dirty="0"/>
+          </a:p>
+        </p:txBody>
+      </p:sp>
+      <p:sp>
+        <p:nvSpPr>
+          <p:cNvPr id="5" name="TextBox 4">
+            <a:extLst>
+              <a:ext uri="{FF2B5EF4-FFF2-40B4-BE49-F238E27FC236}">
+                <a16:creationId xmlns:a16="http://schemas.microsoft.com/office/drawing/2014/main" id="{52F0801C-7ACE-D6D8-B17F-EC9DFDA9E53D}"/>
+              </a:ext>
+            </a:extLst>
+          </p:cNvPr>
+          <p:cNvSpPr txBox="1"/>
+          <p:nvPr/>
+        </p:nvSpPr>
+        <p:spPr>
+          <a:xfrm>
+            <a:off x="5766422" y="3075057"/>
+            <a:ext cx="659155" cy="707886"/>
+          </a:xfrm>
+          <a:prstGeom prst="rect">
+            <a:avLst/>
+          </a:prstGeom>
+          <a:noFill/>
+        </p:spPr>
+        <p:txBody>
+          <a:bodyPr wrap="none" rtlCol="0">
+            <a:spAutoFit/>
+          </a:bodyPr>
+          <a:lstStyle/>
+          <a:p>
+            <a:pPr algn="ctr"/>
+            <a:r>
+              <a:rPr lang="en-CA" sz="4000" b="1" dirty="0"/>
+              <a:t>??</a:t>
+            </a:r>
+            <a:endParaRPr lang="en-AU" sz="3200" dirty="0"/>
+          </a:p>
+        </p:txBody>
+      </p:sp>
+    </p:spTree>
+    <p:extLst>
+      <p:ext uri="{BB962C8B-B14F-4D97-AF65-F5344CB8AC3E}">
+        <p14:creationId xmlns:p14="http://schemas.microsoft.com/office/powerpoint/2010/main" val="1571164964"/>
+      </p:ext>
+    </p:extLst>
+  </p:cSld>
+  <p:clrMapOvr>
+    <a:masterClrMapping/>
+  </p:clrMapOvr>
+  <p:timing>
+    <p:tnLst>
+      <p:par>
+        <p:cTn id="1" dur="indefinite" restart="never" nodeType="tmRoot">
+          <p:childTnLst>
+            <p:seq concurrent="1" nextAc="seek">
+              <p:cTn id="2" dur="indefinite" nodeType="mainSeq">
+                <p:childTnLst>
+                  <p:par>
+                    <p:cTn id="3" fill="hold">
+                      <p:stCondLst>
+                        <p:cond delay="indefinite"/>
+                      </p:stCondLst>
+                      <p:childTnLst>
+                        <p:par>
+                          <p:cTn id="4" fill="hold">
+                            <p:stCondLst>
+                              <p:cond delay="0"/>
+                            </p:stCondLst>
+                            <p:childTnLst>
+                              <p:par>
+                                <p:cTn id="5" presetID="10" presetClass="entr" presetSubtype="0" fill="hold" grpId="0" nodeType="clickEffect">
+                                  <p:stCondLst>
+                                    <p:cond delay="0"/>
+                                  </p:stCondLst>
+                                  <p:childTnLst>
+                                    <p:set>
+                                      <p:cBhvr>
+                                        <p:cTn id="6" dur="1" fill="hold">
+                                          <p:stCondLst>
+                                            <p:cond delay="0"/>
+                                          </p:stCondLst>
+                                        </p:cTn>
+                                        <p:tgtEl>
+                                          <p:spTgt spid="5"/>
+                                        </p:tgtEl>
+                                        <p:attrNameLst>
+                                          <p:attrName>style.visibility</p:attrName>
+                                        </p:attrNameLst>
+                                      </p:cBhvr>
+                                      <p:to>
+                                        <p:strVal val="visible"/>
+                                      </p:to>
+                                    </p:set>
+                                    <p:animEffect transition="in" filter="fade">
+                                      <p:cBhvr>
+                                        <p:cTn id="7" dur="500"/>
+                                        <p:tgtEl>
+                                          <p:spTgt spid="5"/>
+                                        </p:tgtEl>
+                                      </p:cBhvr>
+                                    </p:animEffect>
+                                  </p:childTnLst>
+                                </p:cTn>
+                              </p:par>
+                            </p:childTnLst>
+                          </p:cTn>
+                        </p:par>
+                      </p:childTnLst>
+                    </p:cTn>
+                  </p:par>
+                </p:childTnLst>
+              </p:cTn>
+              <p:prevCondLst>
+                <p:cond evt="onPrev" delay="0">
+                  <p:tgtEl>
+                    <p:sldTgt/>
+                  </p:tgtEl>
+                </p:cond>
+              </p:prevCondLst>
+              <p:nextCondLst>
+                <p:cond evt="onNext" delay="0">
+                  <p:tgtEl>
+                    <p:sldTgt/>
+                  </p:tgtEl>
+                </p:cond>
+              </p:nextCondLst>
+            </p:seq>
+          </p:childTnLst>
+        </p:cTn>
+      </p:par>
+    </p:tnLst>
+    <p:bldLst>
+      <p:bldP spid="5" grpId="0"/>
     </p:bldLst>
   </p:timing>
 </p:sld>

--- a/racket/scheme1975.pptx
+++ b/racket/scheme1975.pptx
@@ -148,7 +148,7 @@
   <pc:docChgLst>
     <pc:chgData name="Toby Donaldson" userId="2e6e5431-bb17-4c41-9985-d39c50d83c73" providerId="ADAL" clId="{F31BC264-820E-54C4-A6D1-F92AF9CC222E}"/>
     <pc:docChg chg="undo custSel addSld delSld modSld sldOrd">
-      <pc:chgData name="Toby Donaldson" userId="2e6e5431-bb17-4c41-9985-d39c50d83c73" providerId="ADAL" clId="{F31BC264-820E-54C4-A6D1-F92AF9CC222E}" dt="2026-09-28T03:35:27.966" v="849" actId="20578"/>
+      <pc:chgData name="Toby Donaldson" userId="2e6e5431-bb17-4c41-9985-d39c50d83c73" providerId="ADAL" clId="{F31BC264-820E-54C4-A6D1-F92AF9CC222E}" dt="2026-09-28T03:37:32.738" v="861" actId="20577"/>
       <pc:docMkLst>
         <pc:docMk/>
       </pc:docMkLst>
@@ -749,13 +749,13 @@
         </pc:picChg>
       </pc:sldChg>
       <pc:sldChg chg="addSp modSp add mod">
-        <pc:chgData name="Toby Donaldson" userId="2e6e5431-bb17-4c41-9985-d39c50d83c73" providerId="ADAL" clId="{F31BC264-820E-54C4-A6D1-F92AF9CC222E}" dt="2026-09-28T03:33:52.479" v="843" actId="20577"/>
+        <pc:chgData name="Toby Donaldson" userId="2e6e5431-bb17-4c41-9985-d39c50d83c73" providerId="ADAL" clId="{F31BC264-820E-54C4-A6D1-F92AF9CC222E}" dt="2026-09-28T03:37:32.738" v="861" actId="20577"/>
         <pc:sldMkLst>
           <pc:docMk/>
           <pc:sldMk cId="2829825335" sldId="295"/>
         </pc:sldMkLst>
         <pc:spChg chg="add mod">
-          <ac:chgData name="Toby Donaldson" userId="2e6e5431-bb17-4c41-9985-d39c50d83c73" providerId="ADAL" clId="{F31BC264-820E-54C4-A6D1-F92AF9CC222E}" dt="2026-09-28T03:33:52.479" v="843" actId="20577"/>
+          <ac:chgData name="Toby Donaldson" userId="2e6e5431-bb17-4c41-9985-d39c50d83c73" providerId="ADAL" clId="{F31BC264-820E-54C4-A6D1-F92AF9CC222E}" dt="2026-09-28T03:37:32.738" v="861" actId="20577"/>
           <ac:spMkLst>
             <pc:docMk/>
             <pc:sldMk cId="2829825335" sldId="295"/>
@@ -4680,7 +4680,7 @@
         <p:spPr>
           <a:xfrm>
             <a:off x="7711440" y="3157696"/>
-            <a:ext cx="4389120" cy="1477328"/>
+            <a:ext cx="4389120" cy="1200329"/>
           </a:xfrm>
           <a:prstGeom prst="rect">
             <a:avLst/>
@@ -4695,7 +4695,7 @@
           <a:p>
             <a:r>
               <a:rPr lang="en-CA" dirty="0"/>
-              <a:t>A lush, orchestral instrumental standard arranged by Percy Faith, it captures a timeless, nostalgic feeling of youthful romance and easygoing vintage summer calm.</a:t>
+              <a:t>A lush, orchestral instrumental standard that captures a timeless, nostalgic feeling of youthful romance and easygoing vintage summer calm.</a:t>
             </a:r>
             <a:endParaRPr lang="en-US" dirty="0"/>
           </a:p>
